--- a/Curso Gas B/05 - ITC-ICG 08 - Aparatos de gas/05 - ITC-ICG 08 - Aparatos de gas - Vídeo 4.pptx
+++ b/Curso Gas B/05 - ITC-ICG 08 - Aparatos de gas/05 - ITC-ICG 08 - Aparatos de gas - Vídeo 4.pptx
@@ -521,7 +521,7 @@
           </a:p>
           <a:p>
             <a:r>
-              <a:t>N2: En los dos últimos anexos de la ITC-ICG cero ocho. El anexo dos fija qué datos lleva la placa de características y cómo se comprueba que ese marcado no se borra. El anexo tres recoge las prescripciones de seguridad y las pruebas que debe superar un aparato cuando no existe una norma específica para él: el listado largo de exigencias de diseño, los famosos dos punto tres, y las pruebas de estanquidad y funcionamiento. Es denso, pero cae en el examen a base de detalles.</a:t>
+              <a:t>N2: En los dos últimos anexos de la ITC-ICG cero ocho, y con ellos cerramos el tema. El anexo dos fija qué datos lleva la placa de características y cómo se comprueba que ese marcado no se borra. El anexo tres recoge las prescripciones de seguridad y las pruebas que debe superar un aparato cuando no existe una norma específica para él: el listado largo de exigencias de diseño, los famosos dos punto tres, y las pruebas de estanquidad y funcionamiento. Es denso, pero cae en el examen a base de detalles, así que vamos a ordenarlo bien.</a:t>
             </a:r>
           </a:p>
         </p:txBody>
@@ -591,12 +591,12 @@
           <a:lstStyle/>
           <a:p>
             <a:r>
-              <a:t>N1: ¿Cómo digiero veinte puntos sin perderme?</a:t>
-            </a:r>
-          </a:p>
-          <a:p>
-            <a:r>
-              <a:t>N2: No los memorices sueltos, agrúpalos por idea. Aguantar el uso: sin desajuste, deformación ni rotura, y aguantando la presión. Sobrevivir a imprevistos: condensación, incendio de origen externo, cortes o fluctuaciones de la energía auxiliar. Nada de fugas peligrosas, ni por encendido ni acumuladas. Fallar sin peligro: si se rompe un dispositivo de seguridad, no debe haber peligro. Encender y quemar bien: encendido suave y cruzado, llama estable, combustión sin escapes. Y no quemar al usuario: temperaturas de mandos y superficies controladas. Con estos bloques colocas cualquier punto.</a:t>
+              <a:t>N1: Son veinte puntos. ¿Cómo los digiero sin perderme?</a:t>
+            </a:r>
+          </a:p>
+          <a:p>
+            <a:r>
+              <a:t>N2: No los memorices sueltos: agrúpalos en seis ideas y colocas cualquiera. Uno, aguantar el uso: sin desajuste, deformación ni rotura, y resistiendo la presión. Dos, sobrevivir a imprevistos: la condensación, un incendio de origen externo, y los cortes o fluctuaciones de la energía auxiliar, sin que nada de eso sea fuente de peligro. Tres, nada de fugas peligrosas: ni al encender, ni acumuladas. Cuatro, fallar sin peligro: si se rompe un dispositivo de seguridad, control o regulación, no debe haber peligro. Cinco, encender y quemar bien: encendido suave y cruzado, llama estable, combustión sin escapes. Y seis, no quemar al usuario: las temperaturas de mandos y superficies próximas se mantienen controladas. Seis cajones, y cada punto cae en uno.</a:t>
             </a:r>
           </a:p>
         </p:txBody>
@@ -671,7 +671,7 @@
           </a:p>
           <a:p>
             <a:r>
-              <a:t>N2: El dos, tres, quince. Los aparatos destinados a usarse en locales disponen de un dispositivo específico que evita la acumulación peligrosa de gas no quemado en el local; los que no lo llevan solo se usan en locales con ventilación suficiente o son de uso exclusivo al aire libre. Es el mismo criterio que ya veías en el manual técnico del vídeo uno y en las advertencias del aparato y del embalaje: todo encaja. Es lo que evita las fugas acumuladas, el revoco de humos y el CO.</a:t>
+              <a:t>N2: El dos, tres, quince, y no es casualidad, porque enlaza todo el tema. Los aparatos destinados a usarse en locales disponen de un dispositivo específico que evita la acumulación peligrosa de gas no quemado en el local. Y los que no llevan ese dispositivo solo se pueden usar en locales con ventilación suficiente, o son de uso exclusivo al aire libre. Fíjate en que es el mismo criterio que ya viste en el manual técnico del primer vídeo y en las advertencias del aparato y del embalaje: todo encaja como un puzle. En la práctica, este punto es lo que evita las fugas acumuladas, el revoco de humos y el monóxido de carbono.</a:t>
             </a:r>
           </a:p>
         </p:txBody>
@@ -746,7 +746,7 @@
           </a:p>
           <a:p>
             <a:r>
-              <a:t>N2: Ojo al tramo: se comprueba la estanquidad del circuito de gas entre la llave del aparato y el quemador, a la presión máxima de utilización. Y además, que no existe fuga interior a través de las válvulas de corte, es decir, que cuando están cerradas no dejan pasar gas. Es la garantía de que el aparato retiene el gas tanto por fuera como por dentro. Esta prueba es la que caza las fugas.</a:t>
+              <a:t>N2: Ojo al tramo exacto, porque el examen lo pregunta. Se comprueba la estanquidad del circuito de gas entre la llave del aparato y el quemador, a la presión máxima de utilización. Y además, que no existe fuga interior a través de las válvulas de corte, es decir, que cuando están cerradas no dejan pasar ni una burbuja de gas. Estanquidad, traducido, es que el gas no se escape por ningún lado. Es la garantía de que el aparato retiene el gas tanto por fuera como por dentro; esta es la prueba que caza las fugas.</a:t>
             </a:r>
           </a:p>
         </p:txBody>
@@ -816,12 +816,12 @@
           <a:lstStyle/>
           <a:p>
             <a:r>
-              <a:t>N1: ¿Qué se comprueba con el aparato trabajando?</a:t>
-            </a:r>
-          </a:p>
-          <a:p>
-            <a:r>
-              <a:t>N2: Dos bloques. El arranque: que prenda bien, con barrido eficaz de la cámara si hace falta, encendido e interencendido correctos, sin fenómenos anómalos en la estabilidad de las llamas ni golpes de presión, respetando las secuencias del programador y los tiempos máximos de seguridad. Y la marcha: que los dispositivos hagan su trabajo, control de llama, control de presión de gas y de aire, control de tiro, consumo calorífico y análisis de los productos de la combustión al consumo nominal. Estas pruebas cazan la mala combustión y el CO.</a:t>
+              <a:t>N1: ¿Qué se comprueba con el aparato ya trabajando?</a:t>
+            </a:r>
+          </a:p>
+          <a:p>
+            <a:r>
+              <a:t>N2: Dos bloques, y ayuda separarlos. El arranque: que prenda bien, con un barrido eficaz de la cámara si hace falta, encendido e interencendido correctos, sin fenómenos anómalos en la estabilidad de las llamas ni golpes de presión en el hogar ni en la instalación, respetando las secuencias del programador y los tiempos máximos de seguridad. Y la marcha: que los dispositivos hagan su trabajo, el control de llama, el control de presión de gas y de aire, el control de tiro, el consumo calorífico y el análisis de los productos de la combustión al consumo nominal. Mientras la estanquidad cazaba las fugas, estas pruebas cazan la mala combustión y el monóxido de carbono.</a:t>
             </a:r>
           </a:p>
         </p:txBody>
@@ -896,7 +896,7 @@
           </a:p>
           <a:p>
             <a:r>
-              <a:t>N2: Aparecen dos veces, en el encendido y en la marcha, porque son críticos: es el tiempo que el aparato puede tardar en cortar el gas si algo va mal, no prende, se apaga la llama o falla el tiro. Si tardara de más, se acumularía gas. Que una válvula automática cierre a tiempo ante un fallo detectado es de lo más importante que se prueba. Y al final, un control visual: que ni el elemento receptor ni el equipo de combustión se hayan deformado ni deteriorado, y que los marcados e instrucciones sigan legibles.</a:t>
+              <a:t>N2: Porque son críticos, y por eso aparecen dos veces, en el encendido y en la marcha. El tiempo máximo de seguridad es lo que el aparato puede tardar en cortar el gas si algo va mal: si no prende, si se apaga la llama, si falla el tiro. Si tardara de más, se acumularía gas sin quemar y tendrías el peligro dentro de casa. Que una válvula automática cierre a tiempo ante un fallo detectado es de lo más importante que se prueba. Y como remate, un control visual: que ni el elemento receptor ni el equipo de combustión se hayan deformado o deteriorado, y que los marcados e instrucciones sigan legibles. Todo tiene que quedar tal y como promete la placa.</a:t>
             </a:r>
           </a:p>
         </p:txBody>
@@ -966,12 +966,22 @@
           <a:lstStyle/>
           <a:p>
             <a:r>
-              <a:t>N1: Lo que cierra la ITC-ICG cero ocho, ¿en tres trazos?</a:t>
-            </a:r>
-          </a:p>
-          <a:p>
-            <a:r>
-              <a:t>N2: Primero, la placa es el DNI del aparato: visible, legible e indeleble, y de ella sacas fabricante e importador, marca y modelo, número de serie, categoría, gas y presión de reglaje, consumo en kilovatios sobre PCI y datos eléctricos; si falta o está borrada, te quedas sin datos para trabajar. Segundo, el punto dos, tres, quince es de oro: aparato de interior con dispositivo anti-acumulación, o solo local bien ventilado o exterior. Y tercero, las pruebas separan un aparato seguro de una avería: la de estanquidad caza las fugas, entre la llave y el quemador a presión máxima; y las de funcionamiento cazan la mala combustión y el CO, con la válvula automática cortando a tiempo.</a:t>
+              <a:t>N1: Es el último vídeo del tema. ¿Cómo lo cierro en la cabeza?</a:t>
+            </a:r>
+          </a:p>
+          <a:p>
+            <a:r>
+              <a:t>N2: Reconstruyamos el hilo completo, porque hoy cierras la ITC entera. En este vídeo has aprendido dos cosas. Una, la placa: es el DNI del aparato, visible, legible e indeleble, y de ella lees fabricante e importador, marca y modelo, número de serie, categoría del aparato, gas y presión de reglaje, consumo en kilovatios sobre PCI y datos eléctricos; y toda ella, indelebilidad, corrosión y adherencia, se verifica con una sola norma, la UNE sesenta mil setecientos cincuenta, porque la placa tiene que durar tanto como el aparato. Dos, el anexo tres, la red de seguridad para aparatos sin norma propia: veinte prescripciones que agrupamos en seis ideas, con el punto de oro dos tres quince, el dispositivo anti-acumulación o, si no lo lleva, solo local ventilado o exterior; y las pruebas, la de estanquidad, entre la llave y el quemador a presión máxima, que caza las fugas, y las de funcionamiento, que cazan la mala combustión y el monóxido de carbono, con la válvula automática cortando a tiempo.</a:t>
+            </a:r>
+          </a:p>
+          <a:p>
+            <a:r>
+              <a:t>N1: ¿Y cómo se traduce todo el tema en el examen y en la obra?</a:t>
+            </a:r>
+          </a:p>
+          <a:p>
+            <a:r>
+              <a:t>N2: Enlázalo con lo anterior, que ahí está la fuerza. En el vídeo uno viste qué exige la norma de fábrica; en el dos, cómo se clasifica, conecta y arranca un aparato, con su certificado de puesta en marcha; en el tres, quién y cómo certifica que es de fiar; y hoy, cómo se marca y qué pruebas de seguridad supera. En el examen todo esto cae cruzado: la placa con el anexo dos, las pruebas con el anexo tres, el dos tres quince con las advertencias. En la obra, es tu oficio entero: llega el aparato, lees su placa, lo conectas y lo arrancas, compruebas la combustión con el analizador y firmas el certificado. Hoy ya lees un aparato como un profesional, de la placa al ticket del análisis de combustión. Enhorabuena: has cerrado la ITC-ICG cero ocho de principio a fin, y eres mucho más gasista que cuando empezaste el tema.</a:t>
             </a:r>
           </a:p>
         </p:txBody>
@@ -1041,12 +1051,12 @@
           <a:lstStyle/>
           <a:p>
             <a:r>
-              <a:t>N1: ¿Qué tres números resumen el cierre de la ITC?</a:t>
-            </a:r>
-          </a:p>
-          <a:p>
-            <a:r>
-              <a:t>N2: Siete datos mínimos en la placa de características. Veinte prescripciones de seguridad en el anexo tres, del dos tres uno al dos tres veinte. Y dos pruebas mínimas: la de estanquidad y la de funcionamiento. Con estos tres números tienes el mapa del vídeo.</a:t>
+              <a:t>N1: ¿Qué tres números cierran la ITC?</a:t>
+            </a:r>
+          </a:p>
+          <a:p>
+            <a:r>
+              <a:t>N2: Tres. Primero, veinte prescripciones de seguridad en el anexo tres, del dos tres uno al dos tres veinte, que agruparemos por ideas para no perdernos. Segundo, dos anexos, que son los que vemos hoy: el de la placa y el de las prescripciones. Y tercero, una sola norma, la UNE sesenta mil setecientos cincuenta, con la que se verifica todo lo de la placa: indelebilidad, corrosión y adherencia. Con estos tres números tienes el mapa del vídeo.</a:t>
             </a:r>
           </a:p>
         </p:txBody>
@@ -1121,7 +1131,7 @@
           </a:p>
           <a:p>
             <a:r>
-              <a:t>N2: Cada aparato incorpora una placa de características fijada de forma sólida y duradera, visible y legible, con caracteres indelebles, es decir, que no se borran. ¿Por qué indelebles? Porque dentro de años alguien tendrá que leerla para revisar o reparar el aparato. Igual que un coche lleva su ficha técnica, cada aparato lleva su placa con lo esencial.</a:t>
+              <a:t>N2: Empecemos por la idea sencilla y luego la afinamos. Igual que un coche lleva su ficha técnica, cada aparato lleva su placa de características con lo esencial. La norma exige que vaya fijada de forma sólida y duradera, visible y legible, y con caracteres indelebles, es decir, que no se borran. ¿Por qué indelebles? Porque dentro de años alguien tendrá que leerla para revisar o reparar el aparato. Una placa que se borra es un DNI inservible.</a:t>
             </a:r>
           </a:p>
         </p:txBody>
@@ -1196,7 +1206,7 @@
           </a:p>
           <a:p>
             <a:r>
-              <a:t>N2: Los datos mínimos son el nombre o marca del fabricante y, en su caso, el importador; la denominación comercial con marca y modelo; el número de serie o fabricación; la categoría del aparato; el tipo de gas en relación con la presión, indicando solo la presión del reglaje actual; el consumo calorífico nominal en kilovatios sobre PCI; y la naturaleza y tensión de la corriente eléctrica con la potencia máxima absorbida, en voltios, amperios, hercios y kilovatios. Son los datos que necesitas para regular, revisar y rellenar el certificado de puesta en marcha.</a:t>
+              <a:t>N2: Los datos mínimos, y conviene sabérselos porque son los que usas a diario. El nombre o marca del fabricante y, en su caso, el importador. La denominación comercial, con marca y modelo. El número de serie o fabricación. La categoría del aparato, que recuerda, es la de los gases que admite. El tipo de gas en relación con la presión, indicando solo la presión del reglaje actual. El consumo calorífico nominal en kilovatios, referido al poder calorífico inferior. Y los datos eléctricos: naturaleza y tensión de la corriente y potencia máxima absorbida, en voltios, amperios, hercios y kilovatios. Son, ni más ni menos, los datos que necesitas para regular, revisar y rellenar el certificado de puesta en marcha.</a:t>
             </a:r>
           </a:p>
         </p:txBody>
@@ -1271,7 +1281,7 @@
           </a:p>
           <a:p>
             <a:r>
-              <a:t>N2: No del todo. En los aparatos de consumo calorífico regulable, la placa deja un espacio libre para que tú, el instalador, sitúes la indicación del valor del consumo al que lo has dejado regulado durante la puesta en marcha: es tu firma técnica sobre el propio aparato. Y ojo a las siglas: el consumo se expresa en kilovatios referidos al poder calorífico inferior, el PCI, que es la energía que da el gas sin aprovechar el calor del vapor de agua de los humos. Es la referencia estándar del sector.</a:t>
+              <a:t>N2: No del todo, y este detalle gusta al examen. En los aparatos de consumo calorífico regulable, la placa deja un espacio libre para que tú, el instalador, sitúes la indicación del valor del consumo al que lo has dejado regulado durante la puesta en marcha. Es, en cierto modo, tu firma técnica sobre el propio aparato. Y aprovechemos para traducir unas siglas que salen aquí: el consumo se expresa en kilovatios referidos al poder calorífico inferior, el PCI, que es la energía que da el gas sin aprovechar el calor del vapor de agua de los humos. Basta con reconocer las siglas: PCI, poder calorífico inferior, la referencia estándar del sector.</a:t>
             </a:r>
           </a:p>
         </p:txBody>
@@ -1346,7 +1356,7 @@
           </a:p>
           <a:p>
             <a:r>
-              <a:t>N2: La advertencia general dice, en esencia, instalar de acuerdo con las normas en vigor, utilizar únicamente en lugares suficientemente ventilados y consultar las instrucciones antes de instalar y usar. Y si el aparato es de uso exclusivo al aire libre, lleva además esa frase, que puede ir en la propia placa o en una placa independiente. No es adorno: meter en un local cerrado un aparato pensado para exterior es la receta de la intoxicación por CO.</a:t>
+              <a:t>N2: Dos, y el examen puede citarte la literal, así que quédate con la idea. La advertencia general viene a decir: instalar de acuerdo con las normas en vigor, utilizar únicamente en lugares suficientemente ventilados y consultar las instrucciones antes de instalar y usar. Y si el aparato es de uso exclusivo al aire libre, lleva además esa frase, que puede ir en la propia placa o en una placa independiente. Y no es adorno burocrático: meter en un local cerrado un aparato pensado solo para exterior es la receta directa de la intoxicación por monóxido de carbono.</a:t>
             </a:r>
           </a:p>
         </p:txBody>
@@ -1421,7 +1431,7 @@
           </a:p>
           <a:p>
             <a:r>
-              <a:t>N2: No te compliques: la indelebilidad de los caracteres, la resistencia a la corrosión si la placa es metálica y la adherencia si es adhesiva se verifican con la misma norma, la UNE sesenta mil setecientos cincuenta. La lógica es sencilla: la placa tiene que durar tanto como el aparato aunque la froten, se moje o se caliente, y tras todos los ensayos debe seguir legible, sin deformarse y sin despegarse. De poco sirve un DNI que se borra al segundo año.</a:t>
+              <a:t>N2: No te compliques, porque todo apunta a la misma norma. La indelebilidad de los caracteres, la resistencia a la corrosión cuando la placa es metálica, y la adherencia cuando es adhesiva, se verifican con la UNE sesenta mil setecientos cincuenta. La lógica de fondo es simple: la placa tiene que durar tanto como el aparato, aunque la froten, se moje o se caliente. Y por eso la norma exige que, tras todos los ensayos, los caracteres sigan legibles, la placa no se haya deformado y no se despegue fácilmente. De poco sirve un DNI que se borra al segundo año.</a:t>
             </a:r>
           </a:p>
         </p:txBody>
@@ -1496,7 +1506,7 @@
           </a:p>
           <a:p>
             <a:r>
-              <a:t>N2: Es el plan B de la conformidad que viste en el apartado tres: si no hay norma UNE o EN específica, se aplican los requisitos y pruebas del anexo tres para certificar un aparato huérfano de norma. Y la exclusión tiene su lógica: quedan fuera los aparatos ya homologados que vayan a usar un gas de distinta familia, siempre que ese cambio ya estuviera considerado en la homologación inicial. Si ya estaba previsto, no hay que pasar otra vez por aquí.</a:t>
+              <a:t>N2: Recuerda la lógica del apartado tres, la de la conformidad: primero la norma UNE o EN, y si no hay, el anexo tres. Pues este anexo es justo ese plan B: establece los requisitos y las pruebas para certificar un aparato huérfano de norma, uno para el que no existe una norma específica. Y tiene una exclusión que tiene su lógica: quedan fuera los aparatos ya homologados que vayan a usar un gas de distinta familia, siempre que ese cambio ya estuviera considerado en la homologación inicial. Si el cambio ya estaba previsto, no hay que pasar otra vez por aquí.</a:t>
             </a:r>
           </a:p>
         </p:txBody>
@@ -1571,7 +1581,7 @@
           </a:p>
           <a:p>
             <a:r>
-              <a:t>N2: Con dos. Primera: el diseño y la fabricación deben ser tales que el aparato funcione con seguridad total y no entrañe peligro para personas, animales domésticos ni bienes, siempre que se use en condiciones normales de funcionamiento. Segunda: los materiales deben ser adecuados y resistentes a las condiciones mecánicas, químicas y térmicas a las que se sometan, y sus propiedades importantes para la seguridad las garantiza el fabricante o el proveedor. Estas prescripciones valen también para los equipos componentes cuando existe el riesgo correspondiente.</a:t>
+              <a:t>N2: Con dos, sencillas de entender. La primera: el diseño y la fabricación deben ser tales que el aparato funcione con seguridad total y no entrañe peligro para las personas, los animales domésticos ni los bienes, siempre que se use en condiciones normales de funcionamiento, esas tres patas que ya conoces del primer vídeo. La segunda: los materiales deben ser adecuados y resistentes a las condiciones mecánicas, químicas y térmicas a las que se sometan, y sus propiedades importantes para la seguridad las garantiza el fabricante o el proveedor. Y un detalle: estas prescripciones valen también para los equipos componentes cuando existe el riesgo correspondiente.</a:t>
             </a:r>
           </a:p>
         </p:txBody>
@@ -5076,7 +5086,7 @@
                 </a:solidFill>
                 <a:latin typeface="Montserrat"/>
               </a:rPr>
-              <a:t>Encender y quemar bien; no quemar al usuario</a:t>
+              <a:t>Quemar bien; no quemar al usuario</a:t>
             </a:r>
           </a:p>
         </p:txBody>
@@ -6817,7 +6827,7 @@
             <a:avLst/>
           </a:prstGeom>
           <a:solidFill>
-            <a:srgbClr val="FFFFFF"/>
+            <a:srgbClr val="1E2761"/>
           </a:solidFill>
           <a:ln>
             <a:noFill/>
@@ -6854,8 +6864,8 @@
         </p:nvSpPr>
         <p:spPr>
           <a:xfrm>
-            <a:off x="10607040" y="320040"/>
-            <a:ext cx="1371600" cy="365760"/>
+            <a:off x="822960" y="640080"/>
+            <a:ext cx="10515600" cy="457200"/>
           </a:xfrm>
           <a:prstGeom prst="rect">
             <a:avLst/>
@@ -6868,15 +6878,14 @@
           </a:bodyPr>
           <a:lstStyle/>
           <a:p>
-            <a:pPr algn="r"/>
-            <a:r>
-              <a:rPr sz="1000" b="1" i="0">
-                <a:solidFill>
-                  <a:srgbClr val="64748B"/>
-                </a:solidFill>
-                <a:latin typeface="Montserrat"/>
-              </a:rPr>
-              <a:t>015 / 015</a:t>
+            <a:r>
+              <a:rPr sz="1400" b="1" i="0">
+                <a:solidFill>
+                  <a:srgbClr val="CADCFC"/>
+                </a:solidFill>
+                <a:latin typeface="Montserrat"/>
+              </a:rPr>
+              <a:t>LO QUE YA DOMINAS</a:t>
             </a:r>
           </a:p>
         </p:txBody>
@@ -6889,8 +6898,8 @@
         </p:nvSpPr>
         <p:spPr>
           <a:xfrm>
-            <a:off x="457200" y="6419088"/>
-            <a:ext cx="8229600" cy="365760"/>
+            <a:off x="822960" y="1143000"/>
+            <a:ext cx="10515600" cy="1097280"/>
           </a:xfrm>
           <a:prstGeom prst="rect">
             <a:avLst/>
@@ -6904,13 +6913,13 @@
           <a:lstStyle/>
           <a:p>
             <a:r>
-              <a:rPr sz="900" b="0" i="0">
-                <a:solidFill>
-                  <a:srgbClr val="64748B"/>
-                </a:solidFill>
-                <a:latin typeface="Montserrat"/>
-              </a:rPr>
-              <a:t>Curso Gas B · Tema 05 · Aparatos de gas</a:t>
+              <a:rPr sz="3400" b="1" i="0">
+                <a:solidFill>
+                  <a:srgbClr val="FFFFFF"/>
+                </a:solidFill>
+                <a:latin typeface="Montserrat"/>
+              </a:rPr>
+              <a:t>Has cerrado la ITC-ICG 08 de principio a fin</a:t>
             </a:r>
           </a:p>
         </p:txBody>
@@ -6923,8 +6932,8 @@
         </p:nvSpPr>
         <p:spPr>
           <a:xfrm>
-            <a:off x="822960" y="640080"/>
-            <a:ext cx="10058400" cy="914400"/>
+            <a:off x="822960" y="2514600"/>
+            <a:ext cx="10515600" cy="2834640"/>
           </a:xfrm>
           <a:prstGeom prst="rect">
             <a:avLst/>
@@ -6937,28 +6946,161 @@
           </a:bodyPr>
           <a:lstStyle/>
           <a:p>
-            <a:r>
-              <a:rPr sz="3000" b="1" i="0">
-                <a:solidFill>
-                  <a:srgbClr val="1E2761"/>
-                </a:solidFill>
-                <a:latin typeface="Montserrat"/>
-              </a:rPr>
-              <a:t>Qué me llevo</a:t>
-            </a:r>
-          </a:p>
-        </p:txBody>
-      </p:sp>
-      <p:sp>
-        <p:nvSpPr>
-          <p:cNvPr id="6" name="TextBox 5"/>
+            <a:pPr>
+              <a:spcAft>
+                <a:spcPts val="1200"/>
+              </a:spcAft>
+            </a:pPr>
+            <a:r>
+              <a:rPr sz="2000" b="1" i="0">
+                <a:solidFill>
+                  <a:srgbClr val="CADCFC"/>
+                </a:solidFill>
+                <a:latin typeface="Montserrat"/>
+              </a:rPr>
+              <a:t>✓  </a:t>
+            </a:r>
+            <a:r>
+              <a:rPr sz="1900" b="0" i="0">
+                <a:solidFill>
+                  <a:srgbClr val="FFFFFF"/>
+                </a:solidFill>
+                <a:latin typeface="Montserrat"/>
+              </a:rPr>
+              <a:t>La placa: DNI indeleble; toda ella se verifica con la UNE 60750</a:t>
+            </a:r>
+          </a:p>
+          <a:p>
+            <a:pPr>
+              <a:spcAft>
+                <a:spcPts val="1200"/>
+              </a:spcAft>
+            </a:pPr>
+            <a:r>
+              <a:rPr sz="2000" b="1" i="0">
+                <a:solidFill>
+                  <a:srgbClr val="CADCFC"/>
+                </a:solidFill>
+                <a:latin typeface="Montserrat"/>
+              </a:rPr>
+              <a:t>✓  </a:t>
+            </a:r>
+            <a:r>
+              <a:rPr sz="1900" b="0" i="0">
+                <a:solidFill>
+                  <a:srgbClr val="FFFFFF"/>
+                </a:solidFill>
+                <a:latin typeface="Montserrat"/>
+              </a:rPr>
+              <a:t>Anexo 3: la red de seguridad sin norma propia</a:t>
+            </a:r>
+          </a:p>
+          <a:p>
+            <a:pPr>
+              <a:spcAft>
+                <a:spcPts val="1200"/>
+              </a:spcAft>
+            </a:pPr>
+            <a:r>
+              <a:rPr sz="2000" b="1" i="0">
+                <a:solidFill>
+                  <a:srgbClr val="CADCFC"/>
+                </a:solidFill>
+                <a:latin typeface="Montserrat"/>
+              </a:rPr>
+              <a:t>✓  </a:t>
+            </a:r>
+            <a:r>
+              <a:rPr sz="1900" b="0" i="0">
+                <a:solidFill>
+                  <a:srgbClr val="FFFFFF"/>
+                </a:solidFill>
+                <a:latin typeface="Montserrat"/>
+              </a:rPr>
+              <a:t>2.3.15: dispositivo anti-acumulación o local ventilado</a:t>
+            </a:r>
+          </a:p>
+          <a:p>
+            <a:pPr>
+              <a:spcAft>
+                <a:spcPts val="1200"/>
+              </a:spcAft>
+            </a:pPr>
+            <a:r>
+              <a:rPr sz="2000" b="1" i="0">
+                <a:solidFill>
+                  <a:srgbClr val="CADCFC"/>
+                </a:solidFill>
+                <a:latin typeface="Montserrat"/>
+              </a:rPr>
+              <a:t>✓  </a:t>
+            </a:r>
+            <a:r>
+              <a:rPr sz="1900" b="0" i="0">
+                <a:solidFill>
+                  <a:srgbClr val="FFFFFF"/>
+                </a:solidFill>
+                <a:latin typeface="Montserrat"/>
+              </a:rPr>
+              <a:t>Estanquidad caza fugas; funcionamiento caza el CO</a:t>
+            </a:r>
+          </a:p>
+        </p:txBody>
+      </p:sp>
+      <p:sp>
+        <p:nvSpPr>
+          <p:cNvPr id="6" name="Rounded Rectangle 5"/>
+          <p:cNvSpPr/>
+          <p:nvPr/>
+        </p:nvSpPr>
+        <p:spPr>
+          <a:xfrm>
+            <a:off x="822960" y="5532120"/>
+            <a:ext cx="10515600" cy="777240"/>
+          </a:xfrm>
+          <a:prstGeom prst="roundRect">
+            <a:avLst/>
+          </a:prstGeom>
+          <a:solidFill>
+            <a:srgbClr val="2E3A80"/>
+          </a:solidFill>
+          <a:ln>
+            <a:noFill/>
+          </a:ln>
+          <a:effectLst/>
+        </p:spPr>
+        <p:style>
+          <a:lnRef idx="1">
+            <a:schemeClr val="accent1"/>
+          </a:lnRef>
+          <a:fillRef idx="3">
+            <a:schemeClr val="accent1"/>
+          </a:fillRef>
+          <a:effectRef idx="2">
+            <a:schemeClr val="accent1"/>
+          </a:effectRef>
+          <a:fontRef idx="minor">
+            <a:schemeClr val="lt1"/>
+          </a:fontRef>
+        </p:style>
+        <p:txBody>
+          <a:bodyPr rtlCol="0" anchor="ctr"/>
+          <a:lstStyle/>
+          <a:p>
+            <a:pPr algn="ctr"/>
+          </a:p>
+        </p:txBody>
+      </p:sp>
+      <p:sp>
+        <p:nvSpPr>
+          <p:cNvPr id="7" name="TextBox 6"/>
           <p:cNvSpPr txBox="1"/>
           <p:nvPr/>
         </p:nvSpPr>
         <p:spPr>
           <a:xfrm>
-            <a:off x="822960" y="2011680"/>
-            <a:ext cx="10058400" cy="3657600"/>
+            <a:off x="1051560" y="5605272"/>
+            <a:ext cx="10058400" cy="640080"/>
           </a:xfrm>
           <a:prstGeom prst="rect">
             <a:avLst/>
@@ -6971,78 +7113,14 @@
           </a:bodyPr>
           <a:lstStyle/>
           <a:p>
-            <a:pPr>
-              <a:spcAft>
-                <a:spcPts val="1400"/>
-              </a:spcAft>
-            </a:pPr>
-            <a:r>
-              <a:rPr sz="2000" b="1" i="0">
-                <a:solidFill>
-                  <a:srgbClr val="2E3A80"/>
-                </a:solidFill>
-                <a:latin typeface="Montserrat"/>
-              </a:rPr>
-              <a:t>✓  </a:t>
-            </a:r>
-            <a:r>
-              <a:rPr sz="2000" b="0" i="0">
-                <a:solidFill>
-                  <a:srgbClr val="1B2330"/>
-                </a:solidFill>
-                <a:latin typeface="Montserrat"/>
-              </a:rPr>
-              <a:t>Placa = DNI indeleble (anexo 2)</a:t>
-            </a:r>
-          </a:p>
-          <a:p>
-            <a:pPr>
-              <a:spcAft>
-                <a:spcPts val="1400"/>
-              </a:spcAft>
-            </a:pPr>
-            <a:r>
-              <a:rPr sz="2000" b="1" i="0">
-                <a:solidFill>
-                  <a:srgbClr val="2E3A80"/>
-                </a:solidFill>
-                <a:latin typeface="Montserrat"/>
-              </a:rPr>
-              <a:t>✓  </a:t>
-            </a:r>
-            <a:r>
-              <a:rPr sz="2000" b="0" i="0">
-                <a:solidFill>
-                  <a:srgbClr val="1B2330"/>
-                </a:solidFill>
-                <a:latin typeface="Montserrat"/>
-              </a:rPr>
-              <a:t>2.3.15: anti-acumulación o ventilado</a:t>
-            </a:r>
-          </a:p>
-          <a:p>
-            <a:pPr>
-              <a:spcAft>
-                <a:spcPts val="1400"/>
-              </a:spcAft>
-            </a:pPr>
-            <a:r>
-              <a:rPr sz="2000" b="1" i="0">
-                <a:solidFill>
-                  <a:srgbClr val="2E3A80"/>
-                </a:solidFill>
-                <a:latin typeface="Montserrat"/>
-              </a:rPr>
-              <a:t>✓  </a:t>
-            </a:r>
-            <a:r>
-              <a:rPr sz="2000" b="0" i="0">
-                <a:solidFill>
-                  <a:srgbClr val="1B2330"/>
-                </a:solidFill>
-                <a:latin typeface="Montserrat"/>
-              </a:rPr>
-              <a:t>Estanquidad y funcionamiento: sin fugas ni CO</a:t>
+            <a:r>
+              <a:rPr sz="1500" b="1" i="1">
+                <a:solidFill>
+                  <a:srgbClr val="CADCFC"/>
+                </a:solidFill>
+                <a:latin typeface="Montserrat"/>
+              </a:rPr>
+              <a:t>Ya lees un aparato como un profesional: de la placa al análisis de combustión. Enhorabuena, has cerrado el tema.</a:t>
             </a:r>
           </a:p>
         </p:txBody>
@@ -7288,7 +7366,7 @@
                 </a:solidFill>
                 <a:latin typeface="Montserrat"/>
               </a:rPr>
-              <a:t>7</a:t>
+              <a:t>20</a:t>
             </a:r>
           </a:p>
         </p:txBody>
@@ -7323,7 +7401,7 @@
                 </a:solidFill>
                 <a:latin typeface="Montserrat"/>
               </a:rPr>
-              <a:t>datos mínimos de la placa</a:t>
+              <a:t>prescripciones de seguridad</a:t>
             </a:r>
           </a:p>
         </p:txBody>
@@ -7404,7 +7482,7 @@
                 </a:solidFill>
                 <a:latin typeface="Montserrat"/>
               </a:rPr>
-              <a:t>20</a:t>
+              <a:t>2</a:t>
             </a:r>
           </a:p>
         </p:txBody>
@@ -7439,7 +7517,7 @@
                 </a:solidFill>
                 <a:latin typeface="Montserrat"/>
               </a:rPr>
-              <a:t>prescripciones de seguridad</a:t>
+              <a:t>anexos: placa y prescripciones</a:t>
             </a:r>
           </a:p>
         </p:txBody>
@@ -7520,7 +7598,7 @@
                 </a:solidFill>
                 <a:latin typeface="Montserrat"/>
               </a:rPr>
-              <a:t>2</a:t>
+              <a:t>1</a:t>
             </a:r>
           </a:p>
         </p:txBody>
@@ -7555,7 +7633,7 @@
                 </a:solidFill>
                 <a:latin typeface="Montserrat"/>
               </a:rPr>
-              <a:t>pruebas mínimas del aparato</a:t>
+              <a:t>norma para toda la placa</a:t>
             </a:r>
           </a:p>
         </p:txBody>
@@ -8217,7 +8295,7 @@
                 </a:solidFill>
                 <a:latin typeface="Montserrat"/>
               </a:rPr>
-              <a:t>Marca y modelo; nº de serie</a:t>
+              <a:t>Marca, modelo y nº de serie</a:t>
             </a:r>
           </a:p>
           <a:p>
@@ -8299,7 +8377,7 @@
       </p:sp>
       <p:sp>
         <p:nvSpPr>
-          <p:cNvPr id="8" name="imgph" descr="IMGQ:boiler rating plate data"/>
+          <p:cNvPr id="8" name="imgph" descr="IMGQ:boiler rating plate data closeup"/>
           <p:cNvSpPr/>
           <p:nvPr/>
         </p:nvSpPr>
@@ -8385,7 +8463,7 @@
                 </a:solidFill>
                 <a:latin typeface="Montserrat"/>
               </a:rPr>
-              <a:t>boiler rating plate data</a:t>
+              <a:t>boiler rating plate data closeup</a:t>
             </a:r>
           </a:p>
         </p:txBody>

--- a/Curso Gas B/05 - ITC-ICG 08 - Aparatos de gas/05 - ITC-ICG 08 - Aparatos de gas - Vídeo 4.pptx
+++ b/Curso Gas B/05 - ITC-ICG 08 - Aparatos de gas/05 - ITC-ICG 08 - Aparatos de gas - Vídeo 4.pptx
@@ -20,6 +20,7 @@
     <p:sldId id="268" r:id="rId20"/>
     <p:sldId id="269" r:id="rId21"/>
     <p:sldId id="270" r:id="rId22"/>
+    <p:sldId id="271" r:id="rId23"/>
   </p:sldIdLst>
   <p:sldSz cx="12191695" cy="6858000" type="screen4x3"/>
   <p:notesSz cx="6858000" cy="9144000"/>
@@ -591,12 +592,12 @@
           <a:lstStyle/>
           <a:p>
             <a:r>
-              <a:t>N1: Son veinte puntos. ¿Cómo los digiero sin perderme?</a:t>
-            </a:r>
-          </a:p>
-          <a:p>
-            <a:r>
-              <a:t>N2: No los memorices sueltos: agrúpalos en seis ideas y colocas cualquiera. Uno, aguantar el uso: sin desajuste, deformación ni rotura, y resistiendo la presión. Dos, sobrevivir a imprevistos: la condensación, un incendio de origen externo, y los cortes o fluctuaciones de la energía auxiliar, sin que nada de eso sea fuente de peligro. Tres, nada de fugas peligrosas: ni al encender, ni acumuladas. Cuatro, fallar sin peligro: si se rompe un dispositivo de seguridad, control o regulación, no debe haber peligro. Cinco, encender y quemar bien: encendido suave y cruzado, llama estable, combustión sin escapes. Y seis, no quemar al usuario: las temperaturas de mandos y superficies próximas se mantienen controladas. Seis cajones, y cada punto cae en uno.</a:t>
+              <a:t>N1: ¿Con qué idea base arranca el anexo tres?</a:t>
+            </a:r>
+          </a:p>
+          <a:p>
+            <a:r>
+              <a:t>N2: Con dos, sencillas de entender. La primera: el diseño y la fabricación deben ser tales que el aparato funcione con seguridad total y no entrañe peligro para las personas, los animales domésticos ni los bienes, siempre que se use en condiciones normales de funcionamiento, esas tres patas que ya conoces del primer vídeo. La segunda: los materiales deben ser adecuados y resistentes a las condiciones mecánicas, químicas y térmicas a las que se sometan, y sus propiedades importantes para la seguridad las garantiza el fabricante o el proveedor. Y un detalle: estas prescripciones valen también para los equipos componentes cuando existe el riesgo correspondiente.</a:t>
             </a:r>
           </a:p>
         </p:txBody>
@@ -666,12 +667,12 @@
           <a:lstStyle/>
           <a:p>
             <a:r>
-              <a:t>N1: ¿Cuál es el punto que más cae del anexo tres?</a:t>
-            </a:r>
-          </a:p>
-          <a:p>
-            <a:r>
-              <a:t>N2: El dos, tres, quince, y no es casualidad, porque enlaza todo el tema. Los aparatos destinados a usarse en locales disponen de un dispositivo específico que evita la acumulación peligrosa de gas no quemado en el local. Y los que no llevan ese dispositivo solo se pueden usar en locales con ventilación suficiente, o son de uso exclusivo al aire libre. Fíjate en que es el mismo criterio que ya viste en el manual técnico del primer vídeo y en las advertencias del aparato y del embalaje: todo encaja como un puzle. En la práctica, este punto es lo que evita las fugas acumuladas, el revoco de humos y el monóxido de carbono.</a:t>
+              <a:t>N1: Son veinte puntos. ¿Cómo los digiero sin perderme?</a:t>
+            </a:r>
+          </a:p>
+          <a:p>
+            <a:r>
+              <a:t>N2: No los memorices sueltos: agrúpalos en seis ideas y colocas cualquiera. Uno, aguantar el uso: sin desajuste, deformación ni rotura, y resistiendo la presión. Dos, sobrevivir a imprevistos: la condensación, un incendio de origen externo, y los cortes o fluctuaciones de la energía auxiliar, sin que nada de eso sea fuente de peligro. Tres, nada de fugas peligrosas: ni al encender, ni acumuladas. Cuatro, fallar sin peligro: si se rompe un dispositivo de seguridad, control o regulación, no debe haber peligro. Cinco, encender y quemar bien: encendido suave y cruzado, llama estable, combustión sin escapes. Y seis, no quemar al usuario: las temperaturas de mandos y superficies próximas se mantienen controladas. Seis cajones, y cada punto cae en uno.</a:t>
             </a:r>
           </a:p>
         </p:txBody>
@@ -741,12 +742,12 @@
           <a:lstStyle/>
           <a:p>
             <a:r>
-              <a:t>N1: ¿Dónde se prueba que el aparato no tiene fugas?</a:t>
-            </a:r>
-          </a:p>
-          <a:p>
-            <a:r>
-              <a:t>N2: Ojo al tramo exacto, porque el examen lo pregunta. Se comprueba la estanquidad del circuito de gas entre la llave del aparato y el quemador, a la presión máxima de utilización. Y además, que no existe fuga interior a través de las válvulas de corte, es decir, que cuando están cerradas no dejan pasar ni una burbuja de gas. Estanquidad, traducido, es que el gas no se escape por ningún lado. Es la garantía de que el aparato retiene el gas tanto por fuera como por dentro; esta es la prueba que caza las fugas.</a:t>
+              <a:t>N1: ¿Cuál es el punto que más cae del anexo tres?</a:t>
+            </a:r>
+          </a:p>
+          <a:p>
+            <a:r>
+              <a:t>N2: El dos, tres, quince, y no es casualidad, porque enlaza todo el tema. Los aparatos destinados a usarse en locales disponen de un dispositivo específico que evita la acumulación peligrosa de gas no quemado en el local. Y los que no llevan ese dispositivo solo se pueden usar en locales con ventilación suficiente, o son de uso exclusivo al aire libre. Fíjate en que es el mismo criterio que ya viste en el manual técnico del primer vídeo y en las advertencias del aparato y del embalaje: todo encaja como un puzle. En la práctica, este punto es lo que evita las fugas acumuladas, el revoco de humos y el monóxido de carbono.</a:t>
             </a:r>
           </a:p>
         </p:txBody>
@@ -816,12 +817,12 @@
           <a:lstStyle/>
           <a:p>
             <a:r>
-              <a:t>N1: ¿Qué se comprueba con el aparato ya trabajando?</a:t>
-            </a:r>
-          </a:p>
-          <a:p>
-            <a:r>
-              <a:t>N2: Dos bloques, y ayuda separarlos. El arranque: que prenda bien, con un barrido eficaz de la cámara si hace falta, encendido e interencendido correctos, sin fenómenos anómalos en la estabilidad de las llamas ni golpes de presión en el hogar ni en la instalación, respetando las secuencias del programador y los tiempos máximos de seguridad. Y la marcha: que los dispositivos hagan su trabajo, el control de llama, el control de presión de gas y de aire, el control de tiro, el consumo calorífico y el análisis de los productos de la combustión al consumo nominal. Mientras la estanquidad cazaba las fugas, estas pruebas cazan la mala combustión y el monóxido de carbono.</a:t>
+              <a:t>N1: ¿Dónde se prueba que el aparato no tiene fugas?</a:t>
+            </a:r>
+          </a:p>
+          <a:p>
+            <a:r>
+              <a:t>N2: Ojo al tramo exacto, porque el examen lo pregunta. Se comprueba la estanquidad del circuito de gas entre la llave del aparato y el quemador, a la presión máxima de utilización. Y además, que no existe fuga interior a través de las válvulas de corte, es decir, que cuando están cerradas no dejan pasar ni una burbuja de gas. Estanquidad, traducido, es que el gas no se escape por ningún lado. Es la garantía de que el aparato retiene el gas tanto por fuera como por dentro; esta es la prueba que caza las fugas.</a:t>
             </a:r>
           </a:p>
         </p:txBody>
@@ -891,12 +892,12 @@
           <a:lstStyle/>
           <a:p>
             <a:r>
-              <a:t>N1: ¿Por qué importan tanto los tiempos máximos de seguridad?</a:t>
-            </a:r>
-          </a:p>
-          <a:p>
-            <a:r>
-              <a:t>N2: Porque son críticos, y por eso aparecen dos veces, en el encendido y en la marcha. El tiempo máximo de seguridad es lo que el aparato puede tardar en cortar el gas si algo va mal: si no prende, si se apaga la llama, si falla el tiro. Si tardara de más, se acumularía gas sin quemar y tendrías el peligro dentro de casa. Que una válvula automática cierre a tiempo ante un fallo detectado es de lo más importante que se prueba. Y como remate, un control visual: que ni el elemento receptor ni el equipo de combustión se hayan deformado o deteriorado, y que los marcados e instrucciones sigan legibles. Todo tiene que quedar tal y como promete la placa.</a:t>
+              <a:t>N1: ¿Qué se comprueba con el aparato ya trabajando?</a:t>
+            </a:r>
+          </a:p>
+          <a:p>
+            <a:r>
+              <a:t>N2: Dos bloques, y ayuda separarlos. El arranque: que prenda bien, con un barrido eficaz de la cámara si hace falta, encendido e interencendido correctos, sin fenómenos anómalos en la estabilidad de las llamas ni golpes de presión en el hogar ni en la instalación, respetando las secuencias del programador y los tiempos máximos de seguridad. Y la marcha: que los dispositivos hagan su trabajo, el control de llama, el control de presión de gas y de aire, el control de tiro, el consumo calorífico y el análisis de los productos de la combustión al consumo nominal. Mientras la estanquidad cazaba las fugas, estas pruebas cazan la mala combustión y el monóxido de carbono.</a:t>
             </a:r>
           </a:p>
         </p:txBody>
@@ -966,6 +967,81 @@
           <a:lstStyle/>
           <a:p>
             <a:r>
+              <a:t>N1: ¿Por qué importan tanto los tiempos máximos de seguridad?</a:t>
+            </a:r>
+          </a:p>
+          <a:p>
+            <a:r>
+              <a:t>N2: Porque son críticos, y por eso aparecen dos veces, en el encendido y en la marcha. El tiempo máximo de seguridad es lo que el aparato puede tardar en cortar el gas si algo va mal: si no prende, si se apaga la llama, si falla el tiro. Si tardara de más, se acumularía gas sin quemar y tendrías el peligro dentro de casa. Que una válvula automática cierre a tiempo ante un fallo detectado es de lo más importante que se prueba. Y como remate, un control visual: que ni el elemento receptor ni el equipo de combustión se hayan deformado o deteriorado, y que los marcados e instrucciones sigan legibles. Todo tiene que quedar tal y como promete la placa.</a:t>
+            </a:r>
+          </a:p>
+        </p:txBody>
+      </p:sp>
+      <p:sp>
+        <p:nvSpPr>
+          <p:cNvPr id="4" name="Slide Number Placeholder 3"/>
+          <p:cNvSpPr>
+            <a:spLocks noGrp="1"/>
+          </p:cNvSpPr>
+          <p:nvPr>
+            <p:ph type="sldNum" idx="5" sz="quarter"/>
+          </p:nvPr>
+        </p:nvSpPr>
+        <p:spPr/>
+      </p:sp>
+    </p:spTree>
+  </p:cSld>
+  <p:clrMapOvr>
+    <a:masterClrMapping/>
+  </p:clrMapOvr>
+</p:notes>
+</file>
+
+<file path=ppt/notesSlides/notesSlide16.xml><?xml version="1.0" encoding="utf-8"?>
+<p:notes xmlns:a="http://schemas.openxmlformats.org/drawingml/2006/main" xmlns:p="http://schemas.openxmlformats.org/presentationml/2006/main" xmlns:r="http://schemas.openxmlformats.org/officeDocument/2006/relationships">
+  <p:cSld>
+    <p:spTree>
+      <p:nvGrpSpPr>
+        <p:cNvPr id="1" name=""/>
+        <p:cNvGrpSpPr/>
+        <p:nvPr/>
+      </p:nvGrpSpPr>
+      <p:grpSpPr>
+        <a:xfrm>
+          <a:off x="0" y="0"/>
+          <a:ext cx="0" cy="0"/>
+          <a:chOff x="0" y="0"/>
+          <a:chExt cx="0" cy="0"/>
+        </a:xfrm>
+      </p:grpSpPr>
+      <p:sp>
+        <p:nvSpPr>
+          <p:cNvPr id="2" name="Slide Image Placeholder 1"/>
+          <p:cNvSpPr>
+            <a:spLocks noGrp="1"/>
+          </p:cNvSpPr>
+          <p:nvPr>
+            <p:ph type="sldImg" idx="2"/>
+          </p:nvPr>
+        </p:nvSpPr>
+        <p:spPr/>
+      </p:sp>
+      <p:sp>
+        <p:nvSpPr>
+          <p:cNvPr id="3" name="Notes Placeholder 2"/>
+          <p:cNvSpPr>
+            <a:spLocks noGrp="1"/>
+          </p:cNvSpPr>
+          <p:nvPr>
+            <p:ph type="body" idx="3" sz="quarter"/>
+          </p:nvPr>
+        </p:nvSpPr>
+        <p:spPr/>
+        <p:txBody>
+          <a:bodyPr/>
+          <a:lstStyle/>
+          <a:p>
+            <a:r>
               <a:t>N1: Es el último vídeo del tema. ¿Cómo lo cierro en la cabeza?</a:t>
             </a:r>
           </a:p>
@@ -1124,16 +1200,7 @@
         <p:txBody>
           <a:bodyPr/>
           <a:lstStyle/>
-          <a:p>
-            <a:r>
-              <a:t>N1: ¿Por qué tanta exigencia con la placa?</a:t>
-            </a:r>
-          </a:p>
-          <a:p>
-            <a:r>
-              <a:t>N2: Empecemos por la idea sencilla y luego la afinamos. Igual que un coche lleva su ficha técnica, cada aparato lleva su placa de características con lo esencial. La norma exige que vaya fijada de forma sólida y duradera, visible y legible, y con caracteres indelebles, es decir, que no se borran. ¿Por qué indelebles? Porque dentro de años alguien tendrá que leerla para revisar o reparar el aparato. Una placa que se borra es un DNI inservible.</a:t>
-            </a:r>
-          </a:p>
+          <a:p/>
         </p:txBody>
       </p:sp>
       <p:sp>
@@ -1201,12 +1268,12 @@
           <a:lstStyle/>
           <a:p>
             <a:r>
-              <a:t>N1: ¿Qué lees exactamente en la placa?</a:t>
-            </a:r>
-          </a:p>
-          <a:p>
-            <a:r>
-              <a:t>N2: Los datos mínimos, y conviene sabérselos porque son los que usas a diario. El nombre o marca del fabricante y, en su caso, el importador. La denominación comercial, con marca y modelo. El número de serie o fabricación. La categoría del aparato, que recuerda, es la de los gases que admite. El tipo de gas en relación con la presión, indicando solo la presión del reglaje actual. El consumo calorífico nominal en kilovatios, referido al poder calorífico inferior. Y los datos eléctricos: naturaleza y tensión de la corriente y potencia máxima absorbida, en voltios, amperios, hercios y kilovatios. Son, ni más ni menos, los datos que necesitas para regular, revisar y rellenar el certificado de puesta en marcha.</a:t>
+              <a:t>N1: ¿Por qué tanta exigencia con la placa?</a:t>
+            </a:r>
+          </a:p>
+          <a:p>
+            <a:r>
+              <a:t>N2: Empecemos por la idea sencilla y luego la afinamos. Igual que un coche lleva su ficha técnica, cada aparato lleva su placa de características con lo esencial. La norma exige que vaya fijada de forma sólida y duradera, visible y legible, y con caracteres indelebles, es decir, que no se borran. ¿Por qué indelebles? Porque dentro de años alguien tendrá que leerla para revisar o reparar el aparato. Una placa que se borra es un DNI inservible.</a:t>
             </a:r>
           </a:p>
         </p:txBody>
@@ -1276,12 +1343,12 @@
           <a:lstStyle/>
           <a:p>
             <a:r>
-              <a:t>N1: ¿La placa la escribe solo la fábrica?</a:t>
-            </a:r>
-          </a:p>
-          <a:p>
-            <a:r>
-              <a:t>N2: No del todo, y este detalle gusta al examen. En los aparatos de consumo calorífico regulable, la placa deja un espacio libre para que tú, el instalador, sitúes la indicación del valor del consumo al que lo has dejado regulado durante la puesta en marcha. Es, en cierto modo, tu firma técnica sobre el propio aparato. Y aprovechemos para traducir unas siglas que salen aquí: el consumo se expresa en kilovatios referidos al poder calorífico inferior, el PCI, que es la energía que da el gas sin aprovechar el calor del vapor de agua de los humos. Basta con reconocer las siglas: PCI, poder calorífico inferior, la referencia estándar del sector.</a:t>
+              <a:t>N1: ¿Qué lees exactamente en la placa?</a:t>
+            </a:r>
+          </a:p>
+          <a:p>
+            <a:r>
+              <a:t>N2: Los datos mínimos, y conviene sabérselos porque son los que usas a diario. El nombre o marca del fabricante y, en su caso, el importador. La denominación comercial, con marca y modelo. El número de serie o fabricación. La categoría del aparato, que recuerda, es la de los gases que admite. El tipo de gas en relación con la presión, indicando solo la presión del reglaje actual. El consumo calorífico nominal en kilovatios, referido al poder calorífico inferior. Y los datos eléctricos: naturaleza y tensión de la corriente y potencia máxima absorbida, en voltios, amperios, hercios y kilovatios. Son, ni más ni menos, los datos que necesitas para regular, revisar y rellenar el certificado de puesta en marcha.</a:t>
             </a:r>
           </a:p>
         </p:txBody>
@@ -1351,12 +1418,12 @@
           <a:lstStyle/>
           <a:p>
             <a:r>
-              <a:t>N1: ¿Qué frases obliga a poner la norma en el aparato?</a:t>
-            </a:r>
-          </a:p>
-          <a:p>
-            <a:r>
-              <a:t>N2: Dos, y el examen puede citarte la literal, así que quédate con la idea. La advertencia general viene a decir: instalar de acuerdo con las normas en vigor, utilizar únicamente en lugares suficientemente ventilados y consultar las instrucciones antes de instalar y usar. Y si el aparato es de uso exclusivo al aire libre, lleva además esa frase, que puede ir en la propia placa o en una placa independiente. Y no es adorno burocrático: meter en un local cerrado un aparato pensado solo para exterior es la receta directa de la intoxicación por monóxido de carbono.</a:t>
+              <a:t>N1: ¿La placa la escribe solo la fábrica?</a:t>
+            </a:r>
+          </a:p>
+          <a:p>
+            <a:r>
+              <a:t>N2: No del todo, y este detalle gusta al examen. En los aparatos de consumo calorífico regulable, la placa deja un espacio libre para que tú, el instalador, sitúes la indicación del valor del consumo al que lo has dejado regulado durante la puesta en marcha. Es, en cierto modo, tu firma técnica sobre el propio aparato. Y aprovechemos para traducir unas siglas que salen aquí: el consumo se expresa en kilovatios referidos al poder calorífico inferior, el PCI, que es la energía que da el gas sin aprovechar el calor del vapor de agua de los humos. Basta con reconocer las siglas: PCI, poder calorífico inferior, la referencia estándar del sector.</a:t>
             </a:r>
           </a:p>
         </p:txBody>
@@ -1426,12 +1493,12 @@
           <a:lstStyle/>
           <a:p>
             <a:r>
-              <a:t>N1: ¿Cómo se comprueba que la placa aguanta con el tiempo?</a:t>
-            </a:r>
-          </a:p>
-          <a:p>
-            <a:r>
-              <a:t>N2: No te compliques, porque todo apunta a la misma norma. La indelebilidad de los caracteres, la resistencia a la corrosión cuando la placa es metálica, y la adherencia cuando es adhesiva, se verifican con la UNE sesenta mil setecientos cincuenta. La lógica de fondo es simple: la placa tiene que durar tanto como el aparato, aunque la froten, se moje o se caliente. Y por eso la norma exige que, tras todos los ensayos, los caracteres sigan legibles, la placa no se haya deformado y no se despegue fácilmente. De poco sirve un DNI que se borra al segundo año.</a:t>
+              <a:t>N1: ¿Qué frases obliga a poner la norma en el aparato?</a:t>
+            </a:r>
+          </a:p>
+          <a:p>
+            <a:r>
+              <a:t>N2: Dos, y el examen puede citarte la literal, así que quédate con la idea. La advertencia general viene a decir: instalar de acuerdo con las normas en vigor, utilizar únicamente en lugares suficientemente ventilados y consultar las instrucciones antes de instalar y usar. Y si el aparato es de uso exclusivo al aire libre, lleva además esa frase, que puede ir en la propia placa o en una placa independiente. Y no es adorno burocrático: meter en un local cerrado un aparato pensado solo para exterior es la receta directa de la intoxicación por monóxido de carbono.</a:t>
             </a:r>
           </a:p>
         </p:txBody>
@@ -1501,12 +1568,12 @@
           <a:lstStyle/>
           <a:p>
             <a:r>
-              <a:t>N1: ¿Cuándo entra en juego el anexo tres?</a:t>
-            </a:r>
-          </a:p>
-          <a:p>
-            <a:r>
-              <a:t>N2: Recuerda la lógica del apartado tres, la de la conformidad: primero la norma UNE o EN, y si no hay, el anexo tres. Pues este anexo es justo ese plan B: establece los requisitos y las pruebas para certificar un aparato huérfano de norma, uno para el que no existe una norma específica. Y tiene una exclusión que tiene su lógica: quedan fuera los aparatos ya homologados que vayan a usar un gas de distinta familia, siempre que ese cambio ya estuviera considerado en la homologación inicial. Si el cambio ya estaba previsto, no hay que pasar otra vez por aquí.</a:t>
+              <a:t>N1: ¿Cómo se comprueba que la placa aguanta con el tiempo?</a:t>
+            </a:r>
+          </a:p>
+          <a:p>
+            <a:r>
+              <a:t>N2: No te compliques, porque todo apunta a la misma norma. La indelebilidad de los caracteres, la resistencia a la corrosión cuando la placa es metálica, y la adherencia cuando es adhesiva, se verifican con la UNE sesenta mil setecientos cincuenta. La lógica de fondo es simple: la placa tiene que durar tanto como el aparato, aunque la froten, se moje o se caliente. Y por eso la norma exige que, tras todos los ensayos, los caracteres sigan legibles, la placa no se haya deformado y no se despegue fácilmente. De poco sirve un DNI que se borra al segundo año.</a:t>
             </a:r>
           </a:p>
         </p:txBody>
@@ -1576,12 +1643,12 @@
           <a:lstStyle/>
           <a:p>
             <a:r>
-              <a:t>N1: ¿Con qué idea base arranca el anexo tres?</a:t>
-            </a:r>
-          </a:p>
-          <a:p>
-            <a:r>
-              <a:t>N2: Con dos, sencillas de entender. La primera: el diseño y la fabricación deben ser tales que el aparato funcione con seguridad total y no entrañe peligro para las personas, los animales domésticos ni los bienes, siempre que se use en condiciones normales de funcionamiento, esas tres patas que ya conoces del primer vídeo. La segunda: los materiales deben ser adecuados y resistentes a las condiciones mecánicas, químicas y térmicas a las que se sometan, y sus propiedades importantes para la seguridad las garantiza el fabricante o el proveedor. Y un detalle: estas prescripciones valen también para los equipos componentes cuando existe el riesgo correspondiente.</a:t>
+              <a:t>N1: ¿Cuándo entra en juego el anexo tres?</a:t>
+            </a:r>
+          </a:p>
+          <a:p>
+            <a:r>
+              <a:t>N2: Recuerda la lógica del apartado tres, la de la conformidad: primero la norma UNE o EN, y si no hay, el anexo tres. Pues este anexo es justo ese plan B: establece los requisitos y las pruebas para certificar un aparato huérfano de norma, uno para el que no existe una norma específica. Y tiene una exclusión que tiene su lógica: quedan fuera los aparatos ya homologados que vayan a usar un gas de distinta familia, siempre que ese cambio ya estuviera considerado en la homologación inicial. Si el cambio ya estaba previsto, no hay que pasar otra vez por aquí.</a:t>
             </a:r>
           </a:p>
         </p:txBody>
@@ -4656,7 +4723,7 @@
             <a:r>
               <a:rPr sz="1400" b="1" i="0">
                 <a:solidFill>
-                  <a:srgbClr val="CADCFC"/>
+                  <a:srgbClr val="F4A24C"/>
                 </a:solidFill>
                 <a:latin typeface="Montserrat"/>
               </a:rPr>
@@ -4667,13 +4734,57 @@
       </p:sp>
       <p:sp>
         <p:nvSpPr>
-          <p:cNvPr id="4" name="TextBox 3"/>
+          <p:cNvPr id="4" name="Rounded Rectangle 3"/>
+          <p:cNvSpPr/>
+          <p:nvPr/>
+        </p:nvSpPr>
+        <p:spPr>
+          <a:xfrm>
+            <a:off x="868680" y="2057400"/>
+            <a:ext cx="1463040" cy="82296"/>
+          </a:xfrm>
+          <a:prstGeom prst="roundRect">
+            <a:avLst/>
+          </a:prstGeom>
+          <a:solidFill>
+            <a:srgbClr val="E8801A"/>
+          </a:solidFill>
+          <a:ln>
+            <a:noFill/>
+          </a:ln>
+          <a:effectLst/>
+        </p:spPr>
+        <p:style>
+          <a:lnRef idx="1">
+            <a:schemeClr val="accent1"/>
+          </a:lnRef>
+          <a:fillRef idx="3">
+            <a:schemeClr val="accent1"/>
+          </a:fillRef>
+          <a:effectRef idx="2">
+            <a:schemeClr val="accent1"/>
+          </a:effectRef>
+          <a:fontRef idx="minor">
+            <a:schemeClr val="lt1"/>
+          </a:fontRef>
+        </p:style>
+        <p:txBody>
+          <a:bodyPr rtlCol="0" anchor="ctr"/>
+          <a:lstStyle/>
+          <a:p>
+            <a:pPr algn="ctr"/>
+          </a:p>
+        </p:txBody>
+      </p:sp>
+      <p:sp>
+        <p:nvSpPr>
+          <p:cNvPr id="5" name="TextBox 4"/>
           <p:cNvSpPr txBox="1"/>
           <p:nvPr/>
         </p:nvSpPr>
         <p:spPr>
           <a:xfrm>
-            <a:off x="822960" y="2194560"/>
+            <a:off x="822960" y="2286000"/>
             <a:ext cx="10515600" cy="2011680"/>
           </a:xfrm>
           <a:prstGeom prst="rect">
@@ -4712,7 +4823,7 @@
       </p:sp>
       <p:sp>
         <p:nvSpPr>
-          <p:cNvPr id="5" name="TextBox 4"/>
+          <p:cNvPr id="6" name="TextBox 5"/>
           <p:cNvSpPr txBox="1"/>
           <p:nvPr/>
         </p:nvSpPr>
@@ -4836,7 +4947,7 @@
                 </a:solidFill>
                 <a:latin typeface="Montserrat"/>
               </a:rPr>
-              <a:t>010 / 015</a:t>
+              <a:t>010 / 016</a:t>
             </a:r>
           </a:p>
         </p:txBody>
@@ -4884,7 +4995,7 @@
         <p:spPr>
           <a:xfrm>
             <a:off x="822960" y="457200"/>
-            <a:ext cx="8229600" cy="365760"/>
+            <a:ext cx="10058400" cy="365760"/>
           </a:xfrm>
           <a:prstGeom prst="rect">
             <a:avLst/>
@@ -4898,13 +5009,13 @@
           <a:lstStyle/>
           <a:p>
             <a:r>
-              <a:rPr sz="1200" b="1" i="0">
-                <a:solidFill>
-                  <a:srgbClr val="64748B"/>
-                </a:solidFill>
-                <a:latin typeface="Montserrat"/>
-              </a:rPr>
-              <a:t>ANEXO 3 · 2.3.1-2.3.20</a:t>
+              <a:rPr sz="1300" b="1" i="0">
+                <a:solidFill>
+                  <a:srgbClr val="E8801A"/>
+                </a:solidFill>
+                <a:latin typeface="Montserrat"/>
+              </a:rPr>
+              <a:t>ANEXO 3 · 2.1-2.2</a:t>
             </a:r>
           </a:p>
         </p:txBody>
@@ -4932,26 +5043,70 @@
           <a:lstStyle/>
           <a:p>
             <a:r>
-              <a:rPr sz="2700" b="1" i="0">
+              <a:rPr sz="2800" b="1" i="0">
                 <a:solidFill>
                   <a:srgbClr val="1E2761"/>
                 </a:solidFill>
                 <a:latin typeface="Montserrat"/>
               </a:rPr>
-              <a:t>Veinte prescripciones, seis ideas</a:t>
-            </a:r>
-          </a:p>
-        </p:txBody>
-      </p:sp>
-      <p:sp>
-        <p:nvSpPr>
-          <p:cNvPr id="7" name="TextBox 6"/>
+              <a:t>Condiciones generales y materiales</a:t>
+            </a:r>
+          </a:p>
+        </p:txBody>
+      </p:sp>
+      <p:sp>
+        <p:nvSpPr>
+          <p:cNvPr id="7" name="Rounded Rectangle 6"/>
+          <p:cNvSpPr/>
+          <p:nvPr/>
+        </p:nvSpPr>
+        <p:spPr>
+          <a:xfrm>
+            <a:off x="868680" y="1627632"/>
+            <a:ext cx="2011680" cy="73152"/>
+          </a:xfrm>
+          <a:prstGeom prst="roundRect">
+            <a:avLst/>
+          </a:prstGeom>
+          <a:solidFill>
+            <a:srgbClr val="E8801A"/>
+          </a:solidFill>
+          <a:ln>
+            <a:noFill/>
+          </a:ln>
+          <a:effectLst/>
+        </p:spPr>
+        <p:style>
+          <a:lnRef idx="1">
+            <a:schemeClr val="accent1"/>
+          </a:lnRef>
+          <a:fillRef idx="3">
+            <a:schemeClr val="accent1"/>
+          </a:fillRef>
+          <a:effectRef idx="2">
+            <a:schemeClr val="accent1"/>
+          </a:effectRef>
+          <a:fontRef idx="minor">
+            <a:schemeClr val="lt1"/>
+          </a:fontRef>
+        </p:style>
+        <p:txBody>
+          <a:bodyPr rtlCol="0" anchor="ctr"/>
+          <a:lstStyle/>
+          <a:p>
+            <a:pPr algn="ctr"/>
+          </a:p>
+        </p:txBody>
+      </p:sp>
+      <p:sp>
+        <p:nvSpPr>
+          <p:cNvPr id="8" name="TextBox 7"/>
           <p:cNvSpPr txBox="1"/>
           <p:nvPr/>
         </p:nvSpPr>
         <p:spPr>
           <a:xfrm>
-            <a:off x="822960" y="1920240"/>
+            <a:off x="822960" y="1965960"/>
             <a:ext cx="4983480" cy="4206240"/>
           </a:xfrm>
           <a:prstGeom prst="rect">
@@ -4967,17 +5122,17 @@
           <a:p>
             <a:pPr>
               <a:spcAft>
-                <a:spcPts val="1000"/>
+                <a:spcPts val="1100"/>
               </a:spcAft>
             </a:pPr>
             <a:r>
               <a:rPr sz="1600" b="1" i="0">
                 <a:solidFill>
-                  <a:srgbClr val="2E3A80"/>
-                </a:solidFill>
-                <a:latin typeface="Montserrat"/>
-              </a:rPr>
-              <a:t>•  </a:t>
+                  <a:srgbClr val="E8801A"/>
+                </a:solidFill>
+                <a:latin typeface="Montserrat"/>
+              </a:rPr>
+              <a:t>▸  </a:t>
             </a:r>
             <a:r>
               <a:rPr sz="1600" b="0" i="0">
@@ -4986,23 +5141,23 @@
                 </a:solidFill>
                 <a:latin typeface="Montserrat"/>
               </a:rPr>
-              <a:t>Aguantar el uso, sin roturas</a:t>
+              <a:t>Seguridad total en uso normal</a:t>
             </a:r>
           </a:p>
           <a:p>
             <a:pPr>
               <a:spcAft>
-                <a:spcPts val="1000"/>
+                <a:spcPts val="1100"/>
               </a:spcAft>
             </a:pPr>
             <a:r>
               <a:rPr sz="1600" b="1" i="0">
                 <a:solidFill>
-                  <a:srgbClr val="2E3A80"/>
-                </a:solidFill>
-                <a:latin typeface="Montserrat"/>
-              </a:rPr>
-              <a:t>•  </a:t>
+                  <a:srgbClr val="E8801A"/>
+                </a:solidFill>
+                <a:latin typeface="Montserrat"/>
+              </a:rPr>
+              <a:t>▸  </a:t>
             </a:r>
             <a:r>
               <a:rPr sz="1600" b="0" i="0">
@@ -5011,23 +5166,23 @@
                 </a:solidFill>
                 <a:latin typeface="Montserrat"/>
               </a:rPr>
-              <a:t>Sobrevivir a imprevistos (luz, incendio)</a:t>
+              <a:t>Materiales: mecánica, química, térmica</a:t>
             </a:r>
           </a:p>
           <a:p>
             <a:pPr>
               <a:spcAft>
-                <a:spcPts val="1000"/>
+                <a:spcPts val="1100"/>
               </a:spcAft>
             </a:pPr>
             <a:r>
               <a:rPr sz="1600" b="1" i="0">
                 <a:solidFill>
-                  <a:srgbClr val="2E3A80"/>
-                </a:solidFill>
-                <a:latin typeface="Montserrat"/>
-              </a:rPr>
-              <a:t>•  </a:t>
+                  <a:srgbClr val="E8801A"/>
+                </a:solidFill>
+                <a:latin typeface="Montserrat"/>
+              </a:rPr>
+              <a:t>▸  </a:t>
             </a:r>
             <a:r>
               <a:rPr sz="1600" b="0" i="0">
@@ -5036,64 +5191,14 @@
                 </a:solidFill>
                 <a:latin typeface="Montserrat"/>
               </a:rPr>
-              <a:t>Nada de fugas peligrosas</a:t>
-            </a:r>
-          </a:p>
-          <a:p>
-            <a:pPr>
-              <a:spcAft>
-                <a:spcPts val="1000"/>
-              </a:spcAft>
-            </a:pPr>
-            <a:r>
-              <a:rPr sz="1600" b="1" i="0">
-                <a:solidFill>
-                  <a:srgbClr val="2E3A80"/>
-                </a:solidFill>
-                <a:latin typeface="Montserrat"/>
-              </a:rPr>
-              <a:t>•  </a:t>
-            </a:r>
-            <a:r>
-              <a:rPr sz="1600" b="0" i="0">
-                <a:solidFill>
-                  <a:srgbClr val="1B2330"/>
-                </a:solidFill>
-                <a:latin typeface="Montserrat"/>
-              </a:rPr>
-              <a:t>Fallar sin peligro</a:t>
-            </a:r>
-          </a:p>
-          <a:p>
-            <a:pPr>
-              <a:spcAft>
-                <a:spcPts val="1000"/>
-              </a:spcAft>
-            </a:pPr>
-            <a:r>
-              <a:rPr sz="1600" b="1" i="0">
-                <a:solidFill>
-                  <a:srgbClr val="2E3A80"/>
-                </a:solidFill>
-                <a:latin typeface="Montserrat"/>
-              </a:rPr>
-              <a:t>•  </a:t>
-            </a:r>
-            <a:r>
-              <a:rPr sz="1600" b="0" i="0">
-                <a:solidFill>
-                  <a:srgbClr val="1B2330"/>
-                </a:solidFill>
-                <a:latin typeface="Montserrat"/>
-              </a:rPr>
-              <a:t>Quemar bien; no quemar al usuario</a:t>
-            </a:r>
-          </a:p>
-        </p:txBody>
-      </p:sp>
-      <p:sp>
-        <p:nvSpPr>
-          <p:cNvPr id="8" name="imgph" descr="IMGQ:gas safety valve mechanism"/>
+              <a:t>Propiedades garantizadas por el fabricante</a:t>
+            </a:r>
+          </a:p>
+        </p:txBody>
+      </p:sp>
+      <p:sp>
+        <p:nvSpPr>
+          <p:cNvPr id="9" name="imgph" descr="IMGQ:stainless steel burner material"/>
           <p:cNvSpPr/>
           <p:nvPr/>
         </p:nvSpPr>
@@ -5139,7 +5244,7 @@
       </p:sp>
       <p:sp>
         <p:nvSpPr>
-          <p:cNvPr id="9" name="TextBox 8"/>
+          <p:cNvPr id="10" name="TextBox 9"/>
           <p:cNvSpPr txBox="1"/>
           <p:nvPr/>
         </p:nvSpPr>
@@ -5179,7 +5284,7 @@
                 </a:solidFill>
                 <a:latin typeface="Montserrat"/>
               </a:rPr>
-              <a:t>gas safety valve mechanism</a:t>
+              <a:t>stainless steel burner material</a:t>
             </a:r>
           </a:p>
         </p:txBody>
@@ -5276,7 +5381,7 @@
                 </a:solidFill>
                 <a:latin typeface="Montserrat"/>
               </a:rPr>
-              <a:t>011 / 015</a:t>
+              <a:t>011 / 016</a:t>
             </a:r>
           </a:p>
         </p:txBody>
@@ -5324,7 +5429,7 @@
         <p:spPr>
           <a:xfrm>
             <a:off x="822960" y="457200"/>
-            <a:ext cx="8229600" cy="365760"/>
+            <a:ext cx="10058400" cy="365760"/>
           </a:xfrm>
           <a:prstGeom prst="rect">
             <a:avLst/>
@@ -5338,13 +5443,13 @@
           <a:lstStyle/>
           <a:p>
             <a:r>
-              <a:rPr sz="1200" b="1" i="0">
-                <a:solidFill>
-                  <a:srgbClr val="64748B"/>
-                </a:solidFill>
-                <a:latin typeface="Montserrat"/>
-              </a:rPr>
-              <a:t>ANEXO 3 · PUNTO DE ORO</a:t>
+              <a:rPr sz="1300" b="1" i="0">
+                <a:solidFill>
+                  <a:srgbClr val="E8801A"/>
+                </a:solidFill>
+                <a:latin typeface="Montserrat"/>
+              </a:rPr>
+              <a:t>ANEXO 3 · 2.3.1-2.3.20</a:t>
             </a:r>
           </a:p>
         </p:txBody>
@@ -5372,26 +5477,70 @@
           <a:lstStyle/>
           <a:p>
             <a:r>
-              <a:rPr sz="2700" b="1" i="0">
+              <a:rPr sz="2800" b="1" i="0">
                 <a:solidFill>
                   <a:srgbClr val="1E2761"/>
                 </a:solidFill>
                 <a:latin typeface="Montserrat"/>
               </a:rPr>
-              <a:t>El dispositivo del 2.3.15</a:t>
-            </a:r>
-          </a:p>
-        </p:txBody>
-      </p:sp>
-      <p:sp>
-        <p:nvSpPr>
-          <p:cNvPr id="7" name="TextBox 6"/>
+              <a:t>Veinte prescripciones, seis ideas</a:t>
+            </a:r>
+          </a:p>
+        </p:txBody>
+      </p:sp>
+      <p:sp>
+        <p:nvSpPr>
+          <p:cNvPr id="7" name="Rounded Rectangle 6"/>
+          <p:cNvSpPr/>
+          <p:nvPr/>
+        </p:nvSpPr>
+        <p:spPr>
+          <a:xfrm>
+            <a:off x="868680" y="1627632"/>
+            <a:ext cx="2011680" cy="73152"/>
+          </a:xfrm>
+          <a:prstGeom prst="roundRect">
+            <a:avLst/>
+          </a:prstGeom>
+          <a:solidFill>
+            <a:srgbClr val="E8801A"/>
+          </a:solidFill>
+          <a:ln>
+            <a:noFill/>
+          </a:ln>
+          <a:effectLst/>
+        </p:spPr>
+        <p:style>
+          <a:lnRef idx="1">
+            <a:schemeClr val="accent1"/>
+          </a:lnRef>
+          <a:fillRef idx="3">
+            <a:schemeClr val="accent1"/>
+          </a:fillRef>
+          <a:effectRef idx="2">
+            <a:schemeClr val="accent1"/>
+          </a:effectRef>
+          <a:fontRef idx="minor">
+            <a:schemeClr val="lt1"/>
+          </a:fontRef>
+        </p:style>
+        <p:txBody>
+          <a:bodyPr rtlCol="0" anchor="ctr"/>
+          <a:lstStyle/>
+          <a:p>
+            <a:pPr algn="ctr"/>
+          </a:p>
+        </p:txBody>
+      </p:sp>
+      <p:sp>
+        <p:nvSpPr>
+          <p:cNvPr id="8" name="TextBox 7"/>
           <p:cNvSpPr txBox="1"/>
           <p:nvPr/>
         </p:nvSpPr>
         <p:spPr>
           <a:xfrm>
-            <a:off x="822960" y="1920240"/>
+            <a:off x="822960" y="1965960"/>
             <a:ext cx="4983480" cy="4206240"/>
           </a:xfrm>
           <a:prstGeom prst="rect">
@@ -5407,17 +5556,17 @@
           <a:p>
             <a:pPr>
               <a:spcAft>
-                <a:spcPts val="1000"/>
+                <a:spcPts val="1100"/>
               </a:spcAft>
             </a:pPr>
             <a:r>
               <a:rPr sz="1600" b="1" i="0">
                 <a:solidFill>
-                  <a:srgbClr val="2E3A80"/>
-                </a:solidFill>
-                <a:latin typeface="Montserrat"/>
-              </a:rPr>
-              <a:t>•  </a:t>
+                  <a:srgbClr val="E8801A"/>
+                </a:solidFill>
+                <a:latin typeface="Montserrat"/>
+              </a:rPr>
+              <a:t>▸  </a:t>
             </a:r>
             <a:r>
               <a:rPr sz="1600" b="0" i="0">
@@ -5426,23 +5575,23 @@
                 </a:solidFill>
                 <a:latin typeface="Montserrat"/>
               </a:rPr>
-              <a:t>Interior: dispositivo anti-acumulación</a:t>
+              <a:t>Aguantar el uso, sin roturas</a:t>
             </a:r>
           </a:p>
           <a:p>
             <a:pPr>
               <a:spcAft>
-                <a:spcPts val="1000"/>
+                <a:spcPts val="1100"/>
               </a:spcAft>
             </a:pPr>
             <a:r>
               <a:rPr sz="1600" b="1" i="0">
                 <a:solidFill>
-                  <a:srgbClr val="2E3A80"/>
-                </a:solidFill>
-                <a:latin typeface="Montserrat"/>
-              </a:rPr>
-              <a:t>•  </a:t>
+                  <a:srgbClr val="E8801A"/>
+                </a:solidFill>
+                <a:latin typeface="Montserrat"/>
+              </a:rPr>
+              <a:t>▸  </a:t>
             </a:r>
             <a:r>
               <a:rPr sz="1600" b="0" i="0">
@@ -5451,23 +5600,23 @@
                 </a:solidFill>
                 <a:latin typeface="Montserrat"/>
               </a:rPr>
-              <a:t>Sin él: solo local bien ventilado</a:t>
+              <a:t>Sobrevivir a imprevistos (luz, incendio)</a:t>
             </a:r>
           </a:p>
           <a:p>
             <a:pPr>
               <a:spcAft>
-                <a:spcPts val="1000"/>
+                <a:spcPts val="1100"/>
               </a:spcAft>
             </a:pPr>
             <a:r>
               <a:rPr sz="1600" b="1" i="0">
                 <a:solidFill>
-                  <a:srgbClr val="2E3A80"/>
-                </a:solidFill>
-                <a:latin typeface="Montserrat"/>
-              </a:rPr>
-              <a:t>•  </a:t>
+                  <a:srgbClr val="E8801A"/>
+                </a:solidFill>
+                <a:latin typeface="Montserrat"/>
+              </a:rPr>
+              <a:t>▸  </a:t>
             </a:r>
             <a:r>
               <a:rPr sz="1600" b="0" i="0">
@@ -5476,14 +5625,64 @@
                 </a:solidFill>
                 <a:latin typeface="Montserrat"/>
               </a:rPr>
-              <a:t>O uso exclusivo al aire libre</a:t>
-            </a:r>
-          </a:p>
-        </p:txBody>
-      </p:sp>
-      <p:sp>
-        <p:nvSpPr>
-          <p:cNvPr id="8" name="imgph" descr="IMGQ:kitchen ventilation grille wall"/>
+              <a:t>Nada de fugas peligrosas</a:t>
+            </a:r>
+          </a:p>
+          <a:p>
+            <a:pPr>
+              <a:spcAft>
+                <a:spcPts val="1100"/>
+              </a:spcAft>
+            </a:pPr>
+            <a:r>
+              <a:rPr sz="1600" b="1" i="0">
+                <a:solidFill>
+                  <a:srgbClr val="E8801A"/>
+                </a:solidFill>
+                <a:latin typeface="Montserrat"/>
+              </a:rPr>
+              <a:t>▸  </a:t>
+            </a:r>
+            <a:r>
+              <a:rPr sz="1600" b="0" i="0">
+                <a:solidFill>
+                  <a:srgbClr val="1B2330"/>
+                </a:solidFill>
+                <a:latin typeface="Montserrat"/>
+              </a:rPr>
+              <a:t>Fallar sin peligro</a:t>
+            </a:r>
+          </a:p>
+          <a:p>
+            <a:pPr>
+              <a:spcAft>
+                <a:spcPts val="1100"/>
+              </a:spcAft>
+            </a:pPr>
+            <a:r>
+              <a:rPr sz="1600" b="1" i="0">
+                <a:solidFill>
+                  <a:srgbClr val="E8801A"/>
+                </a:solidFill>
+                <a:latin typeface="Montserrat"/>
+              </a:rPr>
+              <a:t>▸  </a:t>
+            </a:r>
+            <a:r>
+              <a:rPr sz="1600" b="0" i="0">
+                <a:solidFill>
+                  <a:srgbClr val="1B2330"/>
+                </a:solidFill>
+                <a:latin typeface="Montserrat"/>
+              </a:rPr>
+              <a:t>Quemar bien; no quemar al usuario</a:t>
+            </a:r>
+          </a:p>
+        </p:txBody>
+      </p:sp>
+      <p:sp>
+        <p:nvSpPr>
+          <p:cNvPr id="9" name="imgph" descr="IMGQ:gas safety valve mechanism"/>
           <p:cNvSpPr/>
           <p:nvPr/>
         </p:nvSpPr>
@@ -5529,7 +5728,7 @@
       </p:sp>
       <p:sp>
         <p:nvSpPr>
-          <p:cNvPr id="9" name="TextBox 8"/>
+          <p:cNvPr id="10" name="TextBox 9"/>
           <p:cNvSpPr txBox="1"/>
           <p:nvPr/>
         </p:nvSpPr>
@@ -5569,7 +5768,7 @@
                 </a:solidFill>
                 <a:latin typeface="Montserrat"/>
               </a:rPr>
-              <a:t>kitchen ventilation grille wall</a:t>
+              <a:t>gas safety valve mechanism</a:t>
             </a:r>
           </a:p>
         </p:txBody>
@@ -5666,7 +5865,7 @@
                 </a:solidFill>
                 <a:latin typeface="Montserrat"/>
               </a:rPr>
-              <a:t>012 / 015</a:t>
+              <a:t>012 / 016</a:t>
             </a:r>
           </a:p>
         </p:txBody>
@@ -5714,7 +5913,7 @@
         <p:spPr>
           <a:xfrm>
             <a:off x="822960" y="457200"/>
-            <a:ext cx="8229600" cy="365760"/>
+            <a:ext cx="10058400" cy="365760"/>
           </a:xfrm>
           <a:prstGeom prst="rect">
             <a:avLst/>
@@ -5728,13 +5927,13 @@
           <a:lstStyle/>
           <a:p>
             <a:r>
-              <a:rPr sz="1200" b="1" i="0">
-                <a:solidFill>
-                  <a:srgbClr val="64748B"/>
-                </a:solidFill>
-                <a:latin typeface="Montserrat"/>
-              </a:rPr>
-              <a:t>ANEXO 3 · 3.1</a:t>
+              <a:rPr sz="1300" b="1" i="0">
+                <a:solidFill>
+                  <a:srgbClr val="E8801A"/>
+                </a:solidFill>
+                <a:latin typeface="Montserrat"/>
+              </a:rPr>
+              <a:t>ANEXO 3 · PUNTO DE ORO</a:t>
             </a:r>
           </a:p>
         </p:txBody>
@@ -5762,26 +5961,70 @@
           <a:lstStyle/>
           <a:p>
             <a:r>
-              <a:rPr sz="2700" b="1" i="0">
+              <a:rPr sz="2800" b="1" i="0">
                 <a:solidFill>
                   <a:srgbClr val="1E2761"/>
                 </a:solidFill>
                 <a:latin typeface="Montserrat"/>
               </a:rPr>
-              <a:t>Prueba de estanquidad</a:t>
-            </a:r>
-          </a:p>
-        </p:txBody>
-      </p:sp>
-      <p:sp>
-        <p:nvSpPr>
-          <p:cNvPr id="7" name="TextBox 6"/>
+              <a:t>El dispositivo del 2.3.15</a:t>
+            </a:r>
+          </a:p>
+        </p:txBody>
+      </p:sp>
+      <p:sp>
+        <p:nvSpPr>
+          <p:cNvPr id="7" name="Rounded Rectangle 6"/>
+          <p:cNvSpPr/>
+          <p:nvPr/>
+        </p:nvSpPr>
+        <p:spPr>
+          <a:xfrm>
+            <a:off x="868680" y="1627632"/>
+            <a:ext cx="2011680" cy="73152"/>
+          </a:xfrm>
+          <a:prstGeom prst="roundRect">
+            <a:avLst/>
+          </a:prstGeom>
+          <a:solidFill>
+            <a:srgbClr val="E8801A"/>
+          </a:solidFill>
+          <a:ln>
+            <a:noFill/>
+          </a:ln>
+          <a:effectLst/>
+        </p:spPr>
+        <p:style>
+          <a:lnRef idx="1">
+            <a:schemeClr val="accent1"/>
+          </a:lnRef>
+          <a:fillRef idx="3">
+            <a:schemeClr val="accent1"/>
+          </a:fillRef>
+          <a:effectRef idx="2">
+            <a:schemeClr val="accent1"/>
+          </a:effectRef>
+          <a:fontRef idx="minor">
+            <a:schemeClr val="lt1"/>
+          </a:fontRef>
+        </p:style>
+        <p:txBody>
+          <a:bodyPr rtlCol="0" anchor="ctr"/>
+          <a:lstStyle/>
+          <a:p>
+            <a:pPr algn="ctr"/>
+          </a:p>
+        </p:txBody>
+      </p:sp>
+      <p:sp>
+        <p:nvSpPr>
+          <p:cNvPr id="8" name="TextBox 7"/>
           <p:cNvSpPr txBox="1"/>
           <p:nvPr/>
         </p:nvSpPr>
         <p:spPr>
           <a:xfrm>
-            <a:off x="822960" y="1920240"/>
+            <a:off x="822960" y="1965960"/>
             <a:ext cx="4983480" cy="4206240"/>
           </a:xfrm>
           <a:prstGeom prst="rect">
@@ -5797,17 +6040,17 @@
           <a:p>
             <a:pPr>
               <a:spcAft>
-                <a:spcPts val="1000"/>
+                <a:spcPts val="1100"/>
               </a:spcAft>
             </a:pPr>
             <a:r>
               <a:rPr sz="1600" b="1" i="0">
                 <a:solidFill>
-                  <a:srgbClr val="2E3A80"/>
-                </a:solidFill>
-                <a:latin typeface="Montserrat"/>
-              </a:rPr>
-              <a:t>•  </a:t>
+                  <a:srgbClr val="E8801A"/>
+                </a:solidFill>
+                <a:latin typeface="Montserrat"/>
+              </a:rPr>
+              <a:t>▸  </a:t>
             </a:r>
             <a:r>
               <a:rPr sz="1600" b="0" i="0">
@@ -5816,23 +6059,23 @@
                 </a:solidFill>
                 <a:latin typeface="Montserrat"/>
               </a:rPr>
-              <a:t>Entre la llave del aparato y el quemador</a:t>
+              <a:t>Interior: dispositivo anti-acumulación</a:t>
             </a:r>
           </a:p>
           <a:p>
             <a:pPr>
               <a:spcAft>
-                <a:spcPts val="1000"/>
+                <a:spcPts val="1100"/>
               </a:spcAft>
             </a:pPr>
             <a:r>
               <a:rPr sz="1600" b="1" i="0">
                 <a:solidFill>
-                  <a:srgbClr val="2E3A80"/>
-                </a:solidFill>
-                <a:latin typeface="Montserrat"/>
-              </a:rPr>
-              <a:t>•  </a:t>
+                  <a:srgbClr val="E8801A"/>
+                </a:solidFill>
+                <a:latin typeface="Montserrat"/>
+              </a:rPr>
+              <a:t>▸  </a:t>
             </a:r>
             <a:r>
               <a:rPr sz="1600" b="0" i="0">
@@ -5841,23 +6084,23 @@
                 </a:solidFill>
                 <a:latin typeface="Montserrat"/>
               </a:rPr>
-              <a:t>A presión máxima de utilización</a:t>
+              <a:t>Sin él: solo local bien ventilado</a:t>
             </a:r>
           </a:p>
           <a:p>
             <a:pPr>
               <a:spcAft>
-                <a:spcPts val="1000"/>
+                <a:spcPts val="1100"/>
               </a:spcAft>
             </a:pPr>
             <a:r>
               <a:rPr sz="1600" b="1" i="0">
                 <a:solidFill>
-                  <a:srgbClr val="2E3A80"/>
-                </a:solidFill>
-                <a:latin typeface="Montserrat"/>
-              </a:rPr>
-              <a:t>•  </a:t>
+                  <a:srgbClr val="E8801A"/>
+                </a:solidFill>
+                <a:latin typeface="Montserrat"/>
+              </a:rPr>
+              <a:t>▸  </a:t>
             </a:r>
             <a:r>
               <a:rPr sz="1600" b="0" i="0">
@@ -5866,14 +6109,14 @@
                 </a:solidFill>
                 <a:latin typeface="Montserrat"/>
               </a:rPr>
-              <a:t>Válvulas de corte: sin fuga interior</a:t>
-            </a:r>
-          </a:p>
-        </p:txBody>
-      </p:sp>
-      <p:sp>
-        <p:nvSpPr>
-          <p:cNvPr id="8" name="imgph" descr="IMGQ:gas pipe pressure test gauge"/>
+              <a:t>O uso exclusivo al aire libre</a:t>
+            </a:r>
+          </a:p>
+        </p:txBody>
+      </p:sp>
+      <p:sp>
+        <p:nvSpPr>
+          <p:cNvPr id="9" name="imgph" descr="IMGQ:kitchen ventilation grille wall"/>
           <p:cNvSpPr/>
           <p:nvPr/>
         </p:nvSpPr>
@@ -5919,7 +6162,7 @@
       </p:sp>
       <p:sp>
         <p:nvSpPr>
-          <p:cNvPr id="9" name="TextBox 8"/>
+          <p:cNvPr id="10" name="TextBox 9"/>
           <p:cNvSpPr txBox="1"/>
           <p:nvPr/>
         </p:nvSpPr>
@@ -5959,7 +6202,7 @@
                 </a:solidFill>
                 <a:latin typeface="Montserrat"/>
               </a:rPr>
-              <a:t>gas pipe pressure test gauge</a:t>
+              <a:t>kitchen ventilation grille wall</a:t>
             </a:r>
           </a:p>
         </p:txBody>
@@ -6056,7 +6299,7 @@
                 </a:solidFill>
                 <a:latin typeface="Montserrat"/>
               </a:rPr>
-              <a:t>013 / 015</a:t>
+              <a:t>013 / 016</a:t>
             </a:r>
           </a:p>
         </p:txBody>
@@ -6104,7 +6347,7 @@
         <p:spPr>
           <a:xfrm>
             <a:off x="822960" y="457200"/>
-            <a:ext cx="8229600" cy="365760"/>
+            <a:ext cx="10058400" cy="365760"/>
           </a:xfrm>
           <a:prstGeom prst="rect">
             <a:avLst/>
@@ -6118,13 +6361,13 @@
           <a:lstStyle/>
           <a:p>
             <a:r>
-              <a:rPr sz="1200" b="1" i="0">
-                <a:solidFill>
-                  <a:srgbClr val="64748B"/>
-                </a:solidFill>
-                <a:latin typeface="Montserrat"/>
-              </a:rPr>
-              <a:t>ANEXO 3 · 3.2</a:t>
+              <a:rPr sz="1300" b="1" i="0">
+                <a:solidFill>
+                  <a:srgbClr val="E8801A"/>
+                </a:solidFill>
+                <a:latin typeface="Montserrat"/>
+              </a:rPr>
+              <a:t>ANEXO 3 · 3.1</a:t>
             </a:r>
           </a:p>
         </p:txBody>
@@ -6152,26 +6395,70 @@
           <a:lstStyle/>
           <a:p>
             <a:r>
-              <a:rPr sz="2700" b="1" i="0">
+              <a:rPr sz="2800" b="1" i="0">
                 <a:solidFill>
                   <a:srgbClr val="1E2761"/>
                 </a:solidFill>
                 <a:latin typeface="Montserrat"/>
               </a:rPr>
-              <a:t>Pruebas de funcionamiento</a:t>
-            </a:r>
-          </a:p>
-        </p:txBody>
-      </p:sp>
-      <p:sp>
-        <p:nvSpPr>
-          <p:cNvPr id="7" name="TextBox 6"/>
+              <a:t>Prueba de estanquidad</a:t>
+            </a:r>
+          </a:p>
+        </p:txBody>
+      </p:sp>
+      <p:sp>
+        <p:nvSpPr>
+          <p:cNvPr id="7" name="Rounded Rectangle 6"/>
+          <p:cNvSpPr/>
+          <p:nvPr/>
+        </p:nvSpPr>
+        <p:spPr>
+          <a:xfrm>
+            <a:off x="868680" y="1627632"/>
+            <a:ext cx="2011680" cy="73152"/>
+          </a:xfrm>
+          <a:prstGeom prst="roundRect">
+            <a:avLst/>
+          </a:prstGeom>
+          <a:solidFill>
+            <a:srgbClr val="E8801A"/>
+          </a:solidFill>
+          <a:ln>
+            <a:noFill/>
+          </a:ln>
+          <a:effectLst/>
+        </p:spPr>
+        <p:style>
+          <a:lnRef idx="1">
+            <a:schemeClr val="accent1"/>
+          </a:lnRef>
+          <a:fillRef idx="3">
+            <a:schemeClr val="accent1"/>
+          </a:fillRef>
+          <a:effectRef idx="2">
+            <a:schemeClr val="accent1"/>
+          </a:effectRef>
+          <a:fontRef idx="minor">
+            <a:schemeClr val="lt1"/>
+          </a:fontRef>
+        </p:style>
+        <p:txBody>
+          <a:bodyPr rtlCol="0" anchor="ctr"/>
+          <a:lstStyle/>
+          <a:p>
+            <a:pPr algn="ctr"/>
+          </a:p>
+        </p:txBody>
+      </p:sp>
+      <p:sp>
+        <p:nvSpPr>
+          <p:cNvPr id="8" name="TextBox 7"/>
           <p:cNvSpPr txBox="1"/>
           <p:nvPr/>
         </p:nvSpPr>
         <p:spPr>
           <a:xfrm>
-            <a:off x="822960" y="1920240"/>
+            <a:off x="822960" y="1965960"/>
             <a:ext cx="4983480" cy="4206240"/>
           </a:xfrm>
           <a:prstGeom prst="rect">
@@ -6187,17 +6474,17 @@
           <a:p>
             <a:pPr>
               <a:spcAft>
-                <a:spcPts val="1000"/>
+                <a:spcPts val="1100"/>
               </a:spcAft>
             </a:pPr>
             <a:r>
               <a:rPr sz="1600" b="1" i="0">
                 <a:solidFill>
-                  <a:srgbClr val="2E3A80"/>
-                </a:solidFill>
-                <a:latin typeface="Montserrat"/>
-              </a:rPr>
-              <a:t>•  </a:t>
+                  <a:srgbClr val="E8801A"/>
+                </a:solidFill>
+                <a:latin typeface="Montserrat"/>
+              </a:rPr>
+              <a:t>▸  </a:t>
             </a:r>
             <a:r>
               <a:rPr sz="1600" b="0" i="0">
@@ -6206,23 +6493,23 @@
                 </a:solidFill>
                 <a:latin typeface="Montserrat"/>
               </a:rPr>
-              <a:t>Encendido: sin golpes de presión</a:t>
+              <a:t>Entre la llave del aparato y el quemador</a:t>
             </a:r>
           </a:p>
           <a:p>
             <a:pPr>
               <a:spcAft>
-                <a:spcPts val="1000"/>
+                <a:spcPts val="1100"/>
               </a:spcAft>
             </a:pPr>
             <a:r>
               <a:rPr sz="1600" b="1" i="0">
                 <a:solidFill>
-                  <a:srgbClr val="2E3A80"/>
-                </a:solidFill>
-                <a:latin typeface="Montserrat"/>
-              </a:rPr>
-              <a:t>•  </a:t>
+                  <a:srgbClr val="E8801A"/>
+                </a:solidFill>
+                <a:latin typeface="Montserrat"/>
+              </a:rPr>
+              <a:t>▸  </a:t>
             </a:r>
             <a:r>
               <a:rPr sz="1600" b="0" i="0">
@@ -6231,23 +6518,23 @@
                 </a:solidFill>
                 <a:latin typeface="Montserrat"/>
               </a:rPr>
-              <a:t>Barrido de cámara y tiempos de seguridad</a:t>
+              <a:t>A presión máxima de utilización</a:t>
             </a:r>
           </a:p>
           <a:p>
             <a:pPr>
               <a:spcAft>
-                <a:spcPts val="1000"/>
+                <a:spcPts val="1100"/>
               </a:spcAft>
             </a:pPr>
             <a:r>
               <a:rPr sz="1600" b="1" i="0">
                 <a:solidFill>
-                  <a:srgbClr val="2E3A80"/>
-                </a:solidFill>
-                <a:latin typeface="Montserrat"/>
-              </a:rPr>
-              <a:t>•  </a:t>
+                  <a:srgbClr val="E8801A"/>
+                </a:solidFill>
+                <a:latin typeface="Montserrat"/>
+              </a:rPr>
+              <a:t>▸  </a:t>
             </a:r>
             <a:r>
               <a:rPr sz="1600" b="0" i="0">
@@ -6256,39 +6543,14 @@
                 </a:solidFill>
                 <a:latin typeface="Montserrat"/>
               </a:rPr>
-              <a:t>Marcha: control de llama, presión y tiro</a:t>
-            </a:r>
-          </a:p>
-          <a:p>
-            <a:pPr>
-              <a:spcAft>
-                <a:spcPts val="1000"/>
-              </a:spcAft>
-            </a:pPr>
-            <a:r>
-              <a:rPr sz="1600" b="1" i="0">
-                <a:solidFill>
-                  <a:srgbClr val="2E3A80"/>
-                </a:solidFill>
-                <a:latin typeface="Montserrat"/>
-              </a:rPr>
-              <a:t>•  </a:t>
-            </a:r>
-            <a:r>
-              <a:rPr sz="1600" b="0" i="0">
-                <a:solidFill>
-                  <a:srgbClr val="1B2330"/>
-                </a:solidFill>
-                <a:latin typeface="Montserrat"/>
-              </a:rPr>
-              <a:t>Consumo y análisis de combustión</a:t>
-            </a:r>
-          </a:p>
-        </p:txBody>
-      </p:sp>
-      <p:sp>
-        <p:nvSpPr>
-          <p:cNvPr id="8" name="imgph" descr="IMGQ:boiler flame ignition sequence"/>
+              <a:t>Válvulas de corte: sin fuga interior</a:t>
+            </a:r>
+          </a:p>
+        </p:txBody>
+      </p:sp>
+      <p:sp>
+        <p:nvSpPr>
+          <p:cNvPr id="9" name="imgph" descr="IMGQ:gas pipe pressure test gauge"/>
           <p:cNvSpPr/>
           <p:nvPr/>
         </p:nvSpPr>
@@ -6334,7 +6596,7 @@
       </p:sp>
       <p:sp>
         <p:nvSpPr>
-          <p:cNvPr id="9" name="TextBox 8"/>
+          <p:cNvPr id="10" name="TextBox 9"/>
           <p:cNvSpPr txBox="1"/>
           <p:nvPr/>
         </p:nvSpPr>
@@ -6374,7 +6636,7 @@
                 </a:solidFill>
                 <a:latin typeface="Montserrat"/>
               </a:rPr>
-              <a:t>boiler flame ignition sequence</a:t>
+              <a:t>gas pipe pressure test gauge</a:t>
             </a:r>
           </a:p>
         </p:txBody>
@@ -6471,7 +6733,7 @@
                 </a:solidFill>
                 <a:latin typeface="Montserrat"/>
               </a:rPr>
-              <a:t>014 / 015</a:t>
+              <a:t>014 / 016</a:t>
             </a:r>
           </a:p>
         </p:txBody>
@@ -6519,7 +6781,7 @@
         <p:spPr>
           <a:xfrm>
             <a:off x="822960" y="457200"/>
-            <a:ext cx="8229600" cy="365760"/>
+            <a:ext cx="10058400" cy="365760"/>
           </a:xfrm>
           <a:prstGeom prst="rect">
             <a:avLst/>
@@ -6533,13 +6795,13 @@
           <a:lstStyle/>
           <a:p>
             <a:r>
-              <a:rPr sz="1200" b="1" i="0">
-                <a:solidFill>
-                  <a:srgbClr val="64748B"/>
-                </a:solidFill>
-                <a:latin typeface="Montserrat"/>
-              </a:rPr>
-              <a:t>ANEXO 3 · CIERRE DE PRUEBAS</a:t>
+              <a:rPr sz="1300" b="1" i="0">
+                <a:solidFill>
+                  <a:srgbClr val="E8801A"/>
+                </a:solidFill>
+                <a:latin typeface="Montserrat"/>
+              </a:rPr>
+              <a:t>ANEXO 3 · 3.2</a:t>
             </a:r>
           </a:p>
         </p:txBody>
@@ -6567,26 +6829,70 @@
           <a:lstStyle/>
           <a:p>
             <a:r>
-              <a:rPr sz="2700" b="1" i="0">
+              <a:rPr sz="2800" b="1" i="0">
                 <a:solidFill>
                   <a:srgbClr val="1E2761"/>
                 </a:solidFill>
                 <a:latin typeface="Montserrat"/>
               </a:rPr>
-              <a:t>Tiempos de seguridad y repaso</a:t>
-            </a:r>
-          </a:p>
-        </p:txBody>
-      </p:sp>
-      <p:sp>
-        <p:nvSpPr>
-          <p:cNvPr id="7" name="TextBox 6"/>
+              <a:t>Pruebas de funcionamiento</a:t>
+            </a:r>
+          </a:p>
+        </p:txBody>
+      </p:sp>
+      <p:sp>
+        <p:nvSpPr>
+          <p:cNvPr id="7" name="Rounded Rectangle 6"/>
+          <p:cNvSpPr/>
+          <p:nvPr/>
+        </p:nvSpPr>
+        <p:spPr>
+          <a:xfrm>
+            <a:off x="868680" y="1627632"/>
+            <a:ext cx="2011680" cy="73152"/>
+          </a:xfrm>
+          <a:prstGeom prst="roundRect">
+            <a:avLst/>
+          </a:prstGeom>
+          <a:solidFill>
+            <a:srgbClr val="E8801A"/>
+          </a:solidFill>
+          <a:ln>
+            <a:noFill/>
+          </a:ln>
+          <a:effectLst/>
+        </p:spPr>
+        <p:style>
+          <a:lnRef idx="1">
+            <a:schemeClr val="accent1"/>
+          </a:lnRef>
+          <a:fillRef idx="3">
+            <a:schemeClr val="accent1"/>
+          </a:fillRef>
+          <a:effectRef idx="2">
+            <a:schemeClr val="accent1"/>
+          </a:effectRef>
+          <a:fontRef idx="minor">
+            <a:schemeClr val="lt1"/>
+          </a:fontRef>
+        </p:style>
+        <p:txBody>
+          <a:bodyPr rtlCol="0" anchor="ctr"/>
+          <a:lstStyle/>
+          <a:p>
+            <a:pPr algn="ctr"/>
+          </a:p>
+        </p:txBody>
+      </p:sp>
+      <p:sp>
+        <p:nvSpPr>
+          <p:cNvPr id="8" name="TextBox 7"/>
           <p:cNvSpPr txBox="1"/>
           <p:nvPr/>
         </p:nvSpPr>
         <p:spPr>
           <a:xfrm>
-            <a:off x="822960" y="1920240"/>
+            <a:off x="822960" y="1965960"/>
             <a:ext cx="4983480" cy="4206240"/>
           </a:xfrm>
           <a:prstGeom prst="rect">
@@ -6602,17 +6908,17 @@
           <a:p>
             <a:pPr>
               <a:spcAft>
-                <a:spcPts val="1000"/>
+                <a:spcPts val="1100"/>
               </a:spcAft>
             </a:pPr>
             <a:r>
               <a:rPr sz="1600" b="1" i="0">
                 <a:solidFill>
-                  <a:srgbClr val="2E3A80"/>
-                </a:solidFill>
-                <a:latin typeface="Montserrat"/>
-              </a:rPr>
-              <a:t>•  </a:t>
+                  <a:srgbClr val="E8801A"/>
+                </a:solidFill>
+                <a:latin typeface="Montserrat"/>
+              </a:rPr>
+              <a:t>▸  </a:t>
             </a:r>
             <a:r>
               <a:rPr sz="1600" b="0" i="0">
@@ -6621,23 +6927,23 @@
                 </a:solidFill>
                 <a:latin typeface="Montserrat"/>
               </a:rPr>
-              <a:t>Válvula automática corta a tiempo</a:t>
+              <a:t>Encendido: sin golpes de presión</a:t>
             </a:r>
           </a:p>
           <a:p>
             <a:pPr>
               <a:spcAft>
-                <a:spcPts val="1000"/>
+                <a:spcPts val="1100"/>
               </a:spcAft>
             </a:pPr>
             <a:r>
               <a:rPr sz="1600" b="1" i="0">
                 <a:solidFill>
-                  <a:srgbClr val="2E3A80"/>
-                </a:solidFill>
-                <a:latin typeface="Montserrat"/>
-              </a:rPr>
-              <a:t>•  </a:t>
+                  <a:srgbClr val="E8801A"/>
+                </a:solidFill>
+                <a:latin typeface="Montserrat"/>
+              </a:rPr>
+              <a:t>▸  </a:t>
             </a:r>
             <a:r>
               <a:rPr sz="1600" b="0" i="0">
@@ -6646,23 +6952,23 @@
                 </a:solidFill>
                 <a:latin typeface="Montserrat"/>
               </a:rPr>
-              <a:t>Ante fallo: no prende, se apaga, falla el tiro</a:t>
+              <a:t>Barrido de cámara y tiempos de seguridad</a:t>
             </a:r>
           </a:p>
           <a:p>
             <a:pPr>
               <a:spcAft>
-                <a:spcPts val="1000"/>
+                <a:spcPts val="1100"/>
               </a:spcAft>
             </a:pPr>
             <a:r>
               <a:rPr sz="1600" b="1" i="0">
                 <a:solidFill>
-                  <a:srgbClr val="2E3A80"/>
-                </a:solidFill>
-                <a:latin typeface="Montserrat"/>
-              </a:rPr>
-              <a:t>•  </a:t>
+                  <a:srgbClr val="E8801A"/>
+                </a:solidFill>
+                <a:latin typeface="Montserrat"/>
+              </a:rPr>
+              <a:t>▸  </a:t>
             </a:r>
             <a:r>
               <a:rPr sz="1600" b="0" i="0">
@@ -6671,23 +6977,23 @@
                 </a:solidFill>
                 <a:latin typeface="Montserrat"/>
               </a:rPr>
-              <a:t>Control visual: sin deformaciones</a:t>
+              <a:t>Marcha: control de llama, presión y tiro</a:t>
             </a:r>
           </a:p>
           <a:p>
             <a:pPr>
               <a:spcAft>
-                <a:spcPts val="1000"/>
+                <a:spcPts val="1100"/>
               </a:spcAft>
             </a:pPr>
             <a:r>
               <a:rPr sz="1600" b="1" i="0">
                 <a:solidFill>
-                  <a:srgbClr val="2E3A80"/>
-                </a:solidFill>
-                <a:latin typeface="Montserrat"/>
-              </a:rPr>
-              <a:t>•  </a:t>
+                  <a:srgbClr val="E8801A"/>
+                </a:solidFill>
+                <a:latin typeface="Montserrat"/>
+              </a:rPr>
+              <a:t>▸  </a:t>
             </a:r>
             <a:r>
               <a:rPr sz="1600" b="0" i="0">
@@ -6696,14 +7002,14 @@
                 </a:solidFill>
                 <a:latin typeface="Montserrat"/>
               </a:rPr>
-              <a:t>Marcados legibles</a:t>
-            </a:r>
-          </a:p>
-        </p:txBody>
-      </p:sp>
-      <p:sp>
-        <p:nvSpPr>
-          <p:cNvPr id="8" name="imgph" descr="IMGQ:automatic gas shutoff valve"/>
+              <a:t>Consumo y análisis de combustión</a:t>
+            </a:r>
+          </a:p>
+        </p:txBody>
+      </p:sp>
+      <p:sp>
+        <p:nvSpPr>
+          <p:cNvPr id="9" name="imgph" descr="IMGQ:boiler flame ignition sequence"/>
           <p:cNvSpPr/>
           <p:nvPr/>
         </p:nvSpPr>
@@ -6749,7 +7055,7 @@
       </p:sp>
       <p:sp>
         <p:nvSpPr>
-          <p:cNvPr id="9" name="TextBox 8"/>
+          <p:cNvPr id="10" name="TextBox 9"/>
           <p:cNvSpPr txBox="1"/>
           <p:nvPr/>
         </p:nvSpPr>
@@ -6789,7 +7095,7 @@
                 </a:solidFill>
                 <a:latin typeface="Montserrat"/>
               </a:rPr>
-              <a:t>automatic gas shutoff valve</a:t>
+              <a:t>boiler flame ignition sequence</a:t>
             </a:r>
           </a:p>
         </p:txBody>
@@ -6827,6 +7133,465 @@
             <a:avLst/>
           </a:prstGeom>
           <a:solidFill>
+            <a:srgbClr val="FFFFFF"/>
+          </a:solidFill>
+          <a:ln>
+            <a:noFill/>
+          </a:ln>
+          <a:effectLst/>
+        </p:spPr>
+        <p:style>
+          <a:lnRef idx="1">
+            <a:schemeClr val="accent1"/>
+          </a:lnRef>
+          <a:fillRef idx="3">
+            <a:schemeClr val="accent1"/>
+          </a:fillRef>
+          <a:effectRef idx="2">
+            <a:schemeClr val="accent1"/>
+          </a:effectRef>
+          <a:fontRef idx="minor">
+            <a:schemeClr val="lt1"/>
+          </a:fontRef>
+        </p:style>
+        <p:txBody>
+          <a:bodyPr rtlCol="0" anchor="ctr"/>
+          <a:lstStyle/>
+          <a:p>
+            <a:pPr algn="ctr"/>
+          </a:p>
+        </p:txBody>
+      </p:sp>
+      <p:sp>
+        <p:nvSpPr>
+          <p:cNvPr id="3" name="TextBox 2"/>
+          <p:cNvSpPr txBox="1"/>
+          <p:nvPr/>
+        </p:nvSpPr>
+        <p:spPr>
+          <a:xfrm>
+            <a:off x="10607040" y="320040"/>
+            <a:ext cx="1371600" cy="365760"/>
+          </a:xfrm>
+          <a:prstGeom prst="rect">
+            <a:avLst/>
+          </a:prstGeom>
+          <a:noFill/>
+        </p:spPr>
+        <p:txBody>
+          <a:bodyPr wrap="square">
+            <a:spAutoFit/>
+          </a:bodyPr>
+          <a:lstStyle/>
+          <a:p>
+            <a:pPr algn="r"/>
+            <a:r>
+              <a:rPr sz="1000" b="1" i="0">
+                <a:solidFill>
+                  <a:srgbClr val="64748B"/>
+                </a:solidFill>
+                <a:latin typeface="Montserrat"/>
+              </a:rPr>
+              <a:t>015 / 016</a:t>
+            </a:r>
+          </a:p>
+        </p:txBody>
+      </p:sp>
+      <p:sp>
+        <p:nvSpPr>
+          <p:cNvPr id="4" name="TextBox 3"/>
+          <p:cNvSpPr txBox="1"/>
+          <p:nvPr/>
+        </p:nvSpPr>
+        <p:spPr>
+          <a:xfrm>
+            <a:off x="457200" y="6419088"/>
+            <a:ext cx="8229600" cy="365760"/>
+          </a:xfrm>
+          <a:prstGeom prst="rect">
+            <a:avLst/>
+          </a:prstGeom>
+          <a:noFill/>
+        </p:spPr>
+        <p:txBody>
+          <a:bodyPr wrap="square">
+            <a:spAutoFit/>
+          </a:bodyPr>
+          <a:lstStyle/>
+          <a:p>
+            <a:r>
+              <a:rPr sz="900" b="0" i="0">
+                <a:solidFill>
+                  <a:srgbClr val="64748B"/>
+                </a:solidFill>
+                <a:latin typeface="Montserrat"/>
+              </a:rPr>
+              <a:t>Curso Gas B · Tema 05 · Aparatos de gas</a:t>
+            </a:r>
+          </a:p>
+        </p:txBody>
+      </p:sp>
+      <p:sp>
+        <p:nvSpPr>
+          <p:cNvPr id="5" name="TextBox 4"/>
+          <p:cNvSpPr txBox="1"/>
+          <p:nvPr/>
+        </p:nvSpPr>
+        <p:spPr>
+          <a:xfrm>
+            <a:off x="822960" y="457200"/>
+            <a:ext cx="10058400" cy="365760"/>
+          </a:xfrm>
+          <a:prstGeom prst="rect">
+            <a:avLst/>
+          </a:prstGeom>
+          <a:noFill/>
+        </p:spPr>
+        <p:txBody>
+          <a:bodyPr wrap="square">
+            <a:spAutoFit/>
+          </a:bodyPr>
+          <a:lstStyle/>
+          <a:p>
+            <a:r>
+              <a:rPr sz="1300" b="1" i="0">
+                <a:solidFill>
+                  <a:srgbClr val="E8801A"/>
+                </a:solidFill>
+                <a:latin typeface="Montserrat"/>
+              </a:rPr>
+              <a:t>ANEXO 3 · CIERRE DE PRUEBAS</a:t>
+            </a:r>
+          </a:p>
+        </p:txBody>
+      </p:sp>
+      <p:sp>
+        <p:nvSpPr>
+          <p:cNvPr id="6" name="TextBox 5"/>
+          <p:cNvSpPr txBox="1"/>
+          <p:nvPr/>
+        </p:nvSpPr>
+        <p:spPr>
+          <a:xfrm>
+            <a:off x="822960" y="868680"/>
+            <a:ext cx="10515600" cy="914400"/>
+          </a:xfrm>
+          <a:prstGeom prst="rect">
+            <a:avLst/>
+          </a:prstGeom>
+          <a:noFill/>
+        </p:spPr>
+        <p:txBody>
+          <a:bodyPr wrap="square">
+            <a:spAutoFit/>
+          </a:bodyPr>
+          <a:lstStyle/>
+          <a:p>
+            <a:r>
+              <a:rPr sz="2800" b="1" i="0">
+                <a:solidFill>
+                  <a:srgbClr val="1E2761"/>
+                </a:solidFill>
+                <a:latin typeface="Montserrat"/>
+              </a:rPr>
+              <a:t>Tiempos de seguridad y repaso</a:t>
+            </a:r>
+          </a:p>
+        </p:txBody>
+      </p:sp>
+      <p:sp>
+        <p:nvSpPr>
+          <p:cNvPr id="7" name="Rounded Rectangle 6"/>
+          <p:cNvSpPr/>
+          <p:nvPr/>
+        </p:nvSpPr>
+        <p:spPr>
+          <a:xfrm>
+            <a:off x="868680" y="1627632"/>
+            <a:ext cx="2011680" cy="73152"/>
+          </a:xfrm>
+          <a:prstGeom prst="roundRect">
+            <a:avLst/>
+          </a:prstGeom>
+          <a:solidFill>
+            <a:srgbClr val="E8801A"/>
+          </a:solidFill>
+          <a:ln>
+            <a:noFill/>
+          </a:ln>
+          <a:effectLst/>
+        </p:spPr>
+        <p:style>
+          <a:lnRef idx="1">
+            <a:schemeClr val="accent1"/>
+          </a:lnRef>
+          <a:fillRef idx="3">
+            <a:schemeClr val="accent1"/>
+          </a:fillRef>
+          <a:effectRef idx="2">
+            <a:schemeClr val="accent1"/>
+          </a:effectRef>
+          <a:fontRef idx="minor">
+            <a:schemeClr val="lt1"/>
+          </a:fontRef>
+        </p:style>
+        <p:txBody>
+          <a:bodyPr rtlCol="0" anchor="ctr"/>
+          <a:lstStyle/>
+          <a:p>
+            <a:pPr algn="ctr"/>
+          </a:p>
+        </p:txBody>
+      </p:sp>
+      <p:sp>
+        <p:nvSpPr>
+          <p:cNvPr id="8" name="TextBox 7"/>
+          <p:cNvSpPr txBox="1"/>
+          <p:nvPr/>
+        </p:nvSpPr>
+        <p:spPr>
+          <a:xfrm>
+            <a:off x="822960" y="1965960"/>
+            <a:ext cx="4983480" cy="4206240"/>
+          </a:xfrm>
+          <a:prstGeom prst="rect">
+            <a:avLst/>
+          </a:prstGeom>
+          <a:noFill/>
+        </p:spPr>
+        <p:txBody>
+          <a:bodyPr wrap="square">
+            <a:spAutoFit/>
+          </a:bodyPr>
+          <a:lstStyle/>
+          <a:p>
+            <a:pPr>
+              <a:spcAft>
+                <a:spcPts val="1100"/>
+              </a:spcAft>
+            </a:pPr>
+            <a:r>
+              <a:rPr sz="1600" b="1" i="0">
+                <a:solidFill>
+                  <a:srgbClr val="E8801A"/>
+                </a:solidFill>
+                <a:latin typeface="Montserrat"/>
+              </a:rPr>
+              <a:t>▸  </a:t>
+            </a:r>
+            <a:r>
+              <a:rPr sz="1600" b="0" i="0">
+                <a:solidFill>
+                  <a:srgbClr val="1B2330"/>
+                </a:solidFill>
+                <a:latin typeface="Montserrat"/>
+              </a:rPr>
+              <a:t>Válvula automática corta a tiempo</a:t>
+            </a:r>
+          </a:p>
+          <a:p>
+            <a:pPr>
+              <a:spcAft>
+                <a:spcPts val="1100"/>
+              </a:spcAft>
+            </a:pPr>
+            <a:r>
+              <a:rPr sz="1600" b="1" i="0">
+                <a:solidFill>
+                  <a:srgbClr val="E8801A"/>
+                </a:solidFill>
+                <a:latin typeface="Montserrat"/>
+              </a:rPr>
+              <a:t>▸  </a:t>
+            </a:r>
+            <a:r>
+              <a:rPr sz="1600" b="0" i="0">
+                <a:solidFill>
+                  <a:srgbClr val="1B2330"/>
+                </a:solidFill>
+                <a:latin typeface="Montserrat"/>
+              </a:rPr>
+              <a:t>Ante fallo: no prende, se apaga, falla el tiro</a:t>
+            </a:r>
+          </a:p>
+          <a:p>
+            <a:pPr>
+              <a:spcAft>
+                <a:spcPts val="1100"/>
+              </a:spcAft>
+            </a:pPr>
+            <a:r>
+              <a:rPr sz="1600" b="1" i="0">
+                <a:solidFill>
+                  <a:srgbClr val="E8801A"/>
+                </a:solidFill>
+                <a:latin typeface="Montserrat"/>
+              </a:rPr>
+              <a:t>▸  </a:t>
+            </a:r>
+            <a:r>
+              <a:rPr sz="1600" b="0" i="0">
+                <a:solidFill>
+                  <a:srgbClr val="1B2330"/>
+                </a:solidFill>
+                <a:latin typeface="Montserrat"/>
+              </a:rPr>
+              <a:t>Control visual: sin deformaciones</a:t>
+            </a:r>
+          </a:p>
+          <a:p>
+            <a:pPr>
+              <a:spcAft>
+                <a:spcPts val="1100"/>
+              </a:spcAft>
+            </a:pPr>
+            <a:r>
+              <a:rPr sz="1600" b="1" i="0">
+                <a:solidFill>
+                  <a:srgbClr val="E8801A"/>
+                </a:solidFill>
+                <a:latin typeface="Montserrat"/>
+              </a:rPr>
+              <a:t>▸  </a:t>
+            </a:r>
+            <a:r>
+              <a:rPr sz="1600" b="0" i="0">
+                <a:solidFill>
+                  <a:srgbClr val="1B2330"/>
+                </a:solidFill>
+                <a:latin typeface="Montserrat"/>
+              </a:rPr>
+              <a:t>Marcados legibles</a:t>
+            </a:r>
+          </a:p>
+        </p:txBody>
+      </p:sp>
+      <p:sp>
+        <p:nvSpPr>
+          <p:cNvPr id="9" name="imgph" descr="IMGQ:automatic gas shutoff valve"/>
+          <p:cNvSpPr/>
+          <p:nvPr/>
+        </p:nvSpPr>
+        <p:spPr>
+          <a:xfrm>
+            <a:off x="5806440" y="1051560"/>
+            <a:ext cx="5298947" cy="4629150"/>
+          </a:xfrm>
+          <a:prstGeom prst="roundRect">
+            <a:avLst/>
+          </a:prstGeom>
+          <a:solidFill>
+            <a:srgbClr val="F3F6FB"/>
+          </a:solidFill>
+          <a:ln w="12700">
+            <a:solidFill>
+              <a:srgbClr val="C7D2E6"/>
+            </a:solidFill>
+          </a:ln>
+          <a:effectLst/>
+        </p:spPr>
+        <p:style>
+          <a:lnRef idx="1">
+            <a:schemeClr val="accent1"/>
+          </a:lnRef>
+          <a:fillRef idx="3">
+            <a:schemeClr val="accent1"/>
+          </a:fillRef>
+          <a:effectRef idx="2">
+            <a:schemeClr val="accent1"/>
+          </a:effectRef>
+          <a:fontRef idx="minor">
+            <a:schemeClr val="lt1"/>
+          </a:fontRef>
+        </p:style>
+        <p:txBody>
+          <a:bodyPr rtlCol="0" anchor="ctr"/>
+          <a:lstStyle/>
+          <a:p>
+            <a:pPr algn="ctr"/>
+          </a:p>
+        </p:txBody>
+      </p:sp>
+      <p:sp>
+        <p:nvSpPr>
+          <p:cNvPr id="10" name="TextBox 9"/>
+          <p:cNvSpPr txBox="1"/>
+          <p:nvPr/>
+        </p:nvSpPr>
+        <p:spPr>
+          <a:xfrm>
+            <a:off x="6080760" y="2726055"/>
+            <a:ext cx="4750307" cy="1280160"/>
+          </a:xfrm>
+          <a:prstGeom prst="rect">
+            <a:avLst/>
+          </a:prstGeom>
+          <a:noFill/>
+        </p:spPr>
+        <p:txBody>
+          <a:bodyPr wrap="square">
+            <a:spAutoFit/>
+          </a:bodyPr>
+          <a:lstStyle/>
+          <a:p>
+            <a:pPr algn="ctr"/>
+            <a:r>
+              <a:rPr sz="1400" b="1" i="0">
+                <a:solidFill>
+                  <a:srgbClr val="64748B"/>
+                </a:solidFill>
+                <a:latin typeface="Montserrat"/>
+              </a:rPr>
+              <a:t>IMAGEN REALISTA</a:t>
+            </a:r>
+          </a:p>
+          <a:p>
+            <a:pPr algn="ctr"/>
+            <a:r>
+              <a:rPr sz="1100" b="0" i="1">
+                <a:solidFill>
+                  <a:srgbClr val="64748B"/>
+                </a:solidFill>
+                <a:latin typeface="Montserrat"/>
+              </a:rPr>
+              <a:t>automatic gas shutoff valve</a:t>
+            </a:r>
+          </a:p>
+        </p:txBody>
+      </p:sp>
+    </p:spTree>
+  </p:cSld>
+  <p:clrMapOvr>
+    <a:masterClrMapping/>
+  </p:clrMapOvr>
+</p:sld>
+</file>
+
+<file path=ppt/slides/slide16.xml><?xml version="1.0" encoding="utf-8"?>
+<p:sld xmlns:a="http://schemas.openxmlformats.org/drawingml/2006/main" xmlns:p="http://schemas.openxmlformats.org/presentationml/2006/main" xmlns:r="http://schemas.openxmlformats.org/officeDocument/2006/relationships">
+  <p:cSld>
+    <p:spTree>
+      <p:nvGrpSpPr>
+        <p:cNvPr id="1" name=""/>
+        <p:cNvGrpSpPr/>
+        <p:nvPr/>
+      </p:nvGrpSpPr>
+      <p:grpSpPr/>
+      <p:sp>
+        <p:nvSpPr>
+          <p:cNvPr id="2" name="Rectangle 1"/>
+          <p:cNvSpPr/>
+          <p:nvPr/>
+        </p:nvSpPr>
+        <p:spPr>
+          <a:xfrm>
+            <a:off x="0" y="0"/>
+            <a:ext cx="12191695" cy="6858000"/>
+          </a:xfrm>
+          <a:prstGeom prst="rect">
+            <a:avLst/>
+          </a:prstGeom>
+          <a:solidFill>
             <a:srgbClr val="1E2761"/>
           </a:solidFill>
           <a:ln>
@@ -6881,7 +7646,7 @@
             <a:r>
               <a:rPr sz="1400" b="1" i="0">
                 <a:solidFill>
-                  <a:srgbClr val="CADCFC"/>
+                  <a:srgbClr val="F4A24C"/>
                 </a:solidFill>
                 <a:latin typeface="Montserrat"/>
               </a:rPr>
@@ -6892,13 +7657,57 @@
       </p:sp>
       <p:sp>
         <p:nvSpPr>
-          <p:cNvPr id="4" name="TextBox 3"/>
+          <p:cNvPr id="4" name="Rounded Rectangle 3"/>
+          <p:cNvSpPr/>
+          <p:nvPr/>
+        </p:nvSpPr>
+        <p:spPr>
+          <a:xfrm>
+            <a:off x="868680" y="1051560"/>
+            <a:ext cx="1463040" cy="82296"/>
+          </a:xfrm>
+          <a:prstGeom prst="roundRect">
+            <a:avLst/>
+          </a:prstGeom>
+          <a:solidFill>
+            <a:srgbClr val="E8801A"/>
+          </a:solidFill>
+          <a:ln>
+            <a:noFill/>
+          </a:ln>
+          <a:effectLst/>
+        </p:spPr>
+        <p:style>
+          <a:lnRef idx="1">
+            <a:schemeClr val="accent1"/>
+          </a:lnRef>
+          <a:fillRef idx="3">
+            <a:schemeClr val="accent1"/>
+          </a:fillRef>
+          <a:effectRef idx="2">
+            <a:schemeClr val="accent1"/>
+          </a:effectRef>
+          <a:fontRef idx="minor">
+            <a:schemeClr val="lt1"/>
+          </a:fontRef>
+        </p:style>
+        <p:txBody>
+          <a:bodyPr rtlCol="0" anchor="ctr"/>
+          <a:lstStyle/>
+          <a:p>
+            <a:pPr algn="ctr"/>
+          </a:p>
+        </p:txBody>
+      </p:sp>
+      <p:sp>
+        <p:nvSpPr>
+          <p:cNvPr id="5" name="TextBox 4"/>
           <p:cNvSpPr txBox="1"/>
           <p:nvPr/>
         </p:nvSpPr>
         <p:spPr>
           <a:xfrm>
-            <a:off x="822960" y="1143000"/>
+            <a:off x="822960" y="1234440"/>
             <a:ext cx="10515600" cy="1097280"/>
           </a:xfrm>
           <a:prstGeom prst="rect">
@@ -6926,14 +7735,14 @@
       </p:sp>
       <p:sp>
         <p:nvSpPr>
-          <p:cNvPr id="5" name="TextBox 4"/>
+          <p:cNvPr id="6" name="TextBox 5"/>
           <p:cNvSpPr txBox="1"/>
           <p:nvPr/>
         </p:nvSpPr>
         <p:spPr>
           <a:xfrm>
-            <a:off x="822960" y="2514600"/>
-            <a:ext cx="10515600" cy="2834640"/>
+            <a:off x="822960" y="2606040"/>
+            <a:ext cx="10515600" cy="2743200"/>
           </a:xfrm>
           <a:prstGeom prst="rect">
             <a:avLst/>
@@ -6954,7 +7763,7 @@
             <a:r>
               <a:rPr sz="2000" b="1" i="0">
                 <a:solidFill>
-                  <a:srgbClr val="CADCFC"/>
+                  <a:srgbClr val="F4A24C"/>
                 </a:solidFill>
                 <a:latin typeface="Montserrat"/>
               </a:rPr>
@@ -6979,7 +7788,7 @@
             <a:r>
               <a:rPr sz="2000" b="1" i="0">
                 <a:solidFill>
-                  <a:srgbClr val="CADCFC"/>
+                  <a:srgbClr val="F4A24C"/>
                 </a:solidFill>
                 <a:latin typeface="Montserrat"/>
               </a:rPr>
@@ -7004,7 +7813,7 @@
             <a:r>
               <a:rPr sz="2000" b="1" i="0">
                 <a:solidFill>
-                  <a:srgbClr val="CADCFC"/>
+                  <a:srgbClr val="F4A24C"/>
                 </a:solidFill>
                 <a:latin typeface="Montserrat"/>
               </a:rPr>
@@ -7029,7 +7838,7 @@
             <a:r>
               <a:rPr sz="2000" b="1" i="0">
                 <a:solidFill>
-                  <a:srgbClr val="CADCFC"/>
+                  <a:srgbClr val="F4A24C"/>
                 </a:solidFill>
                 <a:latin typeface="Montserrat"/>
               </a:rPr>
@@ -7049,20 +7858,20 @@
       </p:sp>
       <p:sp>
         <p:nvSpPr>
-          <p:cNvPr id="6" name="Rounded Rectangle 5"/>
+          <p:cNvPr id="7" name="Rounded Rectangle 6"/>
           <p:cNvSpPr/>
           <p:nvPr/>
         </p:nvSpPr>
         <p:spPr>
           <a:xfrm>
             <a:off x="822960" y="5532120"/>
-            <a:ext cx="10515600" cy="777240"/>
+            <a:ext cx="10515600" cy="822960"/>
           </a:xfrm>
           <a:prstGeom prst="roundRect">
             <a:avLst/>
           </a:prstGeom>
           <a:solidFill>
-            <a:srgbClr val="2E3A80"/>
+            <a:srgbClr val="E8801A"/>
           </a:solidFill>
           <a:ln>
             <a:noFill/>
@@ -7093,13 +7902,13 @@
       </p:sp>
       <p:sp>
         <p:nvSpPr>
-          <p:cNvPr id="7" name="TextBox 6"/>
+          <p:cNvPr id="8" name="TextBox 7"/>
           <p:cNvSpPr txBox="1"/>
           <p:nvPr/>
         </p:nvSpPr>
         <p:spPr>
           <a:xfrm>
-            <a:off x="1051560" y="5605272"/>
+            <a:off x="1051560" y="5623560"/>
             <a:ext cx="10058400" cy="640080"/>
           </a:xfrm>
           <a:prstGeom prst="rect">
@@ -7116,7 +7925,7 @@
             <a:r>
               <a:rPr sz="1500" b="1" i="1">
                 <a:solidFill>
-                  <a:srgbClr val="CADCFC"/>
+                  <a:srgbClr val="1E2761"/>
                 </a:solidFill>
                 <a:latin typeface="Montserrat"/>
               </a:rPr>
@@ -7217,7 +8026,7 @@
                 </a:solidFill>
                 <a:latin typeface="Montserrat"/>
               </a:rPr>
-              <a:t>002 / 015</a:t>
+              <a:t>002 / 016</a:t>
             </a:r>
           </a:p>
         </p:txBody>
@@ -7281,7 +8090,7 @@
             <a:r>
               <a:rPr sz="2700" b="1" i="0">
                 <a:solidFill>
-                  <a:srgbClr val="1E2761"/>
+                  <a:srgbClr val="E8801A"/>
                 </a:solidFill>
                 <a:latin typeface="Montserrat"/>
               </a:rPr>
@@ -7293,6 +8102,50 @@
       <p:sp>
         <p:nvSpPr>
           <p:cNvPr id="6" name="Rounded Rectangle 5"/>
+          <p:cNvSpPr/>
+          <p:nvPr/>
+        </p:nvSpPr>
+        <p:spPr>
+          <a:xfrm>
+            <a:off x="868680" y="1234440"/>
+            <a:ext cx="1463040" cy="73152"/>
+          </a:xfrm>
+          <a:prstGeom prst="roundRect">
+            <a:avLst/>
+          </a:prstGeom>
+          <a:solidFill>
+            <a:srgbClr val="1E2761"/>
+          </a:solidFill>
+          <a:ln>
+            <a:noFill/>
+          </a:ln>
+          <a:effectLst/>
+        </p:spPr>
+        <p:style>
+          <a:lnRef idx="1">
+            <a:schemeClr val="accent1"/>
+          </a:lnRef>
+          <a:fillRef idx="3">
+            <a:schemeClr val="accent1"/>
+          </a:fillRef>
+          <a:effectRef idx="2">
+            <a:schemeClr val="accent1"/>
+          </a:effectRef>
+          <a:fontRef idx="minor">
+            <a:schemeClr val="lt1"/>
+          </a:fontRef>
+        </p:style>
+        <p:txBody>
+          <a:bodyPr rtlCol="0" anchor="ctr"/>
+          <a:lstStyle/>
+          <a:p>
+            <a:pPr algn="ctr"/>
+          </a:p>
+        </p:txBody>
+      </p:sp>
+      <p:sp>
+        <p:nvSpPr>
+          <p:cNvPr id="7" name="Rounded Rectangle 6"/>
           <p:cNvSpPr/>
           <p:nvPr/>
         </p:nvSpPr>
@@ -7338,7 +8191,7 @@
       </p:sp>
       <p:sp>
         <p:nvSpPr>
-          <p:cNvPr id="7" name="TextBox 6"/>
+          <p:cNvPr id="8" name="TextBox 7"/>
           <p:cNvSpPr txBox="1"/>
           <p:nvPr/>
         </p:nvSpPr>
@@ -7373,7 +8226,7 @@
       </p:sp>
       <p:sp>
         <p:nvSpPr>
-          <p:cNvPr id="8" name="TextBox 7"/>
+          <p:cNvPr id="9" name="TextBox 8"/>
           <p:cNvSpPr txBox="1"/>
           <p:nvPr/>
         </p:nvSpPr>
@@ -7408,7 +8261,7 @@
       </p:sp>
       <p:sp>
         <p:nvSpPr>
-          <p:cNvPr id="9" name="Rounded Rectangle 8"/>
+          <p:cNvPr id="10" name="Rounded Rectangle 9"/>
           <p:cNvSpPr/>
           <p:nvPr/>
         </p:nvSpPr>
@@ -7454,7 +8307,7 @@
       </p:sp>
       <p:sp>
         <p:nvSpPr>
-          <p:cNvPr id="10" name="TextBox 9"/>
+          <p:cNvPr id="11" name="TextBox 10"/>
           <p:cNvSpPr txBox="1"/>
           <p:nvPr/>
         </p:nvSpPr>
@@ -7489,7 +8342,7 @@
       </p:sp>
       <p:sp>
         <p:nvSpPr>
-          <p:cNvPr id="11" name="TextBox 10"/>
+          <p:cNvPr id="12" name="TextBox 11"/>
           <p:cNvSpPr txBox="1"/>
           <p:nvPr/>
         </p:nvSpPr>
@@ -7524,7 +8377,7 @@
       </p:sp>
       <p:sp>
         <p:nvSpPr>
-          <p:cNvPr id="12" name="Rounded Rectangle 11"/>
+          <p:cNvPr id="13" name="Rounded Rectangle 12"/>
           <p:cNvSpPr/>
           <p:nvPr/>
         </p:nvSpPr>
@@ -7570,7 +8423,7 @@
       </p:sp>
       <p:sp>
         <p:nvSpPr>
-          <p:cNvPr id="13" name="TextBox 12"/>
+          <p:cNvPr id="14" name="TextBox 13"/>
           <p:cNvSpPr txBox="1"/>
           <p:nvPr/>
         </p:nvSpPr>
@@ -7605,7 +8458,7 @@
       </p:sp>
       <p:sp>
         <p:nvSpPr>
-          <p:cNvPr id="14" name="TextBox 13"/>
+          <p:cNvPr id="15" name="TextBox 14"/>
           <p:cNvSpPr txBox="1"/>
           <p:nvPr/>
         </p:nvSpPr>
@@ -7730,7 +8583,7 @@
                 </a:solidFill>
                 <a:latin typeface="Montserrat"/>
               </a:rPr>
-              <a:t>003 / 015</a:t>
+              <a:t>003 / 016</a:t>
             </a:r>
           </a:p>
         </p:txBody>
@@ -7777,7 +8630,7 @@
         </p:nvSpPr>
         <p:spPr>
           <a:xfrm>
-            <a:off x="822960" y="457200"/>
+            <a:off x="822960" y="502920"/>
             <a:ext cx="8229600" cy="365760"/>
           </a:xfrm>
           <a:prstGeom prst="rect">
@@ -7792,13 +8645,13 @@
           <a:lstStyle/>
           <a:p>
             <a:r>
-              <a:rPr sz="1200" b="1" i="0">
-                <a:solidFill>
-                  <a:srgbClr val="64748B"/>
-                </a:solidFill>
-                <a:latin typeface="Montserrat"/>
-              </a:rPr>
-              <a:t>ANEXO 2 · PLACA</a:t>
+              <a:rPr sz="1300" b="1" i="0">
+                <a:solidFill>
+                  <a:srgbClr val="E8801A"/>
+                </a:solidFill>
+                <a:latin typeface="Montserrat"/>
+              </a:rPr>
+              <a:t>PARTES DE ESTE VÍDEO</a:t>
             </a:r>
           </a:p>
         </p:txBody>
@@ -7811,7 +8664,7 @@
         </p:nvSpPr>
         <p:spPr>
           <a:xfrm>
-            <a:off x="822960" y="868680"/>
+            <a:off x="822960" y="914400"/>
             <a:ext cx="10515600" cy="914400"/>
           </a:xfrm>
           <a:prstGeom prst="rect">
@@ -7832,130 +8685,30 @@
                 </a:solidFill>
                 <a:latin typeface="Montserrat"/>
               </a:rPr>
-              <a:t>La placa es el DNI del aparato</a:t>
-            </a:r>
-          </a:p>
-        </p:txBody>
-      </p:sp>
-      <p:sp>
-        <p:nvSpPr>
-          <p:cNvPr id="7" name="TextBox 6"/>
-          <p:cNvSpPr txBox="1"/>
-          <p:nvPr/>
-        </p:nvSpPr>
-        <p:spPr>
-          <a:xfrm>
-            <a:off x="822960" y="1920240"/>
-            <a:ext cx="4983480" cy="4206240"/>
-          </a:xfrm>
-          <a:prstGeom prst="rect">
-            <a:avLst/>
-          </a:prstGeom>
-          <a:noFill/>
-        </p:spPr>
-        <p:txBody>
-          <a:bodyPr wrap="square">
-            <a:spAutoFit/>
-          </a:bodyPr>
-          <a:lstStyle/>
-          <a:p>
-            <a:pPr>
-              <a:spcAft>
-                <a:spcPts val="1000"/>
-              </a:spcAft>
-            </a:pPr>
-            <a:r>
-              <a:rPr sz="1600" b="1" i="0">
-                <a:solidFill>
-                  <a:srgbClr val="2E3A80"/>
-                </a:solidFill>
-                <a:latin typeface="Montserrat"/>
-              </a:rPr>
-              <a:t>•  </a:t>
-            </a:r>
-            <a:r>
-              <a:rPr sz="1600" b="0" i="0">
-                <a:solidFill>
-                  <a:srgbClr val="1B2330"/>
-                </a:solidFill>
-                <a:latin typeface="Montserrat"/>
-              </a:rPr>
-              <a:t>Fijada sólida y duraderamente</a:t>
-            </a:r>
-          </a:p>
-          <a:p>
-            <a:pPr>
-              <a:spcAft>
-                <a:spcPts val="1000"/>
-              </a:spcAft>
-            </a:pPr>
-            <a:r>
-              <a:rPr sz="1600" b="1" i="0">
-                <a:solidFill>
-                  <a:srgbClr val="2E3A80"/>
-                </a:solidFill>
-                <a:latin typeface="Montserrat"/>
-              </a:rPr>
-              <a:t>•  </a:t>
-            </a:r>
-            <a:r>
-              <a:rPr sz="1600" b="0" i="0">
-                <a:solidFill>
-                  <a:srgbClr val="1B2330"/>
-                </a:solidFill>
-                <a:latin typeface="Montserrat"/>
-              </a:rPr>
-              <a:t>Visible y legible</a:t>
-            </a:r>
-          </a:p>
-          <a:p>
-            <a:pPr>
-              <a:spcAft>
-                <a:spcPts val="1000"/>
-              </a:spcAft>
-            </a:pPr>
-            <a:r>
-              <a:rPr sz="1600" b="1" i="0">
-                <a:solidFill>
-                  <a:srgbClr val="2E3A80"/>
-                </a:solidFill>
-                <a:latin typeface="Montserrat"/>
-              </a:rPr>
-              <a:t>•  </a:t>
-            </a:r>
-            <a:r>
-              <a:rPr sz="1600" b="0" i="0">
-                <a:solidFill>
-                  <a:srgbClr val="1B2330"/>
-                </a:solidFill>
-                <a:latin typeface="Montserrat"/>
-              </a:rPr>
-              <a:t>Caracteres indelebles</a:t>
-            </a:r>
-          </a:p>
-        </p:txBody>
-      </p:sp>
-      <p:sp>
-        <p:nvSpPr>
-          <p:cNvPr id="8" name="imgph" descr="IMGQ:gas appliance metal nameplate"/>
+              <a:t>En este vídeo</a:t>
+            </a:r>
+          </a:p>
+        </p:txBody>
+      </p:sp>
+      <p:sp>
+        <p:nvSpPr>
+          <p:cNvPr id="7" name="Rounded Rectangle 6"/>
           <p:cNvSpPr/>
           <p:nvPr/>
         </p:nvSpPr>
         <p:spPr>
           <a:xfrm>
-            <a:off x="5806440" y="1051560"/>
-            <a:ext cx="5298947" cy="4629150"/>
+            <a:off x="868680" y="1673352"/>
+            <a:ext cx="2011680" cy="73152"/>
           </a:xfrm>
           <a:prstGeom prst="roundRect">
             <a:avLst/>
           </a:prstGeom>
           <a:solidFill>
-            <a:srgbClr val="F3F6FB"/>
+            <a:srgbClr val="E8801A"/>
           </a:solidFill>
-          <a:ln w="12700">
-            <a:solidFill>
-              <a:srgbClr val="C7D2E6"/>
-            </a:solidFill>
+          <a:ln>
+            <a:noFill/>
           </a:ln>
           <a:effectLst/>
         </p:spPr>
@@ -7983,14 +8736,14 @@
       </p:sp>
       <p:sp>
         <p:nvSpPr>
-          <p:cNvPr id="9" name="TextBox 8"/>
+          <p:cNvPr id="8" name="TextBox 7"/>
           <p:cNvSpPr txBox="1"/>
           <p:nvPr/>
         </p:nvSpPr>
         <p:spPr>
           <a:xfrm>
-            <a:off x="6080760" y="2726055"/>
-            <a:ext cx="4750307" cy="1280160"/>
+            <a:off x="822960" y="2103120"/>
+            <a:ext cx="10515600" cy="4023360"/>
           </a:xfrm>
           <a:prstGeom prst="rect">
             <a:avLst/>
@@ -8003,27 +8756,53 @@
           </a:bodyPr>
           <a:lstStyle/>
           <a:p>
-            <a:pPr algn="ctr"/>
-            <a:r>
-              <a:rPr sz="1400" b="1" i="0">
-                <a:solidFill>
-                  <a:srgbClr val="64748B"/>
-                </a:solidFill>
-                <a:latin typeface="Montserrat"/>
-              </a:rPr>
-              <a:t>IMAGEN REALISTA</a:t>
-            </a:r>
-          </a:p>
-          <a:p>
-            <a:pPr algn="ctr"/>
-            <a:r>
-              <a:rPr sz="1100" b="0" i="1">
-                <a:solidFill>
-                  <a:srgbClr val="64748B"/>
-                </a:solidFill>
-                <a:latin typeface="Montserrat"/>
-              </a:rPr>
-              <a:t>gas appliance metal nameplate</a:t>
+            <a:pPr>
+              <a:spcAft>
+                <a:spcPts val="900"/>
+              </a:spcAft>
+            </a:pPr>
+            <a:r>
+              <a:rPr sz="1800" b="1" i="0">
+                <a:solidFill>
+                  <a:srgbClr val="E8801A"/>
+                </a:solidFill>
+                <a:latin typeface="Montserrat"/>
+              </a:rPr>
+              <a:t>01   </a:t>
+            </a:r>
+            <a:r>
+              <a:rPr sz="1700" b="0" i="0">
+                <a:solidFill>
+                  <a:srgbClr val="1B2330"/>
+                </a:solidFill>
+                <a:latin typeface="Montserrat"/>
+              </a:rPr>
+              <a:t>Anexo 2</a:t>
+            </a:r>
+          </a:p>
+          <a:p>
+            <a:pPr>
+              <a:spcAft>
+                <a:spcPts val="900"/>
+              </a:spcAft>
+            </a:pPr>
+            <a:r>
+              <a:rPr sz="1800" b="1" i="0">
+                <a:solidFill>
+                  <a:srgbClr val="E8801A"/>
+                </a:solidFill>
+                <a:latin typeface="Montserrat"/>
+              </a:rPr>
+              <a:t>02   </a:t>
+            </a:r>
+            <a:r>
+              <a:rPr sz="1700" b="0" i="0">
+                <a:solidFill>
+                  <a:srgbClr val="1B2330"/>
+                </a:solidFill>
+                <a:latin typeface="Montserrat"/>
+              </a:rPr>
+              <a:t>Anexo 3</a:t>
             </a:r>
           </a:p>
         </p:txBody>
@@ -8120,7 +8899,7 @@
                 </a:solidFill>
                 <a:latin typeface="Montserrat"/>
               </a:rPr>
-              <a:t>004 / 015</a:t>
+              <a:t>004 / 016</a:t>
             </a:r>
           </a:p>
         </p:txBody>
@@ -8168,7 +8947,7 @@
         <p:spPr>
           <a:xfrm>
             <a:off x="822960" y="457200"/>
-            <a:ext cx="8229600" cy="365760"/>
+            <a:ext cx="10058400" cy="365760"/>
           </a:xfrm>
           <a:prstGeom prst="rect">
             <a:avLst/>
@@ -8182,13 +8961,13 @@
           <a:lstStyle/>
           <a:p>
             <a:r>
-              <a:rPr sz="1200" b="1" i="0">
-                <a:solidFill>
-                  <a:srgbClr val="64748B"/>
-                </a:solidFill>
-                <a:latin typeface="Montserrat"/>
-              </a:rPr>
-              <a:t>ANEXO 2 · CONTENIDO</a:t>
+              <a:rPr sz="1300" b="1" i="0">
+                <a:solidFill>
+                  <a:srgbClr val="E8801A"/>
+                </a:solidFill>
+                <a:latin typeface="Montserrat"/>
+              </a:rPr>
+              <a:t>ANEXO 2 · PLACA</a:t>
             </a:r>
           </a:p>
         </p:txBody>
@@ -8216,26 +8995,70 @@
           <a:lstStyle/>
           <a:p>
             <a:r>
-              <a:rPr sz="2700" b="1" i="0">
+              <a:rPr sz="2800" b="1" i="0">
                 <a:solidFill>
                   <a:srgbClr val="1E2761"/>
                 </a:solidFill>
                 <a:latin typeface="Montserrat"/>
               </a:rPr>
-              <a:t>Qué datos lleva la placa</a:t>
-            </a:r>
-          </a:p>
-        </p:txBody>
-      </p:sp>
-      <p:sp>
-        <p:nvSpPr>
-          <p:cNvPr id="7" name="TextBox 6"/>
+              <a:t>La placa es el DNI del aparato</a:t>
+            </a:r>
+          </a:p>
+        </p:txBody>
+      </p:sp>
+      <p:sp>
+        <p:nvSpPr>
+          <p:cNvPr id="7" name="Rounded Rectangle 6"/>
+          <p:cNvSpPr/>
+          <p:nvPr/>
+        </p:nvSpPr>
+        <p:spPr>
+          <a:xfrm>
+            <a:off x="868680" y="1627632"/>
+            <a:ext cx="2011680" cy="73152"/>
+          </a:xfrm>
+          <a:prstGeom prst="roundRect">
+            <a:avLst/>
+          </a:prstGeom>
+          <a:solidFill>
+            <a:srgbClr val="E8801A"/>
+          </a:solidFill>
+          <a:ln>
+            <a:noFill/>
+          </a:ln>
+          <a:effectLst/>
+        </p:spPr>
+        <p:style>
+          <a:lnRef idx="1">
+            <a:schemeClr val="accent1"/>
+          </a:lnRef>
+          <a:fillRef idx="3">
+            <a:schemeClr val="accent1"/>
+          </a:fillRef>
+          <a:effectRef idx="2">
+            <a:schemeClr val="accent1"/>
+          </a:effectRef>
+          <a:fontRef idx="minor">
+            <a:schemeClr val="lt1"/>
+          </a:fontRef>
+        </p:style>
+        <p:txBody>
+          <a:bodyPr rtlCol="0" anchor="ctr"/>
+          <a:lstStyle/>
+          <a:p>
+            <a:pPr algn="ctr"/>
+          </a:p>
+        </p:txBody>
+      </p:sp>
+      <p:sp>
+        <p:nvSpPr>
+          <p:cNvPr id="8" name="TextBox 7"/>
           <p:cNvSpPr txBox="1"/>
           <p:nvPr/>
         </p:nvSpPr>
         <p:spPr>
           <a:xfrm>
-            <a:off x="822960" y="1920240"/>
+            <a:off x="822960" y="1965960"/>
             <a:ext cx="4983480" cy="4206240"/>
           </a:xfrm>
           <a:prstGeom prst="rect">
@@ -8251,17 +9074,17 @@
           <a:p>
             <a:pPr>
               <a:spcAft>
-                <a:spcPts val="1000"/>
+                <a:spcPts val="1100"/>
               </a:spcAft>
             </a:pPr>
             <a:r>
               <a:rPr sz="1600" b="1" i="0">
                 <a:solidFill>
-                  <a:srgbClr val="2E3A80"/>
-                </a:solidFill>
-                <a:latin typeface="Montserrat"/>
-              </a:rPr>
-              <a:t>•  </a:t>
+                  <a:srgbClr val="E8801A"/>
+                </a:solidFill>
+                <a:latin typeface="Montserrat"/>
+              </a:rPr>
+              <a:t>▸  </a:t>
             </a:r>
             <a:r>
               <a:rPr sz="1600" b="0" i="0">
@@ -8270,23 +9093,23 @@
                 </a:solidFill>
                 <a:latin typeface="Montserrat"/>
               </a:rPr>
-              <a:t>Fabricante e importador</a:t>
+              <a:t>Fijada sólida y duraderamente</a:t>
             </a:r>
           </a:p>
           <a:p>
             <a:pPr>
               <a:spcAft>
-                <a:spcPts val="1000"/>
+                <a:spcPts val="1100"/>
               </a:spcAft>
             </a:pPr>
             <a:r>
               <a:rPr sz="1600" b="1" i="0">
                 <a:solidFill>
-                  <a:srgbClr val="2E3A80"/>
-                </a:solidFill>
-                <a:latin typeface="Montserrat"/>
-              </a:rPr>
-              <a:t>•  </a:t>
+                  <a:srgbClr val="E8801A"/>
+                </a:solidFill>
+                <a:latin typeface="Montserrat"/>
+              </a:rPr>
+              <a:t>▸  </a:t>
             </a:r>
             <a:r>
               <a:rPr sz="1600" b="0" i="0">
@@ -8295,23 +9118,23 @@
                 </a:solidFill>
                 <a:latin typeface="Montserrat"/>
               </a:rPr>
-              <a:t>Marca, modelo y nº de serie</a:t>
+              <a:t>Visible y legible</a:t>
             </a:r>
           </a:p>
           <a:p>
             <a:pPr>
               <a:spcAft>
-                <a:spcPts val="1000"/>
+                <a:spcPts val="1100"/>
               </a:spcAft>
             </a:pPr>
             <a:r>
               <a:rPr sz="1600" b="1" i="0">
                 <a:solidFill>
-                  <a:srgbClr val="2E3A80"/>
-                </a:solidFill>
-                <a:latin typeface="Montserrat"/>
-              </a:rPr>
-              <a:t>•  </a:t>
+                  <a:srgbClr val="E8801A"/>
+                </a:solidFill>
+                <a:latin typeface="Montserrat"/>
+              </a:rPr>
+              <a:t>▸  </a:t>
             </a:r>
             <a:r>
               <a:rPr sz="1600" b="0" i="0">
@@ -8320,64 +9143,14 @@
                 </a:solidFill>
                 <a:latin typeface="Montserrat"/>
               </a:rPr>
-              <a:t>Categoría del aparato</a:t>
-            </a:r>
-          </a:p>
-          <a:p>
-            <a:pPr>
-              <a:spcAft>
-                <a:spcPts val="1000"/>
-              </a:spcAft>
-            </a:pPr>
-            <a:r>
-              <a:rPr sz="1600" b="1" i="0">
-                <a:solidFill>
-                  <a:srgbClr val="2E3A80"/>
-                </a:solidFill>
-                <a:latin typeface="Montserrat"/>
-              </a:rPr>
-              <a:t>•  </a:t>
-            </a:r>
-            <a:r>
-              <a:rPr sz="1600" b="0" i="0">
-                <a:solidFill>
-                  <a:srgbClr val="1B2330"/>
-                </a:solidFill>
-                <a:latin typeface="Montserrat"/>
-              </a:rPr>
-              <a:t>Gas y presión de reglaje</a:t>
-            </a:r>
-          </a:p>
-          <a:p>
-            <a:pPr>
-              <a:spcAft>
-                <a:spcPts val="1000"/>
-              </a:spcAft>
-            </a:pPr>
-            <a:r>
-              <a:rPr sz="1600" b="1" i="0">
-                <a:solidFill>
-                  <a:srgbClr val="2E3A80"/>
-                </a:solidFill>
-                <a:latin typeface="Montserrat"/>
-              </a:rPr>
-              <a:t>•  </a:t>
-            </a:r>
-            <a:r>
-              <a:rPr sz="1600" b="0" i="0">
-                <a:solidFill>
-                  <a:srgbClr val="1B2330"/>
-                </a:solidFill>
-                <a:latin typeface="Montserrat"/>
-              </a:rPr>
-              <a:t>Consumo (kW/PCI) y datos eléctricos</a:t>
-            </a:r>
-          </a:p>
-        </p:txBody>
-      </p:sp>
-      <p:sp>
-        <p:nvSpPr>
-          <p:cNvPr id="8" name="imgph" descr="IMGQ:boiler rating plate data closeup"/>
+              <a:t>Caracteres indelebles</a:t>
+            </a:r>
+          </a:p>
+        </p:txBody>
+      </p:sp>
+      <p:sp>
+        <p:nvSpPr>
+          <p:cNvPr id="9" name="imgph" descr="IMGQ:gas appliance metal nameplate"/>
           <p:cNvSpPr/>
           <p:nvPr/>
         </p:nvSpPr>
@@ -8423,7 +9196,7 @@
       </p:sp>
       <p:sp>
         <p:nvSpPr>
-          <p:cNvPr id="9" name="TextBox 8"/>
+          <p:cNvPr id="10" name="TextBox 9"/>
           <p:cNvSpPr txBox="1"/>
           <p:nvPr/>
         </p:nvSpPr>
@@ -8463,7 +9236,7 @@
                 </a:solidFill>
                 <a:latin typeface="Montserrat"/>
               </a:rPr>
-              <a:t>boiler rating plate data closeup</a:t>
+              <a:t>gas appliance metal nameplate</a:t>
             </a:r>
           </a:p>
         </p:txBody>
@@ -8560,7 +9333,7 @@
                 </a:solidFill>
                 <a:latin typeface="Montserrat"/>
               </a:rPr>
-              <a:t>005 / 015</a:t>
+              <a:t>005 / 016</a:t>
             </a:r>
           </a:p>
         </p:txBody>
@@ -8608,7 +9381,7 @@
         <p:spPr>
           <a:xfrm>
             <a:off x="822960" y="457200"/>
-            <a:ext cx="8229600" cy="365760"/>
+            <a:ext cx="10058400" cy="365760"/>
           </a:xfrm>
           <a:prstGeom prst="rect">
             <a:avLst/>
@@ -8622,13 +9395,13 @@
           <a:lstStyle/>
           <a:p>
             <a:r>
-              <a:rPr sz="1200" b="1" i="0">
-                <a:solidFill>
-                  <a:srgbClr val="64748B"/>
-                </a:solidFill>
-                <a:latin typeface="Montserrat"/>
-              </a:rPr>
-              <a:t>ANEXO 2 · DETALLES</a:t>
+              <a:rPr sz="1300" b="1" i="0">
+                <a:solidFill>
+                  <a:srgbClr val="E8801A"/>
+                </a:solidFill>
+                <a:latin typeface="Montserrat"/>
+              </a:rPr>
+              <a:t>ANEXO 2 · CONTENIDO</a:t>
             </a:r>
           </a:p>
         </p:txBody>
@@ -8656,26 +9429,70 @@
           <a:lstStyle/>
           <a:p>
             <a:r>
-              <a:rPr sz="2700" b="1" i="0">
+              <a:rPr sz="2800" b="1" i="0">
                 <a:solidFill>
                   <a:srgbClr val="1E2761"/>
                 </a:solidFill>
                 <a:latin typeface="Montserrat"/>
               </a:rPr>
-              <a:t>El hueco para tu anotación</a:t>
-            </a:r>
-          </a:p>
-        </p:txBody>
-      </p:sp>
-      <p:sp>
-        <p:nvSpPr>
-          <p:cNvPr id="7" name="TextBox 6"/>
+              <a:t>Qué datos lleva la placa</a:t>
+            </a:r>
+          </a:p>
+        </p:txBody>
+      </p:sp>
+      <p:sp>
+        <p:nvSpPr>
+          <p:cNvPr id="7" name="Rounded Rectangle 6"/>
+          <p:cNvSpPr/>
+          <p:nvPr/>
+        </p:nvSpPr>
+        <p:spPr>
+          <a:xfrm>
+            <a:off x="868680" y="1627632"/>
+            <a:ext cx="2011680" cy="73152"/>
+          </a:xfrm>
+          <a:prstGeom prst="roundRect">
+            <a:avLst/>
+          </a:prstGeom>
+          <a:solidFill>
+            <a:srgbClr val="E8801A"/>
+          </a:solidFill>
+          <a:ln>
+            <a:noFill/>
+          </a:ln>
+          <a:effectLst/>
+        </p:spPr>
+        <p:style>
+          <a:lnRef idx="1">
+            <a:schemeClr val="accent1"/>
+          </a:lnRef>
+          <a:fillRef idx="3">
+            <a:schemeClr val="accent1"/>
+          </a:fillRef>
+          <a:effectRef idx="2">
+            <a:schemeClr val="accent1"/>
+          </a:effectRef>
+          <a:fontRef idx="minor">
+            <a:schemeClr val="lt1"/>
+          </a:fontRef>
+        </p:style>
+        <p:txBody>
+          <a:bodyPr rtlCol="0" anchor="ctr"/>
+          <a:lstStyle/>
+          <a:p>
+            <a:pPr algn="ctr"/>
+          </a:p>
+        </p:txBody>
+      </p:sp>
+      <p:sp>
+        <p:nvSpPr>
+          <p:cNvPr id="8" name="TextBox 7"/>
           <p:cNvSpPr txBox="1"/>
           <p:nvPr/>
         </p:nvSpPr>
         <p:spPr>
           <a:xfrm>
-            <a:off x="822960" y="1920240"/>
+            <a:off x="822960" y="1965960"/>
             <a:ext cx="4983480" cy="4206240"/>
           </a:xfrm>
           <a:prstGeom prst="rect">
@@ -8691,17 +9508,17 @@
           <a:p>
             <a:pPr>
               <a:spcAft>
-                <a:spcPts val="1000"/>
+                <a:spcPts val="1100"/>
               </a:spcAft>
             </a:pPr>
             <a:r>
               <a:rPr sz="1600" b="1" i="0">
                 <a:solidFill>
-                  <a:srgbClr val="2E3A80"/>
-                </a:solidFill>
-                <a:latin typeface="Montserrat"/>
-              </a:rPr>
-              <a:t>•  </a:t>
+                  <a:srgbClr val="E8801A"/>
+                </a:solidFill>
+                <a:latin typeface="Montserrat"/>
+              </a:rPr>
+              <a:t>▸  </a:t>
             </a:r>
             <a:r>
               <a:rPr sz="1600" b="0" i="0">
@@ -8710,23 +9527,23 @@
                 </a:solidFill>
                 <a:latin typeface="Montserrat"/>
               </a:rPr>
-              <a:t>Consumo regulable: espacio libre</a:t>
+              <a:t>Fabricante e importador</a:t>
             </a:r>
           </a:p>
           <a:p>
             <a:pPr>
               <a:spcAft>
-                <a:spcPts val="1000"/>
+                <a:spcPts val="1100"/>
               </a:spcAft>
             </a:pPr>
             <a:r>
               <a:rPr sz="1600" b="1" i="0">
                 <a:solidFill>
-                  <a:srgbClr val="2E3A80"/>
-                </a:solidFill>
-                <a:latin typeface="Montserrat"/>
-              </a:rPr>
-              <a:t>•  </a:t>
+                  <a:srgbClr val="E8801A"/>
+                </a:solidFill>
+                <a:latin typeface="Montserrat"/>
+              </a:rPr>
+              <a:t>▸  </a:t>
             </a:r>
             <a:r>
               <a:rPr sz="1600" b="0" i="0">
@@ -8735,23 +9552,23 @@
                 </a:solidFill>
                 <a:latin typeface="Montserrat"/>
               </a:rPr>
-              <a:t>Anotas el consumo que has regulado</a:t>
+              <a:t>Marca, modelo y nº de serie</a:t>
             </a:r>
           </a:p>
           <a:p>
             <a:pPr>
               <a:spcAft>
-                <a:spcPts val="1000"/>
+                <a:spcPts val="1100"/>
               </a:spcAft>
             </a:pPr>
             <a:r>
               <a:rPr sz="1600" b="1" i="0">
                 <a:solidFill>
-                  <a:srgbClr val="2E3A80"/>
-                </a:solidFill>
-                <a:latin typeface="Montserrat"/>
-              </a:rPr>
-              <a:t>•  </a:t>
+                  <a:srgbClr val="E8801A"/>
+                </a:solidFill>
+                <a:latin typeface="Montserrat"/>
+              </a:rPr>
+              <a:t>▸  </a:t>
             </a:r>
             <a:r>
               <a:rPr sz="1600" b="0" i="0">
@@ -8760,14 +9577,64 @@
                 </a:solidFill>
                 <a:latin typeface="Montserrat"/>
               </a:rPr>
-              <a:t>Consumo en kW sobre PCI</a:t>
-            </a:r>
-          </a:p>
-        </p:txBody>
-      </p:sp>
-      <p:sp>
-        <p:nvSpPr>
-          <p:cNvPr id="8" name="imgph" descr="IMGQ:technician writing on appliance label"/>
+              <a:t>Categoría del aparato</a:t>
+            </a:r>
+          </a:p>
+          <a:p>
+            <a:pPr>
+              <a:spcAft>
+                <a:spcPts val="1100"/>
+              </a:spcAft>
+            </a:pPr>
+            <a:r>
+              <a:rPr sz="1600" b="1" i="0">
+                <a:solidFill>
+                  <a:srgbClr val="E8801A"/>
+                </a:solidFill>
+                <a:latin typeface="Montserrat"/>
+              </a:rPr>
+              <a:t>▸  </a:t>
+            </a:r>
+            <a:r>
+              <a:rPr sz="1600" b="0" i="0">
+                <a:solidFill>
+                  <a:srgbClr val="1B2330"/>
+                </a:solidFill>
+                <a:latin typeface="Montserrat"/>
+              </a:rPr>
+              <a:t>Gas y presión de reglaje</a:t>
+            </a:r>
+          </a:p>
+          <a:p>
+            <a:pPr>
+              <a:spcAft>
+                <a:spcPts val="1100"/>
+              </a:spcAft>
+            </a:pPr>
+            <a:r>
+              <a:rPr sz="1600" b="1" i="0">
+                <a:solidFill>
+                  <a:srgbClr val="E8801A"/>
+                </a:solidFill>
+                <a:latin typeface="Montserrat"/>
+              </a:rPr>
+              <a:t>▸  </a:t>
+            </a:r>
+            <a:r>
+              <a:rPr sz="1600" b="0" i="0">
+                <a:solidFill>
+                  <a:srgbClr val="1B2330"/>
+                </a:solidFill>
+                <a:latin typeface="Montserrat"/>
+              </a:rPr>
+              <a:t>Consumo (kW/PCI) y datos eléctricos</a:t>
+            </a:r>
+          </a:p>
+        </p:txBody>
+      </p:sp>
+      <p:sp>
+        <p:nvSpPr>
+          <p:cNvPr id="9" name="imgph" descr="IMGQ:boiler rating plate data closeup"/>
           <p:cNvSpPr/>
           <p:nvPr/>
         </p:nvSpPr>
@@ -8813,7 +9680,7 @@
       </p:sp>
       <p:sp>
         <p:nvSpPr>
-          <p:cNvPr id="9" name="TextBox 8"/>
+          <p:cNvPr id="10" name="TextBox 9"/>
           <p:cNvSpPr txBox="1"/>
           <p:nvPr/>
         </p:nvSpPr>
@@ -8853,7 +9720,7 @@
                 </a:solidFill>
                 <a:latin typeface="Montserrat"/>
               </a:rPr>
-              <a:t>technician writing on appliance label</a:t>
+              <a:t>boiler rating plate data closeup</a:t>
             </a:r>
           </a:p>
         </p:txBody>
@@ -8950,7 +9817,7 @@
                 </a:solidFill>
                 <a:latin typeface="Montserrat"/>
               </a:rPr>
-              <a:t>006 / 015</a:t>
+              <a:t>006 / 016</a:t>
             </a:r>
           </a:p>
         </p:txBody>
@@ -8998,7 +9865,7 @@
         <p:spPr>
           <a:xfrm>
             <a:off x="822960" y="457200"/>
-            <a:ext cx="8229600" cy="365760"/>
+            <a:ext cx="10058400" cy="365760"/>
           </a:xfrm>
           <a:prstGeom prst="rect">
             <a:avLst/>
@@ -9012,13 +9879,13 @@
           <a:lstStyle/>
           <a:p>
             <a:r>
-              <a:rPr sz="1200" b="1" i="0">
-                <a:solidFill>
-                  <a:srgbClr val="64748B"/>
-                </a:solidFill>
-                <a:latin typeface="Montserrat"/>
-              </a:rPr>
-              <a:t>ANEXO 2 · ADVERTENCIAS</a:t>
+              <a:rPr sz="1300" b="1" i="0">
+                <a:solidFill>
+                  <a:srgbClr val="E8801A"/>
+                </a:solidFill>
+                <a:latin typeface="Montserrat"/>
+              </a:rPr>
+              <a:t>ANEXO 2 · DETALLES</a:t>
             </a:r>
           </a:p>
         </p:txBody>
@@ -9046,26 +9913,70 @@
           <a:lstStyle/>
           <a:p>
             <a:r>
-              <a:rPr sz="2700" b="1" i="0">
+              <a:rPr sz="2800" b="1" i="0">
                 <a:solidFill>
                   <a:srgbClr val="1E2761"/>
                 </a:solidFill>
                 <a:latin typeface="Montserrat"/>
               </a:rPr>
-              <a:t>Las dos advertencias</a:t>
-            </a:r>
-          </a:p>
-        </p:txBody>
-      </p:sp>
-      <p:sp>
-        <p:nvSpPr>
-          <p:cNvPr id="7" name="TextBox 6"/>
+              <a:t>El hueco para tu anotación</a:t>
+            </a:r>
+          </a:p>
+        </p:txBody>
+      </p:sp>
+      <p:sp>
+        <p:nvSpPr>
+          <p:cNvPr id="7" name="Rounded Rectangle 6"/>
+          <p:cNvSpPr/>
+          <p:nvPr/>
+        </p:nvSpPr>
+        <p:spPr>
+          <a:xfrm>
+            <a:off x="868680" y="1627632"/>
+            <a:ext cx="2011680" cy="73152"/>
+          </a:xfrm>
+          <a:prstGeom prst="roundRect">
+            <a:avLst/>
+          </a:prstGeom>
+          <a:solidFill>
+            <a:srgbClr val="E8801A"/>
+          </a:solidFill>
+          <a:ln>
+            <a:noFill/>
+          </a:ln>
+          <a:effectLst/>
+        </p:spPr>
+        <p:style>
+          <a:lnRef idx="1">
+            <a:schemeClr val="accent1"/>
+          </a:lnRef>
+          <a:fillRef idx="3">
+            <a:schemeClr val="accent1"/>
+          </a:fillRef>
+          <a:effectRef idx="2">
+            <a:schemeClr val="accent1"/>
+          </a:effectRef>
+          <a:fontRef idx="minor">
+            <a:schemeClr val="lt1"/>
+          </a:fontRef>
+        </p:style>
+        <p:txBody>
+          <a:bodyPr rtlCol="0" anchor="ctr"/>
+          <a:lstStyle/>
+          <a:p>
+            <a:pPr algn="ctr"/>
+          </a:p>
+        </p:txBody>
+      </p:sp>
+      <p:sp>
+        <p:nvSpPr>
+          <p:cNvPr id="8" name="TextBox 7"/>
           <p:cNvSpPr txBox="1"/>
           <p:nvPr/>
         </p:nvSpPr>
         <p:spPr>
           <a:xfrm>
-            <a:off x="822960" y="1920240"/>
+            <a:off x="822960" y="1965960"/>
             <a:ext cx="4983480" cy="4206240"/>
           </a:xfrm>
           <a:prstGeom prst="rect">
@@ -9081,17 +9992,17 @@
           <a:p>
             <a:pPr>
               <a:spcAft>
-                <a:spcPts val="1000"/>
+                <a:spcPts val="1100"/>
               </a:spcAft>
             </a:pPr>
             <a:r>
               <a:rPr sz="1600" b="1" i="0">
                 <a:solidFill>
-                  <a:srgbClr val="2E3A80"/>
-                </a:solidFill>
-                <a:latin typeface="Montserrat"/>
-              </a:rPr>
-              <a:t>•  </a:t>
+                  <a:srgbClr val="E8801A"/>
+                </a:solidFill>
+                <a:latin typeface="Montserrat"/>
+              </a:rPr>
+              <a:t>▸  </a:t>
             </a:r>
             <a:r>
               <a:rPr sz="1600" b="0" i="0">
@@ -9100,23 +10011,23 @@
                 </a:solidFill>
                 <a:latin typeface="Montserrat"/>
               </a:rPr>
-              <a:t>General: normas + lugar ventilado</a:t>
+              <a:t>Consumo regulable: espacio libre</a:t>
             </a:r>
           </a:p>
           <a:p>
             <a:pPr>
               <a:spcAft>
-                <a:spcPts val="1000"/>
+                <a:spcPts val="1100"/>
               </a:spcAft>
             </a:pPr>
             <a:r>
               <a:rPr sz="1600" b="1" i="0">
                 <a:solidFill>
-                  <a:srgbClr val="2E3A80"/>
-                </a:solidFill>
-                <a:latin typeface="Montserrat"/>
-              </a:rPr>
-              <a:t>•  </a:t>
+                  <a:srgbClr val="E8801A"/>
+                </a:solidFill>
+                <a:latin typeface="Montserrat"/>
+              </a:rPr>
+              <a:t>▸  </a:t>
             </a:r>
             <a:r>
               <a:rPr sz="1600" b="0" i="0">
@@ -9125,23 +10036,23 @@
                 </a:solidFill>
                 <a:latin typeface="Montserrat"/>
               </a:rPr>
-              <a:t>General: consultar instrucciones</a:t>
+              <a:t>Anotas el consumo que has regulado</a:t>
             </a:r>
           </a:p>
           <a:p>
             <a:pPr>
               <a:spcAft>
-                <a:spcPts val="1000"/>
+                <a:spcPts val="1100"/>
               </a:spcAft>
             </a:pPr>
             <a:r>
               <a:rPr sz="1600" b="1" i="0">
                 <a:solidFill>
-                  <a:srgbClr val="2E3A80"/>
-                </a:solidFill>
-                <a:latin typeface="Montserrat"/>
-              </a:rPr>
-              <a:t>•  </a:t>
+                  <a:srgbClr val="E8801A"/>
+                </a:solidFill>
+                <a:latin typeface="Montserrat"/>
+              </a:rPr>
+              <a:t>▸  </a:t>
             </a:r>
             <a:r>
               <a:rPr sz="1600" b="0" i="0">
@@ -9150,14 +10061,14 @@
                 </a:solidFill>
                 <a:latin typeface="Montserrat"/>
               </a:rPr>
-              <a:t>Exterior: uso exclusivo al aire libre</a:t>
-            </a:r>
-          </a:p>
-        </p:txBody>
-      </p:sp>
-      <p:sp>
-        <p:nvSpPr>
-          <p:cNvPr id="8" name="imgph" descr="IMGQ:outdoor patio gas heater"/>
+              <a:t>Consumo en kW sobre PCI</a:t>
+            </a:r>
+          </a:p>
+        </p:txBody>
+      </p:sp>
+      <p:sp>
+        <p:nvSpPr>
+          <p:cNvPr id="9" name="imgph" descr="IMGQ:technician writing on appliance label"/>
           <p:cNvSpPr/>
           <p:nvPr/>
         </p:nvSpPr>
@@ -9203,7 +10114,7 @@
       </p:sp>
       <p:sp>
         <p:nvSpPr>
-          <p:cNvPr id="9" name="TextBox 8"/>
+          <p:cNvPr id="10" name="TextBox 9"/>
           <p:cNvSpPr txBox="1"/>
           <p:nvPr/>
         </p:nvSpPr>
@@ -9243,7 +10154,7 @@
                 </a:solidFill>
                 <a:latin typeface="Montserrat"/>
               </a:rPr>
-              <a:t>outdoor patio gas heater</a:t>
+              <a:t>technician writing on appliance label</a:t>
             </a:r>
           </a:p>
         </p:txBody>
@@ -9340,7 +10251,7 @@
                 </a:solidFill>
                 <a:latin typeface="Montserrat"/>
               </a:rPr>
-              <a:t>007 / 015</a:t>
+              <a:t>007 / 016</a:t>
             </a:r>
           </a:p>
         </p:txBody>
@@ -9388,7 +10299,7 @@
         <p:spPr>
           <a:xfrm>
             <a:off x="822960" y="457200"/>
-            <a:ext cx="8229600" cy="365760"/>
+            <a:ext cx="10058400" cy="365760"/>
           </a:xfrm>
           <a:prstGeom prst="rect">
             <a:avLst/>
@@ -9402,13 +10313,13 @@
           <a:lstStyle/>
           <a:p>
             <a:r>
-              <a:rPr sz="1200" b="1" i="0">
-                <a:solidFill>
-                  <a:srgbClr val="64748B"/>
-                </a:solidFill>
-                <a:latin typeface="Montserrat"/>
-              </a:rPr>
-              <a:t>ANEXO 2 · VERIFICACIÓN</a:t>
+              <a:rPr sz="1300" b="1" i="0">
+                <a:solidFill>
+                  <a:srgbClr val="E8801A"/>
+                </a:solidFill>
+                <a:latin typeface="Montserrat"/>
+              </a:rPr>
+              <a:t>ANEXO 2 · ADVERTENCIAS</a:t>
             </a:r>
           </a:p>
         </p:txBody>
@@ -9436,26 +10347,70 @@
           <a:lstStyle/>
           <a:p>
             <a:r>
-              <a:rPr sz="2700" b="1" i="0">
+              <a:rPr sz="2800" b="1" i="0">
                 <a:solidFill>
                   <a:srgbClr val="1E2761"/>
                 </a:solidFill>
                 <a:latin typeface="Montserrat"/>
               </a:rPr>
-              <a:t>Que la placa dure</a:t>
-            </a:r>
-          </a:p>
-        </p:txBody>
-      </p:sp>
-      <p:sp>
-        <p:nvSpPr>
-          <p:cNvPr id="7" name="TextBox 6"/>
+              <a:t>Las dos advertencias</a:t>
+            </a:r>
+          </a:p>
+        </p:txBody>
+      </p:sp>
+      <p:sp>
+        <p:nvSpPr>
+          <p:cNvPr id="7" name="Rounded Rectangle 6"/>
+          <p:cNvSpPr/>
+          <p:nvPr/>
+        </p:nvSpPr>
+        <p:spPr>
+          <a:xfrm>
+            <a:off x="868680" y="1627632"/>
+            <a:ext cx="2011680" cy="73152"/>
+          </a:xfrm>
+          <a:prstGeom prst="roundRect">
+            <a:avLst/>
+          </a:prstGeom>
+          <a:solidFill>
+            <a:srgbClr val="E8801A"/>
+          </a:solidFill>
+          <a:ln>
+            <a:noFill/>
+          </a:ln>
+          <a:effectLst/>
+        </p:spPr>
+        <p:style>
+          <a:lnRef idx="1">
+            <a:schemeClr val="accent1"/>
+          </a:lnRef>
+          <a:fillRef idx="3">
+            <a:schemeClr val="accent1"/>
+          </a:fillRef>
+          <a:effectRef idx="2">
+            <a:schemeClr val="accent1"/>
+          </a:effectRef>
+          <a:fontRef idx="minor">
+            <a:schemeClr val="lt1"/>
+          </a:fontRef>
+        </p:style>
+        <p:txBody>
+          <a:bodyPr rtlCol="0" anchor="ctr"/>
+          <a:lstStyle/>
+          <a:p>
+            <a:pPr algn="ctr"/>
+          </a:p>
+        </p:txBody>
+      </p:sp>
+      <p:sp>
+        <p:nvSpPr>
+          <p:cNvPr id="8" name="TextBox 7"/>
           <p:cNvSpPr txBox="1"/>
           <p:nvPr/>
         </p:nvSpPr>
         <p:spPr>
           <a:xfrm>
-            <a:off x="822960" y="1920240"/>
+            <a:off x="822960" y="1965960"/>
             <a:ext cx="4983480" cy="4206240"/>
           </a:xfrm>
           <a:prstGeom prst="rect">
@@ -9471,17 +10426,17 @@
           <a:p>
             <a:pPr>
               <a:spcAft>
-                <a:spcPts val="1000"/>
+                <a:spcPts val="1100"/>
               </a:spcAft>
             </a:pPr>
             <a:r>
               <a:rPr sz="1600" b="1" i="0">
                 <a:solidFill>
-                  <a:srgbClr val="2E3A80"/>
-                </a:solidFill>
-                <a:latin typeface="Montserrat"/>
-              </a:rPr>
-              <a:t>•  </a:t>
+                  <a:srgbClr val="E8801A"/>
+                </a:solidFill>
+                <a:latin typeface="Montserrat"/>
+              </a:rPr>
+              <a:t>▸  </a:t>
             </a:r>
             <a:r>
               <a:rPr sz="1600" b="0" i="0">
@@ -9490,23 +10445,23 @@
                 </a:solidFill>
                 <a:latin typeface="Montserrat"/>
               </a:rPr>
-              <a:t>Indelebilidad, corrosión y adherencia</a:t>
+              <a:t>General: normas + lugar ventilado</a:t>
             </a:r>
           </a:p>
           <a:p>
             <a:pPr>
               <a:spcAft>
-                <a:spcPts val="1000"/>
+                <a:spcPts val="1100"/>
               </a:spcAft>
             </a:pPr>
             <a:r>
               <a:rPr sz="1600" b="1" i="0">
                 <a:solidFill>
-                  <a:srgbClr val="2E3A80"/>
-                </a:solidFill>
-                <a:latin typeface="Montserrat"/>
-              </a:rPr>
-              <a:t>•  </a:t>
+                  <a:srgbClr val="E8801A"/>
+                </a:solidFill>
+                <a:latin typeface="Montserrat"/>
+              </a:rPr>
+              <a:t>▸  </a:t>
             </a:r>
             <a:r>
               <a:rPr sz="1600" b="0" i="0">
@@ -9515,23 +10470,23 @@
                 </a:solidFill>
                 <a:latin typeface="Montserrat"/>
               </a:rPr>
-              <a:t>Todo con la UNE 60750</a:t>
+              <a:t>General: consultar instrucciones</a:t>
             </a:r>
           </a:p>
           <a:p>
             <a:pPr>
               <a:spcAft>
-                <a:spcPts val="1000"/>
+                <a:spcPts val="1100"/>
               </a:spcAft>
             </a:pPr>
             <a:r>
               <a:rPr sz="1600" b="1" i="0">
                 <a:solidFill>
-                  <a:srgbClr val="2E3A80"/>
-                </a:solidFill>
-                <a:latin typeface="Montserrat"/>
-              </a:rPr>
-              <a:t>•  </a:t>
+                  <a:srgbClr val="E8801A"/>
+                </a:solidFill>
+                <a:latin typeface="Montserrat"/>
+              </a:rPr>
+              <a:t>▸  </a:t>
             </a:r>
             <a:r>
               <a:rPr sz="1600" b="0" i="0">
@@ -9540,14 +10495,14 @@
                 </a:solidFill>
                 <a:latin typeface="Montserrat"/>
               </a:rPr>
-              <a:t>Resiste frotamiento, humedad y calor</a:t>
-            </a:r>
-          </a:p>
-        </p:txBody>
-      </p:sp>
-      <p:sp>
-        <p:nvSpPr>
-          <p:cNvPr id="8" name="imgph" descr="IMGQ:durability testing metal plate"/>
+              <a:t>Exterior: uso exclusivo al aire libre</a:t>
+            </a:r>
+          </a:p>
+        </p:txBody>
+      </p:sp>
+      <p:sp>
+        <p:nvSpPr>
+          <p:cNvPr id="9" name="imgph" descr="IMGQ:outdoor patio gas heater"/>
           <p:cNvSpPr/>
           <p:nvPr/>
         </p:nvSpPr>
@@ -9593,7 +10548,7 @@
       </p:sp>
       <p:sp>
         <p:nvSpPr>
-          <p:cNvPr id="9" name="TextBox 8"/>
+          <p:cNvPr id="10" name="TextBox 9"/>
           <p:cNvSpPr txBox="1"/>
           <p:nvPr/>
         </p:nvSpPr>
@@ -9633,7 +10588,7 @@
                 </a:solidFill>
                 <a:latin typeface="Montserrat"/>
               </a:rPr>
-              <a:t>durability testing metal plate</a:t>
+              <a:t>outdoor patio gas heater</a:t>
             </a:r>
           </a:p>
         </p:txBody>
@@ -9730,7 +10685,7 @@
                 </a:solidFill>
                 <a:latin typeface="Montserrat"/>
               </a:rPr>
-              <a:t>008 / 015</a:t>
+              <a:t>008 / 016</a:t>
             </a:r>
           </a:p>
         </p:txBody>
@@ -9778,7 +10733,7 @@
         <p:spPr>
           <a:xfrm>
             <a:off x="822960" y="457200"/>
-            <a:ext cx="8229600" cy="365760"/>
+            <a:ext cx="10058400" cy="365760"/>
           </a:xfrm>
           <a:prstGeom prst="rect">
             <a:avLst/>
@@ -9792,13 +10747,13 @@
           <a:lstStyle/>
           <a:p>
             <a:r>
-              <a:rPr sz="1200" b="1" i="0">
-                <a:solidFill>
-                  <a:srgbClr val="64748B"/>
-                </a:solidFill>
-                <a:latin typeface="Montserrat"/>
-              </a:rPr>
-              <a:t>ANEXO 3 · CAMPO DE APLICACIÓN</a:t>
+              <a:rPr sz="1300" b="1" i="0">
+                <a:solidFill>
+                  <a:srgbClr val="E8801A"/>
+                </a:solidFill>
+                <a:latin typeface="Montserrat"/>
+              </a:rPr>
+              <a:t>ANEXO 2 · VERIFICACIÓN</a:t>
             </a:r>
           </a:p>
         </p:txBody>
@@ -9826,26 +10781,70 @@
           <a:lstStyle/>
           <a:p>
             <a:r>
-              <a:rPr sz="2700" b="1" i="0">
+              <a:rPr sz="2800" b="1" i="0">
                 <a:solidFill>
                   <a:srgbClr val="1E2761"/>
                 </a:solidFill>
                 <a:latin typeface="Montserrat"/>
               </a:rPr>
-              <a:t>La red de seguridad</a:t>
-            </a:r>
-          </a:p>
-        </p:txBody>
-      </p:sp>
-      <p:sp>
-        <p:nvSpPr>
-          <p:cNvPr id="7" name="TextBox 6"/>
+              <a:t>Que la placa dure</a:t>
+            </a:r>
+          </a:p>
+        </p:txBody>
+      </p:sp>
+      <p:sp>
+        <p:nvSpPr>
+          <p:cNvPr id="7" name="Rounded Rectangle 6"/>
+          <p:cNvSpPr/>
+          <p:nvPr/>
+        </p:nvSpPr>
+        <p:spPr>
+          <a:xfrm>
+            <a:off x="868680" y="1627632"/>
+            <a:ext cx="2011680" cy="73152"/>
+          </a:xfrm>
+          <a:prstGeom prst="roundRect">
+            <a:avLst/>
+          </a:prstGeom>
+          <a:solidFill>
+            <a:srgbClr val="E8801A"/>
+          </a:solidFill>
+          <a:ln>
+            <a:noFill/>
+          </a:ln>
+          <a:effectLst/>
+        </p:spPr>
+        <p:style>
+          <a:lnRef idx="1">
+            <a:schemeClr val="accent1"/>
+          </a:lnRef>
+          <a:fillRef idx="3">
+            <a:schemeClr val="accent1"/>
+          </a:fillRef>
+          <a:effectRef idx="2">
+            <a:schemeClr val="accent1"/>
+          </a:effectRef>
+          <a:fontRef idx="minor">
+            <a:schemeClr val="lt1"/>
+          </a:fontRef>
+        </p:style>
+        <p:txBody>
+          <a:bodyPr rtlCol="0" anchor="ctr"/>
+          <a:lstStyle/>
+          <a:p>
+            <a:pPr algn="ctr"/>
+          </a:p>
+        </p:txBody>
+      </p:sp>
+      <p:sp>
+        <p:nvSpPr>
+          <p:cNvPr id="8" name="TextBox 7"/>
           <p:cNvSpPr txBox="1"/>
           <p:nvPr/>
         </p:nvSpPr>
         <p:spPr>
           <a:xfrm>
-            <a:off x="822960" y="1920240"/>
+            <a:off x="822960" y="1965960"/>
             <a:ext cx="4983480" cy="4206240"/>
           </a:xfrm>
           <a:prstGeom prst="rect">
@@ -9861,17 +10860,17 @@
           <a:p>
             <a:pPr>
               <a:spcAft>
-                <a:spcPts val="1000"/>
+                <a:spcPts val="1100"/>
               </a:spcAft>
             </a:pPr>
             <a:r>
               <a:rPr sz="1600" b="1" i="0">
                 <a:solidFill>
-                  <a:srgbClr val="2E3A80"/>
-                </a:solidFill>
-                <a:latin typeface="Montserrat"/>
-              </a:rPr>
-              <a:t>•  </a:t>
+                  <a:srgbClr val="E8801A"/>
+                </a:solidFill>
+                <a:latin typeface="Montserrat"/>
+              </a:rPr>
+              <a:t>▸  </a:t>
             </a:r>
             <a:r>
               <a:rPr sz="1600" b="0" i="0">
@@ -9880,23 +10879,23 @@
                 </a:solidFill>
                 <a:latin typeface="Montserrat"/>
               </a:rPr>
-              <a:t>Aparatos sin norma específica</a:t>
+              <a:t>Indelebilidad, corrosión y adherencia</a:t>
             </a:r>
           </a:p>
           <a:p>
             <a:pPr>
               <a:spcAft>
-                <a:spcPts val="1000"/>
+                <a:spcPts val="1100"/>
               </a:spcAft>
             </a:pPr>
             <a:r>
               <a:rPr sz="1600" b="1" i="0">
                 <a:solidFill>
-                  <a:srgbClr val="2E3A80"/>
-                </a:solidFill>
-                <a:latin typeface="Montserrat"/>
-              </a:rPr>
-              <a:t>•  </a:t>
+                  <a:srgbClr val="E8801A"/>
+                </a:solidFill>
+                <a:latin typeface="Montserrat"/>
+              </a:rPr>
+              <a:t>▸  </a:t>
             </a:r>
             <a:r>
               <a:rPr sz="1600" b="0" i="0">
@@ -9905,23 +10904,23 @@
                 </a:solidFill>
                 <a:latin typeface="Montserrat"/>
               </a:rPr>
-              <a:t>Requisitos y pruebas mínimas</a:t>
+              <a:t>Todo con la UNE 60750</a:t>
             </a:r>
           </a:p>
           <a:p>
             <a:pPr>
               <a:spcAft>
-                <a:spcPts val="1000"/>
+                <a:spcPts val="1100"/>
               </a:spcAft>
             </a:pPr>
             <a:r>
               <a:rPr sz="1600" b="1" i="0">
                 <a:solidFill>
-                  <a:srgbClr val="2E3A80"/>
-                </a:solidFill>
-                <a:latin typeface="Montserrat"/>
-              </a:rPr>
-              <a:t>•  </a:t>
+                  <a:srgbClr val="E8801A"/>
+                </a:solidFill>
+                <a:latin typeface="Montserrat"/>
+              </a:rPr>
+              <a:t>▸  </a:t>
             </a:r>
             <a:r>
               <a:rPr sz="1600" b="0" i="0">
@@ -9930,14 +10929,14 @@
                 </a:solidFill>
                 <a:latin typeface="Montserrat"/>
               </a:rPr>
-              <a:t>Excluye homologados que cambian de familia</a:t>
-            </a:r>
-          </a:p>
-        </p:txBody>
-      </p:sp>
-      <p:sp>
-        <p:nvSpPr>
-          <p:cNvPr id="8" name="imgph" descr="IMGQ:gas appliance safety inspection"/>
+              <a:t>Resiste frotamiento, humedad y calor</a:t>
+            </a:r>
+          </a:p>
+        </p:txBody>
+      </p:sp>
+      <p:sp>
+        <p:nvSpPr>
+          <p:cNvPr id="9" name="imgph" descr="IMGQ:durability testing metal plate"/>
           <p:cNvSpPr/>
           <p:nvPr/>
         </p:nvSpPr>
@@ -9983,7 +10982,7 @@
       </p:sp>
       <p:sp>
         <p:nvSpPr>
-          <p:cNvPr id="9" name="TextBox 8"/>
+          <p:cNvPr id="10" name="TextBox 9"/>
           <p:cNvSpPr txBox="1"/>
           <p:nvPr/>
         </p:nvSpPr>
@@ -10023,7 +11022,7 @@
                 </a:solidFill>
                 <a:latin typeface="Montserrat"/>
               </a:rPr>
-              <a:t>gas appliance safety inspection</a:t>
+              <a:t>durability testing metal plate</a:t>
             </a:r>
           </a:p>
         </p:txBody>
@@ -10120,7 +11119,7 @@
                 </a:solidFill>
                 <a:latin typeface="Montserrat"/>
               </a:rPr>
-              <a:t>009 / 015</a:t>
+              <a:t>009 / 016</a:t>
             </a:r>
           </a:p>
         </p:txBody>
@@ -10168,7 +11167,7 @@
         <p:spPr>
           <a:xfrm>
             <a:off x="822960" y="457200"/>
-            <a:ext cx="8229600" cy="365760"/>
+            <a:ext cx="10058400" cy="365760"/>
           </a:xfrm>
           <a:prstGeom prst="rect">
             <a:avLst/>
@@ -10182,13 +11181,13 @@
           <a:lstStyle/>
           <a:p>
             <a:r>
-              <a:rPr sz="1200" b="1" i="0">
-                <a:solidFill>
-                  <a:srgbClr val="64748B"/>
-                </a:solidFill>
-                <a:latin typeface="Montserrat"/>
-              </a:rPr>
-              <a:t>ANEXO 3 · 2.1-2.2</a:t>
+              <a:rPr sz="1300" b="1" i="0">
+                <a:solidFill>
+                  <a:srgbClr val="E8801A"/>
+                </a:solidFill>
+                <a:latin typeface="Montserrat"/>
+              </a:rPr>
+              <a:t>ANEXO 3 · CAMPO DE APLICACIÓN</a:t>
             </a:r>
           </a:p>
         </p:txBody>
@@ -10216,26 +11215,70 @@
           <a:lstStyle/>
           <a:p>
             <a:r>
-              <a:rPr sz="2700" b="1" i="0">
+              <a:rPr sz="2800" b="1" i="0">
                 <a:solidFill>
                   <a:srgbClr val="1E2761"/>
                 </a:solidFill>
                 <a:latin typeface="Montserrat"/>
               </a:rPr>
-              <a:t>Condiciones generales y materiales</a:t>
-            </a:r>
-          </a:p>
-        </p:txBody>
-      </p:sp>
-      <p:sp>
-        <p:nvSpPr>
-          <p:cNvPr id="7" name="TextBox 6"/>
+              <a:t>La red de seguridad</a:t>
+            </a:r>
+          </a:p>
+        </p:txBody>
+      </p:sp>
+      <p:sp>
+        <p:nvSpPr>
+          <p:cNvPr id="7" name="Rounded Rectangle 6"/>
+          <p:cNvSpPr/>
+          <p:nvPr/>
+        </p:nvSpPr>
+        <p:spPr>
+          <a:xfrm>
+            <a:off x="868680" y="1627632"/>
+            <a:ext cx="2011680" cy="73152"/>
+          </a:xfrm>
+          <a:prstGeom prst="roundRect">
+            <a:avLst/>
+          </a:prstGeom>
+          <a:solidFill>
+            <a:srgbClr val="E8801A"/>
+          </a:solidFill>
+          <a:ln>
+            <a:noFill/>
+          </a:ln>
+          <a:effectLst/>
+        </p:spPr>
+        <p:style>
+          <a:lnRef idx="1">
+            <a:schemeClr val="accent1"/>
+          </a:lnRef>
+          <a:fillRef idx="3">
+            <a:schemeClr val="accent1"/>
+          </a:fillRef>
+          <a:effectRef idx="2">
+            <a:schemeClr val="accent1"/>
+          </a:effectRef>
+          <a:fontRef idx="minor">
+            <a:schemeClr val="lt1"/>
+          </a:fontRef>
+        </p:style>
+        <p:txBody>
+          <a:bodyPr rtlCol="0" anchor="ctr"/>
+          <a:lstStyle/>
+          <a:p>
+            <a:pPr algn="ctr"/>
+          </a:p>
+        </p:txBody>
+      </p:sp>
+      <p:sp>
+        <p:nvSpPr>
+          <p:cNvPr id="8" name="TextBox 7"/>
           <p:cNvSpPr txBox="1"/>
           <p:nvPr/>
         </p:nvSpPr>
         <p:spPr>
           <a:xfrm>
-            <a:off x="822960" y="1920240"/>
+            <a:off x="822960" y="1965960"/>
             <a:ext cx="4983480" cy="4206240"/>
           </a:xfrm>
           <a:prstGeom prst="rect">
@@ -10251,17 +11294,17 @@
           <a:p>
             <a:pPr>
               <a:spcAft>
-                <a:spcPts val="1000"/>
+                <a:spcPts val="1100"/>
               </a:spcAft>
             </a:pPr>
             <a:r>
               <a:rPr sz="1600" b="1" i="0">
                 <a:solidFill>
-                  <a:srgbClr val="2E3A80"/>
-                </a:solidFill>
-                <a:latin typeface="Montserrat"/>
-              </a:rPr>
-              <a:t>•  </a:t>
+                  <a:srgbClr val="E8801A"/>
+                </a:solidFill>
+                <a:latin typeface="Montserrat"/>
+              </a:rPr>
+              <a:t>▸  </a:t>
             </a:r>
             <a:r>
               <a:rPr sz="1600" b="0" i="0">
@@ -10270,23 +11313,23 @@
                 </a:solidFill>
                 <a:latin typeface="Montserrat"/>
               </a:rPr>
-              <a:t>Seguridad total en uso normal</a:t>
+              <a:t>Aparatos sin norma específica</a:t>
             </a:r>
           </a:p>
           <a:p>
             <a:pPr>
               <a:spcAft>
-                <a:spcPts val="1000"/>
+                <a:spcPts val="1100"/>
               </a:spcAft>
             </a:pPr>
             <a:r>
               <a:rPr sz="1600" b="1" i="0">
                 <a:solidFill>
-                  <a:srgbClr val="2E3A80"/>
-                </a:solidFill>
-                <a:latin typeface="Montserrat"/>
-              </a:rPr>
-              <a:t>•  </a:t>
+                  <a:srgbClr val="E8801A"/>
+                </a:solidFill>
+                <a:latin typeface="Montserrat"/>
+              </a:rPr>
+              <a:t>▸  </a:t>
             </a:r>
             <a:r>
               <a:rPr sz="1600" b="0" i="0">
@@ -10295,23 +11338,23 @@
                 </a:solidFill>
                 <a:latin typeface="Montserrat"/>
               </a:rPr>
-              <a:t>Materiales: mecánica, química, térmica</a:t>
+              <a:t>Requisitos y pruebas mínimas</a:t>
             </a:r>
           </a:p>
           <a:p>
             <a:pPr>
               <a:spcAft>
-                <a:spcPts val="1000"/>
+                <a:spcPts val="1100"/>
               </a:spcAft>
             </a:pPr>
             <a:r>
               <a:rPr sz="1600" b="1" i="0">
                 <a:solidFill>
-                  <a:srgbClr val="2E3A80"/>
-                </a:solidFill>
-                <a:latin typeface="Montserrat"/>
-              </a:rPr>
-              <a:t>•  </a:t>
+                  <a:srgbClr val="E8801A"/>
+                </a:solidFill>
+                <a:latin typeface="Montserrat"/>
+              </a:rPr>
+              <a:t>▸  </a:t>
             </a:r>
             <a:r>
               <a:rPr sz="1600" b="0" i="0">
@@ -10320,14 +11363,14 @@
                 </a:solidFill>
                 <a:latin typeface="Montserrat"/>
               </a:rPr>
-              <a:t>Propiedades garantizadas por el fabricante</a:t>
-            </a:r>
-          </a:p>
-        </p:txBody>
-      </p:sp>
-      <p:sp>
-        <p:nvSpPr>
-          <p:cNvPr id="8" name="imgph" descr="IMGQ:stainless steel burner material"/>
+              <a:t>Excluye homologados que cambian de familia</a:t>
+            </a:r>
+          </a:p>
+        </p:txBody>
+      </p:sp>
+      <p:sp>
+        <p:nvSpPr>
+          <p:cNvPr id="9" name="imgph" descr="IMGQ:gas appliance safety inspection"/>
           <p:cNvSpPr/>
           <p:nvPr/>
         </p:nvSpPr>
@@ -10373,7 +11416,7 @@
       </p:sp>
       <p:sp>
         <p:nvSpPr>
-          <p:cNvPr id="9" name="TextBox 8"/>
+          <p:cNvPr id="10" name="TextBox 9"/>
           <p:cNvSpPr txBox="1"/>
           <p:nvPr/>
         </p:nvSpPr>
@@ -10413,7 +11456,7 @@
                 </a:solidFill>
                 <a:latin typeface="Montserrat"/>
               </a:rPr>
-              <a:t>stainless steel burner material</a:t>
+              <a:t>gas appliance safety inspection</a:t>
             </a:r>
           </a:p>
         </p:txBody>

--- a/Curso Gas B/05 - ITC-ICG 08 - Aparatos de gas/05 - ITC-ICG 08 - Aparatos de gas - Vídeo 4.pptx
+++ b/Curso Gas B/05 - ITC-ICG 08 - Aparatos de gas/05 - ITC-ICG 08 - Aparatos de gas - Vídeo 4.pptx
@@ -21,6 +21,10 @@
     <p:sldId id="269" r:id="rId21"/>
     <p:sldId id="270" r:id="rId22"/>
     <p:sldId id="271" r:id="rId23"/>
+    <p:sldId id="272" r:id="rId24"/>
+    <p:sldId id="273" r:id="rId25"/>
+    <p:sldId id="274" r:id="rId26"/>
+    <p:sldId id="275" r:id="rId27"/>
   </p:sldIdLst>
   <p:sldSz cx="12191695" cy="6858000" type="screen4x3"/>
   <p:notesSz cx="6858000" cy="9144000"/>
@@ -592,12 +596,12 @@
           <a:lstStyle/>
           <a:p>
             <a:r>
-              <a:t>N1: ¿Con qué idea base arranca el anexo tres?</a:t>
-            </a:r>
-          </a:p>
-          <a:p>
-            <a:r>
-              <a:t>N2: Con dos, sencillas de entender. La primera: el diseño y la fabricación deben ser tales que el aparato funcione con seguridad total y no entrañe peligro para las personas, los animales domésticos ni los bienes, siempre que se use en condiciones normales de funcionamiento, esas tres patas que ya conoces del primer vídeo. La segunda: los materiales deben ser adecuados y resistentes a las condiciones mecánicas, químicas y térmicas a las que se sometan, y sus propiedades importantes para la seguridad las garantiza el fabricante o el proveedor. Y un detalle: estas prescripciones valen también para los equipos componentes cuando existe el riesgo correspondiente.</a:t>
+              <a:t>N1: ¿Por qué esa norma?</a:t>
+            </a:r>
+          </a:p>
+          <a:p>
+            <a:r>
+              <a:t>N2: Porque la ITC remite las tres cualidades de la placa, indelebilidad, corrosión y adherencia, a la misma norma, la une sesenta mil setecientos cincuenta. El truco: la parte siete es de conexión, la nueve mil uno es de calidad y la cuatrocientos treinta y siete es de gases; la de la placa es la sesenta mil setecientos cincuenta.</a:t>
             </a:r>
           </a:p>
         </p:txBody>
@@ -667,12 +671,12 @@
           <a:lstStyle/>
           <a:p>
             <a:r>
-              <a:t>N1: Son veinte puntos. ¿Cómo los digiero sin perderme?</a:t>
-            </a:r>
-          </a:p>
-          <a:p>
-            <a:r>
-              <a:t>N2: No los memorices sueltos: agrúpalos en seis ideas y colocas cualquiera. Uno, aguantar el uso: sin desajuste, deformación ni rotura, y resistiendo la presión. Dos, sobrevivir a imprevistos: la condensación, un incendio de origen externo, y los cortes o fluctuaciones de la energía auxiliar, sin que nada de eso sea fuente de peligro. Tres, nada de fugas peligrosas: ni al encender, ni acumuladas. Cuatro, fallar sin peligro: si se rompe un dispositivo de seguridad, control o regulación, no debe haber peligro. Cinco, encender y quemar bien: encendido suave y cruzado, llama estable, combustión sin escapes. Y seis, no quemar al usuario: las temperaturas de mandos y superficies próximas se mantienen controladas. Seis cajones, y cada punto cae en uno.</a:t>
+              <a:t>N1: ¿Cuándo entra en juego el anexo tres?</a:t>
+            </a:r>
+          </a:p>
+          <a:p>
+            <a:r>
+              <a:t>N2: Recuerda la lógica del apartado tres, la de la conformidad: primero la norma UNE o EN, y si no hay, el anexo tres. Pues este anexo es justo ese plan B: establece los requisitos y las pruebas para certificar un aparato huérfano de norma, uno para el que no existe una norma específica. Y tiene una exclusión que tiene su lógica: quedan fuera los aparatos ya homologados que vayan a usar un gas de distinta familia, siempre que ese cambio ya estuviera considerado en la homologación inicial. Si el cambio ya estaba previsto, no hay que pasar otra vez por aquí.</a:t>
             </a:r>
           </a:p>
         </p:txBody>
@@ -742,12 +746,12 @@
           <a:lstStyle/>
           <a:p>
             <a:r>
-              <a:t>N1: ¿Cuál es el punto que más cae del anexo tres?</a:t>
-            </a:r>
-          </a:p>
-          <a:p>
-            <a:r>
-              <a:t>N2: El dos, tres, quince, y no es casualidad, porque enlaza todo el tema. Los aparatos destinados a usarse en locales disponen de un dispositivo específico que evita la acumulación peligrosa de gas no quemado en el local. Y los que no llevan ese dispositivo solo se pueden usar en locales con ventilación suficiente, o son de uso exclusivo al aire libre. Fíjate en que es el mismo criterio que ya viste en el manual técnico del primer vídeo y en las advertencias del aparato y del embalaje: todo encaja como un puzle. En la práctica, este punto es lo que evita las fugas acumuladas, el revoco de humos y el monóxido de carbono.</a:t>
+              <a:t>N1: ¿Con qué idea base arranca el anexo tres?</a:t>
+            </a:r>
+          </a:p>
+          <a:p>
+            <a:r>
+              <a:t>N2: Con dos, sencillas de entender. La primera: el diseño y la fabricación deben ser tales que el aparato funcione con seguridad total y no entrañe peligro para las personas, los animales domésticos ni los bienes, siempre que se use en condiciones normales de funcionamiento, esas tres patas que ya conoces del primer vídeo. La segunda: los materiales deben ser adecuados y resistentes a las condiciones mecánicas, químicas y térmicas a las que se sometan, y sus propiedades importantes para la seguridad las garantiza el fabricante o el proveedor. Y un detalle: estas prescripciones valen también para los equipos componentes cuando existe el riesgo correspondiente.</a:t>
             </a:r>
           </a:p>
         </p:txBody>
@@ -817,12 +821,12 @@
           <a:lstStyle/>
           <a:p>
             <a:r>
-              <a:t>N1: ¿Dónde se prueba que el aparato no tiene fugas?</a:t>
-            </a:r>
-          </a:p>
-          <a:p>
-            <a:r>
-              <a:t>N2: Ojo al tramo exacto, porque el examen lo pregunta. Se comprueba la estanquidad del circuito de gas entre la llave del aparato y el quemador, a la presión máxima de utilización. Y además, que no existe fuga interior a través de las válvulas de corte, es decir, que cuando están cerradas no dejan pasar ni una burbuja de gas. Estanquidad, traducido, es que el gas no se escape por ningún lado. Es la garantía de que el aparato retiene el gas tanto por fuera como por dentro; esta es la prueba que caza las fugas.</a:t>
+              <a:t>N1: Son veinte puntos. ¿Cómo los digiero sin perderme?</a:t>
+            </a:r>
+          </a:p>
+          <a:p>
+            <a:r>
+              <a:t>N2: No los memorices sueltos: agrúpalos en seis ideas y colocas cualquiera. Uno, aguantar el uso: sin desajuste, deformación ni rotura, y resistiendo la presión. Dos, sobrevivir a imprevistos: la condensación, un incendio de origen externo, y los cortes o fluctuaciones de la energía auxiliar, sin que nada de eso sea fuente de peligro. Tres, nada de fugas peligrosas: ni al encender, ni acumuladas. Cuatro, fallar sin peligro: si se rompe un dispositivo de seguridad, control o regulación, no debe haber peligro. Cinco, encender y quemar bien: encendido suave y cruzado, llama estable, combustión sin escapes. Y seis, no quemar al usuario: las temperaturas de mandos y superficies próximas se mantienen controladas. Seis cajones, y cada punto cae en uno.</a:t>
             </a:r>
           </a:p>
         </p:txBody>
@@ -892,12 +896,12 @@
           <a:lstStyle/>
           <a:p>
             <a:r>
-              <a:t>N1: ¿Qué se comprueba con el aparato ya trabajando?</a:t>
-            </a:r>
-          </a:p>
-          <a:p>
-            <a:r>
-              <a:t>N2: Dos bloques, y ayuda separarlos. El arranque: que prenda bien, con un barrido eficaz de la cámara si hace falta, encendido e interencendido correctos, sin fenómenos anómalos en la estabilidad de las llamas ni golpes de presión en el hogar ni en la instalación, respetando las secuencias del programador y los tiempos máximos de seguridad. Y la marcha: que los dispositivos hagan su trabajo, el control de llama, el control de presión de gas y de aire, el control de tiro, el consumo calorífico y el análisis de los productos de la combustión al consumo nominal. Mientras la estanquidad cazaba las fugas, estas pruebas cazan la mala combustión y el monóxido de carbono.</a:t>
+              <a:t>N1: ¿Cuál es el punto que más cae del anexo tres?</a:t>
+            </a:r>
+          </a:p>
+          <a:p>
+            <a:r>
+              <a:t>N2: El dos, tres, quince, y no es casualidad, porque enlaza todo el tema. Los aparatos destinados a usarse en locales disponen de un dispositivo específico que evita la acumulación peligrosa de gas no quemado en el local. Y los que no llevan ese dispositivo solo se pueden usar en locales con ventilación suficiente, o son de uso exclusivo al aire libre. Fíjate en que es el mismo criterio que ya viste en el manual técnico del primer vídeo y en las advertencias del aparato y del embalaje: todo encaja como un puzle. En la práctica, este punto es lo que evita las fugas acumuladas, el revoco de humos y el monóxido de carbono.</a:t>
             </a:r>
           </a:p>
         </p:txBody>
@@ -967,12 +971,12 @@
           <a:lstStyle/>
           <a:p>
             <a:r>
-              <a:t>N1: ¿Por qué importan tanto los tiempos máximos de seguridad?</a:t>
-            </a:r>
-          </a:p>
-          <a:p>
-            <a:r>
-              <a:t>N2: Porque son críticos, y por eso aparecen dos veces, en el encendido y en la marcha. El tiempo máximo de seguridad es lo que el aparato puede tardar en cortar el gas si algo va mal: si no prende, si se apaga la llama, si falla el tiro. Si tardara de más, se acumularía gas sin quemar y tendrías el peligro dentro de casa. Que una válvula automática cierre a tiempo ante un fallo detectado es de lo más importante que se prueba. Y como remate, un control visual: que ni el elemento receptor ni el equipo de combustión se hayan deformado o deteriorado, y que los marcados e instrucciones sigan legibles. Todo tiene que quedar tal y como promete la placa.</a:t>
+              <a:t>N1: ¿Dónde se prueba que el aparato no tiene fugas?</a:t>
+            </a:r>
+          </a:p>
+          <a:p>
+            <a:r>
+              <a:t>N2: Ojo al tramo exacto, porque el examen lo pregunta. Se comprueba la estanquidad del circuito de gas entre la llave del aparato y el quemador, a la presión máxima de utilización. Y además, que no existe fuga interior a través de las válvulas de corte, es decir, que cuando están cerradas no dejan pasar ni una burbuja de gas. Estanquidad, traducido, es que el gas no se escape por ningún lado. Es la garantía de que el aparato retiene el gas tanto por fuera como por dentro; esta es la prueba que caza las fugas.</a:t>
             </a:r>
           </a:p>
         </p:txBody>
@@ -1042,22 +1046,237 @@
           <a:lstStyle/>
           <a:p>
             <a:r>
-              <a:t>N1: Es el último vídeo del tema. ¿Cómo lo cierro en la cabeza?</a:t>
-            </a:r>
-          </a:p>
-          <a:p>
-            <a:r>
-              <a:t>N2: Reconstruyamos el hilo completo, porque hoy cierras la ITC entera. En este vídeo has aprendido dos cosas. Una, la placa: es el DNI del aparato, visible, legible e indeleble, y de ella lees fabricante e importador, marca y modelo, número de serie, categoría del aparato, gas y presión de reglaje, consumo en kilovatios sobre PCI y datos eléctricos; y toda ella, indelebilidad, corrosión y adherencia, se verifica con una sola norma, la UNE sesenta mil setecientos cincuenta, porque la placa tiene que durar tanto como el aparato. Dos, el anexo tres, la red de seguridad para aparatos sin norma propia: veinte prescripciones que agrupamos en seis ideas, con el punto de oro dos tres quince, el dispositivo anti-acumulación o, si no lo lleva, solo local ventilado o exterior; y las pruebas, la de estanquidad, entre la llave y el quemador a presión máxima, que caza las fugas, y las de funcionamiento, que cazan la mala combustión y el monóxido de carbono, con la válvula automática cortando a tiempo.</a:t>
-            </a:r>
-          </a:p>
-          <a:p>
-            <a:r>
-              <a:t>N1: ¿Y cómo se traduce todo el tema en el examen y en la obra?</a:t>
-            </a:r>
-          </a:p>
-          <a:p>
-            <a:r>
-              <a:t>N2: Enlázalo con lo anterior, que ahí está la fuerza. En el vídeo uno viste qué exige la norma de fábrica; en el dos, cómo se clasifica, conecta y arranca un aparato, con su certificado de puesta en marcha; en el tres, quién y cómo certifica que es de fiar; y hoy, cómo se marca y qué pruebas de seguridad supera. En el examen todo esto cae cruzado: la placa con el anexo dos, las pruebas con el anexo tres, el dos tres quince con las advertencias. En la obra, es tu oficio entero: llega el aparato, lees su placa, lo conectas y lo arrancas, compruebas la combustión con el analizador y firmas el certificado. Hoy ya lees un aparato como un profesional, de la placa al ticket del análisis de combustión. Enhorabuena: has cerrado la ITC-ICG cero ocho de principio a fin, y eres mucho más gasista que cuando empezaste el tema.</a:t>
+              <a:t>N1: Un tramo muy concreto que el examen pregunta tal cual.</a:t>
+            </a:r>
+          </a:p>
+          <a:p>
+            <a:r>
+              <a:t>N2: Piensa en el circuito interno del aparato, no en la instalación de la casa. ¿Dónde empieza y dónde acaba ese tramo?</a:t>
+            </a:r>
+          </a:p>
+        </p:txBody>
+      </p:sp>
+      <p:sp>
+        <p:nvSpPr>
+          <p:cNvPr id="4" name="Slide Number Placeholder 3"/>
+          <p:cNvSpPr>
+            <a:spLocks noGrp="1"/>
+          </p:cNvSpPr>
+          <p:nvPr>
+            <p:ph type="sldNum" idx="5" sz="quarter"/>
+          </p:nvPr>
+        </p:nvSpPr>
+        <p:spPr/>
+      </p:sp>
+    </p:spTree>
+  </p:cSld>
+  <p:clrMapOvr>
+    <a:masterClrMapping/>
+  </p:clrMapOvr>
+</p:notes>
+</file>
+
+<file path=ppt/notesSlides/notesSlide17.xml><?xml version="1.0" encoding="utf-8"?>
+<p:notes xmlns:a="http://schemas.openxmlformats.org/drawingml/2006/main" xmlns:p="http://schemas.openxmlformats.org/presentationml/2006/main" xmlns:r="http://schemas.openxmlformats.org/officeDocument/2006/relationships">
+  <p:cSld>
+    <p:spTree>
+      <p:nvGrpSpPr>
+        <p:cNvPr id="1" name=""/>
+        <p:cNvGrpSpPr/>
+        <p:nvPr/>
+      </p:nvGrpSpPr>
+      <p:grpSpPr>
+        <a:xfrm>
+          <a:off x="0" y="0"/>
+          <a:ext cx="0" cy="0"/>
+          <a:chOff x="0" y="0"/>
+          <a:chExt cx="0" cy="0"/>
+        </a:xfrm>
+      </p:grpSpPr>
+      <p:sp>
+        <p:nvSpPr>
+          <p:cNvPr id="2" name="Slide Image Placeholder 1"/>
+          <p:cNvSpPr>
+            <a:spLocks noGrp="1"/>
+          </p:cNvSpPr>
+          <p:nvPr>
+            <p:ph type="sldImg" idx="2"/>
+          </p:nvPr>
+        </p:nvSpPr>
+        <p:spPr/>
+      </p:sp>
+      <p:sp>
+        <p:nvSpPr>
+          <p:cNvPr id="3" name="Notes Placeholder 2"/>
+          <p:cNvSpPr>
+            <a:spLocks noGrp="1"/>
+          </p:cNvSpPr>
+          <p:nvPr>
+            <p:ph type="body" idx="3" sz="quarter"/>
+          </p:nvPr>
+        </p:nvSpPr>
+        <p:spPr/>
+        <p:txBody>
+          <a:bodyPr/>
+          <a:lstStyle/>
+          <a:p>
+            <a:r>
+              <a:t>N1: ¿Por qué ese tramo?</a:t>
+            </a:r>
+          </a:p>
+          <a:p>
+            <a:r>
+              <a:t>N2: Porque la prueba de estanquidad va entre la llave del aparato y el quemador, a presión máxima de utilización, y además comprueba que las válvulas de corte no dejen fuga interior. El truco: es el circuito de gas dentro del aparato, no la instalación receptora entera.</a:t>
+            </a:r>
+          </a:p>
+        </p:txBody>
+      </p:sp>
+      <p:sp>
+        <p:nvSpPr>
+          <p:cNvPr id="4" name="Slide Number Placeholder 3"/>
+          <p:cNvSpPr>
+            <a:spLocks noGrp="1"/>
+          </p:cNvSpPr>
+          <p:nvPr>
+            <p:ph type="sldNum" idx="5" sz="quarter"/>
+          </p:nvPr>
+        </p:nvSpPr>
+        <p:spPr/>
+      </p:sp>
+    </p:spTree>
+  </p:cSld>
+  <p:clrMapOvr>
+    <a:masterClrMapping/>
+  </p:clrMapOvr>
+</p:notes>
+</file>
+
+<file path=ppt/notesSlides/notesSlide18.xml><?xml version="1.0" encoding="utf-8"?>
+<p:notes xmlns:a="http://schemas.openxmlformats.org/drawingml/2006/main" xmlns:p="http://schemas.openxmlformats.org/presentationml/2006/main" xmlns:r="http://schemas.openxmlformats.org/officeDocument/2006/relationships">
+  <p:cSld>
+    <p:spTree>
+      <p:nvGrpSpPr>
+        <p:cNvPr id="1" name=""/>
+        <p:cNvGrpSpPr/>
+        <p:nvPr/>
+      </p:nvGrpSpPr>
+      <p:grpSpPr>
+        <a:xfrm>
+          <a:off x="0" y="0"/>
+          <a:ext cx="0" cy="0"/>
+          <a:chOff x="0" y="0"/>
+          <a:chExt cx="0" cy="0"/>
+        </a:xfrm>
+      </p:grpSpPr>
+      <p:sp>
+        <p:nvSpPr>
+          <p:cNvPr id="2" name="Slide Image Placeholder 1"/>
+          <p:cNvSpPr>
+            <a:spLocks noGrp="1"/>
+          </p:cNvSpPr>
+          <p:nvPr>
+            <p:ph type="sldImg" idx="2"/>
+          </p:nvPr>
+        </p:nvSpPr>
+        <p:spPr/>
+      </p:sp>
+      <p:sp>
+        <p:nvSpPr>
+          <p:cNvPr id="3" name="Notes Placeholder 2"/>
+          <p:cNvSpPr>
+            <a:spLocks noGrp="1"/>
+          </p:cNvSpPr>
+          <p:nvPr>
+            <p:ph type="body" idx="3" sz="quarter"/>
+          </p:nvPr>
+        </p:nvSpPr>
+        <p:spPr/>
+        <p:txBody>
+          <a:bodyPr/>
+          <a:lstStyle/>
+          <a:p>
+            <a:r>
+              <a:t>N1: ¿Qué se comprueba con el aparato ya trabajando?</a:t>
+            </a:r>
+          </a:p>
+          <a:p>
+            <a:r>
+              <a:t>N2: Dos bloques, y ayuda separarlos. El arranque: que prenda bien, con un barrido eficaz de la cámara si hace falta, encendido e interencendido correctos, sin fenómenos anómalos en la estabilidad de las llamas ni golpes de presión en el hogar ni en la instalación, respetando las secuencias del programador y los tiempos máximos de seguridad. Y la marcha: que los dispositivos hagan su trabajo, el control de llama, el control de presión de gas y de aire, el control de tiro, el consumo calorífico y el análisis de los productos de la combustión al consumo nominal. Mientras la estanquidad cazaba las fugas, estas pruebas cazan la mala combustión y el monóxido de carbono.</a:t>
+            </a:r>
+          </a:p>
+        </p:txBody>
+      </p:sp>
+      <p:sp>
+        <p:nvSpPr>
+          <p:cNvPr id="4" name="Slide Number Placeholder 3"/>
+          <p:cNvSpPr>
+            <a:spLocks noGrp="1"/>
+          </p:cNvSpPr>
+          <p:nvPr>
+            <p:ph type="sldNum" idx="5" sz="quarter"/>
+          </p:nvPr>
+        </p:nvSpPr>
+        <p:spPr/>
+      </p:sp>
+    </p:spTree>
+  </p:cSld>
+  <p:clrMapOvr>
+    <a:masterClrMapping/>
+  </p:clrMapOvr>
+</p:notes>
+</file>
+
+<file path=ppt/notesSlides/notesSlide19.xml><?xml version="1.0" encoding="utf-8"?>
+<p:notes xmlns:a="http://schemas.openxmlformats.org/drawingml/2006/main" xmlns:p="http://schemas.openxmlformats.org/presentationml/2006/main" xmlns:r="http://schemas.openxmlformats.org/officeDocument/2006/relationships">
+  <p:cSld>
+    <p:spTree>
+      <p:nvGrpSpPr>
+        <p:cNvPr id="1" name=""/>
+        <p:cNvGrpSpPr/>
+        <p:nvPr/>
+      </p:nvGrpSpPr>
+      <p:grpSpPr>
+        <a:xfrm>
+          <a:off x="0" y="0"/>
+          <a:ext cx="0" cy="0"/>
+          <a:chOff x="0" y="0"/>
+          <a:chExt cx="0" cy="0"/>
+        </a:xfrm>
+      </p:grpSpPr>
+      <p:sp>
+        <p:nvSpPr>
+          <p:cNvPr id="2" name="Slide Image Placeholder 1"/>
+          <p:cNvSpPr>
+            <a:spLocks noGrp="1"/>
+          </p:cNvSpPr>
+          <p:nvPr>
+            <p:ph type="sldImg" idx="2"/>
+          </p:nvPr>
+        </p:nvSpPr>
+        <p:spPr/>
+      </p:sp>
+      <p:sp>
+        <p:nvSpPr>
+          <p:cNvPr id="3" name="Notes Placeholder 2"/>
+          <p:cNvSpPr>
+            <a:spLocks noGrp="1"/>
+          </p:cNvSpPr>
+          <p:nvPr>
+            <p:ph type="body" idx="3" sz="quarter"/>
+          </p:nvPr>
+        </p:nvSpPr>
+        <p:spPr/>
+        <p:txBody>
+          <a:bodyPr/>
+          <a:lstStyle/>
+          <a:p>
+            <a:r>
+              <a:t>N1: ¿Por qué importan tanto los tiempos máximos de seguridad?</a:t>
+            </a:r>
+          </a:p>
+          <a:p>
+            <a:r>
+              <a:t>N2: Porque son críticos, y por eso aparecen dos veces, en el encendido y en la marcha. El tiempo máximo de seguridad es lo que el aparato puede tardar en cortar el gas si algo va mal: si no prende, si se apaga la llama, si falla el tiro. Si tardara de más, se acumularía gas sin quemar y tendrías el peligro dentro de casa. Que una válvula automática cierre a tiempo ante un fallo detectado es de lo más importante que se prueba. Y como remate, un control visual: que ni el elemento receptor ni el equipo de combustión se hayan deformado o deteriorado, y que los marcados e instrucciones sigan legibles. Todo tiene que quedar tal y como promete la placa.</a:t>
             </a:r>
           </a:p>
         </p:txBody>
@@ -1157,6 +1376,91 @@
 </p:notes>
 </file>
 
+<file path=ppt/notesSlides/notesSlide20.xml><?xml version="1.0" encoding="utf-8"?>
+<p:notes xmlns:a="http://schemas.openxmlformats.org/drawingml/2006/main" xmlns:p="http://schemas.openxmlformats.org/presentationml/2006/main" xmlns:r="http://schemas.openxmlformats.org/officeDocument/2006/relationships">
+  <p:cSld>
+    <p:spTree>
+      <p:nvGrpSpPr>
+        <p:cNvPr id="1" name=""/>
+        <p:cNvGrpSpPr/>
+        <p:nvPr/>
+      </p:nvGrpSpPr>
+      <p:grpSpPr>
+        <a:xfrm>
+          <a:off x="0" y="0"/>
+          <a:ext cx="0" cy="0"/>
+          <a:chOff x="0" y="0"/>
+          <a:chExt cx="0" cy="0"/>
+        </a:xfrm>
+      </p:grpSpPr>
+      <p:sp>
+        <p:nvSpPr>
+          <p:cNvPr id="2" name="Slide Image Placeholder 1"/>
+          <p:cNvSpPr>
+            <a:spLocks noGrp="1"/>
+          </p:cNvSpPr>
+          <p:nvPr>
+            <p:ph type="sldImg" idx="2"/>
+          </p:nvPr>
+        </p:nvSpPr>
+        <p:spPr/>
+      </p:sp>
+      <p:sp>
+        <p:nvSpPr>
+          <p:cNvPr id="3" name="Notes Placeholder 2"/>
+          <p:cNvSpPr>
+            <a:spLocks noGrp="1"/>
+          </p:cNvSpPr>
+          <p:nvPr>
+            <p:ph type="body" idx="3" sz="quarter"/>
+          </p:nvPr>
+        </p:nvSpPr>
+        <p:spPr/>
+        <p:txBody>
+          <a:bodyPr/>
+          <a:lstStyle/>
+          <a:p>
+            <a:r>
+              <a:t>N1: Es el último vídeo del tema. ¿Cómo lo cierro en la cabeza?</a:t>
+            </a:r>
+          </a:p>
+          <a:p>
+            <a:r>
+              <a:t>N2: Reconstruyamos el hilo completo, porque hoy cierras la ITC entera. En este vídeo has aprendido dos cosas. Una, la placa: es el DNI del aparato, visible, legible e indeleble, y de ella lees fabricante e importador, marca y modelo, número de serie, categoría del aparato, gas y presión de reglaje, consumo en kilovatios sobre PCI y datos eléctricos; y toda ella, indelebilidad, corrosión y adherencia, se verifica con una sola norma, la UNE sesenta mil setecientos cincuenta, porque la placa tiene que durar tanto como el aparato. Dos, el anexo tres, la red de seguridad para aparatos sin norma propia: veinte prescripciones que agrupamos en seis ideas, con el punto de oro dos tres quince, el dispositivo anti-acumulación o, si no lo lleva, solo local ventilado o exterior; y las pruebas, la de estanquidad, entre la llave y el quemador a presión máxima, que caza las fugas, y las de funcionamiento, que cazan la mala combustión y el monóxido de carbono, con la válvula automática cortando a tiempo.</a:t>
+            </a:r>
+          </a:p>
+          <a:p>
+            <a:r>
+              <a:t>N1: ¿Y cómo se traduce todo el tema en el examen y en la obra?</a:t>
+            </a:r>
+          </a:p>
+          <a:p>
+            <a:r>
+              <a:t>N2: Enlázalo con lo anterior, que ahí está la fuerza. En el vídeo uno viste qué exige la norma de fábrica; en el dos, cómo se clasifica, conecta y arranca un aparato, con su certificado de puesta en marcha; en el tres, quién y cómo certifica que es de fiar; y hoy, cómo se marca y qué pruebas de seguridad supera. En el examen todo esto cae cruzado: la placa con el anexo dos, las pruebas con el anexo tres, el dos tres quince con las advertencias. En la obra, es tu oficio entero: llega el aparato, lees su placa, lo conectas y lo arrancas, compruebas la combustión con el analizador y firmas el certificado. Hoy ya lees un aparato como un profesional, de la placa al ticket del análisis de combustión. Enhorabuena: has cerrado la ITC-ICG cero ocho de principio a fin, y eres mucho más gasista que cuando empezaste el tema.</a:t>
+            </a:r>
+          </a:p>
+        </p:txBody>
+      </p:sp>
+      <p:sp>
+        <p:nvSpPr>
+          <p:cNvPr id="4" name="Slide Number Placeholder 3"/>
+          <p:cNvSpPr>
+            <a:spLocks noGrp="1"/>
+          </p:cNvSpPr>
+          <p:nvPr>
+            <p:ph type="sldNum" idx="5" sz="quarter"/>
+          </p:nvPr>
+        </p:nvSpPr>
+        <p:spPr/>
+      </p:sp>
+    </p:spTree>
+  </p:cSld>
+  <p:clrMapOvr>
+    <a:masterClrMapping/>
+  </p:clrMapOvr>
+</p:notes>
+</file>
+
 <file path=ppt/notesSlides/notesSlide3.xml><?xml version="1.0" encoding="utf-8"?>
 <p:notes xmlns:a="http://schemas.openxmlformats.org/drawingml/2006/main" xmlns:p="http://schemas.openxmlformats.org/presentationml/2006/main" xmlns:r="http://schemas.openxmlformats.org/officeDocument/2006/relationships">
   <p:cSld>
@@ -1643,12 +1947,12 @@
           <a:lstStyle/>
           <a:p>
             <a:r>
-              <a:t>N1: ¿Cuándo entra en juego el anexo tres?</a:t>
-            </a:r>
-          </a:p>
-          <a:p>
-            <a:r>
-              <a:t>N2: Recuerda la lógica del apartado tres, la de la conformidad: primero la norma UNE o EN, y si no hay, el anexo tres. Pues este anexo es justo ese plan B: establece los requisitos y las pruebas para certificar un aparato huérfano de norma, uno para el que no existe una norma específica. Y tiene una exclusión que tiene su lógica: quedan fuera los aparatos ya homologados que vayan a usar un gas de distinta familia, siempre que ese cambio ya estuviera considerado en la homologación inicial. Si el cambio ya estaba previsto, no hay que pasar otra vez por aquí.</a:t>
+              <a:t>N1: Una sola norma resume toda la placa.</a:t>
+            </a:r>
+          </a:p>
+          <a:p>
+            <a:r>
+              <a:t>N2: No te dejes liar por otras normas del tema. Piensa en la que garantiza que el marcado no se borra, no se corroe y no se despega.</a:t>
             </a:r>
           </a:p>
         </p:txBody>
@@ -4734,7 +5038,7 @@
       </p:sp>
       <p:sp>
         <p:nvSpPr>
-          <p:cNvPr id="4" name="Rounded Rectangle 3"/>
+          <p:cNvPr id="4" name="Rectangle 3"/>
           <p:cNvSpPr/>
           <p:nvPr/>
         </p:nvSpPr>
@@ -4743,7 +5047,7 @@
             <a:off x="868680" y="2057400"/>
             <a:ext cx="1463040" cy="82296"/>
           </a:xfrm>
-          <a:prstGeom prst="roundRect">
+          <a:prstGeom prst="rect">
             <a:avLst/>
           </a:prstGeom>
           <a:solidFill>
@@ -4860,6 +5164,18 @@
   <p:clrMapOvr>
     <a:masterClrMapping/>
   </p:clrMapOvr>
+  <mc:AlternateContent xmlns:mc="http://schemas.openxmlformats.org/markup-compatibility/2006">
+    <mc:Choice xmlns:p14="http://schemas.microsoft.com/office/powerpoint/2010/main" Requires="p14">
+      <p:transition spd="med" p14:dur="700">
+        <p14:cube dir="l"/>
+      </p:transition>
+    </mc:Choice>
+    <mc:Fallback>
+      <p:transition spd="med">
+        <p:push dir="l"/>
+      </p:transition>
+    </mc:Fallback>
+  </mc:AlternateContent>
 </p:sld>
 </file>
 
@@ -4947,7 +5263,7 @@
                 </a:solidFill>
                 <a:latin typeface="Montserrat"/>
               </a:rPr>
-              <a:t>010 / 016</a:t>
+              <a:t>010 / 020</a:t>
             </a:r>
           </a:p>
         </p:txBody>
@@ -4988,88 +5304,20 @@
       </p:sp>
       <p:sp>
         <p:nvSpPr>
-          <p:cNvPr id="5" name="TextBox 4"/>
-          <p:cNvSpPr txBox="1"/>
-          <p:nvPr/>
-        </p:nvSpPr>
-        <p:spPr>
-          <a:xfrm>
-            <a:off x="822960" y="457200"/>
-            <a:ext cx="10058400" cy="365760"/>
-          </a:xfrm>
-          <a:prstGeom prst="rect">
-            <a:avLst/>
-          </a:prstGeom>
-          <a:noFill/>
-        </p:spPr>
-        <p:txBody>
-          <a:bodyPr wrap="square">
-            <a:spAutoFit/>
-          </a:bodyPr>
-          <a:lstStyle/>
-          <a:p>
-            <a:r>
-              <a:rPr sz="1300" b="1" i="0">
-                <a:solidFill>
-                  <a:srgbClr val="E8801A"/>
-                </a:solidFill>
-                <a:latin typeface="Montserrat"/>
-              </a:rPr>
-              <a:t>ANEXO 3 · 2.1-2.2</a:t>
-            </a:r>
-          </a:p>
-        </p:txBody>
-      </p:sp>
-      <p:sp>
-        <p:nvSpPr>
-          <p:cNvPr id="6" name="TextBox 5"/>
-          <p:cNvSpPr txBox="1"/>
-          <p:nvPr/>
-        </p:nvSpPr>
-        <p:spPr>
-          <a:xfrm>
-            <a:off x="822960" y="868680"/>
-            <a:ext cx="10515600" cy="914400"/>
-          </a:xfrm>
-          <a:prstGeom prst="rect">
-            <a:avLst/>
-          </a:prstGeom>
-          <a:noFill/>
-        </p:spPr>
-        <p:txBody>
-          <a:bodyPr wrap="square">
-            <a:spAutoFit/>
-          </a:bodyPr>
-          <a:lstStyle/>
-          <a:p>
-            <a:r>
-              <a:rPr sz="2800" b="1" i="0">
-                <a:solidFill>
-                  <a:srgbClr val="1E2761"/>
-                </a:solidFill>
-                <a:latin typeface="Montserrat"/>
-              </a:rPr>
-              <a:t>Condiciones generales y materiales</a:t>
-            </a:r>
-          </a:p>
-        </p:txBody>
-      </p:sp>
-      <p:sp>
-        <p:nvSpPr>
-          <p:cNvPr id="7" name="Rounded Rectangle 6"/>
+          <p:cNvPr id="5" name="Rectangle 4"/>
           <p:cNvSpPr/>
           <p:nvPr/>
         </p:nvSpPr>
         <p:spPr>
           <a:xfrm>
-            <a:off x="868680" y="1627632"/>
-            <a:ext cx="2011680" cy="73152"/>
-          </a:xfrm>
-          <a:prstGeom prst="roundRect">
+            <a:off x="0" y="0"/>
+            <a:ext cx="12191695" cy="1143000"/>
+          </a:xfrm>
+          <a:prstGeom prst="rect">
             <a:avLst/>
           </a:prstGeom>
           <a:solidFill>
-            <a:srgbClr val="E8801A"/>
+            <a:srgbClr val="1E8E4B"/>
           </a:solidFill>
           <a:ln>
             <a:noFill/>
@@ -5100,14 +5348,14 @@
       </p:sp>
       <p:sp>
         <p:nvSpPr>
-          <p:cNvPr id="8" name="TextBox 7"/>
+          <p:cNvPr id="6" name="TextBox 5"/>
           <p:cNvSpPr txBox="1"/>
           <p:nvPr/>
         </p:nvSpPr>
         <p:spPr>
           <a:xfrm>
-            <a:off x="822960" y="1965960"/>
-            <a:ext cx="4983480" cy="4206240"/>
+            <a:off x="822960" y="274320"/>
+            <a:ext cx="10515600" cy="640080"/>
           </a:xfrm>
           <a:prstGeom prst="rect">
             <a:avLst/>
@@ -5120,102 +5368,72 @@
           </a:bodyPr>
           <a:lstStyle/>
           <a:p>
-            <a:pPr>
-              <a:spcAft>
-                <a:spcPts val="1100"/>
-              </a:spcAft>
-            </a:pPr>
-            <a:r>
-              <a:rPr sz="1600" b="1" i="0">
-                <a:solidFill>
-                  <a:srgbClr val="E8801A"/>
-                </a:solidFill>
-                <a:latin typeface="Montserrat"/>
-              </a:rPr>
-              <a:t>▸  </a:t>
-            </a:r>
-            <a:r>
-              <a:rPr sz="1600" b="0" i="0">
-                <a:solidFill>
-                  <a:srgbClr val="1B2330"/>
-                </a:solidFill>
-                <a:latin typeface="Montserrat"/>
-              </a:rPr>
-              <a:t>Seguridad total en uso normal</a:t>
-            </a:r>
-          </a:p>
-          <a:p>
-            <a:pPr>
-              <a:spcAft>
-                <a:spcPts val="1100"/>
-              </a:spcAft>
-            </a:pPr>
-            <a:r>
-              <a:rPr sz="1600" b="1" i="0">
-                <a:solidFill>
-                  <a:srgbClr val="E8801A"/>
-                </a:solidFill>
-                <a:latin typeface="Montserrat"/>
-              </a:rPr>
-              <a:t>▸  </a:t>
-            </a:r>
-            <a:r>
-              <a:rPr sz="1600" b="0" i="0">
-                <a:solidFill>
-                  <a:srgbClr val="1B2330"/>
-                </a:solidFill>
-                <a:latin typeface="Montserrat"/>
-              </a:rPr>
-              <a:t>Materiales: mecánica, química, térmica</a:t>
-            </a:r>
-          </a:p>
-          <a:p>
-            <a:pPr>
-              <a:spcAft>
-                <a:spcPts val="1100"/>
-              </a:spcAft>
-            </a:pPr>
-            <a:r>
-              <a:rPr sz="1600" b="1" i="0">
-                <a:solidFill>
-                  <a:srgbClr val="E8801A"/>
-                </a:solidFill>
-                <a:latin typeface="Montserrat"/>
-              </a:rPr>
-              <a:t>▸  </a:t>
-            </a:r>
-            <a:r>
-              <a:rPr sz="1600" b="0" i="0">
-                <a:solidFill>
-                  <a:srgbClr val="1B2330"/>
-                </a:solidFill>
-                <a:latin typeface="Montserrat"/>
-              </a:rPr>
-              <a:t>Propiedades garantizadas por el fabricante</a:t>
-            </a:r>
-          </a:p>
-        </p:txBody>
-      </p:sp>
-      <p:sp>
-        <p:nvSpPr>
-          <p:cNvPr id="9" name="imgph" descr="IMGQ:stainless steel burner material"/>
+            <a:r>
+              <a:rPr sz="2400" b="1" i="0">
+                <a:solidFill>
+                  <a:srgbClr val="FFFFFF"/>
+                </a:solidFill>
+                <a:latin typeface="Montserrat"/>
+              </a:rPr>
+              <a:t>✔  RESPUESTA:  B</a:t>
+            </a:r>
+          </a:p>
+        </p:txBody>
+      </p:sp>
+      <p:sp>
+        <p:nvSpPr>
+          <p:cNvPr id="7" name="TextBox 6"/>
+          <p:cNvSpPr txBox="1"/>
+          <p:nvPr/>
+        </p:nvSpPr>
+        <p:spPr>
+          <a:xfrm>
+            <a:off x="822960" y="1417320"/>
+            <a:ext cx="10515600" cy="914400"/>
+          </a:xfrm>
+          <a:prstGeom prst="rect">
+            <a:avLst/>
+          </a:prstGeom>
+          <a:noFill/>
+        </p:spPr>
+        <p:txBody>
+          <a:bodyPr wrap="square">
+            <a:spAutoFit/>
+          </a:bodyPr>
+          <a:lstStyle/>
+          <a:p>
+            <a:r>
+              <a:rPr sz="1800" b="1" i="0">
+                <a:solidFill>
+                  <a:srgbClr val="64748B"/>
+                </a:solidFill>
+                <a:latin typeface="Montserrat"/>
+              </a:rPr>
+              <a:t>¿Con qué norma se verifican la indelebilidad, la corrosión y la adherencia de la placa de características?</a:t>
+            </a:r>
+          </a:p>
+        </p:txBody>
+      </p:sp>
+      <p:sp>
+        <p:nvSpPr>
+          <p:cNvPr id="8" name="Rounded Rectangle 7"/>
           <p:cNvSpPr/>
           <p:nvPr/>
         </p:nvSpPr>
         <p:spPr>
           <a:xfrm>
-            <a:off x="5806440" y="1051560"/>
-            <a:ext cx="5298947" cy="4629150"/>
+            <a:off x="822960" y="2514600"/>
+            <a:ext cx="10515600" cy="914400"/>
           </a:xfrm>
           <a:prstGeom prst="roundRect">
             <a:avLst/>
           </a:prstGeom>
           <a:solidFill>
-            <a:srgbClr val="F3F6FB"/>
+            <a:srgbClr val="E9F6EE"/>
           </a:solidFill>
           <a:ln w="12700">
             <a:solidFill>
-              <a:srgbClr val="C7D2E6"/>
+              <a:srgbClr val="1E8E4B"/>
             </a:solidFill>
           </a:ln>
           <a:effectLst/>
@@ -5244,14 +5462,14 @@
       </p:sp>
       <p:sp>
         <p:nvSpPr>
-          <p:cNvPr id="10" name="TextBox 9"/>
+          <p:cNvPr id="9" name="TextBox 8"/>
           <p:cNvSpPr txBox="1"/>
           <p:nvPr/>
         </p:nvSpPr>
         <p:spPr>
           <a:xfrm>
-            <a:off x="6080760" y="2726055"/>
-            <a:ext cx="4750307" cy="1280160"/>
+            <a:off x="1097280" y="2697480"/>
+            <a:ext cx="10058400" cy="640080"/>
           </a:xfrm>
           <a:prstGeom prst="rect">
             <a:avLst/>
@@ -5264,27 +5482,66 @@
           </a:bodyPr>
           <a:lstStyle/>
           <a:p>
-            <a:pPr algn="ctr"/>
-            <a:r>
-              <a:rPr sz="1400" b="1" i="0">
-                <a:solidFill>
-                  <a:srgbClr val="64748B"/>
-                </a:solidFill>
-                <a:latin typeface="Montserrat"/>
-              </a:rPr>
-              <a:t>IMAGEN REALISTA</a:t>
-            </a:r>
-          </a:p>
-          <a:p>
-            <a:pPr algn="ctr"/>
-            <a:r>
-              <a:rPr sz="1100" b="0" i="1">
-                <a:solidFill>
-                  <a:srgbClr val="64748B"/>
-                </a:solidFill>
-                <a:latin typeface="Montserrat"/>
-              </a:rPr>
-              <a:t>stainless steel burner material</a:t>
+            <a:r>
+              <a:rPr sz="1800" b="1" i="0">
+                <a:solidFill>
+                  <a:srgbClr val="1E8E4B"/>
+                </a:solidFill>
+                <a:latin typeface="Montserrat"/>
+              </a:rPr>
+              <a:t>B.  </a:t>
+            </a:r>
+            <a:r>
+              <a:rPr sz="1800" b="1" i="0">
+                <a:solidFill>
+                  <a:srgbClr val="1E2761"/>
+                </a:solidFill>
+                <a:latin typeface="Montserrat"/>
+              </a:rPr>
+              <a:t>UNE 60750</a:t>
+            </a:r>
+          </a:p>
+        </p:txBody>
+      </p:sp>
+      <p:sp>
+        <p:nvSpPr>
+          <p:cNvPr id="10" name="TextBox 9"/>
+          <p:cNvSpPr txBox="1"/>
+          <p:nvPr/>
+        </p:nvSpPr>
+        <p:spPr>
+          <a:xfrm>
+            <a:off x="822960" y="3749039"/>
+            <a:ext cx="10515600" cy="2194560"/>
+          </a:xfrm>
+          <a:prstGeom prst="rect">
+            <a:avLst/>
+          </a:prstGeom>
+          <a:noFill/>
+        </p:spPr>
+        <p:txBody>
+          <a:bodyPr wrap="square">
+            <a:spAutoFit/>
+          </a:bodyPr>
+          <a:lstStyle/>
+          <a:p>
+            <a:r>
+              <a:rPr sz="1500" b="1" i="0">
+                <a:solidFill>
+                  <a:srgbClr val="E8801A"/>
+                </a:solidFill>
+                <a:latin typeface="Montserrat"/>
+              </a:rPr>
+              <a:t>Por qué:  </a:t>
+            </a:r>
+            <a:r>
+              <a:rPr sz="1500" b="0" i="0">
+                <a:solidFill>
+                  <a:srgbClr val="1B2330"/>
+                </a:solidFill>
+                <a:latin typeface="Montserrat"/>
+              </a:rPr>
+              <a:t>Toda la placa (indelebilidad de los caracteres, resistencia a la corrosión y adherencia) se comprueba con la UNE 60750.</a:t>
             </a:r>
           </a:p>
         </p:txBody>
@@ -5294,6 +5551,18 @@
   <p:clrMapOvr>
     <a:masterClrMapping/>
   </p:clrMapOvr>
+  <mc:AlternateContent xmlns:mc="http://schemas.openxmlformats.org/markup-compatibility/2006">
+    <mc:Choice xmlns:p14="http://schemas.microsoft.com/office/powerpoint/2010/main" Requires="p14">
+      <p:transition spd="med" p14:dur="700">
+        <p14:cube dir="r"/>
+      </p:transition>
+    </mc:Choice>
+    <mc:Fallback>
+      <p:transition spd="med">
+        <p:push dir="r"/>
+      </p:transition>
+    </mc:Fallback>
+  </mc:AlternateContent>
 </p:sld>
 </file>
 
@@ -5381,7 +5650,7 @@
                 </a:solidFill>
                 <a:latin typeface="Montserrat"/>
               </a:rPr>
-              <a:t>011 / 016</a:t>
+              <a:t>011 / 020</a:t>
             </a:r>
           </a:p>
         </p:txBody>
@@ -5449,7 +5718,7 @@
                 </a:solidFill>
                 <a:latin typeface="Montserrat"/>
               </a:rPr>
-              <a:t>ANEXO 3 · 2.3.1-2.3.20</a:t>
+              <a:t>ANEXO 3 · CAMPO DE APLICACIÓN</a:t>
             </a:r>
           </a:p>
         </p:txBody>
@@ -5483,14 +5752,14 @@
                 </a:solidFill>
                 <a:latin typeface="Montserrat"/>
               </a:rPr>
-              <a:t>Veinte prescripciones, seis ideas</a:t>
-            </a:r>
-          </a:p>
-        </p:txBody>
-      </p:sp>
-      <p:sp>
-        <p:nvSpPr>
-          <p:cNvPr id="7" name="Rounded Rectangle 6"/>
+              <a:t>La red de seguridad</a:t>
+            </a:r>
+          </a:p>
+        </p:txBody>
+      </p:sp>
+      <p:sp>
+        <p:nvSpPr>
+          <p:cNvPr id="7" name="Rectangle 6"/>
           <p:cNvSpPr/>
           <p:nvPr/>
         </p:nvSpPr>
@@ -5499,7 +5768,7 @@
             <a:off x="868680" y="1627632"/>
             <a:ext cx="2011680" cy="73152"/>
           </a:xfrm>
-          <a:prstGeom prst="roundRect">
+          <a:prstGeom prst="rect">
             <a:avLst/>
           </a:prstGeom>
           <a:solidFill>
@@ -5540,8 +5809,8 @@
         </p:nvSpPr>
         <p:spPr>
           <a:xfrm>
-            <a:off x="822960" y="1965960"/>
-            <a:ext cx="4983480" cy="4206240"/>
+            <a:off x="6355080" y="1965960"/>
+            <a:ext cx="5029200" cy="4206240"/>
           </a:xfrm>
           <a:prstGeom prst="rect">
             <a:avLst/>
@@ -5575,7 +5844,7 @@
                 </a:solidFill>
                 <a:latin typeface="Montserrat"/>
               </a:rPr>
-              <a:t>Aguantar el uso, sin roturas</a:t>
+              <a:t>Aparatos sin norma específica</a:t>
             </a:r>
           </a:p>
           <a:p>
@@ -5600,7 +5869,7 @@
                 </a:solidFill>
                 <a:latin typeface="Montserrat"/>
               </a:rPr>
-              <a:t>Sobrevivir a imprevistos (luz, incendio)</a:t>
+              <a:t>Requisitos y pruebas mínimas</a:t>
             </a:r>
           </a:p>
           <a:p>
@@ -5625,71 +5894,21 @@
                 </a:solidFill>
                 <a:latin typeface="Montserrat"/>
               </a:rPr>
-              <a:t>Nada de fugas peligrosas</a:t>
-            </a:r>
-          </a:p>
-          <a:p>
-            <a:pPr>
-              <a:spcAft>
-                <a:spcPts val="1100"/>
-              </a:spcAft>
-            </a:pPr>
-            <a:r>
-              <a:rPr sz="1600" b="1" i="0">
-                <a:solidFill>
-                  <a:srgbClr val="E8801A"/>
-                </a:solidFill>
-                <a:latin typeface="Montserrat"/>
-              </a:rPr>
-              <a:t>▸  </a:t>
-            </a:r>
-            <a:r>
-              <a:rPr sz="1600" b="0" i="0">
-                <a:solidFill>
-                  <a:srgbClr val="1B2330"/>
-                </a:solidFill>
-                <a:latin typeface="Montserrat"/>
-              </a:rPr>
-              <a:t>Fallar sin peligro</a:t>
-            </a:r>
-          </a:p>
-          <a:p>
-            <a:pPr>
-              <a:spcAft>
-                <a:spcPts val="1100"/>
-              </a:spcAft>
-            </a:pPr>
-            <a:r>
-              <a:rPr sz="1600" b="1" i="0">
-                <a:solidFill>
-                  <a:srgbClr val="E8801A"/>
-                </a:solidFill>
-                <a:latin typeface="Montserrat"/>
-              </a:rPr>
-              <a:t>▸  </a:t>
-            </a:r>
-            <a:r>
-              <a:rPr sz="1600" b="0" i="0">
-                <a:solidFill>
-                  <a:srgbClr val="1B2330"/>
-                </a:solidFill>
-                <a:latin typeface="Montserrat"/>
-              </a:rPr>
-              <a:t>Quemar bien; no quemar al usuario</a:t>
-            </a:r>
-          </a:p>
-        </p:txBody>
-      </p:sp>
-      <p:sp>
-        <p:nvSpPr>
-          <p:cNvPr id="9" name="imgph" descr="IMGQ:gas safety valve mechanism"/>
+              <a:t>Excluye homologados que cambian de familia</a:t>
+            </a:r>
+          </a:p>
+        </p:txBody>
+      </p:sp>
+      <p:sp>
+        <p:nvSpPr>
+          <p:cNvPr id="9" name="imgph" descr="IMGQ:gas appliance safety inspection"/>
           <p:cNvSpPr/>
           <p:nvPr/>
         </p:nvSpPr>
         <p:spPr>
           <a:xfrm>
-            <a:off x="5806440" y="1051560"/>
-            <a:ext cx="5298947" cy="4629150"/>
+            <a:off x="822960" y="1965960"/>
+            <a:ext cx="5303520" cy="4572000"/>
           </a:xfrm>
           <a:prstGeom prst="roundRect">
             <a:avLst/>
@@ -5734,8 +5953,8 @@
         </p:nvSpPr>
         <p:spPr>
           <a:xfrm>
-            <a:off x="6080760" y="2726055"/>
-            <a:ext cx="4750307" cy="1280160"/>
+            <a:off x="1097280" y="3611880"/>
+            <a:ext cx="4754880" cy="1280160"/>
           </a:xfrm>
           <a:prstGeom prst="rect">
             <a:avLst/>
@@ -5756,7 +5975,7 @@
                 </a:solidFill>
                 <a:latin typeface="Montserrat"/>
               </a:rPr>
-              <a:t>IMAGEN REALISTA</a:t>
+              <a:t>IMAGEN</a:t>
             </a:r>
           </a:p>
           <a:p>
@@ -5768,7 +5987,7 @@
                 </a:solidFill>
                 <a:latin typeface="Montserrat"/>
               </a:rPr>
-              <a:t>gas safety valve mechanism</a:t>
+              <a:t>gas appliance safety inspection</a:t>
             </a:r>
           </a:p>
         </p:txBody>
@@ -5778,6 +5997,18 @@
   <p:clrMapOvr>
     <a:masterClrMapping/>
   </p:clrMapOvr>
+  <mc:AlternateContent xmlns:mc="http://schemas.openxmlformats.org/markup-compatibility/2006">
+    <mc:Choice xmlns:p14="http://schemas.microsoft.com/office/powerpoint/2010/main" Requires="p14">
+      <p:transition spd="med" p14:dur="700">
+        <p14:cube dir="l"/>
+      </p:transition>
+    </mc:Choice>
+    <mc:Fallback>
+      <p:transition spd="med">
+        <p:push dir="l"/>
+      </p:transition>
+    </mc:Fallback>
+  </mc:AlternateContent>
 </p:sld>
 </file>
 
@@ -5865,7 +6096,7 @@
                 </a:solidFill>
                 <a:latin typeface="Montserrat"/>
               </a:rPr>
-              <a:t>012 / 016</a:t>
+              <a:t>012 / 020</a:t>
             </a:r>
           </a:p>
         </p:txBody>
@@ -5933,7 +6164,7 @@
                 </a:solidFill>
                 <a:latin typeface="Montserrat"/>
               </a:rPr>
-              <a:t>ANEXO 3 · PUNTO DE ORO</a:t>
+              <a:t>ANEXO 3 · 2.1-2.2</a:t>
             </a:r>
           </a:p>
         </p:txBody>
@@ -5967,14 +6198,14 @@
                 </a:solidFill>
                 <a:latin typeface="Montserrat"/>
               </a:rPr>
-              <a:t>El dispositivo del 2.3.15</a:t>
-            </a:r>
-          </a:p>
-        </p:txBody>
-      </p:sp>
-      <p:sp>
-        <p:nvSpPr>
-          <p:cNvPr id="7" name="Rounded Rectangle 6"/>
+              <a:t>Condiciones generales y materiales</a:t>
+            </a:r>
+          </a:p>
+        </p:txBody>
+      </p:sp>
+      <p:sp>
+        <p:nvSpPr>
+          <p:cNvPr id="7" name="Rectangle 6"/>
           <p:cNvSpPr/>
           <p:nvPr/>
         </p:nvSpPr>
@@ -5983,7 +6214,7 @@
             <a:off x="868680" y="1627632"/>
             <a:ext cx="2011680" cy="73152"/>
           </a:xfrm>
-          <a:prstGeom prst="roundRect">
+          <a:prstGeom prst="rect">
             <a:avLst/>
           </a:prstGeom>
           <a:solidFill>
@@ -6025,7 +6256,7 @@
         <p:spPr>
           <a:xfrm>
             <a:off x="822960" y="1965960"/>
-            <a:ext cx="4983480" cy="4206240"/>
+            <a:ext cx="5029200" cy="4206240"/>
           </a:xfrm>
           <a:prstGeom prst="rect">
             <a:avLst/>
@@ -6059,7 +6290,7 @@
                 </a:solidFill>
                 <a:latin typeface="Montserrat"/>
               </a:rPr>
-              <a:t>Interior: dispositivo anti-acumulación</a:t>
+              <a:t>Seguridad total en uso normal</a:t>
             </a:r>
           </a:p>
           <a:p>
@@ -6084,7 +6315,7 @@
                 </a:solidFill>
                 <a:latin typeface="Montserrat"/>
               </a:rPr>
-              <a:t>Sin él: solo local bien ventilado</a:t>
+              <a:t>Materiales: mecánica, química, térmica</a:t>
             </a:r>
           </a:p>
           <a:p>
@@ -6109,21 +6340,21 @@
                 </a:solidFill>
                 <a:latin typeface="Montserrat"/>
               </a:rPr>
-              <a:t>O uso exclusivo al aire libre</a:t>
-            </a:r>
-          </a:p>
-        </p:txBody>
-      </p:sp>
-      <p:sp>
-        <p:nvSpPr>
-          <p:cNvPr id="9" name="imgph" descr="IMGQ:kitchen ventilation grille wall"/>
+              <a:t>Propiedades garantizadas por el fabricante</a:t>
+            </a:r>
+          </a:p>
+        </p:txBody>
+      </p:sp>
+      <p:sp>
+        <p:nvSpPr>
+          <p:cNvPr id="9" name="imgph" descr="IMGQ:stainless steel burner material"/>
           <p:cNvSpPr/>
           <p:nvPr/>
         </p:nvSpPr>
         <p:spPr>
           <a:xfrm>
-            <a:off x="5806440" y="1051560"/>
-            <a:ext cx="5298947" cy="4629150"/>
+            <a:off x="6080760" y="1965960"/>
+            <a:ext cx="5303520" cy="4572000"/>
           </a:xfrm>
           <a:prstGeom prst="roundRect">
             <a:avLst/>
@@ -6168,8 +6399,8 @@
         </p:nvSpPr>
         <p:spPr>
           <a:xfrm>
-            <a:off x="6080760" y="2726055"/>
-            <a:ext cx="4750307" cy="1280160"/>
+            <a:off x="6355080" y="3611880"/>
+            <a:ext cx="4754880" cy="1280160"/>
           </a:xfrm>
           <a:prstGeom prst="rect">
             <a:avLst/>
@@ -6190,7 +6421,7 @@
                 </a:solidFill>
                 <a:latin typeface="Montserrat"/>
               </a:rPr>
-              <a:t>IMAGEN REALISTA</a:t>
+              <a:t>IMAGEN</a:t>
             </a:r>
           </a:p>
           <a:p>
@@ -6202,7 +6433,7 @@
                 </a:solidFill>
                 <a:latin typeface="Montserrat"/>
               </a:rPr>
-              <a:t>kitchen ventilation grille wall</a:t>
+              <a:t>stainless steel burner material</a:t>
             </a:r>
           </a:p>
         </p:txBody>
@@ -6212,6 +6443,18 @@
   <p:clrMapOvr>
     <a:masterClrMapping/>
   </p:clrMapOvr>
+  <mc:AlternateContent xmlns:mc="http://schemas.openxmlformats.org/markup-compatibility/2006">
+    <mc:Choice xmlns:p14="http://schemas.microsoft.com/office/powerpoint/2010/main" Requires="p14">
+      <p:transition spd="med" p14:dur="700">
+        <p14:cube dir="r"/>
+      </p:transition>
+    </mc:Choice>
+    <mc:Fallback>
+      <p:transition spd="med">
+        <p:push dir="r"/>
+      </p:transition>
+    </mc:Fallback>
+  </mc:AlternateContent>
 </p:sld>
 </file>
 
@@ -6299,7 +6542,7 @@
                 </a:solidFill>
                 <a:latin typeface="Montserrat"/>
               </a:rPr>
-              <a:t>013 / 016</a:t>
+              <a:t>013 / 020</a:t>
             </a:r>
           </a:p>
         </p:txBody>
@@ -6367,7 +6610,7 @@
                 </a:solidFill>
                 <a:latin typeface="Montserrat"/>
               </a:rPr>
-              <a:t>ANEXO 3 · 3.1</a:t>
+              <a:t>ANEXO 3 · 2.3.1-2.3.20</a:t>
             </a:r>
           </a:p>
         </p:txBody>
@@ -6401,14 +6644,14 @@
                 </a:solidFill>
                 <a:latin typeface="Montserrat"/>
               </a:rPr>
-              <a:t>Prueba de estanquidad</a:t>
-            </a:r>
-          </a:p>
-        </p:txBody>
-      </p:sp>
-      <p:sp>
-        <p:nvSpPr>
-          <p:cNvPr id="7" name="Rounded Rectangle 6"/>
+              <a:t>Veinte prescripciones, seis ideas</a:t>
+            </a:r>
+          </a:p>
+        </p:txBody>
+      </p:sp>
+      <p:sp>
+        <p:nvSpPr>
+          <p:cNvPr id="7" name="Rectangle 6"/>
           <p:cNvSpPr/>
           <p:nvPr/>
         </p:nvSpPr>
@@ -6417,7 +6660,7 @@
             <a:off x="868680" y="1627632"/>
             <a:ext cx="2011680" cy="73152"/>
           </a:xfrm>
-          <a:prstGeom prst="roundRect">
+          <a:prstGeom prst="rect">
             <a:avLst/>
           </a:prstGeom>
           <a:solidFill>
@@ -6458,8 +6701,8 @@
         </p:nvSpPr>
         <p:spPr>
           <a:xfrm>
-            <a:off x="822960" y="1965960"/>
-            <a:ext cx="4983480" cy="4206240"/>
+            <a:off x="6355080" y="1965960"/>
+            <a:ext cx="5029200" cy="4206240"/>
           </a:xfrm>
           <a:prstGeom prst="rect">
             <a:avLst/>
@@ -6493,7 +6736,7 @@
                 </a:solidFill>
                 <a:latin typeface="Montserrat"/>
               </a:rPr>
-              <a:t>Entre la llave del aparato y el quemador</a:t>
+              <a:t>Aguantar el uso, sin roturas</a:t>
             </a:r>
           </a:p>
           <a:p>
@@ -6518,7 +6761,7 @@
                 </a:solidFill>
                 <a:latin typeface="Montserrat"/>
               </a:rPr>
-              <a:t>A presión máxima de utilización</a:t>
+              <a:t>Sobrevivir a imprevistos (luz, incendio)</a:t>
             </a:r>
           </a:p>
           <a:p>
@@ -6543,21 +6786,71 @@
                 </a:solidFill>
                 <a:latin typeface="Montserrat"/>
               </a:rPr>
-              <a:t>Válvulas de corte: sin fuga interior</a:t>
-            </a:r>
-          </a:p>
-        </p:txBody>
-      </p:sp>
-      <p:sp>
-        <p:nvSpPr>
-          <p:cNvPr id="9" name="imgph" descr="IMGQ:gas pipe pressure test gauge"/>
+              <a:t>Nada de fugas peligrosas</a:t>
+            </a:r>
+          </a:p>
+          <a:p>
+            <a:pPr>
+              <a:spcAft>
+                <a:spcPts val="1100"/>
+              </a:spcAft>
+            </a:pPr>
+            <a:r>
+              <a:rPr sz="1600" b="1" i="0">
+                <a:solidFill>
+                  <a:srgbClr val="E8801A"/>
+                </a:solidFill>
+                <a:latin typeface="Montserrat"/>
+              </a:rPr>
+              <a:t>▸  </a:t>
+            </a:r>
+            <a:r>
+              <a:rPr sz="1600" b="0" i="0">
+                <a:solidFill>
+                  <a:srgbClr val="1B2330"/>
+                </a:solidFill>
+                <a:latin typeface="Montserrat"/>
+              </a:rPr>
+              <a:t>Fallar sin peligro</a:t>
+            </a:r>
+          </a:p>
+          <a:p>
+            <a:pPr>
+              <a:spcAft>
+                <a:spcPts val="1100"/>
+              </a:spcAft>
+            </a:pPr>
+            <a:r>
+              <a:rPr sz="1600" b="1" i="0">
+                <a:solidFill>
+                  <a:srgbClr val="E8801A"/>
+                </a:solidFill>
+                <a:latin typeface="Montserrat"/>
+              </a:rPr>
+              <a:t>▸  </a:t>
+            </a:r>
+            <a:r>
+              <a:rPr sz="1600" b="0" i="0">
+                <a:solidFill>
+                  <a:srgbClr val="1B2330"/>
+                </a:solidFill>
+                <a:latin typeface="Montserrat"/>
+              </a:rPr>
+              <a:t>Quemar bien; no quemar al usuario</a:t>
+            </a:r>
+          </a:p>
+        </p:txBody>
+      </p:sp>
+      <p:sp>
+        <p:nvSpPr>
+          <p:cNvPr id="9" name="imgph" descr="IMGQ:gas safety valve mechanism"/>
           <p:cNvSpPr/>
           <p:nvPr/>
         </p:nvSpPr>
         <p:spPr>
           <a:xfrm>
-            <a:off x="5806440" y="1051560"/>
-            <a:ext cx="5298947" cy="4629150"/>
+            <a:off x="822960" y="1965960"/>
+            <a:ext cx="5303520" cy="4572000"/>
           </a:xfrm>
           <a:prstGeom prst="roundRect">
             <a:avLst/>
@@ -6602,8 +6895,8 @@
         </p:nvSpPr>
         <p:spPr>
           <a:xfrm>
-            <a:off x="6080760" y="2726055"/>
-            <a:ext cx="4750307" cy="1280160"/>
+            <a:off x="1097280" y="3611880"/>
+            <a:ext cx="4754880" cy="1280160"/>
           </a:xfrm>
           <a:prstGeom prst="rect">
             <a:avLst/>
@@ -6624,7 +6917,7 @@
                 </a:solidFill>
                 <a:latin typeface="Montserrat"/>
               </a:rPr>
-              <a:t>IMAGEN REALISTA</a:t>
+              <a:t>IMAGEN</a:t>
             </a:r>
           </a:p>
           <a:p>
@@ -6636,7 +6929,7 @@
                 </a:solidFill>
                 <a:latin typeface="Montserrat"/>
               </a:rPr>
-              <a:t>gas pipe pressure test gauge</a:t>
+              <a:t>gas safety valve mechanism</a:t>
             </a:r>
           </a:p>
         </p:txBody>
@@ -6646,6 +6939,18 @@
   <p:clrMapOvr>
     <a:masterClrMapping/>
   </p:clrMapOvr>
+  <mc:AlternateContent xmlns:mc="http://schemas.openxmlformats.org/markup-compatibility/2006">
+    <mc:Choice xmlns:p14="http://schemas.microsoft.com/office/powerpoint/2010/main" Requires="p14">
+      <p:transition spd="med" p14:dur="700">
+        <p14:cube dir="l"/>
+      </p:transition>
+    </mc:Choice>
+    <mc:Fallback>
+      <p:transition spd="med">
+        <p:push dir="l"/>
+      </p:transition>
+    </mc:Fallback>
+  </mc:AlternateContent>
 </p:sld>
 </file>
 
@@ -6733,7 +7038,7 @@
                 </a:solidFill>
                 <a:latin typeface="Montserrat"/>
               </a:rPr>
-              <a:t>014 / 016</a:t>
+              <a:t>014 / 020</a:t>
             </a:r>
           </a:p>
         </p:txBody>
@@ -6801,7 +7106,7 @@
                 </a:solidFill>
                 <a:latin typeface="Montserrat"/>
               </a:rPr>
-              <a:t>ANEXO 3 · 3.2</a:t>
+              <a:t>ANEXO 3 · PUNTO DE ORO</a:t>
             </a:r>
           </a:p>
         </p:txBody>
@@ -6835,14 +7140,14 @@
                 </a:solidFill>
                 <a:latin typeface="Montserrat"/>
               </a:rPr>
-              <a:t>Pruebas de funcionamiento</a:t>
-            </a:r>
-          </a:p>
-        </p:txBody>
-      </p:sp>
-      <p:sp>
-        <p:nvSpPr>
-          <p:cNvPr id="7" name="Rounded Rectangle 6"/>
+              <a:t>El dispositivo del 2.3.15</a:t>
+            </a:r>
+          </a:p>
+        </p:txBody>
+      </p:sp>
+      <p:sp>
+        <p:nvSpPr>
+          <p:cNvPr id="7" name="Rectangle 6"/>
           <p:cNvSpPr/>
           <p:nvPr/>
         </p:nvSpPr>
@@ -6851,7 +7156,7 @@
             <a:off x="868680" y="1627632"/>
             <a:ext cx="2011680" cy="73152"/>
           </a:xfrm>
-          <a:prstGeom prst="roundRect">
+          <a:prstGeom prst="rect">
             <a:avLst/>
           </a:prstGeom>
           <a:solidFill>
@@ -6893,7 +7198,7 @@
         <p:spPr>
           <a:xfrm>
             <a:off x="822960" y="1965960"/>
-            <a:ext cx="4983480" cy="4206240"/>
+            <a:ext cx="5029200" cy="4206240"/>
           </a:xfrm>
           <a:prstGeom prst="rect">
             <a:avLst/>
@@ -6927,7 +7232,7 @@
                 </a:solidFill>
                 <a:latin typeface="Montserrat"/>
               </a:rPr>
-              <a:t>Encendido: sin golpes de presión</a:t>
+              <a:t>Interior: dispositivo anti-acumulación</a:t>
             </a:r>
           </a:p>
           <a:p>
@@ -6952,7 +7257,7 @@
                 </a:solidFill>
                 <a:latin typeface="Montserrat"/>
               </a:rPr>
-              <a:t>Barrido de cámara y tiempos de seguridad</a:t>
+              <a:t>Sin él: solo local bien ventilado</a:t>
             </a:r>
           </a:p>
           <a:p>
@@ -6977,46 +7282,21 @@
                 </a:solidFill>
                 <a:latin typeface="Montserrat"/>
               </a:rPr>
-              <a:t>Marcha: control de llama, presión y tiro</a:t>
-            </a:r>
-          </a:p>
-          <a:p>
-            <a:pPr>
-              <a:spcAft>
-                <a:spcPts val="1100"/>
-              </a:spcAft>
-            </a:pPr>
-            <a:r>
-              <a:rPr sz="1600" b="1" i="0">
-                <a:solidFill>
-                  <a:srgbClr val="E8801A"/>
-                </a:solidFill>
-                <a:latin typeface="Montserrat"/>
-              </a:rPr>
-              <a:t>▸  </a:t>
-            </a:r>
-            <a:r>
-              <a:rPr sz="1600" b="0" i="0">
-                <a:solidFill>
-                  <a:srgbClr val="1B2330"/>
-                </a:solidFill>
-                <a:latin typeface="Montserrat"/>
-              </a:rPr>
-              <a:t>Consumo y análisis de combustión</a:t>
-            </a:r>
-          </a:p>
-        </p:txBody>
-      </p:sp>
-      <p:sp>
-        <p:nvSpPr>
-          <p:cNvPr id="9" name="imgph" descr="IMGQ:boiler flame ignition sequence"/>
+              <a:t>O uso exclusivo al aire libre</a:t>
+            </a:r>
+          </a:p>
+        </p:txBody>
+      </p:sp>
+      <p:sp>
+        <p:nvSpPr>
+          <p:cNvPr id="9" name="imgph" descr="IMGQ:kitchen ventilation grille wall"/>
           <p:cNvSpPr/>
           <p:nvPr/>
         </p:nvSpPr>
         <p:spPr>
           <a:xfrm>
-            <a:off x="5806440" y="1051560"/>
-            <a:ext cx="5298947" cy="4629150"/>
+            <a:off x="6080760" y="1965960"/>
+            <a:ext cx="5303520" cy="4572000"/>
           </a:xfrm>
           <a:prstGeom prst="roundRect">
             <a:avLst/>
@@ -7061,8 +7341,8 @@
         </p:nvSpPr>
         <p:spPr>
           <a:xfrm>
-            <a:off x="6080760" y="2726055"/>
-            <a:ext cx="4750307" cy="1280160"/>
+            <a:off x="6355080" y="3611880"/>
+            <a:ext cx="4754880" cy="1280160"/>
           </a:xfrm>
           <a:prstGeom prst="rect">
             <a:avLst/>
@@ -7083,7 +7363,7 @@
                 </a:solidFill>
                 <a:latin typeface="Montserrat"/>
               </a:rPr>
-              <a:t>IMAGEN REALISTA</a:t>
+              <a:t>IMAGEN</a:t>
             </a:r>
           </a:p>
           <a:p>
@@ -7095,7 +7375,7 @@
                 </a:solidFill>
                 <a:latin typeface="Montserrat"/>
               </a:rPr>
-              <a:t>boiler flame ignition sequence</a:t>
+              <a:t>kitchen ventilation grille wall</a:t>
             </a:r>
           </a:p>
         </p:txBody>
@@ -7105,6 +7385,18 @@
   <p:clrMapOvr>
     <a:masterClrMapping/>
   </p:clrMapOvr>
+  <mc:AlternateContent xmlns:mc="http://schemas.openxmlformats.org/markup-compatibility/2006">
+    <mc:Choice xmlns:p14="http://schemas.microsoft.com/office/powerpoint/2010/main" Requires="p14">
+      <p:transition spd="med" p14:dur="700">
+        <p14:cube dir="r"/>
+      </p:transition>
+    </mc:Choice>
+    <mc:Fallback>
+      <p:transition spd="med">
+        <p:push dir="r"/>
+      </p:transition>
+    </mc:Fallback>
+  </mc:AlternateContent>
 </p:sld>
 </file>
 
@@ -7192,7 +7484,7 @@
                 </a:solidFill>
                 <a:latin typeface="Montserrat"/>
               </a:rPr>
-              <a:t>015 / 016</a:t>
+              <a:t>015 / 020</a:t>
             </a:r>
           </a:p>
         </p:txBody>
@@ -7260,7 +7552,7 @@
                 </a:solidFill>
                 <a:latin typeface="Montserrat"/>
               </a:rPr>
-              <a:t>ANEXO 3 · CIERRE DE PRUEBAS</a:t>
+              <a:t>ANEXO 3 · 3.1</a:t>
             </a:r>
           </a:p>
         </p:txBody>
@@ -7294,14 +7586,14 @@
                 </a:solidFill>
                 <a:latin typeface="Montserrat"/>
               </a:rPr>
-              <a:t>Tiempos de seguridad y repaso</a:t>
-            </a:r>
-          </a:p>
-        </p:txBody>
-      </p:sp>
-      <p:sp>
-        <p:nvSpPr>
-          <p:cNvPr id="7" name="Rounded Rectangle 6"/>
+              <a:t>Prueba de estanquidad</a:t>
+            </a:r>
+          </a:p>
+        </p:txBody>
+      </p:sp>
+      <p:sp>
+        <p:nvSpPr>
+          <p:cNvPr id="7" name="Rectangle 6"/>
           <p:cNvSpPr/>
           <p:nvPr/>
         </p:nvSpPr>
@@ -7310,7 +7602,7 @@
             <a:off x="868680" y="1627632"/>
             <a:ext cx="2011680" cy="73152"/>
           </a:xfrm>
-          <a:prstGeom prst="roundRect">
+          <a:prstGeom prst="rect">
             <a:avLst/>
           </a:prstGeom>
           <a:solidFill>
@@ -7351,8 +7643,8 @@
         </p:nvSpPr>
         <p:spPr>
           <a:xfrm>
-            <a:off x="822960" y="1965960"/>
-            <a:ext cx="4983480" cy="4206240"/>
+            <a:off x="6355080" y="1965960"/>
+            <a:ext cx="5029200" cy="4206240"/>
           </a:xfrm>
           <a:prstGeom prst="rect">
             <a:avLst/>
@@ -7386,7 +7678,7 @@
                 </a:solidFill>
                 <a:latin typeface="Montserrat"/>
               </a:rPr>
-              <a:t>Válvula automática corta a tiempo</a:t>
+              <a:t>Entre la llave del aparato y el quemador</a:t>
             </a:r>
           </a:p>
           <a:p>
@@ -7411,7 +7703,7 @@
                 </a:solidFill>
                 <a:latin typeface="Montserrat"/>
               </a:rPr>
-              <a:t>Ante fallo: no prende, se apaga, falla el tiro</a:t>
+              <a:t>A presión máxima de utilización</a:t>
             </a:r>
           </a:p>
           <a:p>
@@ -7436,46 +7728,21 @@
                 </a:solidFill>
                 <a:latin typeface="Montserrat"/>
               </a:rPr>
-              <a:t>Control visual: sin deformaciones</a:t>
-            </a:r>
-          </a:p>
-          <a:p>
-            <a:pPr>
-              <a:spcAft>
-                <a:spcPts val="1100"/>
-              </a:spcAft>
-            </a:pPr>
-            <a:r>
-              <a:rPr sz="1600" b="1" i="0">
-                <a:solidFill>
-                  <a:srgbClr val="E8801A"/>
-                </a:solidFill>
-                <a:latin typeface="Montserrat"/>
-              </a:rPr>
-              <a:t>▸  </a:t>
-            </a:r>
-            <a:r>
-              <a:rPr sz="1600" b="0" i="0">
-                <a:solidFill>
-                  <a:srgbClr val="1B2330"/>
-                </a:solidFill>
-                <a:latin typeface="Montserrat"/>
-              </a:rPr>
-              <a:t>Marcados legibles</a:t>
-            </a:r>
-          </a:p>
-        </p:txBody>
-      </p:sp>
-      <p:sp>
-        <p:nvSpPr>
-          <p:cNvPr id="9" name="imgph" descr="IMGQ:automatic gas shutoff valve"/>
+              <a:t>Válvulas de corte: sin fuga interior</a:t>
+            </a:r>
+          </a:p>
+        </p:txBody>
+      </p:sp>
+      <p:sp>
+        <p:nvSpPr>
+          <p:cNvPr id="9" name="imgph" descr="IMGQ:gas pipe pressure test gauge"/>
           <p:cNvSpPr/>
           <p:nvPr/>
         </p:nvSpPr>
         <p:spPr>
           <a:xfrm>
-            <a:off x="5806440" y="1051560"/>
-            <a:ext cx="5298947" cy="4629150"/>
+            <a:off x="822960" y="1965960"/>
+            <a:ext cx="5303520" cy="4572000"/>
           </a:xfrm>
           <a:prstGeom prst="roundRect">
             <a:avLst/>
@@ -7520,8 +7787,8 @@
         </p:nvSpPr>
         <p:spPr>
           <a:xfrm>
-            <a:off x="6080760" y="2726055"/>
-            <a:ext cx="4750307" cy="1280160"/>
+            <a:off x="1097280" y="3611880"/>
+            <a:ext cx="4754880" cy="1280160"/>
           </a:xfrm>
           <a:prstGeom prst="rect">
             <a:avLst/>
@@ -7542,7 +7809,7 @@
                 </a:solidFill>
                 <a:latin typeface="Montserrat"/>
               </a:rPr>
-              <a:t>IMAGEN REALISTA</a:t>
+              <a:t>IMAGEN</a:t>
             </a:r>
           </a:p>
           <a:p>
@@ -7554,7 +7821,7 @@
                 </a:solidFill>
                 <a:latin typeface="Montserrat"/>
               </a:rPr>
-              <a:t>automatic gas shutoff valve</a:t>
+              <a:t>gas pipe pressure test gauge</a:t>
             </a:r>
           </a:p>
         </p:txBody>
@@ -7564,6 +7831,18 @@
   <p:clrMapOvr>
     <a:masterClrMapping/>
   </p:clrMapOvr>
+  <mc:AlternateContent xmlns:mc="http://schemas.openxmlformats.org/markup-compatibility/2006">
+    <mc:Choice xmlns:p14="http://schemas.microsoft.com/office/powerpoint/2010/main" Requires="p14">
+      <p:transition spd="med" p14:dur="700">
+        <p14:cube dir="l"/>
+      </p:transition>
+    </mc:Choice>
+    <mc:Fallback>
+      <p:transition spd="med">
+        <p:push dir="l"/>
+      </p:transition>
+    </mc:Fallback>
+  </mc:AlternateContent>
 </p:sld>
 </file>
 
@@ -7592,7 +7871,7 @@
             <a:avLst/>
           </a:prstGeom>
           <a:solidFill>
-            <a:srgbClr val="1E2761"/>
+            <a:srgbClr val="FFFFFF"/>
           </a:solidFill>
           <a:ln>
             <a:noFill/>
@@ -7629,8 +7908,8 @@
         </p:nvSpPr>
         <p:spPr>
           <a:xfrm>
-            <a:off x="822960" y="640080"/>
-            <a:ext cx="10515600" cy="457200"/>
+            <a:off x="10607040" y="320040"/>
+            <a:ext cx="1371600" cy="365760"/>
           </a:xfrm>
           <a:prstGeom prst="rect">
             <a:avLst/>
@@ -7643,30 +7922,65 @@
           </a:bodyPr>
           <a:lstStyle/>
           <a:p>
-            <a:r>
-              <a:rPr sz="1400" b="1" i="0">
-                <a:solidFill>
-                  <a:srgbClr val="F4A24C"/>
-                </a:solidFill>
-                <a:latin typeface="Montserrat"/>
-              </a:rPr>
-              <a:t>LO QUE YA DOMINAS</a:t>
-            </a:r>
-          </a:p>
-        </p:txBody>
-      </p:sp>
-      <p:sp>
-        <p:nvSpPr>
-          <p:cNvPr id="4" name="Rounded Rectangle 3"/>
+            <a:pPr algn="r"/>
+            <a:r>
+              <a:rPr sz="1000" b="1" i="0">
+                <a:solidFill>
+                  <a:srgbClr val="64748B"/>
+                </a:solidFill>
+                <a:latin typeface="Montserrat"/>
+              </a:rPr>
+              <a:t>016 / 020</a:t>
+            </a:r>
+          </a:p>
+        </p:txBody>
+      </p:sp>
+      <p:sp>
+        <p:nvSpPr>
+          <p:cNvPr id="4" name="TextBox 3"/>
+          <p:cNvSpPr txBox="1"/>
+          <p:nvPr/>
+        </p:nvSpPr>
+        <p:spPr>
+          <a:xfrm>
+            <a:off x="457200" y="6419088"/>
+            <a:ext cx="8229600" cy="365760"/>
+          </a:xfrm>
+          <a:prstGeom prst="rect">
+            <a:avLst/>
+          </a:prstGeom>
+          <a:noFill/>
+        </p:spPr>
+        <p:txBody>
+          <a:bodyPr wrap="square">
+            <a:spAutoFit/>
+          </a:bodyPr>
+          <a:lstStyle/>
+          <a:p>
+            <a:r>
+              <a:rPr sz="900" b="0" i="0">
+                <a:solidFill>
+                  <a:srgbClr val="64748B"/>
+                </a:solidFill>
+                <a:latin typeface="Montserrat"/>
+              </a:rPr>
+              <a:t>Curso Gas B · Tema 05 · Aparatos de gas</a:t>
+            </a:r>
+          </a:p>
+        </p:txBody>
+      </p:sp>
+      <p:sp>
+        <p:nvSpPr>
+          <p:cNvPr id="5" name="Rectangle 4"/>
           <p:cNvSpPr/>
           <p:nvPr/>
         </p:nvSpPr>
         <p:spPr>
           <a:xfrm>
-            <a:off x="868680" y="1051560"/>
-            <a:ext cx="1463040" cy="82296"/>
-          </a:xfrm>
-          <a:prstGeom prst="roundRect">
+            <a:off x="0" y="0"/>
+            <a:ext cx="12191695" cy="1143000"/>
+          </a:xfrm>
+          <a:prstGeom prst="rect">
             <a:avLst/>
           </a:prstGeom>
           <a:solidFill>
@@ -7701,14 +8015,14 @@
       </p:sp>
       <p:sp>
         <p:nvSpPr>
-          <p:cNvPr id="5" name="TextBox 4"/>
+          <p:cNvPr id="6" name="TextBox 5"/>
           <p:cNvSpPr txBox="1"/>
           <p:nvPr/>
         </p:nvSpPr>
         <p:spPr>
           <a:xfrm>
-            <a:off x="822960" y="1234440"/>
-            <a:ext cx="10515600" cy="1097280"/>
+            <a:off x="822960" y="274320"/>
+            <a:ext cx="10515600" cy="640080"/>
           </a:xfrm>
           <a:prstGeom prst="rect">
             <a:avLst/>
@@ -7722,27 +8036,27 @@
           <a:lstStyle/>
           <a:p>
             <a:r>
-              <a:rPr sz="3400" b="1" i="0">
+              <a:rPr sz="2400" b="1" i="0">
                 <a:solidFill>
                   <a:srgbClr val="FFFFFF"/>
                 </a:solidFill>
                 <a:latin typeface="Montserrat"/>
               </a:rPr>
-              <a:t>Has cerrado la ITC-ICG 08 de principio a fin</a:t>
-            </a:r>
-          </a:p>
-        </p:txBody>
-      </p:sp>
-      <p:sp>
-        <p:nvSpPr>
-          <p:cNvPr id="6" name="TextBox 5"/>
+              <a:t>⚡  PREGUNTA RÁPIDA</a:t>
+            </a:r>
+          </a:p>
+        </p:txBody>
+      </p:sp>
+      <p:sp>
+        <p:nvSpPr>
+          <p:cNvPr id="7" name="TextBox 6"/>
           <p:cNvSpPr txBox="1"/>
           <p:nvPr/>
         </p:nvSpPr>
         <p:spPr>
           <a:xfrm>
-            <a:off x="822960" y="2606040"/>
-            <a:ext cx="10515600" cy="2743200"/>
+            <a:off x="822960" y="1508760"/>
+            <a:ext cx="10515600" cy="1371600"/>
           </a:xfrm>
           <a:prstGeom prst="rect">
             <a:avLst/>
@@ -7755,119 +8069,1264 @@
           </a:bodyPr>
           <a:lstStyle/>
           <a:p>
-            <a:pPr>
-              <a:spcAft>
-                <a:spcPts val="1200"/>
-              </a:spcAft>
-            </a:pPr>
-            <a:r>
-              <a:rPr sz="2000" b="1" i="0">
-                <a:solidFill>
-                  <a:srgbClr val="F4A24C"/>
-                </a:solidFill>
-                <a:latin typeface="Montserrat"/>
-              </a:rPr>
-              <a:t>✓  </a:t>
-            </a:r>
-            <a:r>
-              <a:rPr sz="1900" b="0" i="0">
+            <a:r>
+              <a:rPr sz="2400" b="1" i="0">
+                <a:solidFill>
+                  <a:srgbClr val="1E2761"/>
+                </a:solidFill>
+                <a:latin typeface="Montserrat"/>
+              </a:rPr>
+              <a:t>¿En qué tramo se comprueba la estanquidad del aparato en la prueba del anexo 3?</a:t>
+            </a:r>
+          </a:p>
+        </p:txBody>
+      </p:sp>
+      <p:sp>
+        <p:nvSpPr>
+          <p:cNvPr id="8" name="Rounded Rectangle 7"/>
+          <p:cNvSpPr/>
+          <p:nvPr/>
+        </p:nvSpPr>
+        <p:spPr>
+          <a:xfrm>
+            <a:off x="822960" y="3291840"/>
+            <a:ext cx="4983480" cy="1143000"/>
+          </a:xfrm>
+          <a:prstGeom prst="roundRect">
+            <a:avLst/>
+          </a:prstGeom>
+          <a:solidFill>
+            <a:srgbClr val="F3F6FB"/>
+          </a:solidFill>
+          <a:ln w="12700">
+            <a:solidFill>
+              <a:srgbClr val="C7D2E6"/>
+            </a:solidFill>
+          </a:ln>
+          <a:effectLst/>
+        </p:spPr>
+        <p:style>
+          <a:lnRef idx="1">
+            <a:schemeClr val="accent1"/>
+          </a:lnRef>
+          <a:fillRef idx="3">
+            <a:schemeClr val="accent1"/>
+          </a:fillRef>
+          <a:effectRef idx="2">
+            <a:schemeClr val="accent1"/>
+          </a:effectRef>
+          <a:fontRef idx="minor">
+            <a:schemeClr val="lt1"/>
+          </a:fontRef>
+        </p:style>
+        <p:txBody>
+          <a:bodyPr rtlCol="0" anchor="ctr"/>
+          <a:lstStyle/>
+          <a:p>
+            <a:pPr algn="ctr"/>
+          </a:p>
+        </p:txBody>
+      </p:sp>
+      <p:sp>
+        <p:nvSpPr>
+          <p:cNvPr id="9" name="Rectangle 8"/>
+          <p:cNvSpPr/>
+          <p:nvPr/>
+        </p:nvSpPr>
+        <p:spPr>
+          <a:xfrm>
+            <a:off x="822960" y="3291840"/>
+            <a:ext cx="640080" cy="1143000"/>
+          </a:xfrm>
+          <a:prstGeom prst="rect">
+            <a:avLst/>
+          </a:prstGeom>
+          <a:solidFill>
+            <a:srgbClr val="1E2761"/>
+          </a:solidFill>
+          <a:ln>
+            <a:noFill/>
+          </a:ln>
+          <a:effectLst/>
+        </p:spPr>
+        <p:style>
+          <a:lnRef idx="1">
+            <a:schemeClr val="accent1"/>
+          </a:lnRef>
+          <a:fillRef idx="3">
+            <a:schemeClr val="accent1"/>
+          </a:fillRef>
+          <a:effectRef idx="2">
+            <a:schemeClr val="accent1"/>
+          </a:effectRef>
+          <a:fontRef idx="minor">
+            <a:schemeClr val="lt1"/>
+          </a:fontRef>
+        </p:style>
+        <p:txBody>
+          <a:bodyPr rtlCol="0" anchor="ctr"/>
+          <a:lstStyle/>
+          <a:p>
+            <a:pPr algn="ctr"/>
+          </a:p>
+        </p:txBody>
+      </p:sp>
+      <p:sp>
+        <p:nvSpPr>
+          <p:cNvPr id="10" name="TextBox 9"/>
+          <p:cNvSpPr txBox="1"/>
+          <p:nvPr/>
+        </p:nvSpPr>
+        <p:spPr>
+          <a:xfrm>
+            <a:off x="822960" y="3611880"/>
+            <a:ext cx="640080" cy="548640"/>
+          </a:xfrm>
+          <a:prstGeom prst="rect">
+            <a:avLst/>
+          </a:prstGeom>
+          <a:noFill/>
+        </p:spPr>
+        <p:txBody>
+          <a:bodyPr wrap="square">
+            <a:spAutoFit/>
+          </a:bodyPr>
+          <a:lstStyle/>
+          <a:p>
+            <a:pPr algn="ctr"/>
+            <a:r>
+              <a:rPr sz="2200" b="1" i="0">
                 <a:solidFill>
                   <a:srgbClr val="FFFFFF"/>
                 </a:solidFill>
                 <a:latin typeface="Montserrat"/>
               </a:rPr>
-              <a:t>La placa: DNI indeleble; toda ella se verifica con la UNE 60750</a:t>
-            </a:r>
-          </a:p>
-          <a:p>
-            <a:pPr>
-              <a:spcAft>
-                <a:spcPts val="1200"/>
-              </a:spcAft>
-            </a:pPr>
-            <a:r>
-              <a:rPr sz="2000" b="1" i="0">
-                <a:solidFill>
-                  <a:srgbClr val="F4A24C"/>
-                </a:solidFill>
-                <a:latin typeface="Montserrat"/>
-              </a:rPr>
-              <a:t>✓  </a:t>
-            </a:r>
-            <a:r>
-              <a:rPr sz="1900" b="0" i="0">
+              <a:t>A</a:t>
+            </a:r>
+          </a:p>
+        </p:txBody>
+      </p:sp>
+      <p:sp>
+        <p:nvSpPr>
+          <p:cNvPr id="11" name="TextBox 10"/>
+          <p:cNvSpPr txBox="1"/>
+          <p:nvPr/>
+        </p:nvSpPr>
+        <p:spPr>
+          <a:xfrm>
+            <a:off x="1600200" y="3474720"/>
+            <a:ext cx="4114800" cy="868680"/>
+          </a:xfrm>
+          <a:prstGeom prst="rect">
+            <a:avLst/>
+          </a:prstGeom>
+          <a:noFill/>
+        </p:spPr>
+        <p:txBody>
+          <a:bodyPr wrap="square">
+            <a:spAutoFit/>
+          </a:bodyPr>
+          <a:lstStyle/>
+          <a:p>
+            <a:r>
+              <a:rPr sz="1400" b="0" i="0">
+                <a:solidFill>
+                  <a:srgbClr val="1B2330"/>
+                </a:solidFill>
+                <a:latin typeface="Montserrat"/>
+              </a:rPr>
+              <a:t>Entre el contador y la llave de acometida</a:t>
+            </a:r>
+          </a:p>
+        </p:txBody>
+      </p:sp>
+      <p:sp>
+        <p:nvSpPr>
+          <p:cNvPr id="12" name="Rounded Rectangle 11"/>
+          <p:cNvSpPr/>
+          <p:nvPr/>
+        </p:nvSpPr>
+        <p:spPr>
+          <a:xfrm>
+            <a:off x="6355080" y="3291840"/>
+            <a:ext cx="4983480" cy="1143000"/>
+          </a:xfrm>
+          <a:prstGeom prst="roundRect">
+            <a:avLst/>
+          </a:prstGeom>
+          <a:solidFill>
+            <a:srgbClr val="F3F6FB"/>
+          </a:solidFill>
+          <a:ln w="12700">
+            <a:solidFill>
+              <a:srgbClr val="C7D2E6"/>
+            </a:solidFill>
+          </a:ln>
+          <a:effectLst/>
+        </p:spPr>
+        <p:style>
+          <a:lnRef idx="1">
+            <a:schemeClr val="accent1"/>
+          </a:lnRef>
+          <a:fillRef idx="3">
+            <a:schemeClr val="accent1"/>
+          </a:fillRef>
+          <a:effectRef idx="2">
+            <a:schemeClr val="accent1"/>
+          </a:effectRef>
+          <a:fontRef idx="minor">
+            <a:schemeClr val="lt1"/>
+          </a:fontRef>
+        </p:style>
+        <p:txBody>
+          <a:bodyPr rtlCol="0" anchor="ctr"/>
+          <a:lstStyle/>
+          <a:p>
+            <a:pPr algn="ctr"/>
+          </a:p>
+        </p:txBody>
+      </p:sp>
+      <p:sp>
+        <p:nvSpPr>
+          <p:cNvPr id="13" name="Rectangle 12"/>
+          <p:cNvSpPr/>
+          <p:nvPr/>
+        </p:nvSpPr>
+        <p:spPr>
+          <a:xfrm>
+            <a:off x="6355080" y="3291840"/>
+            <a:ext cx="640080" cy="1143000"/>
+          </a:xfrm>
+          <a:prstGeom prst="rect">
+            <a:avLst/>
+          </a:prstGeom>
+          <a:solidFill>
+            <a:srgbClr val="1E2761"/>
+          </a:solidFill>
+          <a:ln>
+            <a:noFill/>
+          </a:ln>
+          <a:effectLst/>
+        </p:spPr>
+        <p:style>
+          <a:lnRef idx="1">
+            <a:schemeClr val="accent1"/>
+          </a:lnRef>
+          <a:fillRef idx="3">
+            <a:schemeClr val="accent1"/>
+          </a:fillRef>
+          <a:effectRef idx="2">
+            <a:schemeClr val="accent1"/>
+          </a:effectRef>
+          <a:fontRef idx="minor">
+            <a:schemeClr val="lt1"/>
+          </a:fontRef>
+        </p:style>
+        <p:txBody>
+          <a:bodyPr rtlCol="0" anchor="ctr"/>
+          <a:lstStyle/>
+          <a:p>
+            <a:pPr algn="ctr"/>
+          </a:p>
+        </p:txBody>
+      </p:sp>
+      <p:sp>
+        <p:nvSpPr>
+          <p:cNvPr id="14" name="TextBox 13"/>
+          <p:cNvSpPr txBox="1"/>
+          <p:nvPr/>
+        </p:nvSpPr>
+        <p:spPr>
+          <a:xfrm>
+            <a:off x="6355080" y="3611880"/>
+            <a:ext cx="640080" cy="548640"/>
+          </a:xfrm>
+          <a:prstGeom prst="rect">
+            <a:avLst/>
+          </a:prstGeom>
+          <a:noFill/>
+        </p:spPr>
+        <p:txBody>
+          <a:bodyPr wrap="square">
+            <a:spAutoFit/>
+          </a:bodyPr>
+          <a:lstStyle/>
+          <a:p>
+            <a:pPr algn="ctr"/>
+            <a:r>
+              <a:rPr sz="2200" b="1" i="0">
                 <a:solidFill>
                   <a:srgbClr val="FFFFFF"/>
                 </a:solidFill>
                 <a:latin typeface="Montserrat"/>
               </a:rPr>
-              <a:t>Anexo 3: la red de seguridad sin norma propia</a:t>
-            </a:r>
-          </a:p>
-          <a:p>
-            <a:pPr>
-              <a:spcAft>
-                <a:spcPts val="1200"/>
-              </a:spcAft>
-            </a:pPr>
-            <a:r>
-              <a:rPr sz="2000" b="1" i="0">
-                <a:solidFill>
-                  <a:srgbClr val="F4A24C"/>
-                </a:solidFill>
-                <a:latin typeface="Montserrat"/>
-              </a:rPr>
-              <a:t>✓  </a:t>
-            </a:r>
-            <a:r>
-              <a:rPr sz="1900" b="0" i="0">
+              <a:t>B</a:t>
+            </a:r>
+          </a:p>
+        </p:txBody>
+      </p:sp>
+      <p:sp>
+        <p:nvSpPr>
+          <p:cNvPr id="15" name="TextBox 14"/>
+          <p:cNvSpPr txBox="1"/>
+          <p:nvPr/>
+        </p:nvSpPr>
+        <p:spPr>
+          <a:xfrm>
+            <a:off x="7132320" y="3474720"/>
+            <a:ext cx="4114800" cy="868680"/>
+          </a:xfrm>
+          <a:prstGeom prst="rect">
+            <a:avLst/>
+          </a:prstGeom>
+          <a:noFill/>
+        </p:spPr>
+        <p:txBody>
+          <a:bodyPr wrap="square">
+            <a:spAutoFit/>
+          </a:bodyPr>
+          <a:lstStyle/>
+          <a:p>
+            <a:r>
+              <a:rPr sz="1400" b="0" i="0">
+                <a:solidFill>
+                  <a:srgbClr val="1B2330"/>
+                </a:solidFill>
+                <a:latin typeface="Montserrat"/>
+              </a:rPr>
+              <a:t>Entre la llave del aparato y el quemador</a:t>
+            </a:r>
+          </a:p>
+        </p:txBody>
+      </p:sp>
+      <p:sp>
+        <p:nvSpPr>
+          <p:cNvPr id="16" name="Rounded Rectangle 15"/>
+          <p:cNvSpPr/>
+          <p:nvPr/>
+        </p:nvSpPr>
+        <p:spPr>
+          <a:xfrm>
+            <a:off x="822960" y="4617720"/>
+            <a:ext cx="4983480" cy="1143000"/>
+          </a:xfrm>
+          <a:prstGeom prst="roundRect">
+            <a:avLst/>
+          </a:prstGeom>
+          <a:solidFill>
+            <a:srgbClr val="F3F6FB"/>
+          </a:solidFill>
+          <a:ln w="12700">
+            <a:solidFill>
+              <a:srgbClr val="C7D2E6"/>
+            </a:solidFill>
+          </a:ln>
+          <a:effectLst/>
+        </p:spPr>
+        <p:style>
+          <a:lnRef idx="1">
+            <a:schemeClr val="accent1"/>
+          </a:lnRef>
+          <a:fillRef idx="3">
+            <a:schemeClr val="accent1"/>
+          </a:fillRef>
+          <a:effectRef idx="2">
+            <a:schemeClr val="accent1"/>
+          </a:effectRef>
+          <a:fontRef idx="minor">
+            <a:schemeClr val="lt1"/>
+          </a:fontRef>
+        </p:style>
+        <p:txBody>
+          <a:bodyPr rtlCol="0" anchor="ctr"/>
+          <a:lstStyle/>
+          <a:p>
+            <a:pPr algn="ctr"/>
+          </a:p>
+        </p:txBody>
+      </p:sp>
+      <p:sp>
+        <p:nvSpPr>
+          <p:cNvPr id="17" name="Rectangle 16"/>
+          <p:cNvSpPr/>
+          <p:nvPr/>
+        </p:nvSpPr>
+        <p:spPr>
+          <a:xfrm>
+            <a:off x="822960" y="4617720"/>
+            <a:ext cx="640080" cy="1143000"/>
+          </a:xfrm>
+          <a:prstGeom prst="rect">
+            <a:avLst/>
+          </a:prstGeom>
+          <a:solidFill>
+            <a:srgbClr val="1E2761"/>
+          </a:solidFill>
+          <a:ln>
+            <a:noFill/>
+          </a:ln>
+          <a:effectLst/>
+        </p:spPr>
+        <p:style>
+          <a:lnRef idx="1">
+            <a:schemeClr val="accent1"/>
+          </a:lnRef>
+          <a:fillRef idx="3">
+            <a:schemeClr val="accent1"/>
+          </a:fillRef>
+          <a:effectRef idx="2">
+            <a:schemeClr val="accent1"/>
+          </a:effectRef>
+          <a:fontRef idx="minor">
+            <a:schemeClr val="lt1"/>
+          </a:fontRef>
+        </p:style>
+        <p:txBody>
+          <a:bodyPr rtlCol="0" anchor="ctr"/>
+          <a:lstStyle/>
+          <a:p>
+            <a:pPr algn="ctr"/>
+          </a:p>
+        </p:txBody>
+      </p:sp>
+      <p:sp>
+        <p:nvSpPr>
+          <p:cNvPr id="18" name="TextBox 17"/>
+          <p:cNvSpPr txBox="1"/>
+          <p:nvPr/>
+        </p:nvSpPr>
+        <p:spPr>
+          <a:xfrm>
+            <a:off x="822960" y="4937760"/>
+            <a:ext cx="640080" cy="548640"/>
+          </a:xfrm>
+          <a:prstGeom prst="rect">
+            <a:avLst/>
+          </a:prstGeom>
+          <a:noFill/>
+        </p:spPr>
+        <p:txBody>
+          <a:bodyPr wrap="square">
+            <a:spAutoFit/>
+          </a:bodyPr>
+          <a:lstStyle/>
+          <a:p>
+            <a:pPr algn="ctr"/>
+            <a:r>
+              <a:rPr sz="2200" b="1" i="0">
                 <a:solidFill>
                   <a:srgbClr val="FFFFFF"/>
                 </a:solidFill>
                 <a:latin typeface="Montserrat"/>
               </a:rPr>
-              <a:t>2.3.15: dispositivo anti-acumulación o local ventilado</a:t>
-            </a:r>
-          </a:p>
-          <a:p>
-            <a:pPr>
-              <a:spcAft>
-                <a:spcPts val="1200"/>
-              </a:spcAft>
-            </a:pPr>
-            <a:r>
-              <a:rPr sz="2000" b="1" i="0">
-                <a:solidFill>
-                  <a:srgbClr val="F4A24C"/>
-                </a:solidFill>
-                <a:latin typeface="Montserrat"/>
-              </a:rPr>
-              <a:t>✓  </a:t>
-            </a:r>
-            <a:r>
-              <a:rPr sz="1900" b="0" i="0">
+              <a:t>C</a:t>
+            </a:r>
+          </a:p>
+        </p:txBody>
+      </p:sp>
+      <p:sp>
+        <p:nvSpPr>
+          <p:cNvPr id="19" name="TextBox 18"/>
+          <p:cNvSpPr txBox="1"/>
+          <p:nvPr/>
+        </p:nvSpPr>
+        <p:spPr>
+          <a:xfrm>
+            <a:off x="1600200" y="4800600"/>
+            <a:ext cx="4114800" cy="868680"/>
+          </a:xfrm>
+          <a:prstGeom prst="rect">
+            <a:avLst/>
+          </a:prstGeom>
+          <a:noFill/>
+        </p:spPr>
+        <p:txBody>
+          <a:bodyPr wrap="square">
+            <a:spAutoFit/>
+          </a:bodyPr>
+          <a:lstStyle/>
+          <a:p>
+            <a:r>
+              <a:rPr sz="1400" b="0" i="0">
+                <a:solidFill>
+                  <a:srgbClr val="1B2330"/>
+                </a:solidFill>
+                <a:latin typeface="Montserrat"/>
+              </a:rPr>
+              <a:t>En toda la instalación receptora de la vivienda</a:t>
+            </a:r>
+          </a:p>
+        </p:txBody>
+      </p:sp>
+      <p:sp>
+        <p:nvSpPr>
+          <p:cNvPr id="20" name="Rounded Rectangle 19"/>
+          <p:cNvSpPr/>
+          <p:nvPr/>
+        </p:nvSpPr>
+        <p:spPr>
+          <a:xfrm>
+            <a:off x="6355080" y="4617720"/>
+            <a:ext cx="4983480" cy="1143000"/>
+          </a:xfrm>
+          <a:prstGeom prst="roundRect">
+            <a:avLst/>
+          </a:prstGeom>
+          <a:solidFill>
+            <a:srgbClr val="F3F6FB"/>
+          </a:solidFill>
+          <a:ln w="12700">
+            <a:solidFill>
+              <a:srgbClr val="C7D2E6"/>
+            </a:solidFill>
+          </a:ln>
+          <a:effectLst/>
+        </p:spPr>
+        <p:style>
+          <a:lnRef idx="1">
+            <a:schemeClr val="accent1"/>
+          </a:lnRef>
+          <a:fillRef idx="3">
+            <a:schemeClr val="accent1"/>
+          </a:fillRef>
+          <a:effectRef idx="2">
+            <a:schemeClr val="accent1"/>
+          </a:effectRef>
+          <a:fontRef idx="minor">
+            <a:schemeClr val="lt1"/>
+          </a:fontRef>
+        </p:style>
+        <p:txBody>
+          <a:bodyPr rtlCol="0" anchor="ctr"/>
+          <a:lstStyle/>
+          <a:p>
+            <a:pPr algn="ctr"/>
+          </a:p>
+        </p:txBody>
+      </p:sp>
+      <p:sp>
+        <p:nvSpPr>
+          <p:cNvPr id="21" name="Rectangle 20"/>
+          <p:cNvSpPr/>
+          <p:nvPr/>
+        </p:nvSpPr>
+        <p:spPr>
+          <a:xfrm>
+            <a:off x="6355080" y="4617720"/>
+            <a:ext cx="640080" cy="1143000"/>
+          </a:xfrm>
+          <a:prstGeom prst="rect">
+            <a:avLst/>
+          </a:prstGeom>
+          <a:solidFill>
+            <a:srgbClr val="1E2761"/>
+          </a:solidFill>
+          <a:ln>
+            <a:noFill/>
+          </a:ln>
+          <a:effectLst/>
+        </p:spPr>
+        <p:style>
+          <a:lnRef idx="1">
+            <a:schemeClr val="accent1"/>
+          </a:lnRef>
+          <a:fillRef idx="3">
+            <a:schemeClr val="accent1"/>
+          </a:fillRef>
+          <a:effectRef idx="2">
+            <a:schemeClr val="accent1"/>
+          </a:effectRef>
+          <a:fontRef idx="minor">
+            <a:schemeClr val="lt1"/>
+          </a:fontRef>
+        </p:style>
+        <p:txBody>
+          <a:bodyPr rtlCol="0" anchor="ctr"/>
+          <a:lstStyle/>
+          <a:p>
+            <a:pPr algn="ctr"/>
+          </a:p>
+        </p:txBody>
+      </p:sp>
+      <p:sp>
+        <p:nvSpPr>
+          <p:cNvPr id="22" name="TextBox 21"/>
+          <p:cNvSpPr txBox="1"/>
+          <p:nvPr/>
+        </p:nvSpPr>
+        <p:spPr>
+          <a:xfrm>
+            <a:off x="6355080" y="4937760"/>
+            <a:ext cx="640080" cy="548640"/>
+          </a:xfrm>
+          <a:prstGeom prst="rect">
+            <a:avLst/>
+          </a:prstGeom>
+          <a:noFill/>
+        </p:spPr>
+        <p:txBody>
+          <a:bodyPr wrap="square">
+            <a:spAutoFit/>
+          </a:bodyPr>
+          <a:lstStyle/>
+          <a:p>
+            <a:pPr algn="ctr"/>
+            <a:r>
+              <a:rPr sz="2200" b="1" i="0">
                 <a:solidFill>
                   <a:srgbClr val="FFFFFF"/>
                 </a:solidFill>
                 <a:latin typeface="Montserrat"/>
               </a:rPr>
-              <a:t>Estanquidad caza fugas; funcionamiento caza el CO</a:t>
-            </a:r>
-          </a:p>
-        </p:txBody>
-      </p:sp>
-      <p:sp>
-        <p:nvSpPr>
-          <p:cNvPr id="7" name="Rounded Rectangle 6"/>
+              <a:t>D</a:t>
+            </a:r>
+          </a:p>
+        </p:txBody>
+      </p:sp>
+      <p:sp>
+        <p:nvSpPr>
+          <p:cNvPr id="23" name="TextBox 22"/>
+          <p:cNvSpPr txBox="1"/>
+          <p:nvPr/>
+        </p:nvSpPr>
+        <p:spPr>
+          <a:xfrm>
+            <a:off x="7132320" y="4800600"/>
+            <a:ext cx="4114800" cy="868680"/>
+          </a:xfrm>
+          <a:prstGeom prst="rect">
+            <a:avLst/>
+          </a:prstGeom>
+          <a:noFill/>
+        </p:spPr>
+        <p:txBody>
+          <a:bodyPr wrap="square">
+            <a:spAutoFit/>
+          </a:bodyPr>
+          <a:lstStyle/>
+          <a:p>
+            <a:r>
+              <a:rPr sz="1400" b="0" i="0">
+                <a:solidFill>
+                  <a:srgbClr val="1B2330"/>
+                </a:solidFill>
+                <a:latin typeface="Montserrat"/>
+              </a:rPr>
+              <a:t>Solo en el conducto de evacuación de humos</a:t>
+            </a:r>
+          </a:p>
+        </p:txBody>
+      </p:sp>
+    </p:spTree>
+  </p:cSld>
+  <p:clrMapOvr>
+    <a:masterClrMapping/>
+  </p:clrMapOvr>
+  <mc:AlternateContent xmlns:mc="http://schemas.openxmlformats.org/markup-compatibility/2006">
+    <mc:Choice xmlns:p14="http://schemas.microsoft.com/office/powerpoint/2010/main" Requires="p14">
+      <p:transition spd="med" p14:dur="700">
+        <p14:cube dir="r"/>
+      </p:transition>
+    </mc:Choice>
+    <mc:Fallback>
+      <p:transition spd="med">
+        <p:push dir="r"/>
+      </p:transition>
+    </mc:Fallback>
+  </mc:AlternateContent>
+</p:sld>
+</file>
+
+<file path=ppt/slides/slide17.xml><?xml version="1.0" encoding="utf-8"?>
+<p:sld xmlns:a="http://schemas.openxmlformats.org/drawingml/2006/main" xmlns:p="http://schemas.openxmlformats.org/presentationml/2006/main" xmlns:r="http://schemas.openxmlformats.org/officeDocument/2006/relationships">
+  <p:cSld>
+    <p:spTree>
+      <p:nvGrpSpPr>
+        <p:cNvPr id="1" name=""/>
+        <p:cNvGrpSpPr/>
+        <p:nvPr/>
+      </p:nvGrpSpPr>
+      <p:grpSpPr/>
+      <p:sp>
+        <p:nvSpPr>
+          <p:cNvPr id="2" name="Rectangle 1"/>
           <p:cNvSpPr/>
           <p:nvPr/>
         </p:nvSpPr>
         <p:spPr>
           <a:xfrm>
-            <a:off x="822960" y="5532120"/>
-            <a:ext cx="10515600" cy="822960"/>
+            <a:off x="0" y="0"/>
+            <a:ext cx="12191695" cy="6858000"/>
+          </a:xfrm>
+          <a:prstGeom prst="rect">
+            <a:avLst/>
+          </a:prstGeom>
+          <a:solidFill>
+            <a:srgbClr val="FFFFFF"/>
+          </a:solidFill>
+          <a:ln>
+            <a:noFill/>
+          </a:ln>
+          <a:effectLst/>
+        </p:spPr>
+        <p:style>
+          <a:lnRef idx="1">
+            <a:schemeClr val="accent1"/>
+          </a:lnRef>
+          <a:fillRef idx="3">
+            <a:schemeClr val="accent1"/>
+          </a:fillRef>
+          <a:effectRef idx="2">
+            <a:schemeClr val="accent1"/>
+          </a:effectRef>
+          <a:fontRef idx="minor">
+            <a:schemeClr val="lt1"/>
+          </a:fontRef>
+        </p:style>
+        <p:txBody>
+          <a:bodyPr rtlCol="0" anchor="ctr"/>
+          <a:lstStyle/>
+          <a:p>
+            <a:pPr algn="ctr"/>
+          </a:p>
+        </p:txBody>
+      </p:sp>
+      <p:sp>
+        <p:nvSpPr>
+          <p:cNvPr id="3" name="TextBox 2"/>
+          <p:cNvSpPr txBox="1"/>
+          <p:nvPr/>
+        </p:nvSpPr>
+        <p:spPr>
+          <a:xfrm>
+            <a:off x="10607040" y="320040"/>
+            <a:ext cx="1371600" cy="365760"/>
+          </a:xfrm>
+          <a:prstGeom prst="rect">
+            <a:avLst/>
+          </a:prstGeom>
+          <a:noFill/>
+        </p:spPr>
+        <p:txBody>
+          <a:bodyPr wrap="square">
+            <a:spAutoFit/>
+          </a:bodyPr>
+          <a:lstStyle/>
+          <a:p>
+            <a:pPr algn="r"/>
+            <a:r>
+              <a:rPr sz="1000" b="1" i="0">
+                <a:solidFill>
+                  <a:srgbClr val="64748B"/>
+                </a:solidFill>
+                <a:latin typeface="Montserrat"/>
+              </a:rPr>
+              <a:t>017 / 020</a:t>
+            </a:r>
+          </a:p>
+        </p:txBody>
+      </p:sp>
+      <p:sp>
+        <p:nvSpPr>
+          <p:cNvPr id="4" name="TextBox 3"/>
+          <p:cNvSpPr txBox="1"/>
+          <p:nvPr/>
+        </p:nvSpPr>
+        <p:spPr>
+          <a:xfrm>
+            <a:off x="457200" y="6419088"/>
+            <a:ext cx="8229600" cy="365760"/>
+          </a:xfrm>
+          <a:prstGeom prst="rect">
+            <a:avLst/>
+          </a:prstGeom>
+          <a:noFill/>
+        </p:spPr>
+        <p:txBody>
+          <a:bodyPr wrap="square">
+            <a:spAutoFit/>
+          </a:bodyPr>
+          <a:lstStyle/>
+          <a:p>
+            <a:r>
+              <a:rPr sz="900" b="0" i="0">
+                <a:solidFill>
+                  <a:srgbClr val="64748B"/>
+                </a:solidFill>
+                <a:latin typeface="Montserrat"/>
+              </a:rPr>
+              <a:t>Curso Gas B · Tema 05 · Aparatos de gas</a:t>
+            </a:r>
+          </a:p>
+        </p:txBody>
+      </p:sp>
+      <p:sp>
+        <p:nvSpPr>
+          <p:cNvPr id="5" name="Rectangle 4"/>
+          <p:cNvSpPr/>
+          <p:nvPr/>
+        </p:nvSpPr>
+        <p:spPr>
+          <a:xfrm>
+            <a:off x="0" y="0"/>
+            <a:ext cx="12191695" cy="1143000"/>
+          </a:xfrm>
+          <a:prstGeom prst="rect">
+            <a:avLst/>
+          </a:prstGeom>
+          <a:solidFill>
+            <a:srgbClr val="1E8E4B"/>
+          </a:solidFill>
+          <a:ln>
+            <a:noFill/>
+          </a:ln>
+          <a:effectLst/>
+        </p:spPr>
+        <p:style>
+          <a:lnRef idx="1">
+            <a:schemeClr val="accent1"/>
+          </a:lnRef>
+          <a:fillRef idx="3">
+            <a:schemeClr val="accent1"/>
+          </a:fillRef>
+          <a:effectRef idx="2">
+            <a:schemeClr val="accent1"/>
+          </a:effectRef>
+          <a:fontRef idx="minor">
+            <a:schemeClr val="lt1"/>
+          </a:fontRef>
+        </p:style>
+        <p:txBody>
+          <a:bodyPr rtlCol="0" anchor="ctr"/>
+          <a:lstStyle/>
+          <a:p>
+            <a:pPr algn="ctr"/>
+          </a:p>
+        </p:txBody>
+      </p:sp>
+      <p:sp>
+        <p:nvSpPr>
+          <p:cNvPr id="6" name="TextBox 5"/>
+          <p:cNvSpPr txBox="1"/>
+          <p:nvPr/>
+        </p:nvSpPr>
+        <p:spPr>
+          <a:xfrm>
+            <a:off x="822960" y="274320"/>
+            <a:ext cx="10515600" cy="640080"/>
+          </a:xfrm>
+          <a:prstGeom prst="rect">
+            <a:avLst/>
+          </a:prstGeom>
+          <a:noFill/>
+        </p:spPr>
+        <p:txBody>
+          <a:bodyPr wrap="square">
+            <a:spAutoFit/>
+          </a:bodyPr>
+          <a:lstStyle/>
+          <a:p>
+            <a:r>
+              <a:rPr sz="2400" b="1" i="0">
+                <a:solidFill>
+                  <a:srgbClr val="FFFFFF"/>
+                </a:solidFill>
+                <a:latin typeface="Montserrat"/>
+              </a:rPr>
+              <a:t>✔  RESPUESTA:  B</a:t>
+            </a:r>
+          </a:p>
+        </p:txBody>
+      </p:sp>
+      <p:sp>
+        <p:nvSpPr>
+          <p:cNvPr id="7" name="TextBox 6"/>
+          <p:cNvSpPr txBox="1"/>
+          <p:nvPr/>
+        </p:nvSpPr>
+        <p:spPr>
+          <a:xfrm>
+            <a:off x="822960" y="1417320"/>
+            <a:ext cx="10515600" cy="914400"/>
+          </a:xfrm>
+          <a:prstGeom prst="rect">
+            <a:avLst/>
+          </a:prstGeom>
+          <a:noFill/>
+        </p:spPr>
+        <p:txBody>
+          <a:bodyPr wrap="square">
+            <a:spAutoFit/>
+          </a:bodyPr>
+          <a:lstStyle/>
+          <a:p>
+            <a:r>
+              <a:rPr sz="1800" b="1" i="0">
+                <a:solidFill>
+                  <a:srgbClr val="64748B"/>
+                </a:solidFill>
+                <a:latin typeface="Montserrat"/>
+              </a:rPr>
+              <a:t>¿En qué tramo se comprueba la estanquidad del aparato en la prueba del anexo 3?</a:t>
+            </a:r>
+          </a:p>
+        </p:txBody>
+      </p:sp>
+      <p:sp>
+        <p:nvSpPr>
+          <p:cNvPr id="8" name="Rounded Rectangle 7"/>
+          <p:cNvSpPr/>
+          <p:nvPr/>
+        </p:nvSpPr>
+        <p:spPr>
+          <a:xfrm>
+            <a:off x="822960" y="2514600"/>
+            <a:ext cx="10515600" cy="914400"/>
           </a:xfrm>
           <a:prstGeom prst="roundRect">
+            <a:avLst/>
+          </a:prstGeom>
+          <a:solidFill>
+            <a:srgbClr val="E9F6EE"/>
+          </a:solidFill>
+          <a:ln w="12700">
+            <a:solidFill>
+              <a:srgbClr val="1E8E4B"/>
+            </a:solidFill>
+          </a:ln>
+          <a:effectLst/>
+        </p:spPr>
+        <p:style>
+          <a:lnRef idx="1">
+            <a:schemeClr val="accent1"/>
+          </a:lnRef>
+          <a:fillRef idx="3">
+            <a:schemeClr val="accent1"/>
+          </a:fillRef>
+          <a:effectRef idx="2">
+            <a:schemeClr val="accent1"/>
+          </a:effectRef>
+          <a:fontRef idx="minor">
+            <a:schemeClr val="lt1"/>
+          </a:fontRef>
+        </p:style>
+        <p:txBody>
+          <a:bodyPr rtlCol="0" anchor="ctr"/>
+          <a:lstStyle/>
+          <a:p>
+            <a:pPr algn="ctr"/>
+          </a:p>
+        </p:txBody>
+      </p:sp>
+      <p:sp>
+        <p:nvSpPr>
+          <p:cNvPr id="9" name="TextBox 8"/>
+          <p:cNvSpPr txBox="1"/>
+          <p:nvPr/>
+        </p:nvSpPr>
+        <p:spPr>
+          <a:xfrm>
+            <a:off x="1097280" y="2697480"/>
+            <a:ext cx="10058400" cy="640080"/>
+          </a:xfrm>
+          <a:prstGeom prst="rect">
+            <a:avLst/>
+          </a:prstGeom>
+          <a:noFill/>
+        </p:spPr>
+        <p:txBody>
+          <a:bodyPr wrap="square">
+            <a:spAutoFit/>
+          </a:bodyPr>
+          <a:lstStyle/>
+          <a:p>
+            <a:r>
+              <a:rPr sz="1800" b="1" i="0">
+                <a:solidFill>
+                  <a:srgbClr val="1E8E4B"/>
+                </a:solidFill>
+                <a:latin typeface="Montserrat"/>
+              </a:rPr>
+              <a:t>B.  </a:t>
+            </a:r>
+            <a:r>
+              <a:rPr sz="1800" b="1" i="0">
+                <a:solidFill>
+                  <a:srgbClr val="1E2761"/>
+                </a:solidFill>
+                <a:latin typeface="Montserrat"/>
+              </a:rPr>
+              <a:t>Entre la llave del aparato y el quemador</a:t>
+            </a:r>
+          </a:p>
+        </p:txBody>
+      </p:sp>
+      <p:sp>
+        <p:nvSpPr>
+          <p:cNvPr id="10" name="TextBox 9"/>
+          <p:cNvSpPr txBox="1"/>
+          <p:nvPr/>
+        </p:nvSpPr>
+        <p:spPr>
+          <a:xfrm>
+            <a:off x="822960" y="3749039"/>
+            <a:ext cx="10515600" cy="2194560"/>
+          </a:xfrm>
+          <a:prstGeom prst="rect">
+            <a:avLst/>
+          </a:prstGeom>
+          <a:noFill/>
+        </p:spPr>
+        <p:txBody>
+          <a:bodyPr wrap="square">
+            <a:spAutoFit/>
+          </a:bodyPr>
+          <a:lstStyle/>
+          <a:p>
+            <a:r>
+              <a:rPr sz="1500" b="1" i="0">
+                <a:solidFill>
+                  <a:srgbClr val="E8801A"/>
+                </a:solidFill>
+                <a:latin typeface="Montserrat"/>
+              </a:rPr>
+              <a:t>Por qué:  </a:t>
+            </a:r>
+            <a:r>
+              <a:rPr sz="1500" b="0" i="0">
+                <a:solidFill>
+                  <a:srgbClr val="1B2330"/>
+                </a:solidFill>
+                <a:latin typeface="Montserrat"/>
+              </a:rPr>
+              <a:t>La prueba comprueba la estanquidad del circuito de gas entre la llave del aparato y el quemador, a la presión máxima de utilización, y que las válvulas de corte no tengan fuga interior.</a:t>
+            </a:r>
+          </a:p>
+        </p:txBody>
+      </p:sp>
+    </p:spTree>
+  </p:cSld>
+  <p:clrMapOvr>
+    <a:masterClrMapping/>
+  </p:clrMapOvr>
+  <mc:AlternateContent xmlns:mc="http://schemas.openxmlformats.org/markup-compatibility/2006">
+    <mc:Choice xmlns:p14="http://schemas.microsoft.com/office/powerpoint/2010/main" Requires="p14">
+      <p:transition spd="med" p14:dur="700">
+        <p14:cube dir="l"/>
+      </p:transition>
+    </mc:Choice>
+    <mc:Fallback>
+      <p:transition spd="med">
+        <p:push dir="l"/>
+      </p:transition>
+    </mc:Fallback>
+  </mc:AlternateContent>
+</p:sld>
+</file>
+
+<file path=ppt/slides/slide18.xml><?xml version="1.0" encoding="utf-8"?>
+<p:sld xmlns:a="http://schemas.openxmlformats.org/drawingml/2006/main" xmlns:p="http://schemas.openxmlformats.org/presentationml/2006/main" xmlns:r="http://schemas.openxmlformats.org/officeDocument/2006/relationships">
+  <p:cSld>
+    <p:spTree>
+      <p:nvGrpSpPr>
+        <p:cNvPr id="1" name=""/>
+        <p:cNvGrpSpPr/>
+        <p:nvPr/>
+      </p:nvGrpSpPr>
+      <p:grpSpPr/>
+      <p:sp>
+        <p:nvSpPr>
+          <p:cNvPr id="2" name="Rectangle 1"/>
+          <p:cNvSpPr/>
+          <p:nvPr/>
+        </p:nvSpPr>
+        <p:spPr>
+          <a:xfrm>
+            <a:off x="0" y="0"/>
+            <a:ext cx="12191695" cy="6858000"/>
+          </a:xfrm>
+          <a:prstGeom prst="rect">
+            <a:avLst/>
+          </a:prstGeom>
+          <a:solidFill>
+            <a:srgbClr val="FFFFFF"/>
+          </a:solidFill>
+          <a:ln>
+            <a:noFill/>
+          </a:ln>
+          <a:effectLst/>
+        </p:spPr>
+        <p:style>
+          <a:lnRef idx="1">
+            <a:schemeClr val="accent1"/>
+          </a:lnRef>
+          <a:fillRef idx="3">
+            <a:schemeClr val="accent1"/>
+          </a:fillRef>
+          <a:effectRef idx="2">
+            <a:schemeClr val="accent1"/>
+          </a:effectRef>
+          <a:fontRef idx="minor">
+            <a:schemeClr val="lt1"/>
+          </a:fontRef>
+        </p:style>
+        <p:txBody>
+          <a:bodyPr rtlCol="0" anchor="ctr"/>
+          <a:lstStyle/>
+          <a:p>
+            <a:pPr algn="ctr"/>
+          </a:p>
+        </p:txBody>
+      </p:sp>
+      <p:sp>
+        <p:nvSpPr>
+          <p:cNvPr id="3" name="TextBox 2"/>
+          <p:cNvSpPr txBox="1"/>
+          <p:nvPr/>
+        </p:nvSpPr>
+        <p:spPr>
+          <a:xfrm>
+            <a:off x="10607040" y="320040"/>
+            <a:ext cx="1371600" cy="365760"/>
+          </a:xfrm>
+          <a:prstGeom prst="rect">
+            <a:avLst/>
+          </a:prstGeom>
+          <a:noFill/>
+        </p:spPr>
+        <p:txBody>
+          <a:bodyPr wrap="square">
+            <a:spAutoFit/>
+          </a:bodyPr>
+          <a:lstStyle/>
+          <a:p>
+            <a:pPr algn="r"/>
+            <a:r>
+              <a:rPr sz="1000" b="1" i="0">
+                <a:solidFill>
+                  <a:srgbClr val="64748B"/>
+                </a:solidFill>
+                <a:latin typeface="Montserrat"/>
+              </a:rPr>
+              <a:t>018 / 020</a:t>
+            </a:r>
+          </a:p>
+        </p:txBody>
+      </p:sp>
+      <p:sp>
+        <p:nvSpPr>
+          <p:cNvPr id="4" name="TextBox 3"/>
+          <p:cNvSpPr txBox="1"/>
+          <p:nvPr/>
+        </p:nvSpPr>
+        <p:spPr>
+          <a:xfrm>
+            <a:off x="457200" y="6419088"/>
+            <a:ext cx="8229600" cy="365760"/>
+          </a:xfrm>
+          <a:prstGeom prst="rect">
+            <a:avLst/>
+          </a:prstGeom>
+          <a:noFill/>
+        </p:spPr>
+        <p:txBody>
+          <a:bodyPr wrap="square">
+            <a:spAutoFit/>
+          </a:bodyPr>
+          <a:lstStyle/>
+          <a:p>
+            <a:r>
+              <a:rPr sz="900" b="0" i="0">
+                <a:solidFill>
+                  <a:srgbClr val="64748B"/>
+                </a:solidFill>
+                <a:latin typeface="Montserrat"/>
+              </a:rPr>
+              <a:t>Curso Gas B · Tema 05 · Aparatos de gas</a:t>
+            </a:r>
+          </a:p>
+        </p:txBody>
+      </p:sp>
+      <p:sp>
+        <p:nvSpPr>
+          <p:cNvPr id="5" name="TextBox 4"/>
+          <p:cNvSpPr txBox="1"/>
+          <p:nvPr/>
+        </p:nvSpPr>
+        <p:spPr>
+          <a:xfrm>
+            <a:off x="822960" y="457200"/>
+            <a:ext cx="10058400" cy="365760"/>
+          </a:xfrm>
+          <a:prstGeom prst="rect">
+            <a:avLst/>
+          </a:prstGeom>
+          <a:noFill/>
+        </p:spPr>
+        <p:txBody>
+          <a:bodyPr wrap="square">
+            <a:spAutoFit/>
+          </a:bodyPr>
+          <a:lstStyle/>
+          <a:p>
+            <a:r>
+              <a:rPr sz="1300" b="1" i="0">
+                <a:solidFill>
+                  <a:srgbClr val="E8801A"/>
+                </a:solidFill>
+                <a:latin typeface="Montserrat"/>
+              </a:rPr>
+              <a:t>ANEXO 3 · 3.2</a:t>
+            </a:r>
+          </a:p>
+        </p:txBody>
+      </p:sp>
+      <p:sp>
+        <p:nvSpPr>
+          <p:cNvPr id="6" name="TextBox 5"/>
+          <p:cNvSpPr txBox="1"/>
+          <p:nvPr/>
+        </p:nvSpPr>
+        <p:spPr>
+          <a:xfrm>
+            <a:off x="822960" y="868680"/>
+            <a:ext cx="10515600" cy="914400"/>
+          </a:xfrm>
+          <a:prstGeom prst="rect">
+            <a:avLst/>
+          </a:prstGeom>
+          <a:noFill/>
+        </p:spPr>
+        <p:txBody>
+          <a:bodyPr wrap="square">
+            <a:spAutoFit/>
+          </a:bodyPr>
+          <a:lstStyle/>
+          <a:p>
+            <a:r>
+              <a:rPr sz="2800" b="1" i="0">
+                <a:solidFill>
+                  <a:srgbClr val="1E2761"/>
+                </a:solidFill>
+                <a:latin typeface="Montserrat"/>
+              </a:rPr>
+              <a:t>Pruebas de funcionamiento</a:t>
+            </a:r>
+          </a:p>
+        </p:txBody>
+      </p:sp>
+      <p:sp>
+        <p:nvSpPr>
+          <p:cNvPr id="7" name="Rectangle 6"/>
+          <p:cNvSpPr/>
+          <p:nvPr/>
+        </p:nvSpPr>
+        <p:spPr>
+          <a:xfrm>
+            <a:off x="868680" y="1627632"/>
+            <a:ext cx="2011680" cy="73152"/>
+          </a:xfrm>
+          <a:prstGeom prst="rect">
             <a:avLst/>
           </a:prstGeom>
           <a:solidFill>
@@ -7908,8 +9367,8 @@
         </p:nvSpPr>
         <p:spPr>
           <a:xfrm>
-            <a:off x="1051560" y="5623560"/>
-            <a:ext cx="10058400" cy="640080"/>
+            <a:off x="822960" y="1965960"/>
+            <a:ext cx="5029200" cy="4206240"/>
           </a:xfrm>
           <a:prstGeom prst="rect">
             <a:avLst/>
@@ -7922,14 +9381,196 @@
           </a:bodyPr>
           <a:lstStyle/>
           <a:p>
-            <a:r>
-              <a:rPr sz="1500" b="1" i="1">
-                <a:solidFill>
-                  <a:srgbClr val="1E2761"/>
-                </a:solidFill>
-                <a:latin typeface="Montserrat"/>
-              </a:rPr>
-              <a:t>Ya lees un aparato como un profesional: de la placa al análisis de combustión. Enhorabuena, has cerrado el tema.</a:t>
+            <a:pPr>
+              <a:spcAft>
+                <a:spcPts val="1100"/>
+              </a:spcAft>
+            </a:pPr>
+            <a:r>
+              <a:rPr sz="1600" b="1" i="0">
+                <a:solidFill>
+                  <a:srgbClr val="E8801A"/>
+                </a:solidFill>
+                <a:latin typeface="Montserrat"/>
+              </a:rPr>
+              <a:t>▸  </a:t>
+            </a:r>
+            <a:r>
+              <a:rPr sz="1600" b="0" i="0">
+                <a:solidFill>
+                  <a:srgbClr val="1B2330"/>
+                </a:solidFill>
+                <a:latin typeface="Montserrat"/>
+              </a:rPr>
+              <a:t>Encendido: sin golpes de presión</a:t>
+            </a:r>
+          </a:p>
+          <a:p>
+            <a:pPr>
+              <a:spcAft>
+                <a:spcPts val="1100"/>
+              </a:spcAft>
+            </a:pPr>
+            <a:r>
+              <a:rPr sz="1600" b="1" i="0">
+                <a:solidFill>
+                  <a:srgbClr val="E8801A"/>
+                </a:solidFill>
+                <a:latin typeface="Montserrat"/>
+              </a:rPr>
+              <a:t>▸  </a:t>
+            </a:r>
+            <a:r>
+              <a:rPr sz="1600" b="0" i="0">
+                <a:solidFill>
+                  <a:srgbClr val="1B2330"/>
+                </a:solidFill>
+                <a:latin typeface="Montserrat"/>
+              </a:rPr>
+              <a:t>Barrido de cámara y tiempos de seguridad</a:t>
+            </a:r>
+          </a:p>
+          <a:p>
+            <a:pPr>
+              <a:spcAft>
+                <a:spcPts val="1100"/>
+              </a:spcAft>
+            </a:pPr>
+            <a:r>
+              <a:rPr sz="1600" b="1" i="0">
+                <a:solidFill>
+                  <a:srgbClr val="E8801A"/>
+                </a:solidFill>
+                <a:latin typeface="Montserrat"/>
+              </a:rPr>
+              <a:t>▸  </a:t>
+            </a:r>
+            <a:r>
+              <a:rPr sz="1600" b="0" i="0">
+                <a:solidFill>
+                  <a:srgbClr val="1B2330"/>
+                </a:solidFill>
+                <a:latin typeface="Montserrat"/>
+              </a:rPr>
+              <a:t>Marcha: control de llama, presión y tiro</a:t>
+            </a:r>
+          </a:p>
+          <a:p>
+            <a:pPr>
+              <a:spcAft>
+                <a:spcPts val="1100"/>
+              </a:spcAft>
+            </a:pPr>
+            <a:r>
+              <a:rPr sz="1600" b="1" i="0">
+                <a:solidFill>
+                  <a:srgbClr val="E8801A"/>
+                </a:solidFill>
+                <a:latin typeface="Montserrat"/>
+              </a:rPr>
+              <a:t>▸  </a:t>
+            </a:r>
+            <a:r>
+              <a:rPr sz="1600" b="0" i="0">
+                <a:solidFill>
+                  <a:srgbClr val="1B2330"/>
+                </a:solidFill>
+                <a:latin typeface="Montserrat"/>
+              </a:rPr>
+              <a:t>Consumo y análisis de combustión</a:t>
+            </a:r>
+          </a:p>
+        </p:txBody>
+      </p:sp>
+      <p:sp>
+        <p:nvSpPr>
+          <p:cNvPr id="9" name="imgph" descr="IMGQ:boiler flame ignition sequence"/>
+          <p:cNvSpPr/>
+          <p:nvPr/>
+        </p:nvSpPr>
+        <p:spPr>
+          <a:xfrm>
+            <a:off x="6080760" y="1965960"/>
+            <a:ext cx="5303520" cy="4572000"/>
+          </a:xfrm>
+          <a:prstGeom prst="roundRect">
+            <a:avLst/>
+          </a:prstGeom>
+          <a:solidFill>
+            <a:srgbClr val="F3F6FB"/>
+          </a:solidFill>
+          <a:ln w="12700">
+            <a:solidFill>
+              <a:srgbClr val="C7D2E6"/>
+            </a:solidFill>
+          </a:ln>
+          <a:effectLst/>
+        </p:spPr>
+        <p:style>
+          <a:lnRef idx="1">
+            <a:schemeClr val="accent1"/>
+          </a:lnRef>
+          <a:fillRef idx="3">
+            <a:schemeClr val="accent1"/>
+          </a:fillRef>
+          <a:effectRef idx="2">
+            <a:schemeClr val="accent1"/>
+          </a:effectRef>
+          <a:fontRef idx="minor">
+            <a:schemeClr val="lt1"/>
+          </a:fontRef>
+        </p:style>
+        <p:txBody>
+          <a:bodyPr rtlCol="0" anchor="ctr"/>
+          <a:lstStyle/>
+          <a:p>
+            <a:pPr algn="ctr"/>
+          </a:p>
+        </p:txBody>
+      </p:sp>
+      <p:sp>
+        <p:nvSpPr>
+          <p:cNvPr id="10" name="TextBox 9"/>
+          <p:cNvSpPr txBox="1"/>
+          <p:nvPr/>
+        </p:nvSpPr>
+        <p:spPr>
+          <a:xfrm>
+            <a:off x="6355080" y="3611880"/>
+            <a:ext cx="4754880" cy="1280160"/>
+          </a:xfrm>
+          <a:prstGeom prst="rect">
+            <a:avLst/>
+          </a:prstGeom>
+          <a:noFill/>
+        </p:spPr>
+        <p:txBody>
+          <a:bodyPr wrap="square">
+            <a:spAutoFit/>
+          </a:bodyPr>
+          <a:lstStyle/>
+          <a:p>
+            <a:pPr algn="ctr"/>
+            <a:r>
+              <a:rPr sz="1400" b="1" i="0">
+                <a:solidFill>
+                  <a:srgbClr val="64748B"/>
+                </a:solidFill>
+                <a:latin typeface="Montserrat"/>
+              </a:rPr>
+              <a:t>IMAGEN</a:t>
+            </a:r>
+          </a:p>
+          <a:p>
+            <a:pPr algn="ctr"/>
+            <a:r>
+              <a:rPr sz="1100" b="0" i="1">
+                <a:solidFill>
+                  <a:srgbClr val="64748B"/>
+                </a:solidFill>
+                <a:latin typeface="Montserrat"/>
+              </a:rPr>
+              <a:t>boiler flame ignition sequence</a:t>
             </a:r>
           </a:p>
         </p:txBody>
@@ -7939,6 +9580,489 @@
   <p:clrMapOvr>
     <a:masterClrMapping/>
   </p:clrMapOvr>
+  <mc:AlternateContent xmlns:mc="http://schemas.openxmlformats.org/markup-compatibility/2006">
+    <mc:Choice xmlns:p14="http://schemas.microsoft.com/office/powerpoint/2010/main" Requires="p14">
+      <p:transition spd="med" p14:dur="700">
+        <p14:cube dir="r"/>
+      </p:transition>
+    </mc:Choice>
+    <mc:Fallback>
+      <p:transition spd="med">
+        <p:push dir="r"/>
+      </p:transition>
+    </mc:Fallback>
+  </mc:AlternateContent>
+</p:sld>
+</file>
+
+<file path=ppt/slides/slide19.xml><?xml version="1.0" encoding="utf-8"?>
+<p:sld xmlns:a="http://schemas.openxmlformats.org/drawingml/2006/main" xmlns:p="http://schemas.openxmlformats.org/presentationml/2006/main" xmlns:r="http://schemas.openxmlformats.org/officeDocument/2006/relationships">
+  <p:cSld>
+    <p:spTree>
+      <p:nvGrpSpPr>
+        <p:cNvPr id="1" name=""/>
+        <p:cNvGrpSpPr/>
+        <p:nvPr/>
+      </p:nvGrpSpPr>
+      <p:grpSpPr/>
+      <p:sp>
+        <p:nvSpPr>
+          <p:cNvPr id="2" name="Rectangle 1"/>
+          <p:cNvSpPr/>
+          <p:nvPr/>
+        </p:nvSpPr>
+        <p:spPr>
+          <a:xfrm>
+            <a:off x="0" y="0"/>
+            <a:ext cx="12191695" cy="6858000"/>
+          </a:xfrm>
+          <a:prstGeom prst="rect">
+            <a:avLst/>
+          </a:prstGeom>
+          <a:solidFill>
+            <a:srgbClr val="FFFFFF"/>
+          </a:solidFill>
+          <a:ln>
+            <a:noFill/>
+          </a:ln>
+          <a:effectLst/>
+        </p:spPr>
+        <p:style>
+          <a:lnRef idx="1">
+            <a:schemeClr val="accent1"/>
+          </a:lnRef>
+          <a:fillRef idx="3">
+            <a:schemeClr val="accent1"/>
+          </a:fillRef>
+          <a:effectRef idx="2">
+            <a:schemeClr val="accent1"/>
+          </a:effectRef>
+          <a:fontRef idx="minor">
+            <a:schemeClr val="lt1"/>
+          </a:fontRef>
+        </p:style>
+        <p:txBody>
+          <a:bodyPr rtlCol="0" anchor="ctr"/>
+          <a:lstStyle/>
+          <a:p>
+            <a:pPr algn="ctr"/>
+          </a:p>
+        </p:txBody>
+      </p:sp>
+      <p:sp>
+        <p:nvSpPr>
+          <p:cNvPr id="3" name="TextBox 2"/>
+          <p:cNvSpPr txBox="1"/>
+          <p:nvPr/>
+        </p:nvSpPr>
+        <p:spPr>
+          <a:xfrm>
+            <a:off x="10607040" y="320040"/>
+            <a:ext cx="1371600" cy="365760"/>
+          </a:xfrm>
+          <a:prstGeom prst="rect">
+            <a:avLst/>
+          </a:prstGeom>
+          <a:noFill/>
+        </p:spPr>
+        <p:txBody>
+          <a:bodyPr wrap="square">
+            <a:spAutoFit/>
+          </a:bodyPr>
+          <a:lstStyle/>
+          <a:p>
+            <a:pPr algn="r"/>
+            <a:r>
+              <a:rPr sz="1000" b="1" i="0">
+                <a:solidFill>
+                  <a:srgbClr val="64748B"/>
+                </a:solidFill>
+                <a:latin typeface="Montserrat"/>
+              </a:rPr>
+              <a:t>019 / 020</a:t>
+            </a:r>
+          </a:p>
+        </p:txBody>
+      </p:sp>
+      <p:sp>
+        <p:nvSpPr>
+          <p:cNvPr id="4" name="TextBox 3"/>
+          <p:cNvSpPr txBox="1"/>
+          <p:nvPr/>
+        </p:nvSpPr>
+        <p:spPr>
+          <a:xfrm>
+            <a:off x="457200" y="6419088"/>
+            <a:ext cx="8229600" cy="365760"/>
+          </a:xfrm>
+          <a:prstGeom prst="rect">
+            <a:avLst/>
+          </a:prstGeom>
+          <a:noFill/>
+        </p:spPr>
+        <p:txBody>
+          <a:bodyPr wrap="square">
+            <a:spAutoFit/>
+          </a:bodyPr>
+          <a:lstStyle/>
+          <a:p>
+            <a:r>
+              <a:rPr sz="900" b="0" i="0">
+                <a:solidFill>
+                  <a:srgbClr val="64748B"/>
+                </a:solidFill>
+                <a:latin typeface="Montserrat"/>
+              </a:rPr>
+              <a:t>Curso Gas B · Tema 05 · Aparatos de gas</a:t>
+            </a:r>
+          </a:p>
+        </p:txBody>
+      </p:sp>
+      <p:sp>
+        <p:nvSpPr>
+          <p:cNvPr id="5" name="TextBox 4"/>
+          <p:cNvSpPr txBox="1"/>
+          <p:nvPr/>
+        </p:nvSpPr>
+        <p:spPr>
+          <a:xfrm>
+            <a:off x="822960" y="457200"/>
+            <a:ext cx="10058400" cy="365760"/>
+          </a:xfrm>
+          <a:prstGeom prst="rect">
+            <a:avLst/>
+          </a:prstGeom>
+          <a:noFill/>
+        </p:spPr>
+        <p:txBody>
+          <a:bodyPr wrap="square">
+            <a:spAutoFit/>
+          </a:bodyPr>
+          <a:lstStyle/>
+          <a:p>
+            <a:r>
+              <a:rPr sz="1300" b="1" i="0">
+                <a:solidFill>
+                  <a:srgbClr val="E8801A"/>
+                </a:solidFill>
+                <a:latin typeface="Montserrat"/>
+              </a:rPr>
+              <a:t>ANEXO 3 · CIERRE DE PRUEBAS</a:t>
+            </a:r>
+          </a:p>
+        </p:txBody>
+      </p:sp>
+      <p:sp>
+        <p:nvSpPr>
+          <p:cNvPr id="6" name="TextBox 5"/>
+          <p:cNvSpPr txBox="1"/>
+          <p:nvPr/>
+        </p:nvSpPr>
+        <p:spPr>
+          <a:xfrm>
+            <a:off x="822960" y="868680"/>
+            <a:ext cx="10515600" cy="914400"/>
+          </a:xfrm>
+          <a:prstGeom prst="rect">
+            <a:avLst/>
+          </a:prstGeom>
+          <a:noFill/>
+        </p:spPr>
+        <p:txBody>
+          <a:bodyPr wrap="square">
+            <a:spAutoFit/>
+          </a:bodyPr>
+          <a:lstStyle/>
+          <a:p>
+            <a:r>
+              <a:rPr sz="2800" b="1" i="0">
+                <a:solidFill>
+                  <a:srgbClr val="1E2761"/>
+                </a:solidFill>
+                <a:latin typeface="Montserrat"/>
+              </a:rPr>
+              <a:t>Tiempos de seguridad y repaso</a:t>
+            </a:r>
+          </a:p>
+        </p:txBody>
+      </p:sp>
+      <p:sp>
+        <p:nvSpPr>
+          <p:cNvPr id="7" name="Rectangle 6"/>
+          <p:cNvSpPr/>
+          <p:nvPr/>
+        </p:nvSpPr>
+        <p:spPr>
+          <a:xfrm>
+            <a:off x="868680" y="1627632"/>
+            <a:ext cx="2011680" cy="73152"/>
+          </a:xfrm>
+          <a:prstGeom prst="rect">
+            <a:avLst/>
+          </a:prstGeom>
+          <a:solidFill>
+            <a:srgbClr val="E8801A"/>
+          </a:solidFill>
+          <a:ln>
+            <a:noFill/>
+          </a:ln>
+          <a:effectLst/>
+        </p:spPr>
+        <p:style>
+          <a:lnRef idx="1">
+            <a:schemeClr val="accent1"/>
+          </a:lnRef>
+          <a:fillRef idx="3">
+            <a:schemeClr val="accent1"/>
+          </a:fillRef>
+          <a:effectRef idx="2">
+            <a:schemeClr val="accent1"/>
+          </a:effectRef>
+          <a:fontRef idx="minor">
+            <a:schemeClr val="lt1"/>
+          </a:fontRef>
+        </p:style>
+        <p:txBody>
+          <a:bodyPr rtlCol="0" anchor="ctr"/>
+          <a:lstStyle/>
+          <a:p>
+            <a:pPr algn="ctr"/>
+          </a:p>
+        </p:txBody>
+      </p:sp>
+      <p:sp>
+        <p:nvSpPr>
+          <p:cNvPr id="8" name="TextBox 7"/>
+          <p:cNvSpPr txBox="1"/>
+          <p:nvPr/>
+        </p:nvSpPr>
+        <p:spPr>
+          <a:xfrm>
+            <a:off x="6355080" y="1965960"/>
+            <a:ext cx="5029200" cy="4206240"/>
+          </a:xfrm>
+          <a:prstGeom prst="rect">
+            <a:avLst/>
+          </a:prstGeom>
+          <a:noFill/>
+        </p:spPr>
+        <p:txBody>
+          <a:bodyPr wrap="square">
+            <a:spAutoFit/>
+          </a:bodyPr>
+          <a:lstStyle/>
+          <a:p>
+            <a:pPr>
+              <a:spcAft>
+                <a:spcPts val="1100"/>
+              </a:spcAft>
+            </a:pPr>
+            <a:r>
+              <a:rPr sz="1600" b="1" i="0">
+                <a:solidFill>
+                  <a:srgbClr val="E8801A"/>
+                </a:solidFill>
+                <a:latin typeface="Montserrat"/>
+              </a:rPr>
+              <a:t>▸  </a:t>
+            </a:r>
+            <a:r>
+              <a:rPr sz="1600" b="0" i="0">
+                <a:solidFill>
+                  <a:srgbClr val="1B2330"/>
+                </a:solidFill>
+                <a:latin typeface="Montserrat"/>
+              </a:rPr>
+              <a:t>Válvula automática corta a tiempo</a:t>
+            </a:r>
+          </a:p>
+          <a:p>
+            <a:pPr>
+              <a:spcAft>
+                <a:spcPts val="1100"/>
+              </a:spcAft>
+            </a:pPr>
+            <a:r>
+              <a:rPr sz="1600" b="1" i="0">
+                <a:solidFill>
+                  <a:srgbClr val="E8801A"/>
+                </a:solidFill>
+                <a:latin typeface="Montserrat"/>
+              </a:rPr>
+              <a:t>▸  </a:t>
+            </a:r>
+            <a:r>
+              <a:rPr sz="1600" b="0" i="0">
+                <a:solidFill>
+                  <a:srgbClr val="1B2330"/>
+                </a:solidFill>
+                <a:latin typeface="Montserrat"/>
+              </a:rPr>
+              <a:t>Ante fallo: no prende, se apaga, falla el tiro</a:t>
+            </a:r>
+          </a:p>
+          <a:p>
+            <a:pPr>
+              <a:spcAft>
+                <a:spcPts val="1100"/>
+              </a:spcAft>
+            </a:pPr>
+            <a:r>
+              <a:rPr sz="1600" b="1" i="0">
+                <a:solidFill>
+                  <a:srgbClr val="E8801A"/>
+                </a:solidFill>
+                <a:latin typeface="Montserrat"/>
+              </a:rPr>
+              <a:t>▸  </a:t>
+            </a:r>
+            <a:r>
+              <a:rPr sz="1600" b="0" i="0">
+                <a:solidFill>
+                  <a:srgbClr val="1B2330"/>
+                </a:solidFill>
+                <a:latin typeface="Montserrat"/>
+              </a:rPr>
+              <a:t>Control visual: sin deformaciones</a:t>
+            </a:r>
+          </a:p>
+          <a:p>
+            <a:pPr>
+              <a:spcAft>
+                <a:spcPts val="1100"/>
+              </a:spcAft>
+            </a:pPr>
+            <a:r>
+              <a:rPr sz="1600" b="1" i="0">
+                <a:solidFill>
+                  <a:srgbClr val="E8801A"/>
+                </a:solidFill>
+                <a:latin typeface="Montserrat"/>
+              </a:rPr>
+              <a:t>▸  </a:t>
+            </a:r>
+            <a:r>
+              <a:rPr sz="1600" b="0" i="0">
+                <a:solidFill>
+                  <a:srgbClr val="1B2330"/>
+                </a:solidFill>
+                <a:latin typeface="Montserrat"/>
+              </a:rPr>
+              <a:t>Marcados legibles</a:t>
+            </a:r>
+          </a:p>
+        </p:txBody>
+      </p:sp>
+      <p:sp>
+        <p:nvSpPr>
+          <p:cNvPr id="9" name="imgph" descr="IMGQ:automatic gas shutoff valve"/>
+          <p:cNvSpPr/>
+          <p:nvPr/>
+        </p:nvSpPr>
+        <p:spPr>
+          <a:xfrm>
+            <a:off x="822960" y="1965960"/>
+            <a:ext cx="5303520" cy="4572000"/>
+          </a:xfrm>
+          <a:prstGeom prst="roundRect">
+            <a:avLst/>
+          </a:prstGeom>
+          <a:solidFill>
+            <a:srgbClr val="F3F6FB"/>
+          </a:solidFill>
+          <a:ln w="12700">
+            <a:solidFill>
+              <a:srgbClr val="C7D2E6"/>
+            </a:solidFill>
+          </a:ln>
+          <a:effectLst/>
+        </p:spPr>
+        <p:style>
+          <a:lnRef idx="1">
+            <a:schemeClr val="accent1"/>
+          </a:lnRef>
+          <a:fillRef idx="3">
+            <a:schemeClr val="accent1"/>
+          </a:fillRef>
+          <a:effectRef idx="2">
+            <a:schemeClr val="accent1"/>
+          </a:effectRef>
+          <a:fontRef idx="minor">
+            <a:schemeClr val="lt1"/>
+          </a:fontRef>
+        </p:style>
+        <p:txBody>
+          <a:bodyPr rtlCol="0" anchor="ctr"/>
+          <a:lstStyle/>
+          <a:p>
+            <a:pPr algn="ctr"/>
+          </a:p>
+        </p:txBody>
+      </p:sp>
+      <p:sp>
+        <p:nvSpPr>
+          <p:cNvPr id="10" name="TextBox 9"/>
+          <p:cNvSpPr txBox="1"/>
+          <p:nvPr/>
+        </p:nvSpPr>
+        <p:spPr>
+          <a:xfrm>
+            <a:off x="1097280" y="3611880"/>
+            <a:ext cx="4754880" cy="1280160"/>
+          </a:xfrm>
+          <a:prstGeom prst="rect">
+            <a:avLst/>
+          </a:prstGeom>
+          <a:noFill/>
+        </p:spPr>
+        <p:txBody>
+          <a:bodyPr wrap="square">
+            <a:spAutoFit/>
+          </a:bodyPr>
+          <a:lstStyle/>
+          <a:p>
+            <a:pPr algn="ctr"/>
+            <a:r>
+              <a:rPr sz="1400" b="1" i="0">
+                <a:solidFill>
+                  <a:srgbClr val="64748B"/>
+                </a:solidFill>
+                <a:latin typeface="Montserrat"/>
+              </a:rPr>
+              <a:t>IMAGEN</a:t>
+            </a:r>
+          </a:p>
+          <a:p>
+            <a:pPr algn="ctr"/>
+            <a:r>
+              <a:rPr sz="1100" b="0" i="1">
+                <a:solidFill>
+                  <a:srgbClr val="64748B"/>
+                </a:solidFill>
+                <a:latin typeface="Montserrat"/>
+              </a:rPr>
+              <a:t>automatic gas shutoff valve</a:t>
+            </a:r>
+          </a:p>
+        </p:txBody>
+      </p:sp>
+    </p:spTree>
+  </p:cSld>
+  <p:clrMapOvr>
+    <a:masterClrMapping/>
+  </p:clrMapOvr>
+  <mc:AlternateContent xmlns:mc="http://schemas.openxmlformats.org/markup-compatibility/2006">
+    <mc:Choice xmlns:p14="http://schemas.microsoft.com/office/powerpoint/2010/main" Requires="p14">
+      <p:transition spd="med" p14:dur="700">
+        <p14:cube dir="l"/>
+      </p:transition>
+    </mc:Choice>
+    <mc:Fallback>
+      <p:transition spd="med">
+        <p:push dir="l"/>
+      </p:transition>
+    </mc:Fallback>
+  </mc:AlternateContent>
 </p:sld>
 </file>
 
@@ -8026,7 +10150,7 @@
                 </a:solidFill>
                 <a:latin typeface="Montserrat"/>
               </a:rPr>
-              <a:t>002 / 016</a:t>
+              <a:t>002 / 020</a:t>
             </a:r>
           </a:p>
         </p:txBody>
@@ -8101,7 +10225,7 @@
       </p:sp>
       <p:sp>
         <p:nvSpPr>
-          <p:cNvPr id="6" name="Rounded Rectangle 5"/>
+          <p:cNvPr id="6" name="Rectangle 5"/>
           <p:cNvSpPr/>
           <p:nvPr/>
         </p:nvSpPr>
@@ -8110,7 +10234,7 @@
             <a:off x="868680" y="1234440"/>
             <a:ext cx="1463040" cy="73152"/>
           </a:xfrm>
-          <a:prstGeom prst="roundRect">
+          <a:prstGeom prst="rect">
             <a:avLst/>
           </a:prstGeom>
           <a:solidFill>
@@ -8191,14 +10315,58 @@
       </p:sp>
       <p:sp>
         <p:nvSpPr>
-          <p:cNvPr id="8" name="TextBox 7"/>
+          <p:cNvPr id="8" name="Rectangle 7"/>
+          <p:cNvSpPr/>
+          <p:nvPr/>
+        </p:nvSpPr>
+        <p:spPr>
+          <a:xfrm>
+            <a:off x="822960" y="2011680"/>
+            <a:ext cx="3017520" cy="128016"/>
+          </a:xfrm>
+          <a:prstGeom prst="rect">
+            <a:avLst/>
+          </a:prstGeom>
+          <a:solidFill>
+            <a:srgbClr val="E8801A"/>
+          </a:solidFill>
+          <a:ln>
+            <a:noFill/>
+          </a:ln>
+          <a:effectLst/>
+        </p:spPr>
+        <p:style>
+          <a:lnRef idx="1">
+            <a:schemeClr val="accent1"/>
+          </a:lnRef>
+          <a:fillRef idx="3">
+            <a:schemeClr val="accent1"/>
+          </a:fillRef>
+          <a:effectRef idx="2">
+            <a:schemeClr val="accent1"/>
+          </a:effectRef>
+          <a:fontRef idx="minor">
+            <a:schemeClr val="lt1"/>
+          </a:fontRef>
+        </p:style>
+        <p:txBody>
+          <a:bodyPr rtlCol="0" anchor="ctr"/>
+          <a:lstStyle/>
+          <a:p>
+            <a:pPr algn="ctr"/>
+          </a:p>
+        </p:txBody>
+      </p:sp>
+      <p:sp>
+        <p:nvSpPr>
+          <p:cNvPr id="9" name="TextBox 8"/>
           <p:cNvSpPr txBox="1"/>
           <p:nvPr/>
         </p:nvSpPr>
         <p:spPr>
           <a:xfrm>
-            <a:off x="822960" y="2331720"/>
-            <a:ext cx="3017520" cy="1463040"/>
+            <a:off x="822960" y="2377440"/>
+            <a:ext cx="3017520" cy="1371600"/>
           </a:xfrm>
           <a:prstGeom prst="rect">
             <a:avLst/>
@@ -8213,7 +10381,7 @@
           <a:p>
             <a:pPr algn="ctr"/>
             <a:r>
-              <a:rPr sz="6000" b="1" i="0">
+              <a:rPr sz="5800" b="1" i="0">
                 <a:solidFill>
                   <a:srgbClr val="1E2761"/>
                 </a:solidFill>
@@ -8226,13 +10394,13 @@
       </p:sp>
       <p:sp>
         <p:nvSpPr>
-          <p:cNvPr id="9" name="TextBox 8"/>
+          <p:cNvPr id="10" name="TextBox 9"/>
           <p:cNvSpPr txBox="1"/>
           <p:nvPr/>
         </p:nvSpPr>
         <p:spPr>
           <a:xfrm>
-            <a:off x="1051560" y="3611880"/>
+            <a:off x="1051560" y="3657600"/>
             <a:ext cx="2560320" cy="1005840"/>
           </a:xfrm>
           <a:prstGeom prst="rect">
@@ -8261,7 +10429,7 @@
       </p:sp>
       <p:sp>
         <p:nvSpPr>
-          <p:cNvPr id="10" name="Rounded Rectangle 9"/>
+          <p:cNvPr id="11" name="Rounded Rectangle 10"/>
           <p:cNvSpPr/>
           <p:nvPr/>
         </p:nvSpPr>
@@ -8307,14 +10475,58 @@
       </p:sp>
       <p:sp>
         <p:nvSpPr>
-          <p:cNvPr id="11" name="TextBox 10"/>
+          <p:cNvPr id="12" name="Rectangle 11"/>
+          <p:cNvSpPr/>
+          <p:nvPr/>
+        </p:nvSpPr>
+        <p:spPr>
+          <a:xfrm>
+            <a:off x="4617720" y="2011680"/>
+            <a:ext cx="3017520" cy="128016"/>
+          </a:xfrm>
+          <a:prstGeom prst="rect">
+            <a:avLst/>
+          </a:prstGeom>
+          <a:solidFill>
+            <a:srgbClr val="E8801A"/>
+          </a:solidFill>
+          <a:ln>
+            <a:noFill/>
+          </a:ln>
+          <a:effectLst/>
+        </p:spPr>
+        <p:style>
+          <a:lnRef idx="1">
+            <a:schemeClr val="accent1"/>
+          </a:lnRef>
+          <a:fillRef idx="3">
+            <a:schemeClr val="accent1"/>
+          </a:fillRef>
+          <a:effectRef idx="2">
+            <a:schemeClr val="accent1"/>
+          </a:effectRef>
+          <a:fontRef idx="minor">
+            <a:schemeClr val="lt1"/>
+          </a:fontRef>
+        </p:style>
+        <p:txBody>
+          <a:bodyPr rtlCol="0" anchor="ctr"/>
+          <a:lstStyle/>
+          <a:p>
+            <a:pPr algn="ctr"/>
+          </a:p>
+        </p:txBody>
+      </p:sp>
+      <p:sp>
+        <p:nvSpPr>
+          <p:cNvPr id="13" name="TextBox 12"/>
           <p:cNvSpPr txBox="1"/>
           <p:nvPr/>
         </p:nvSpPr>
         <p:spPr>
           <a:xfrm>
-            <a:off x="4617720" y="2331720"/>
-            <a:ext cx="3017520" cy="1463040"/>
+            <a:off x="4617720" y="2377440"/>
+            <a:ext cx="3017520" cy="1371600"/>
           </a:xfrm>
           <a:prstGeom prst="rect">
             <a:avLst/>
@@ -8329,7 +10541,7 @@
           <a:p>
             <a:pPr algn="ctr"/>
             <a:r>
-              <a:rPr sz="6000" b="1" i="0">
+              <a:rPr sz="5800" b="1" i="0">
                 <a:solidFill>
                   <a:srgbClr val="1E2761"/>
                 </a:solidFill>
@@ -8342,13 +10554,13 @@
       </p:sp>
       <p:sp>
         <p:nvSpPr>
-          <p:cNvPr id="12" name="TextBox 11"/>
+          <p:cNvPr id="14" name="TextBox 13"/>
           <p:cNvSpPr txBox="1"/>
           <p:nvPr/>
         </p:nvSpPr>
         <p:spPr>
           <a:xfrm>
-            <a:off x="4846320" y="3611880"/>
+            <a:off x="4846320" y="3657600"/>
             <a:ext cx="2560320" cy="1005840"/>
           </a:xfrm>
           <a:prstGeom prst="rect">
@@ -8377,7 +10589,7 @@
       </p:sp>
       <p:sp>
         <p:nvSpPr>
-          <p:cNvPr id="13" name="Rounded Rectangle 12"/>
+          <p:cNvPr id="15" name="Rounded Rectangle 14"/>
           <p:cNvSpPr/>
           <p:nvPr/>
         </p:nvSpPr>
@@ -8423,14 +10635,58 @@
       </p:sp>
       <p:sp>
         <p:nvSpPr>
-          <p:cNvPr id="14" name="TextBox 13"/>
+          <p:cNvPr id="16" name="Rectangle 15"/>
+          <p:cNvSpPr/>
+          <p:nvPr/>
+        </p:nvSpPr>
+        <p:spPr>
+          <a:xfrm>
+            <a:off x="8412480" y="2011680"/>
+            <a:ext cx="3017520" cy="128016"/>
+          </a:xfrm>
+          <a:prstGeom prst="rect">
+            <a:avLst/>
+          </a:prstGeom>
+          <a:solidFill>
+            <a:srgbClr val="E8801A"/>
+          </a:solidFill>
+          <a:ln>
+            <a:noFill/>
+          </a:ln>
+          <a:effectLst/>
+        </p:spPr>
+        <p:style>
+          <a:lnRef idx="1">
+            <a:schemeClr val="accent1"/>
+          </a:lnRef>
+          <a:fillRef idx="3">
+            <a:schemeClr val="accent1"/>
+          </a:fillRef>
+          <a:effectRef idx="2">
+            <a:schemeClr val="accent1"/>
+          </a:effectRef>
+          <a:fontRef idx="minor">
+            <a:schemeClr val="lt1"/>
+          </a:fontRef>
+        </p:style>
+        <p:txBody>
+          <a:bodyPr rtlCol="0" anchor="ctr"/>
+          <a:lstStyle/>
+          <a:p>
+            <a:pPr algn="ctr"/>
+          </a:p>
+        </p:txBody>
+      </p:sp>
+      <p:sp>
+        <p:nvSpPr>
+          <p:cNvPr id="17" name="TextBox 16"/>
           <p:cNvSpPr txBox="1"/>
           <p:nvPr/>
         </p:nvSpPr>
         <p:spPr>
           <a:xfrm>
-            <a:off x="8412480" y="2331720"/>
-            <a:ext cx="3017520" cy="1463040"/>
+            <a:off x="8412480" y="2377440"/>
+            <a:ext cx="3017520" cy="1371600"/>
           </a:xfrm>
           <a:prstGeom prst="rect">
             <a:avLst/>
@@ -8445,7 +10701,7 @@
           <a:p>
             <a:pPr algn="ctr"/>
             <a:r>
-              <a:rPr sz="6000" b="1" i="0">
+              <a:rPr sz="5800" b="1" i="0">
                 <a:solidFill>
                   <a:srgbClr val="1E2761"/>
                 </a:solidFill>
@@ -8458,13 +10714,13 @@
       </p:sp>
       <p:sp>
         <p:nvSpPr>
-          <p:cNvPr id="15" name="TextBox 14"/>
+          <p:cNvPr id="18" name="TextBox 17"/>
           <p:cNvSpPr txBox="1"/>
           <p:nvPr/>
         </p:nvSpPr>
         <p:spPr>
           <a:xfrm>
-            <a:off x="8641080" y="3611880"/>
+            <a:off x="8641080" y="3657600"/>
             <a:ext cx="2560320" cy="1005840"/>
           </a:xfrm>
           <a:prstGeom prst="rect">
@@ -8496,6 +10752,405 @@
   <p:clrMapOvr>
     <a:masterClrMapping/>
   </p:clrMapOvr>
+  <mc:AlternateContent xmlns:mc="http://schemas.openxmlformats.org/markup-compatibility/2006">
+    <mc:Choice xmlns:p14="http://schemas.microsoft.com/office/powerpoint/2010/main" Requires="p14">
+      <p:transition spd="med" p14:dur="700">
+        <p14:cube dir="r"/>
+      </p:transition>
+    </mc:Choice>
+    <mc:Fallback>
+      <p:transition spd="med">
+        <p:push dir="r"/>
+      </p:transition>
+    </mc:Fallback>
+  </mc:AlternateContent>
+</p:sld>
+</file>
+
+<file path=ppt/slides/slide20.xml><?xml version="1.0" encoding="utf-8"?>
+<p:sld xmlns:a="http://schemas.openxmlformats.org/drawingml/2006/main" xmlns:p="http://schemas.openxmlformats.org/presentationml/2006/main" xmlns:r="http://schemas.openxmlformats.org/officeDocument/2006/relationships">
+  <p:cSld>
+    <p:spTree>
+      <p:nvGrpSpPr>
+        <p:cNvPr id="1" name=""/>
+        <p:cNvGrpSpPr/>
+        <p:nvPr/>
+      </p:nvGrpSpPr>
+      <p:grpSpPr/>
+      <p:sp>
+        <p:nvSpPr>
+          <p:cNvPr id="2" name="Rectangle 1"/>
+          <p:cNvSpPr/>
+          <p:nvPr/>
+        </p:nvSpPr>
+        <p:spPr>
+          <a:xfrm>
+            <a:off x="0" y="0"/>
+            <a:ext cx="12191695" cy="6858000"/>
+          </a:xfrm>
+          <a:prstGeom prst="rect">
+            <a:avLst/>
+          </a:prstGeom>
+          <a:solidFill>
+            <a:srgbClr val="1E2761"/>
+          </a:solidFill>
+          <a:ln>
+            <a:noFill/>
+          </a:ln>
+          <a:effectLst/>
+        </p:spPr>
+        <p:style>
+          <a:lnRef idx="1">
+            <a:schemeClr val="accent1"/>
+          </a:lnRef>
+          <a:fillRef idx="3">
+            <a:schemeClr val="accent1"/>
+          </a:fillRef>
+          <a:effectRef idx="2">
+            <a:schemeClr val="accent1"/>
+          </a:effectRef>
+          <a:fontRef idx="minor">
+            <a:schemeClr val="lt1"/>
+          </a:fontRef>
+        </p:style>
+        <p:txBody>
+          <a:bodyPr rtlCol="0" anchor="ctr"/>
+          <a:lstStyle/>
+          <a:p>
+            <a:pPr algn="ctr"/>
+          </a:p>
+        </p:txBody>
+      </p:sp>
+      <p:sp>
+        <p:nvSpPr>
+          <p:cNvPr id="3" name="TextBox 2"/>
+          <p:cNvSpPr txBox="1"/>
+          <p:nvPr/>
+        </p:nvSpPr>
+        <p:spPr>
+          <a:xfrm>
+            <a:off x="822960" y="640080"/>
+            <a:ext cx="10515600" cy="457200"/>
+          </a:xfrm>
+          <a:prstGeom prst="rect">
+            <a:avLst/>
+          </a:prstGeom>
+          <a:noFill/>
+        </p:spPr>
+        <p:txBody>
+          <a:bodyPr wrap="square">
+            <a:spAutoFit/>
+          </a:bodyPr>
+          <a:lstStyle/>
+          <a:p>
+            <a:r>
+              <a:rPr sz="1400" b="1" i="0">
+                <a:solidFill>
+                  <a:srgbClr val="F4A24C"/>
+                </a:solidFill>
+                <a:latin typeface="Montserrat"/>
+              </a:rPr>
+              <a:t>LO QUE YA DOMINAS</a:t>
+            </a:r>
+          </a:p>
+        </p:txBody>
+      </p:sp>
+      <p:sp>
+        <p:nvSpPr>
+          <p:cNvPr id="4" name="Rectangle 3"/>
+          <p:cNvSpPr/>
+          <p:nvPr/>
+        </p:nvSpPr>
+        <p:spPr>
+          <a:xfrm>
+            <a:off x="868680" y="1051560"/>
+            <a:ext cx="1463040" cy="82296"/>
+          </a:xfrm>
+          <a:prstGeom prst="rect">
+            <a:avLst/>
+          </a:prstGeom>
+          <a:solidFill>
+            <a:srgbClr val="E8801A"/>
+          </a:solidFill>
+          <a:ln>
+            <a:noFill/>
+          </a:ln>
+          <a:effectLst/>
+        </p:spPr>
+        <p:style>
+          <a:lnRef idx="1">
+            <a:schemeClr val="accent1"/>
+          </a:lnRef>
+          <a:fillRef idx="3">
+            <a:schemeClr val="accent1"/>
+          </a:fillRef>
+          <a:effectRef idx="2">
+            <a:schemeClr val="accent1"/>
+          </a:effectRef>
+          <a:fontRef idx="minor">
+            <a:schemeClr val="lt1"/>
+          </a:fontRef>
+        </p:style>
+        <p:txBody>
+          <a:bodyPr rtlCol="0" anchor="ctr"/>
+          <a:lstStyle/>
+          <a:p>
+            <a:pPr algn="ctr"/>
+          </a:p>
+        </p:txBody>
+      </p:sp>
+      <p:sp>
+        <p:nvSpPr>
+          <p:cNvPr id="5" name="TextBox 4"/>
+          <p:cNvSpPr txBox="1"/>
+          <p:nvPr/>
+        </p:nvSpPr>
+        <p:spPr>
+          <a:xfrm>
+            <a:off x="822960" y="1234440"/>
+            <a:ext cx="10515600" cy="1097280"/>
+          </a:xfrm>
+          <a:prstGeom prst="rect">
+            <a:avLst/>
+          </a:prstGeom>
+          <a:noFill/>
+        </p:spPr>
+        <p:txBody>
+          <a:bodyPr wrap="square">
+            <a:spAutoFit/>
+          </a:bodyPr>
+          <a:lstStyle/>
+          <a:p>
+            <a:r>
+              <a:rPr sz="3400" b="1" i="0">
+                <a:solidFill>
+                  <a:srgbClr val="FFFFFF"/>
+                </a:solidFill>
+                <a:latin typeface="Montserrat"/>
+              </a:rPr>
+              <a:t>Has cerrado la ITC-ICG 08 de principio a fin</a:t>
+            </a:r>
+          </a:p>
+        </p:txBody>
+      </p:sp>
+      <p:sp>
+        <p:nvSpPr>
+          <p:cNvPr id="6" name="TextBox 5"/>
+          <p:cNvSpPr txBox="1"/>
+          <p:nvPr/>
+        </p:nvSpPr>
+        <p:spPr>
+          <a:xfrm>
+            <a:off x="822960" y="2606040"/>
+            <a:ext cx="10515600" cy="2743200"/>
+          </a:xfrm>
+          <a:prstGeom prst="rect">
+            <a:avLst/>
+          </a:prstGeom>
+          <a:noFill/>
+        </p:spPr>
+        <p:txBody>
+          <a:bodyPr wrap="square">
+            <a:spAutoFit/>
+          </a:bodyPr>
+          <a:lstStyle/>
+          <a:p>
+            <a:pPr>
+              <a:spcAft>
+                <a:spcPts val="1200"/>
+              </a:spcAft>
+            </a:pPr>
+            <a:r>
+              <a:rPr sz="2000" b="1" i="0">
+                <a:solidFill>
+                  <a:srgbClr val="F4A24C"/>
+                </a:solidFill>
+                <a:latin typeface="Montserrat"/>
+              </a:rPr>
+              <a:t>✓  </a:t>
+            </a:r>
+            <a:r>
+              <a:rPr sz="1900" b="0" i="0">
+                <a:solidFill>
+                  <a:srgbClr val="FFFFFF"/>
+                </a:solidFill>
+                <a:latin typeface="Montserrat"/>
+              </a:rPr>
+              <a:t>La placa: DNI indeleble; toda ella se verifica con la UNE 60750</a:t>
+            </a:r>
+          </a:p>
+          <a:p>
+            <a:pPr>
+              <a:spcAft>
+                <a:spcPts val="1200"/>
+              </a:spcAft>
+            </a:pPr>
+            <a:r>
+              <a:rPr sz="2000" b="1" i="0">
+                <a:solidFill>
+                  <a:srgbClr val="F4A24C"/>
+                </a:solidFill>
+                <a:latin typeface="Montserrat"/>
+              </a:rPr>
+              <a:t>✓  </a:t>
+            </a:r>
+            <a:r>
+              <a:rPr sz="1900" b="0" i="0">
+                <a:solidFill>
+                  <a:srgbClr val="FFFFFF"/>
+                </a:solidFill>
+                <a:latin typeface="Montserrat"/>
+              </a:rPr>
+              <a:t>Anexo 3: la red de seguridad sin norma propia</a:t>
+            </a:r>
+          </a:p>
+          <a:p>
+            <a:pPr>
+              <a:spcAft>
+                <a:spcPts val="1200"/>
+              </a:spcAft>
+            </a:pPr>
+            <a:r>
+              <a:rPr sz="2000" b="1" i="0">
+                <a:solidFill>
+                  <a:srgbClr val="F4A24C"/>
+                </a:solidFill>
+                <a:latin typeface="Montserrat"/>
+              </a:rPr>
+              <a:t>✓  </a:t>
+            </a:r>
+            <a:r>
+              <a:rPr sz="1900" b="0" i="0">
+                <a:solidFill>
+                  <a:srgbClr val="FFFFFF"/>
+                </a:solidFill>
+                <a:latin typeface="Montserrat"/>
+              </a:rPr>
+              <a:t>2.3.15: dispositivo anti-acumulación o local ventilado</a:t>
+            </a:r>
+          </a:p>
+          <a:p>
+            <a:pPr>
+              <a:spcAft>
+                <a:spcPts val="1200"/>
+              </a:spcAft>
+            </a:pPr>
+            <a:r>
+              <a:rPr sz="2000" b="1" i="0">
+                <a:solidFill>
+                  <a:srgbClr val="F4A24C"/>
+                </a:solidFill>
+                <a:latin typeface="Montserrat"/>
+              </a:rPr>
+              <a:t>✓  </a:t>
+            </a:r>
+            <a:r>
+              <a:rPr sz="1900" b="0" i="0">
+                <a:solidFill>
+                  <a:srgbClr val="FFFFFF"/>
+                </a:solidFill>
+                <a:latin typeface="Montserrat"/>
+              </a:rPr>
+              <a:t>Estanquidad caza fugas; funcionamiento caza el CO</a:t>
+            </a:r>
+          </a:p>
+        </p:txBody>
+      </p:sp>
+      <p:sp>
+        <p:nvSpPr>
+          <p:cNvPr id="7" name="Rounded Rectangle 6"/>
+          <p:cNvSpPr/>
+          <p:nvPr/>
+        </p:nvSpPr>
+        <p:spPr>
+          <a:xfrm>
+            <a:off x="822960" y="5532120"/>
+            <a:ext cx="10515600" cy="822960"/>
+          </a:xfrm>
+          <a:prstGeom prst="roundRect">
+            <a:avLst/>
+          </a:prstGeom>
+          <a:solidFill>
+            <a:srgbClr val="E8801A"/>
+          </a:solidFill>
+          <a:ln>
+            <a:noFill/>
+          </a:ln>
+          <a:effectLst/>
+        </p:spPr>
+        <p:style>
+          <a:lnRef idx="1">
+            <a:schemeClr val="accent1"/>
+          </a:lnRef>
+          <a:fillRef idx="3">
+            <a:schemeClr val="accent1"/>
+          </a:fillRef>
+          <a:effectRef idx="2">
+            <a:schemeClr val="accent1"/>
+          </a:effectRef>
+          <a:fontRef idx="minor">
+            <a:schemeClr val="lt1"/>
+          </a:fontRef>
+        </p:style>
+        <p:txBody>
+          <a:bodyPr rtlCol="0" anchor="ctr"/>
+          <a:lstStyle/>
+          <a:p>
+            <a:pPr algn="ctr"/>
+          </a:p>
+        </p:txBody>
+      </p:sp>
+      <p:sp>
+        <p:nvSpPr>
+          <p:cNvPr id="8" name="TextBox 7"/>
+          <p:cNvSpPr txBox="1"/>
+          <p:nvPr/>
+        </p:nvSpPr>
+        <p:spPr>
+          <a:xfrm>
+            <a:off x="1051560" y="5623560"/>
+            <a:ext cx="10058400" cy="640080"/>
+          </a:xfrm>
+          <a:prstGeom prst="rect">
+            <a:avLst/>
+          </a:prstGeom>
+          <a:noFill/>
+        </p:spPr>
+        <p:txBody>
+          <a:bodyPr wrap="square">
+            <a:spAutoFit/>
+          </a:bodyPr>
+          <a:lstStyle/>
+          <a:p>
+            <a:r>
+              <a:rPr sz="1500" b="1" i="1">
+                <a:solidFill>
+                  <a:srgbClr val="1E2761"/>
+                </a:solidFill>
+                <a:latin typeface="Montserrat"/>
+              </a:rPr>
+              <a:t>Ya lees un aparato como un profesional: de la placa al análisis de combustión. Enhorabuena, has cerrado el tema.</a:t>
+            </a:r>
+          </a:p>
+        </p:txBody>
+      </p:sp>
+    </p:spTree>
+  </p:cSld>
+  <p:clrMapOvr>
+    <a:masterClrMapping/>
+  </p:clrMapOvr>
+  <mc:AlternateContent xmlns:mc="http://schemas.openxmlformats.org/markup-compatibility/2006">
+    <mc:Choice xmlns:p14="http://schemas.microsoft.com/office/powerpoint/2010/main" Requires="p14">
+      <p:transition spd="med" p14:dur="700">
+        <p14:cube dir="r"/>
+      </p:transition>
+    </mc:Choice>
+    <mc:Fallback>
+      <p:transition spd="med">
+        <p:push dir="r"/>
+      </p:transition>
+    </mc:Fallback>
+  </mc:AlternateContent>
 </p:sld>
 </file>
 
@@ -8583,7 +11238,7 @@
                 </a:solidFill>
                 <a:latin typeface="Montserrat"/>
               </a:rPr>
-              <a:t>003 / 016</a:t>
+              <a:t>003 / 020</a:t>
             </a:r>
           </a:p>
         </p:txBody>
@@ -8692,7 +11347,7 @@
       </p:sp>
       <p:sp>
         <p:nvSpPr>
-          <p:cNvPr id="7" name="Rounded Rectangle 6"/>
+          <p:cNvPr id="7" name="Rectangle 6"/>
           <p:cNvSpPr/>
           <p:nvPr/>
         </p:nvSpPr>
@@ -8701,7 +11356,7 @@
             <a:off x="868680" y="1673352"/>
             <a:ext cx="2011680" cy="73152"/>
           </a:xfrm>
-          <a:prstGeom prst="roundRect">
+          <a:prstGeom prst="rect">
             <a:avLst/>
           </a:prstGeom>
           <a:solidFill>
@@ -8812,6 +11467,18 @@
   <p:clrMapOvr>
     <a:masterClrMapping/>
   </p:clrMapOvr>
+  <mc:AlternateContent xmlns:mc="http://schemas.openxmlformats.org/markup-compatibility/2006">
+    <mc:Choice xmlns:p14="http://schemas.microsoft.com/office/powerpoint/2010/main" Requires="p14">
+      <p:transition spd="med" p14:dur="700">
+        <p14:cube dir="l"/>
+      </p:transition>
+    </mc:Choice>
+    <mc:Fallback>
+      <p:transition spd="med">
+        <p:push dir="l"/>
+      </p:transition>
+    </mc:Fallback>
+  </mc:AlternateContent>
 </p:sld>
 </file>
 
@@ -8899,7 +11566,7 @@
                 </a:solidFill>
                 <a:latin typeface="Montserrat"/>
               </a:rPr>
-              <a:t>004 / 016</a:t>
+              <a:t>004 / 020</a:t>
             </a:r>
           </a:p>
         </p:txBody>
@@ -9008,7 +11675,7 @@
       </p:sp>
       <p:sp>
         <p:nvSpPr>
-          <p:cNvPr id="7" name="Rounded Rectangle 6"/>
+          <p:cNvPr id="7" name="Rectangle 6"/>
           <p:cNvSpPr/>
           <p:nvPr/>
         </p:nvSpPr>
@@ -9017,7 +11684,7 @@
             <a:off x="868680" y="1627632"/>
             <a:ext cx="2011680" cy="73152"/>
           </a:xfrm>
-          <a:prstGeom prst="roundRect">
+          <a:prstGeom prst="rect">
             <a:avLst/>
           </a:prstGeom>
           <a:solidFill>
@@ -9059,7 +11726,7 @@
         <p:spPr>
           <a:xfrm>
             <a:off x="822960" y="1965960"/>
-            <a:ext cx="4983480" cy="4206240"/>
+            <a:ext cx="5029200" cy="4206240"/>
           </a:xfrm>
           <a:prstGeom prst="rect">
             <a:avLst/>
@@ -9156,8 +11823,8 @@
         </p:nvSpPr>
         <p:spPr>
           <a:xfrm>
-            <a:off x="5806440" y="1051560"/>
-            <a:ext cx="5298947" cy="4629150"/>
+            <a:off x="6080760" y="1965960"/>
+            <a:ext cx="5303520" cy="4572000"/>
           </a:xfrm>
           <a:prstGeom prst="roundRect">
             <a:avLst/>
@@ -9202,8 +11869,8 @@
         </p:nvSpPr>
         <p:spPr>
           <a:xfrm>
-            <a:off x="6080760" y="2726055"/>
-            <a:ext cx="4750307" cy="1280160"/>
+            <a:off x="6355080" y="3611880"/>
+            <a:ext cx="4754880" cy="1280160"/>
           </a:xfrm>
           <a:prstGeom prst="rect">
             <a:avLst/>
@@ -9224,7 +11891,7 @@
                 </a:solidFill>
                 <a:latin typeface="Montserrat"/>
               </a:rPr>
-              <a:t>IMAGEN REALISTA</a:t>
+              <a:t>IMAGEN</a:t>
             </a:r>
           </a:p>
           <a:p>
@@ -9246,6 +11913,18 @@
   <p:clrMapOvr>
     <a:masterClrMapping/>
   </p:clrMapOvr>
+  <mc:AlternateContent xmlns:mc="http://schemas.openxmlformats.org/markup-compatibility/2006">
+    <mc:Choice xmlns:p14="http://schemas.microsoft.com/office/powerpoint/2010/main" Requires="p14">
+      <p:transition spd="med" p14:dur="700">
+        <p14:cube dir="r"/>
+      </p:transition>
+    </mc:Choice>
+    <mc:Fallback>
+      <p:transition spd="med">
+        <p:push dir="r"/>
+      </p:transition>
+    </mc:Fallback>
+  </mc:AlternateContent>
 </p:sld>
 </file>
 
@@ -9333,7 +12012,7 @@
                 </a:solidFill>
                 <a:latin typeface="Montserrat"/>
               </a:rPr>
-              <a:t>005 / 016</a:t>
+              <a:t>005 / 020</a:t>
             </a:r>
           </a:p>
         </p:txBody>
@@ -9442,7 +12121,7 @@
       </p:sp>
       <p:sp>
         <p:nvSpPr>
-          <p:cNvPr id="7" name="Rounded Rectangle 6"/>
+          <p:cNvPr id="7" name="Rectangle 6"/>
           <p:cNvSpPr/>
           <p:nvPr/>
         </p:nvSpPr>
@@ -9451,7 +12130,7 @@
             <a:off x="868680" y="1627632"/>
             <a:ext cx="2011680" cy="73152"/>
           </a:xfrm>
-          <a:prstGeom prst="roundRect">
+          <a:prstGeom prst="rect">
             <a:avLst/>
           </a:prstGeom>
           <a:solidFill>
@@ -9492,8 +12171,8 @@
         </p:nvSpPr>
         <p:spPr>
           <a:xfrm>
-            <a:off x="822960" y="1965960"/>
-            <a:ext cx="4983480" cy="4206240"/>
+            <a:off x="6355080" y="1965960"/>
+            <a:ext cx="5029200" cy="4206240"/>
           </a:xfrm>
           <a:prstGeom prst="rect">
             <a:avLst/>
@@ -9640,8 +12319,8 @@
         </p:nvSpPr>
         <p:spPr>
           <a:xfrm>
-            <a:off x="5806440" y="1051560"/>
-            <a:ext cx="5298947" cy="4629150"/>
+            <a:off x="822960" y="1965960"/>
+            <a:ext cx="5303520" cy="4572000"/>
           </a:xfrm>
           <a:prstGeom prst="roundRect">
             <a:avLst/>
@@ -9686,8 +12365,8 @@
         </p:nvSpPr>
         <p:spPr>
           <a:xfrm>
-            <a:off x="6080760" y="2726055"/>
-            <a:ext cx="4750307" cy="1280160"/>
+            <a:off x="1097280" y="3611880"/>
+            <a:ext cx="4754880" cy="1280160"/>
           </a:xfrm>
           <a:prstGeom prst="rect">
             <a:avLst/>
@@ -9708,7 +12387,7 @@
                 </a:solidFill>
                 <a:latin typeface="Montserrat"/>
               </a:rPr>
-              <a:t>IMAGEN REALISTA</a:t>
+              <a:t>IMAGEN</a:t>
             </a:r>
           </a:p>
           <a:p>
@@ -9730,6 +12409,18 @@
   <p:clrMapOvr>
     <a:masterClrMapping/>
   </p:clrMapOvr>
+  <mc:AlternateContent xmlns:mc="http://schemas.openxmlformats.org/markup-compatibility/2006">
+    <mc:Choice xmlns:p14="http://schemas.microsoft.com/office/powerpoint/2010/main" Requires="p14">
+      <p:transition spd="med" p14:dur="700">
+        <p14:cube dir="l"/>
+      </p:transition>
+    </mc:Choice>
+    <mc:Fallback>
+      <p:transition spd="med">
+        <p:push dir="l"/>
+      </p:transition>
+    </mc:Fallback>
+  </mc:AlternateContent>
 </p:sld>
 </file>
 
@@ -9817,7 +12508,7 @@
                 </a:solidFill>
                 <a:latin typeface="Montserrat"/>
               </a:rPr>
-              <a:t>006 / 016</a:t>
+              <a:t>006 / 020</a:t>
             </a:r>
           </a:p>
         </p:txBody>
@@ -9926,7 +12617,7 @@
       </p:sp>
       <p:sp>
         <p:nvSpPr>
-          <p:cNvPr id="7" name="Rounded Rectangle 6"/>
+          <p:cNvPr id="7" name="Rectangle 6"/>
           <p:cNvSpPr/>
           <p:nvPr/>
         </p:nvSpPr>
@@ -9935,7 +12626,7 @@
             <a:off x="868680" y="1627632"/>
             <a:ext cx="2011680" cy="73152"/>
           </a:xfrm>
-          <a:prstGeom prst="roundRect">
+          <a:prstGeom prst="rect">
             <a:avLst/>
           </a:prstGeom>
           <a:solidFill>
@@ -9977,7 +12668,7 @@
         <p:spPr>
           <a:xfrm>
             <a:off x="822960" y="1965960"/>
-            <a:ext cx="4983480" cy="4206240"/>
+            <a:ext cx="5029200" cy="4206240"/>
           </a:xfrm>
           <a:prstGeom prst="rect">
             <a:avLst/>
@@ -10074,8 +12765,8 @@
         </p:nvSpPr>
         <p:spPr>
           <a:xfrm>
-            <a:off x="5806440" y="1051560"/>
-            <a:ext cx="5298947" cy="4629150"/>
+            <a:off x="6080760" y="1965960"/>
+            <a:ext cx="5303520" cy="4572000"/>
           </a:xfrm>
           <a:prstGeom prst="roundRect">
             <a:avLst/>
@@ -10120,8 +12811,8 @@
         </p:nvSpPr>
         <p:spPr>
           <a:xfrm>
-            <a:off x="6080760" y="2726055"/>
-            <a:ext cx="4750307" cy="1280160"/>
+            <a:off x="6355080" y="3611880"/>
+            <a:ext cx="4754880" cy="1280160"/>
           </a:xfrm>
           <a:prstGeom prst="rect">
             <a:avLst/>
@@ -10142,7 +12833,7 @@
                 </a:solidFill>
                 <a:latin typeface="Montserrat"/>
               </a:rPr>
-              <a:t>IMAGEN REALISTA</a:t>
+              <a:t>IMAGEN</a:t>
             </a:r>
           </a:p>
           <a:p>
@@ -10164,6 +12855,18 @@
   <p:clrMapOvr>
     <a:masterClrMapping/>
   </p:clrMapOvr>
+  <mc:AlternateContent xmlns:mc="http://schemas.openxmlformats.org/markup-compatibility/2006">
+    <mc:Choice xmlns:p14="http://schemas.microsoft.com/office/powerpoint/2010/main" Requires="p14">
+      <p:transition spd="med" p14:dur="700">
+        <p14:cube dir="r"/>
+      </p:transition>
+    </mc:Choice>
+    <mc:Fallback>
+      <p:transition spd="med">
+        <p:push dir="r"/>
+      </p:transition>
+    </mc:Fallback>
+  </mc:AlternateContent>
 </p:sld>
 </file>
 
@@ -10251,7 +12954,7 @@
                 </a:solidFill>
                 <a:latin typeface="Montserrat"/>
               </a:rPr>
-              <a:t>007 / 016</a:t>
+              <a:t>007 / 020</a:t>
             </a:r>
           </a:p>
         </p:txBody>
@@ -10360,7 +13063,7 @@
       </p:sp>
       <p:sp>
         <p:nvSpPr>
-          <p:cNvPr id="7" name="Rounded Rectangle 6"/>
+          <p:cNvPr id="7" name="Rectangle 6"/>
           <p:cNvSpPr/>
           <p:nvPr/>
         </p:nvSpPr>
@@ -10369,7 +13072,7 @@
             <a:off x="868680" y="1627632"/>
             <a:ext cx="2011680" cy="73152"/>
           </a:xfrm>
-          <a:prstGeom prst="roundRect">
+          <a:prstGeom prst="rect">
             <a:avLst/>
           </a:prstGeom>
           <a:solidFill>
@@ -10410,8 +13113,8 @@
         </p:nvSpPr>
         <p:spPr>
           <a:xfrm>
-            <a:off x="822960" y="1965960"/>
-            <a:ext cx="4983480" cy="4206240"/>
+            <a:off x="6355080" y="1965960"/>
+            <a:ext cx="5029200" cy="4206240"/>
           </a:xfrm>
           <a:prstGeom prst="rect">
             <a:avLst/>
@@ -10508,8 +13211,8 @@
         </p:nvSpPr>
         <p:spPr>
           <a:xfrm>
-            <a:off x="5806440" y="1051560"/>
-            <a:ext cx="5298947" cy="4629150"/>
+            <a:off x="822960" y="1965960"/>
+            <a:ext cx="5303520" cy="4572000"/>
           </a:xfrm>
           <a:prstGeom prst="roundRect">
             <a:avLst/>
@@ -10554,8 +13257,8 @@
         </p:nvSpPr>
         <p:spPr>
           <a:xfrm>
-            <a:off x="6080760" y="2726055"/>
-            <a:ext cx="4750307" cy="1280160"/>
+            <a:off x="1097280" y="3611880"/>
+            <a:ext cx="4754880" cy="1280160"/>
           </a:xfrm>
           <a:prstGeom prst="rect">
             <a:avLst/>
@@ -10576,7 +13279,7 @@
                 </a:solidFill>
                 <a:latin typeface="Montserrat"/>
               </a:rPr>
-              <a:t>IMAGEN REALISTA</a:t>
+              <a:t>IMAGEN</a:t>
             </a:r>
           </a:p>
           <a:p>
@@ -10598,6 +13301,18 @@
   <p:clrMapOvr>
     <a:masterClrMapping/>
   </p:clrMapOvr>
+  <mc:AlternateContent xmlns:mc="http://schemas.openxmlformats.org/markup-compatibility/2006">
+    <mc:Choice xmlns:p14="http://schemas.microsoft.com/office/powerpoint/2010/main" Requires="p14">
+      <p:transition spd="med" p14:dur="700">
+        <p14:cube dir="l"/>
+      </p:transition>
+    </mc:Choice>
+    <mc:Fallback>
+      <p:transition spd="med">
+        <p:push dir="l"/>
+      </p:transition>
+    </mc:Fallback>
+  </mc:AlternateContent>
 </p:sld>
 </file>
 
@@ -10685,7 +13400,7 @@
                 </a:solidFill>
                 <a:latin typeface="Montserrat"/>
               </a:rPr>
-              <a:t>008 / 016</a:t>
+              <a:t>008 / 020</a:t>
             </a:r>
           </a:p>
         </p:txBody>
@@ -10794,7 +13509,7 @@
       </p:sp>
       <p:sp>
         <p:nvSpPr>
-          <p:cNvPr id="7" name="Rounded Rectangle 6"/>
+          <p:cNvPr id="7" name="Rectangle 6"/>
           <p:cNvSpPr/>
           <p:nvPr/>
         </p:nvSpPr>
@@ -10803,7 +13518,7 @@
             <a:off x="868680" y="1627632"/>
             <a:ext cx="2011680" cy="73152"/>
           </a:xfrm>
-          <a:prstGeom prst="roundRect">
+          <a:prstGeom prst="rect">
             <a:avLst/>
           </a:prstGeom>
           <a:solidFill>
@@ -10845,7 +13560,7 @@
         <p:spPr>
           <a:xfrm>
             <a:off x="822960" y="1965960"/>
-            <a:ext cx="4983480" cy="4206240"/>
+            <a:ext cx="5029200" cy="4206240"/>
           </a:xfrm>
           <a:prstGeom prst="rect">
             <a:avLst/>
@@ -10942,8 +13657,8 @@
         </p:nvSpPr>
         <p:spPr>
           <a:xfrm>
-            <a:off x="5806440" y="1051560"/>
-            <a:ext cx="5298947" cy="4629150"/>
+            <a:off x="6080760" y="1965960"/>
+            <a:ext cx="5303520" cy="4572000"/>
           </a:xfrm>
           <a:prstGeom prst="roundRect">
             <a:avLst/>
@@ -10988,8 +13703,8 @@
         </p:nvSpPr>
         <p:spPr>
           <a:xfrm>
-            <a:off x="6080760" y="2726055"/>
-            <a:ext cx="4750307" cy="1280160"/>
+            <a:off x="6355080" y="3611880"/>
+            <a:ext cx="4754880" cy="1280160"/>
           </a:xfrm>
           <a:prstGeom prst="rect">
             <a:avLst/>
@@ -11010,7 +13725,7 @@
                 </a:solidFill>
                 <a:latin typeface="Montserrat"/>
               </a:rPr>
-              <a:t>IMAGEN REALISTA</a:t>
+              <a:t>IMAGEN</a:t>
             </a:r>
           </a:p>
           <a:p>
@@ -11032,6 +13747,18 @@
   <p:clrMapOvr>
     <a:masterClrMapping/>
   </p:clrMapOvr>
+  <mc:AlternateContent xmlns:mc="http://schemas.openxmlformats.org/markup-compatibility/2006">
+    <mc:Choice xmlns:p14="http://schemas.microsoft.com/office/powerpoint/2010/main" Requires="p14">
+      <p:transition spd="med" p14:dur="700">
+        <p14:cube dir="r"/>
+      </p:transition>
+    </mc:Choice>
+    <mc:Fallback>
+      <p:transition spd="med">
+        <p:push dir="r"/>
+      </p:transition>
+    </mc:Fallback>
+  </mc:AlternateContent>
 </p:sld>
 </file>
 
@@ -11119,7 +13846,7 @@
                 </a:solidFill>
                 <a:latin typeface="Montserrat"/>
               </a:rPr>
-              <a:t>009 / 016</a:t>
+              <a:t>009 / 020</a:t>
             </a:r>
           </a:p>
         </p:txBody>
@@ -11160,84 +13887,16 @@
       </p:sp>
       <p:sp>
         <p:nvSpPr>
-          <p:cNvPr id="5" name="TextBox 4"/>
-          <p:cNvSpPr txBox="1"/>
-          <p:nvPr/>
-        </p:nvSpPr>
-        <p:spPr>
-          <a:xfrm>
-            <a:off x="822960" y="457200"/>
-            <a:ext cx="10058400" cy="365760"/>
-          </a:xfrm>
-          <a:prstGeom prst="rect">
-            <a:avLst/>
-          </a:prstGeom>
-          <a:noFill/>
-        </p:spPr>
-        <p:txBody>
-          <a:bodyPr wrap="square">
-            <a:spAutoFit/>
-          </a:bodyPr>
-          <a:lstStyle/>
-          <a:p>
-            <a:r>
-              <a:rPr sz="1300" b="1" i="0">
-                <a:solidFill>
-                  <a:srgbClr val="E8801A"/>
-                </a:solidFill>
-                <a:latin typeface="Montserrat"/>
-              </a:rPr>
-              <a:t>ANEXO 3 · CAMPO DE APLICACIÓN</a:t>
-            </a:r>
-          </a:p>
-        </p:txBody>
-      </p:sp>
-      <p:sp>
-        <p:nvSpPr>
-          <p:cNvPr id="6" name="TextBox 5"/>
-          <p:cNvSpPr txBox="1"/>
-          <p:nvPr/>
-        </p:nvSpPr>
-        <p:spPr>
-          <a:xfrm>
-            <a:off x="822960" y="868680"/>
-            <a:ext cx="10515600" cy="914400"/>
-          </a:xfrm>
-          <a:prstGeom prst="rect">
-            <a:avLst/>
-          </a:prstGeom>
-          <a:noFill/>
-        </p:spPr>
-        <p:txBody>
-          <a:bodyPr wrap="square">
-            <a:spAutoFit/>
-          </a:bodyPr>
-          <a:lstStyle/>
-          <a:p>
-            <a:r>
-              <a:rPr sz="2800" b="1" i="0">
-                <a:solidFill>
-                  <a:srgbClr val="1E2761"/>
-                </a:solidFill>
-                <a:latin typeface="Montserrat"/>
-              </a:rPr>
-              <a:t>La red de seguridad</a:t>
-            </a:r>
-          </a:p>
-        </p:txBody>
-      </p:sp>
-      <p:sp>
-        <p:nvSpPr>
-          <p:cNvPr id="7" name="Rounded Rectangle 6"/>
+          <p:cNvPr id="5" name="Rectangle 4"/>
           <p:cNvSpPr/>
           <p:nvPr/>
         </p:nvSpPr>
         <p:spPr>
           <a:xfrm>
-            <a:off x="868680" y="1627632"/>
-            <a:ext cx="2011680" cy="73152"/>
-          </a:xfrm>
-          <a:prstGeom prst="roundRect">
+            <a:off x="0" y="0"/>
+            <a:ext cx="12191695" cy="1143000"/>
+          </a:xfrm>
+          <a:prstGeom prst="rect">
             <a:avLst/>
           </a:prstGeom>
           <a:solidFill>
@@ -11272,14 +13931,14 @@
       </p:sp>
       <p:sp>
         <p:nvSpPr>
-          <p:cNvPr id="8" name="TextBox 7"/>
+          <p:cNvPr id="6" name="TextBox 5"/>
           <p:cNvSpPr txBox="1"/>
           <p:nvPr/>
         </p:nvSpPr>
         <p:spPr>
           <a:xfrm>
-            <a:off x="822960" y="1965960"/>
-            <a:ext cx="4983480" cy="4206240"/>
+            <a:off x="822960" y="274320"/>
+            <a:ext cx="10515600" cy="640080"/>
           </a:xfrm>
           <a:prstGeom prst="rect">
             <a:avLst/>
@@ -11292,92 +13951,62 @@
           </a:bodyPr>
           <a:lstStyle/>
           <a:p>
-            <a:pPr>
-              <a:spcAft>
-                <a:spcPts val="1100"/>
-              </a:spcAft>
-            </a:pPr>
-            <a:r>
-              <a:rPr sz="1600" b="1" i="0">
-                <a:solidFill>
-                  <a:srgbClr val="E8801A"/>
-                </a:solidFill>
-                <a:latin typeface="Montserrat"/>
-              </a:rPr>
-              <a:t>▸  </a:t>
-            </a:r>
-            <a:r>
-              <a:rPr sz="1600" b="0" i="0">
-                <a:solidFill>
-                  <a:srgbClr val="1B2330"/>
-                </a:solidFill>
-                <a:latin typeface="Montserrat"/>
-              </a:rPr>
-              <a:t>Aparatos sin norma específica</a:t>
-            </a:r>
-          </a:p>
-          <a:p>
-            <a:pPr>
-              <a:spcAft>
-                <a:spcPts val="1100"/>
-              </a:spcAft>
-            </a:pPr>
-            <a:r>
-              <a:rPr sz="1600" b="1" i="0">
-                <a:solidFill>
-                  <a:srgbClr val="E8801A"/>
-                </a:solidFill>
-                <a:latin typeface="Montserrat"/>
-              </a:rPr>
-              <a:t>▸  </a:t>
-            </a:r>
-            <a:r>
-              <a:rPr sz="1600" b="0" i="0">
-                <a:solidFill>
-                  <a:srgbClr val="1B2330"/>
-                </a:solidFill>
-                <a:latin typeface="Montserrat"/>
-              </a:rPr>
-              <a:t>Requisitos y pruebas mínimas</a:t>
-            </a:r>
-          </a:p>
-          <a:p>
-            <a:pPr>
-              <a:spcAft>
-                <a:spcPts val="1100"/>
-              </a:spcAft>
-            </a:pPr>
-            <a:r>
-              <a:rPr sz="1600" b="1" i="0">
-                <a:solidFill>
-                  <a:srgbClr val="E8801A"/>
-                </a:solidFill>
-                <a:latin typeface="Montserrat"/>
-              </a:rPr>
-              <a:t>▸  </a:t>
-            </a:r>
-            <a:r>
-              <a:rPr sz="1600" b="0" i="0">
-                <a:solidFill>
-                  <a:srgbClr val="1B2330"/>
-                </a:solidFill>
-                <a:latin typeface="Montserrat"/>
-              </a:rPr>
-              <a:t>Excluye homologados que cambian de familia</a:t>
-            </a:r>
-          </a:p>
-        </p:txBody>
-      </p:sp>
-      <p:sp>
-        <p:nvSpPr>
-          <p:cNvPr id="9" name="imgph" descr="IMGQ:gas appliance safety inspection"/>
+            <a:r>
+              <a:rPr sz="2400" b="1" i="0">
+                <a:solidFill>
+                  <a:srgbClr val="FFFFFF"/>
+                </a:solidFill>
+                <a:latin typeface="Montserrat"/>
+              </a:rPr>
+              <a:t>⚡  PREGUNTA RÁPIDA</a:t>
+            </a:r>
+          </a:p>
+        </p:txBody>
+      </p:sp>
+      <p:sp>
+        <p:nvSpPr>
+          <p:cNvPr id="7" name="TextBox 6"/>
+          <p:cNvSpPr txBox="1"/>
+          <p:nvPr/>
+        </p:nvSpPr>
+        <p:spPr>
+          <a:xfrm>
+            <a:off x="822960" y="1508760"/>
+            <a:ext cx="10515600" cy="1371600"/>
+          </a:xfrm>
+          <a:prstGeom prst="rect">
+            <a:avLst/>
+          </a:prstGeom>
+          <a:noFill/>
+        </p:spPr>
+        <p:txBody>
+          <a:bodyPr wrap="square">
+            <a:spAutoFit/>
+          </a:bodyPr>
+          <a:lstStyle/>
+          <a:p>
+            <a:r>
+              <a:rPr sz="2400" b="1" i="0">
+                <a:solidFill>
+                  <a:srgbClr val="1E2761"/>
+                </a:solidFill>
+                <a:latin typeface="Montserrat"/>
+              </a:rPr>
+              <a:t>¿Con qué norma se verifican la indelebilidad, la corrosión y la adherencia de la placa de características?</a:t>
+            </a:r>
+          </a:p>
+        </p:txBody>
+      </p:sp>
+      <p:sp>
+        <p:nvSpPr>
+          <p:cNvPr id="8" name="Rounded Rectangle 7"/>
           <p:cNvSpPr/>
           <p:nvPr/>
         </p:nvSpPr>
         <p:spPr>
           <a:xfrm>
-            <a:off x="5806440" y="1051560"/>
-            <a:ext cx="5298947" cy="4629150"/>
+            <a:off x="822960" y="3291840"/>
+            <a:ext cx="4983480" cy="1143000"/>
           </a:xfrm>
           <a:prstGeom prst="roundRect">
             <a:avLst/>
@@ -11416,14 +14045,58 @@
       </p:sp>
       <p:sp>
         <p:nvSpPr>
+          <p:cNvPr id="9" name="Rectangle 8"/>
+          <p:cNvSpPr/>
+          <p:nvPr/>
+        </p:nvSpPr>
+        <p:spPr>
+          <a:xfrm>
+            <a:off x="822960" y="3291840"/>
+            <a:ext cx="640080" cy="1143000"/>
+          </a:xfrm>
+          <a:prstGeom prst="rect">
+            <a:avLst/>
+          </a:prstGeom>
+          <a:solidFill>
+            <a:srgbClr val="1E2761"/>
+          </a:solidFill>
+          <a:ln>
+            <a:noFill/>
+          </a:ln>
+          <a:effectLst/>
+        </p:spPr>
+        <p:style>
+          <a:lnRef idx="1">
+            <a:schemeClr val="accent1"/>
+          </a:lnRef>
+          <a:fillRef idx="3">
+            <a:schemeClr val="accent1"/>
+          </a:fillRef>
+          <a:effectRef idx="2">
+            <a:schemeClr val="accent1"/>
+          </a:effectRef>
+          <a:fontRef idx="minor">
+            <a:schemeClr val="lt1"/>
+          </a:fontRef>
+        </p:style>
+        <p:txBody>
+          <a:bodyPr rtlCol="0" anchor="ctr"/>
+          <a:lstStyle/>
+          <a:p>
+            <a:pPr algn="ctr"/>
+          </a:p>
+        </p:txBody>
+      </p:sp>
+      <p:sp>
+        <p:nvSpPr>
           <p:cNvPr id="10" name="TextBox 9"/>
           <p:cNvSpPr txBox="1"/>
           <p:nvPr/>
         </p:nvSpPr>
         <p:spPr>
           <a:xfrm>
-            <a:off x="6080760" y="2726055"/>
-            <a:ext cx="4750307" cy="1280160"/>
+            <a:off x="822960" y="3611880"/>
+            <a:ext cx="640080" cy="548640"/>
           </a:xfrm>
           <a:prstGeom prst="rect">
             <a:avLst/>
@@ -11438,25 +14111,524 @@
           <a:p>
             <a:pPr algn="ctr"/>
             <a:r>
-              <a:rPr sz="1400" b="1" i="0">
-                <a:solidFill>
-                  <a:srgbClr val="64748B"/>
-                </a:solidFill>
-                <a:latin typeface="Montserrat"/>
-              </a:rPr>
-              <a:t>IMAGEN REALISTA</a:t>
-            </a:r>
-          </a:p>
+              <a:rPr sz="2200" b="1" i="0">
+                <a:solidFill>
+                  <a:srgbClr val="FFFFFF"/>
+                </a:solidFill>
+                <a:latin typeface="Montserrat"/>
+              </a:rPr>
+              <a:t>A</a:t>
+            </a:r>
+          </a:p>
+        </p:txBody>
+      </p:sp>
+      <p:sp>
+        <p:nvSpPr>
+          <p:cNvPr id="11" name="TextBox 10"/>
+          <p:cNvSpPr txBox="1"/>
+          <p:nvPr/>
+        </p:nvSpPr>
+        <p:spPr>
+          <a:xfrm>
+            <a:off x="1600200" y="3474720"/>
+            <a:ext cx="4114800" cy="868680"/>
+          </a:xfrm>
+          <a:prstGeom prst="rect">
+            <a:avLst/>
+          </a:prstGeom>
+          <a:noFill/>
+        </p:spPr>
+        <p:txBody>
+          <a:bodyPr wrap="square">
+            <a:spAutoFit/>
+          </a:bodyPr>
+          <a:lstStyle/>
+          <a:p>
+            <a:r>
+              <a:rPr sz="1400" b="0" i="0">
+                <a:solidFill>
+                  <a:srgbClr val="1B2330"/>
+                </a:solidFill>
+                <a:latin typeface="Montserrat"/>
+              </a:rPr>
+              <a:t>UNE 60670-7</a:t>
+            </a:r>
+          </a:p>
+        </p:txBody>
+      </p:sp>
+      <p:sp>
+        <p:nvSpPr>
+          <p:cNvPr id="12" name="Rounded Rectangle 11"/>
+          <p:cNvSpPr/>
+          <p:nvPr/>
+        </p:nvSpPr>
+        <p:spPr>
+          <a:xfrm>
+            <a:off x="6355080" y="3291840"/>
+            <a:ext cx="4983480" cy="1143000"/>
+          </a:xfrm>
+          <a:prstGeom prst="roundRect">
+            <a:avLst/>
+          </a:prstGeom>
+          <a:solidFill>
+            <a:srgbClr val="F3F6FB"/>
+          </a:solidFill>
+          <a:ln w="12700">
+            <a:solidFill>
+              <a:srgbClr val="C7D2E6"/>
+            </a:solidFill>
+          </a:ln>
+          <a:effectLst/>
+        </p:spPr>
+        <p:style>
+          <a:lnRef idx="1">
+            <a:schemeClr val="accent1"/>
+          </a:lnRef>
+          <a:fillRef idx="3">
+            <a:schemeClr val="accent1"/>
+          </a:fillRef>
+          <a:effectRef idx="2">
+            <a:schemeClr val="accent1"/>
+          </a:effectRef>
+          <a:fontRef idx="minor">
+            <a:schemeClr val="lt1"/>
+          </a:fontRef>
+        </p:style>
+        <p:txBody>
+          <a:bodyPr rtlCol="0" anchor="ctr"/>
+          <a:lstStyle/>
           <a:p>
             <a:pPr algn="ctr"/>
-            <a:r>
-              <a:rPr sz="1100" b="0" i="1">
-                <a:solidFill>
-                  <a:srgbClr val="64748B"/>
-                </a:solidFill>
-                <a:latin typeface="Montserrat"/>
-              </a:rPr>
-              <a:t>gas appliance safety inspection</a:t>
+          </a:p>
+        </p:txBody>
+      </p:sp>
+      <p:sp>
+        <p:nvSpPr>
+          <p:cNvPr id="13" name="Rectangle 12"/>
+          <p:cNvSpPr/>
+          <p:nvPr/>
+        </p:nvSpPr>
+        <p:spPr>
+          <a:xfrm>
+            <a:off x="6355080" y="3291840"/>
+            <a:ext cx="640080" cy="1143000"/>
+          </a:xfrm>
+          <a:prstGeom prst="rect">
+            <a:avLst/>
+          </a:prstGeom>
+          <a:solidFill>
+            <a:srgbClr val="1E2761"/>
+          </a:solidFill>
+          <a:ln>
+            <a:noFill/>
+          </a:ln>
+          <a:effectLst/>
+        </p:spPr>
+        <p:style>
+          <a:lnRef idx="1">
+            <a:schemeClr val="accent1"/>
+          </a:lnRef>
+          <a:fillRef idx="3">
+            <a:schemeClr val="accent1"/>
+          </a:fillRef>
+          <a:effectRef idx="2">
+            <a:schemeClr val="accent1"/>
+          </a:effectRef>
+          <a:fontRef idx="minor">
+            <a:schemeClr val="lt1"/>
+          </a:fontRef>
+        </p:style>
+        <p:txBody>
+          <a:bodyPr rtlCol="0" anchor="ctr"/>
+          <a:lstStyle/>
+          <a:p>
+            <a:pPr algn="ctr"/>
+          </a:p>
+        </p:txBody>
+      </p:sp>
+      <p:sp>
+        <p:nvSpPr>
+          <p:cNvPr id="14" name="TextBox 13"/>
+          <p:cNvSpPr txBox="1"/>
+          <p:nvPr/>
+        </p:nvSpPr>
+        <p:spPr>
+          <a:xfrm>
+            <a:off x="6355080" y="3611880"/>
+            <a:ext cx="640080" cy="548640"/>
+          </a:xfrm>
+          <a:prstGeom prst="rect">
+            <a:avLst/>
+          </a:prstGeom>
+          <a:noFill/>
+        </p:spPr>
+        <p:txBody>
+          <a:bodyPr wrap="square">
+            <a:spAutoFit/>
+          </a:bodyPr>
+          <a:lstStyle/>
+          <a:p>
+            <a:pPr algn="ctr"/>
+            <a:r>
+              <a:rPr sz="2200" b="1" i="0">
+                <a:solidFill>
+                  <a:srgbClr val="FFFFFF"/>
+                </a:solidFill>
+                <a:latin typeface="Montserrat"/>
+              </a:rPr>
+              <a:t>B</a:t>
+            </a:r>
+          </a:p>
+        </p:txBody>
+      </p:sp>
+      <p:sp>
+        <p:nvSpPr>
+          <p:cNvPr id="15" name="TextBox 14"/>
+          <p:cNvSpPr txBox="1"/>
+          <p:nvPr/>
+        </p:nvSpPr>
+        <p:spPr>
+          <a:xfrm>
+            <a:off x="7132320" y="3474720"/>
+            <a:ext cx="4114800" cy="868680"/>
+          </a:xfrm>
+          <a:prstGeom prst="rect">
+            <a:avLst/>
+          </a:prstGeom>
+          <a:noFill/>
+        </p:spPr>
+        <p:txBody>
+          <a:bodyPr wrap="square">
+            <a:spAutoFit/>
+          </a:bodyPr>
+          <a:lstStyle/>
+          <a:p>
+            <a:r>
+              <a:rPr sz="1400" b="0" i="0">
+                <a:solidFill>
+                  <a:srgbClr val="1B2330"/>
+                </a:solidFill>
+                <a:latin typeface="Montserrat"/>
+              </a:rPr>
+              <a:t>UNE 60750</a:t>
+            </a:r>
+          </a:p>
+        </p:txBody>
+      </p:sp>
+      <p:sp>
+        <p:nvSpPr>
+          <p:cNvPr id="16" name="Rounded Rectangle 15"/>
+          <p:cNvSpPr/>
+          <p:nvPr/>
+        </p:nvSpPr>
+        <p:spPr>
+          <a:xfrm>
+            <a:off x="822960" y="4617720"/>
+            <a:ext cx="4983480" cy="1143000"/>
+          </a:xfrm>
+          <a:prstGeom prst="roundRect">
+            <a:avLst/>
+          </a:prstGeom>
+          <a:solidFill>
+            <a:srgbClr val="F3F6FB"/>
+          </a:solidFill>
+          <a:ln w="12700">
+            <a:solidFill>
+              <a:srgbClr val="C7D2E6"/>
+            </a:solidFill>
+          </a:ln>
+          <a:effectLst/>
+        </p:spPr>
+        <p:style>
+          <a:lnRef idx="1">
+            <a:schemeClr val="accent1"/>
+          </a:lnRef>
+          <a:fillRef idx="3">
+            <a:schemeClr val="accent1"/>
+          </a:fillRef>
+          <a:effectRef idx="2">
+            <a:schemeClr val="accent1"/>
+          </a:effectRef>
+          <a:fontRef idx="minor">
+            <a:schemeClr val="lt1"/>
+          </a:fontRef>
+        </p:style>
+        <p:txBody>
+          <a:bodyPr rtlCol="0" anchor="ctr"/>
+          <a:lstStyle/>
+          <a:p>
+            <a:pPr algn="ctr"/>
+          </a:p>
+        </p:txBody>
+      </p:sp>
+      <p:sp>
+        <p:nvSpPr>
+          <p:cNvPr id="17" name="Rectangle 16"/>
+          <p:cNvSpPr/>
+          <p:nvPr/>
+        </p:nvSpPr>
+        <p:spPr>
+          <a:xfrm>
+            <a:off x="822960" y="4617720"/>
+            <a:ext cx="640080" cy="1143000"/>
+          </a:xfrm>
+          <a:prstGeom prst="rect">
+            <a:avLst/>
+          </a:prstGeom>
+          <a:solidFill>
+            <a:srgbClr val="1E2761"/>
+          </a:solidFill>
+          <a:ln>
+            <a:noFill/>
+          </a:ln>
+          <a:effectLst/>
+        </p:spPr>
+        <p:style>
+          <a:lnRef idx="1">
+            <a:schemeClr val="accent1"/>
+          </a:lnRef>
+          <a:fillRef idx="3">
+            <a:schemeClr val="accent1"/>
+          </a:fillRef>
+          <a:effectRef idx="2">
+            <a:schemeClr val="accent1"/>
+          </a:effectRef>
+          <a:fontRef idx="minor">
+            <a:schemeClr val="lt1"/>
+          </a:fontRef>
+        </p:style>
+        <p:txBody>
+          <a:bodyPr rtlCol="0" anchor="ctr"/>
+          <a:lstStyle/>
+          <a:p>
+            <a:pPr algn="ctr"/>
+          </a:p>
+        </p:txBody>
+      </p:sp>
+      <p:sp>
+        <p:nvSpPr>
+          <p:cNvPr id="18" name="TextBox 17"/>
+          <p:cNvSpPr txBox="1"/>
+          <p:nvPr/>
+        </p:nvSpPr>
+        <p:spPr>
+          <a:xfrm>
+            <a:off x="822960" y="4937760"/>
+            <a:ext cx="640080" cy="548640"/>
+          </a:xfrm>
+          <a:prstGeom prst="rect">
+            <a:avLst/>
+          </a:prstGeom>
+          <a:noFill/>
+        </p:spPr>
+        <p:txBody>
+          <a:bodyPr wrap="square">
+            <a:spAutoFit/>
+          </a:bodyPr>
+          <a:lstStyle/>
+          <a:p>
+            <a:pPr algn="ctr"/>
+            <a:r>
+              <a:rPr sz="2200" b="1" i="0">
+                <a:solidFill>
+                  <a:srgbClr val="FFFFFF"/>
+                </a:solidFill>
+                <a:latin typeface="Montserrat"/>
+              </a:rPr>
+              <a:t>C</a:t>
+            </a:r>
+          </a:p>
+        </p:txBody>
+      </p:sp>
+      <p:sp>
+        <p:nvSpPr>
+          <p:cNvPr id="19" name="TextBox 18"/>
+          <p:cNvSpPr txBox="1"/>
+          <p:nvPr/>
+        </p:nvSpPr>
+        <p:spPr>
+          <a:xfrm>
+            <a:off x="1600200" y="4800600"/>
+            <a:ext cx="4114800" cy="868680"/>
+          </a:xfrm>
+          <a:prstGeom prst="rect">
+            <a:avLst/>
+          </a:prstGeom>
+          <a:noFill/>
+        </p:spPr>
+        <p:txBody>
+          <a:bodyPr wrap="square">
+            <a:spAutoFit/>
+          </a:bodyPr>
+          <a:lstStyle/>
+          <a:p>
+            <a:r>
+              <a:rPr sz="1400" b="0" i="0">
+                <a:solidFill>
+                  <a:srgbClr val="1B2330"/>
+                </a:solidFill>
+                <a:latin typeface="Montserrat"/>
+              </a:rPr>
+              <a:t>UNE-EN ISO 9001</a:t>
+            </a:r>
+          </a:p>
+        </p:txBody>
+      </p:sp>
+      <p:sp>
+        <p:nvSpPr>
+          <p:cNvPr id="20" name="Rounded Rectangle 19"/>
+          <p:cNvSpPr/>
+          <p:nvPr/>
+        </p:nvSpPr>
+        <p:spPr>
+          <a:xfrm>
+            <a:off x="6355080" y="4617720"/>
+            <a:ext cx="4983480" cy="1143000"/>
+          </a:xfrm>
+          <a:prstGeom prst="roundRect">
+            <a:avLst/>
+          </a:prstGeom>
+          <a:solidFill>
+            <a:srgbClr val="F3F6FB"/>
+          </a:solidFill>
+          <a:ln w="12700">
+            <a:solidFill>
+              <a:srgbClr val="C7D2E6"/>
+            </a:solidFill>
+          </a:ln>
+          <a:effectLst/>
+        </p:spPr>
+        <p:style>
+          <a:lnRef idx="1">
+            <a:schemeClr val="accent1"/>
+          </a:lnRef>
+          <a:fillRef idx="3">
+            <a:schemeClr val="accent1"/>
+          </a:fillRef>
+          <a:effectRef idx="2">
+            <a:schemeClr val="accent1"/>
+          </a:effectRef>
+          <a:fontRef idx="minor">
+            <a:schemeClr val="lt1"/>
+          </a:fontRef>
+        </p:style>
+        <p:txBody>
+          <a:bodyPr rtlCol="0" anchor="ctr"/>
+          <a:lstStyle/>
+          <a:p>
+            <a:pPr algn="ctr"/>
+          </a:p>
+        </p:txBody>
+      </p:sp>
+      <p:sp>
+        <p:nvSpPr>
+          <p:cNvPr id="21" name="Rectangle 20"/>
+          <p:cNvSpPr/>
+          <p:nvPr/>
+        </p:nvSpPr>
+        <p:spPr>
+          <a:xfrm>
+            <a:off x="6355080" y="4617720"/>
+            <a:ext cx="640080" cy="1143000"/>
+          </a:xfrm>
+          <a:prstGeom prst="rect">
+            <a:avLst/>
+          </a:prstGeom>
+          <a:solidFill>
+            <a:srgbClr val="1E2761"/>
+          </a:solidFill>
+          <a:ln>
+            <a:noFill/>
+          </a:ln>
+          <a:effectLst/>
+        </p:spPr>
+        <p:style>
+          <a:lnRef idx="1">
+            <a:schemeClr val="accent1"/>
+          </a:lnRef>
+          <a:fillRef idx="3">
+            <a:schemeClr val="accent1"/>
+          </a:fillRef>
+          <a:effectRef idx="2">
+            <a:schemeClr val="accent1"/>
+          </a:effectRef>
+          <a:fontRef idx="minor">
+            <a:schemeClr val="lt1"/>
+          </a:fontRef>
+        </p:style>
+        <p:txBody>
+          <a:bodyPr rtlCol="0" anchor="ctr"/>
+          <a:lstStyle/>
+          <a:p>
+            <a:pPr algn="ctr"/>
+          </a:p>
+        </p:txBody>
+      </p:sp>
+      <p:sp>
+        <p:nvSpPr>
+          <p:cNvPr id="22" name="TextBox 21"/>
+          <p:cNvSpPr txBox="1"/>
+          <p:nvPr/>
+        </p:nvSpPr>
+        <p:spPr>
+          <a:xfrm>
+            <a:off x="6355080" y="4937760"/>
+            <a:ext cx="640080" cy="548640"/>
+          </a:xfrm>
+          <a:prstGeom prst="rect">
+            <a:avLst/>
+          </a:prstGeom>
+          <a:noFill/>
+        </p:spPr>
+        <p:txBody>
+          <a:bodyPr wrap="square">
+            <a:spAutoFit/>
+          </a:bodyPr>
+          <a:lstStyle/>
+          <a:p>
+            <a:pPr algn="ctr"/>
+            <a:r>
+              <a:rPr sz="2200" b="1" i="0">
+                <a:solidFill>
+                  <a:srgbClr val="FFFFFF"/>
+                </a:solidFill>
+                <a:latin typeface="Montserrat"/>
+              </a:rPr>
+              <a:t>D</a:t>
+            </a:r>
+          </a:p>
+        </p:txBody>
+      </p:sp>
+      <p:sp>
+        <p:nvSpPr>
+          <p:cNvPr id="23" name="TextBox 22"/>
+          <p:cNvSpPr txBox="1"/>
+          <p:nvPr/>
+        </p:nvSpPr>
+        <p:spPr>
+          <a:xfrm>
+            <a:off x="7132320" y="4800600"/>
+            <a:ext cx="4114800" cy="868680"/>
+          </a:xfrm>
+          <a:prstGeom prst="rect">
+            <a:avLst/>
+          </a:prstGeom>
+          <a:noFill/>
+        </p:spPr>
+        <p:txBody>
+          <a:bodyPr wrap="square">
+            <a:spAutoFit/>
+          </a:bodyPr>
+          <a:lstStyle/>
+          <a:p>
+            <a:r>
+              <a:rPr sz="1400" b="0" i="0">
+                <a:solidFill>
+                  <a:srgbClr val="1B2330"/>
+                </a:solidFill>
+                <a:latin typeface="Montserrat"/>
+              </a:rPr>
+              <a:t>UNE-EN 437</a:t>
             </a:r>
           </a:p>
         </p:txBody>
@@ -11466,6 +14638,18 @@
   <p:clrMapOvr>
     <a:masterClrMapping/>
   </p:clrMapOvr>
+  <mc:AlternateContent xmlns:mc="http://schemas.openxmlformats.org/markup-compatibility/2006">
+    <mc:Choice xmlns:p14="http://schemas.microsoft.com/office/powerpoint/2010/main" Requires="p14">
+      <p:transition spd="med" p14:dur="700">
+        <p14:cube dir="l"/>
+      </p:transition>
+    </mc:Choice>
+    <mc:Fallback>
+      <p:transition spd="med">
+        <p:push dir="l"/>
+      </p:transition>
+    </mc:Fallback>
+  </mc:AlternateContent>
 </p:sld>
 </file>
 

--- a/Curso Gas B/05 - ITC-ICG 08 - Aparatos de gas/05 - ITC-ICG 08 - Aparatos de gas - Vídeo 4.pptx
+++ b/Curso Gas B/05 - ITC-ICG 08 - Aparatos de gas/05 - ITC-ICG 08 - Aparatos de gas - Vídeo 4.pptx
@@ -596,12 +596,12 @@
           <a:lstStyle/>
           <a:p>
             <a:r>
-              <a:t>N1: ¿Por qué esa norma?</a:t>
-            </a:r>
-          </a:p>
-          <a:p>
-            <a:r>
-              <a:t>N2: Porque la ITC remite las tres cualidades de la placa, indelebilidad, corrosión y adherencia, a la misma norma, la une sesenta mil setecientos cincuenta. El truco: la parte siete es de conexión, la nueve mil uno es de calidad y la cuatrocientos treinta y siete es de gases; la de la placa es la sesenta mil setecientos cincuenta.</a:t>
+              <a:t>N2: La respuesta correcta es la opción be: la une sesenta mil setecientos cincuenta. El porqué: la ITC remite las tres cualidades de la placa, indelebilidad, corrosión y adherencia, a esa misma norma. El truco para no liarte con las otras: la parte siete es la de conexión de aparatos, la nueve mil uno es la de calidad, y la cuatrocientos treinta y siete es la de gases; la de la placa es la sesenta mil setecientos cincuenta.</a:t>
+            </a:r>
+          </a:p>
+          <a:p>
+            <a:r>
+              <a:t>N1: Toda la placa, con la sesenta mil setecientos cincuenta.</a:t>
             </a:r>
           </a:p>
         </p:txBody>
@@ -1046,12 +1046,7 @@
           <a:lstStyle/>
           <a:p>
             <a:r>
-              <a:t>N1: Un tramo muy concreto que el examen pregunta tal cual.</a:t>
-            </a:r>
-          </a:p>
-          <a:p>
-            <a:r>
-              <a:t>N2: Piensa en el circuito interno del aparato, no en la instalación de la casa. ¿Dónde empieza y dónde acaba ese tramo?</a:t>
+              <a:t>N1: Un tramo muy concreto que el examen pregunta tal cual. La pregunta: ¿en qué tramo se comprueba la estanquidad del aparato en la prueba del anexo tres? Opción a: entre el contador y la llave de acometida. Opción be: entre la llave del aparato y el quemador. Opción ce: en toda la instalación receptora de la vivienda. Opción de: solo en el conducto de evacuación de humos. Piénsalo un momento... estamos hablando del circuito interno del aparato, no de la instalación de la casa. ¿Dónde empieza y dónde acaba ese tramo?</a:t>
             </a:r>
           </a:p>
         </p:txBody>
@@ -1121,12 +1116,12 @@
           <a:lstStyle/>
           <a:p>
             <a:r>
-              <a:t>N1: ¿Por qué ese tramo?</a:t>
-            </a:r>
-          </a:p>
-          <a:p>
-            <a:r>
-              <a:t>N2: Porque la prueba de estanquidad va entre la llave del aparato y el quemador, a presión máxima de utilización, y además comprueba que las válvulas de corte no dejen fuga interior. El truco: es el circuito de gas dentro del aparato, no la instalación receptora entera.</a:t>
+              <a:t>N2: La respuesta correcta es la opción be: entre la llave del aparato y el quemador. El porqué: la prueba de estanquidad comprueba el circuito de gas justo en ese tramo, a la presión máxima de utilización, y además que las válvulas de corte no dejen fuga interior cuando están cerradas. El truco: es el circuito de gas dentro del aparato, no la instalación receptora entera ni el conducto de humos.</a:t>
+            </a:r>
+          </a:p>
+          <a:p>
+            <a:r>
+              <a:t>N1: De la llave del aparato al quemador. Ahí se caza la fuga.</a:t>
             </a:r>
           </a:p>
         </p:txBody>
@@ -1947,12 +1942,7 @@
           <a:lstStyle/>
           <a:p>
             <a:r>
-              <a:t>N1: Una sola norma resume toda la placa.</a:t>
-            </a:r>
-          </a:p>
-          <a:p>
-            <a:r>
-              <a:t>N2: No te dejes liar por otras normas del tema. Piensa en la que garantiza que el marcado no se borra, no se corroe y no se despega.</a:t>
+              <a:t>N1: Una sola norma resume toda la placa. Escucha bien las siglas y los números: ¿con qué norma se verifican la indelebilidad, la corrosión y la adherencia de la placa de características? Opción a: la une sesenta mil seiscientos setenta, parte siete. Opción be: la une sesenta mil setecientos cincuenta. Opción ce: la une-en iso nueve mil uno. Opción de: la une-en cuatrocientos treinta y siete. Piénsalo... busca la que garantiza que el marcado no se borra, no se corroe y no se despega.</a:t>
             </a:r>
           </a:p>
         </p:txBody>
